--- a/07-trees-forests-boosting/slides.pptx
+++ b/07-trees-forests-boosting/slides.pptx
@@ -943,7 +943,7 @@
           <a:bodyPr anchor="t"/>
           <a:lstStyle>
             <a:lvl1pPr algn="l">
-              <a:defRPr sz="3000" b="1" cap="all"/>
+              <a:defRPr sz="2350" b="1" cap="all"/>
             </a:lvl1pPr>
           </a:lstStyle>
           <a:p>
@@ -975,7 +975,7 @@
           <a:lstStyle>
             <a:lvl1pPr marL="0" indent="0">
               <a:buNone/>
-              <a:defRPr sz="1500">
+              <a:defRPr sz="1150">
                 <a:solidFill>
                   <a:schemeClr val="tx1">
                     <a:tint val="75000"/>
@@ -985,7 +985,7 @@
             </a:lvl1pPr>
             <a:lvl2pPr marL="342900" indent="0">
               <a:buNone/>
-              <a:defRPr sz="1350">
+              <a:defRPr sz="1050">
                 <a:solidFill>
                   <a:schemeClr val="tx1">
                     <a:tint val="75000"/>
@@ -995,7 +995,7 @@
             </a:lvl2pPr>
             <a:lvl3pPr marL="685800" indent="0">
               <a:buNone/>
-              <a:defRPr sz="1200">
+              <a:defRPr sz="950">
                 <a:solidFill>
                   <a:schemeClr val="tx1">
                     <a:tint val="75000"/>
@@ -1005,7 +1005,7 @@
             </a:lvl3pPr>
             <a:lvl4pPr marL="1028700" indent="0">
               <a:buNone/>
-              <a:defRPr sz="1050">
+              <a:defRPr sz="800">
                 <a:solidFill>
                   <a:schemeClr val="tx1">
                     <a:tint val="75000"/>
@@ -1015,7 +1015,7 @@
             </a:lvl4pPr>
             <a:lvl5pPr marL="1371600" indent="0">
               <a:buNone/>
-              <a:defRPr sz="1050">
+              <a:defRPr sz="800">
                 <a:solidFill>
                   <a:schemeClr val="tx1">
                     <a:tint val="75000"/>
@@ -1025,7 +1025,7 @@
             </a:lvl5pPr>
             <a:lvl6pPr marL="1714500" indent="0">
               <a:buNone/>
-              <a:defRPr sz="1050">
+              <a:defRPr sz="800">
                 <a:solidFill>
                   <a:schemeClr val="tx1">
                     <a:tint val="75000"/>
@@ -1035,7 +1035,7 @@
             </a:lvl6pPr>
             <a:lvl7pPr marL="2057400" indent="0">
               <a:buNone/>
-              <a:defRPr sz="1050">
+              <a:defRPr sz="800">
                 <a:solidFill>
                   <a:schemeClr val="tx1">
                     <a:tint val="75000"/>
@@ -1045,7 +1045,7 @@
             </a:lvl7pPr>
             <a:lvl8pPr marL="2400300" indent="0">
               <a:buNone/>
-              <a:defRPr sz="1050">
+              <a:defRPr sz="800">
                 <a:solidFill>
                   <a:schemeClr val="tx1">
                     <a:tint val="75000"/>
@@ -1055,7 +1055,7 @@
             </a:lvl8pPr>
             <a:lvl9pPr marL="2743200" indent="0">
               <a:buNone/>
-              <a:defRPr sz="1050">
+              <a:defRPr sz="800">
                 <a:solidFill>
                   <a:schemeClr val="tx1">
                     <a:tint val="75000"/>
@@ -1210,31 +1210,31 @@
           <a:bodyPr/>
           <a:lstStyle>
             <a:lvl1pPr>
-              <a:defRPr sz="2100"/>
+              <a:defRPr sz="1650"/>
             </a:lvl1pPr>
             <a:lvl2pPr>
-              <a:defRPr sz="1800"/>
+              <a:defRPr sz="1400"/>
             </a:lvl2pPr>
             <a:lvl3pPr>
-              <a:defRPr sz="1500"/>
+              <a:defRPr sz="1150"/>
             </a:lvl3pPr>
             <a:lvl4pPr>
-              <a:defRPr sz="1350"/>
+              <a:defRPr sz="1050"/>
             </a:lvl4pPr>
             <a:lvl5pPr>
-              <a:defRPr sz="1350"/>
+              <a:defRPr sz="1050"/>
             </a:lvl5pPr>
             <a:lvl6pPr>
-              <a:defRPr sz="1350"/>
+              <a:defRPr sz="1050"/>
             </a:lvl6pPr>
             <a:lvl7pPr>
-              <a:defRPr sz="1350"/>
+              <a:defRPr sz="1050"/>
             </a:lvl7pPr>
             <a:lvl8pPr>
-              <a:defRPr sz="1350"/>
+              <a:defRPr sz="1050"/>
             </a:lvl8pPr>
             <a:lvl9pPr>
-              <a:defRPr sz="1350"/>
+              <a:defRPr sz="1050"/>
             </a:lvl9pPr>
           </a:lstStyle>
           <a:p>
@@ -1294,31 +1294,31 @@
           <a:bodyPr/>
           <a:lstStyle>
             <a:lvl1pPr>
-              <a:defRPr sz="2100"/>
+              <a:defRPr sz="1650"/>
             </a:lvl1pPr>
             <a:lvl2pPr>
-              <a:defRPr sz="1800"/>
+              <a:defRPr sz="1400"/>
             </a:lvl2pPr>
             <a:lvl3pPr>
-              <a:defRPr sz="1500"/>
+              <a:defRPr sz="1150"/>
             </a:lvl3pPr>
             <a:lvl4pPr>
-              <a:defRPr sz="1350"/>
+              <a:defRPr sz="1050"/>
             </a:lvl4pPr>
             <a:lvl5pPr>
-              <a:defRPr sz="1350"/>
+              <a:defRPr sz="1050"/>
             </a:lvl5pPr>
             <a:lvl6pPr>
-              <a:defRPr sz="1350"/>
+              <a:defRPr sz="1050"/>
             </a:lvl6pPr>
             <a:lvl7pPr>
-              <a:defRPr sz="1350"/>
+              <a:defRPr sz="1050"/>
             </a:lvl7pPr>
             <a:lvl8pPr>
-              <a:defRPr sz="1350"/>
+              <a:defRPr sz="1050"/>
             </a:lvl8pPr>
             <a:lvl9pPr>
-              <a:defRPr sz="1350"/>
+              <a:defRPr sz="1050"/>
             </a:lvl9pPr>
           </a:lstStyle>
           <a:p>
@@ -1500,39 +1500,39 @@
           <a:lstStyle>
             <a:lvl1pPr marL="0" indent="0">
               <a:buNone/>
-              <a:defRPr sz="1800" b="1"/>
+              <a:defRPr sz="1400" b="1"/>
             </a:lvl1pPr>
             <a:lvl2pPr marL="342900" indent="0">
               <a:buNone/>
-              <a:defRPr sz="1500" b="1"/>
+              <a:defRPr sz="1150" b="1"/>
             </a:lvl2pPr>
             <a:lvl3pPr marL="685800" indent="0">
               <a:buNone/>
-              <a:defRPr sz="1350" b="1"/>
+              <a:defRPr sz="1050" b="1"/>
             </a:lvl3pPr>
             <a:lvl4pPr marL="1028700" indent="0">
               <a:buNone/>
-              <a:defRPr sz="1200" b="1"/>
+              <a:defRPr sz="950" b="1"/>
             </a:lvl4pPr>
             <a:lvl5pPr marL="1371600" indent="0">
               <a:buNone/>
-              <a:defRPr sz="1200" b="1"/>
+              <a:defRPr sz="950" b="1"/>
             </a:lvl5pPr>
             <a:lvl6pPr marL="1714500" indent="0">
               <a:buNone/>
-              <a:defRPr sz="1200" b="1"/>
+              <a:defRPr sz="950" b="1"/>
             </a:lvl6pPr>
             <a:lvl7pPr marL="2057400" indent="0">
               <a:buNone/>
-              <a:defRPr sz="1200" b="1"/>
+              <a:defRPr sz="950" b="1"/>
             </a:lvl7pPr>
             <a:lvl8pPr marL="2400300" indent="0">
               <a:buNone/>
-              <a:defRPr sz="1200" b="1"/>
+              <a:defRPr sz="950" b="1"/>
             </a:lvl8pPr>
             <a:lvl9pPr marL="2743200" indent="0">
               <a:buNone/>
-              <a:defRPr sz="1200" b="1"/>
+              <a:defRPr sz="950" b="1"/>
             </a:lvl9pPr>
           </a:lstStyle>
           <a:p>
@@ -1564,31 +1564,31 @@
           <a:bodyPr/>
           <a:lstStyle>
             <a:lvl1pPr>
-              <a:defRPr sz="1800"/>
+              <a:defRPr sz="1400"/>
             </a:lvl1pPr>
             <a:lvl2pPr>
-              <a:defRPr sz="1500"/>
+              <a:defRPr sz="1150"/>
             </a:lvl2pPr>
             <a:lvl3pPr>
-              <a:defRPr sz="1350"/>
+              <a:defRPr sz="1050"/>
             </a:lvl3pPr>
             <a:lvl4pPr>
-              <a:defRPr sz="1200"/>
+              <a:defRPr sz="950"/>
             </a:lvl4pPr>
             <a:lvl5pPr>
-              <a:defRPr sz="1200"/>
+              <a:defRPr sz="950"/>
             </a:lvl5pPr>
             <a:lvl6pPr>
-              <a:defRPr sz="1200"/>
+              <a:defRPr sz="950"/>
             </a:lvl6pPr>
             <a:lvl7pPr>
-              <a:defRPr sz="1200"/>
+              <a:defRPr sz="950"/>
             </a:lvl7pPr>
             <a:lvl8pPr>
-              <a:defRPr sz="1200"/>
+              <a:defRPr sz="950"/>
             </a:lvl8pPr>
             <a:lvl9pPr>
-              <a:defRPr sz="1200"/>
+              <a:defRPr sz="950"/>
             </a:lvl9pPr>
           </a:lstStyle>
           <a:p>
@@ -1649,39 +1649,39 @@
           <a:lstStyle>
             <a:lvl1pPr marL="0" indent="0">
               <a:buNone/>
-              <a:defRPr sz="1800" b="1"/>
+              <a:defRPr sz="1400" b="1"/>
             </a:lvl1pPr>
             <a:lvl2pPr marL="342900" indent="0">
               <a:buNone/>
-              <a:defRPr sz="1500" b="1"/>
+              <a:defRPr sz="1150" b="1"/>
             </a:lvl2pPr>
             <a:lvl3pPr marL="685800" indent="0">
               <a:buNone/>
-              <a:defRPr sz="1350" b="1"/>
+              <a:defRPr sz="1050" b="1"/>
             </a:lvl3pPr>
             <a:lvl4pPr marL="1028700" indent="0">
               <a:buNone/>
-              <a:defRPr sz="1200" b="1"/>
+              <a:defRPr sz="950" b="1"/>
             </a:lvl4pPr>
             <a:lvl5pPr marL="1371600" indent="0">
               <a:buNone/>
-              <a:defRPr sz="1200" b="1"/>
+              <a:defRPr sz="950" b="1"/>
             </a:lvl5pPr>
             <a:lvl6pPr marL="1714500" indent="0">
               <a:buNone/>
-              <a:defRPr sz="1200" b="1"/>
+              <a:defRPr sz="950" b="1"/>
             </a:lvl6pPr>
             <a:lvl7pPr marL="2057400" indent="0">
               <a:buNone/>
-              <a:defRPr sz="1200" b="1"/>
+              <a:defRPr sz="950" b="1"/>
             </a:lvl7pPr>
             <a:lvl8pPr marL="2400300" indent="0">
               <a:buNone/>
-              <a:defRPr sz="1200" b="1"/>
+              <a:defRPr sz="950" b="1"/>
             </a:lvl8pPr>
             <a:lvl9pPr marL="2743200" indent="0">
               <a:buNone/>
-              <a:defRPr sz="1200" b="1"/>
+              <a:defRPr sz="950" b="1"/>
             </a:lvl9pPr>
           </a:lstStyle>
           <a:p>
@@ -1713,31 +1713,31 @@
           <a:bodyPr/>
           <a:lstStyle>
             <a:lvl1pPr>
-              <a:defRPr sz="1800"/>
+              <a:defRPr sz="1400"/>
             </a:lvl1pPr>
             <a:lvl2pPr>
-              <a:defRPr sz="1500"/>
+              <a:defRPr sz="1150"/>
             </a:lvl2pPr>
             <a:lvl3pPr>
-              <a:defRPr sz="1350"/>
+              <a:defRPr sz="1050"/>
             </a:lvl3pPr>
             <a:lvl4pPr>
-              <a:defRPr sz="1200"/>
+              <a:defRPr sz="950"/>
             </a:lvl4pPr>
             <a:lvl5pPr>
-              <a:defRPr sz="1200"/>
+              <a:defRPr sz="950"/>
             </a:lvl5pPr>
             <a:lvl6pPr>
-              <a:defRPr sz="1200"/>
+              <a:defRPr sz="950"/>
             </a:lvl6pPr>
             <a:lvl7pPr>
-              <a:defRPr sz="1200"/>
+              <a:defRPr sz="950"/>
             </a:lvl7pPr>
             <a:lvl8pPr>
-              <a:defRPr sz="1200"/>
+              <a:defRPr sz="950"/>
             </a:lvl8pPr>
             <a:lvl9pPr>
-              <a:defRPr sz="1200"/>
+              <a:defRPr sz="950"/>
             </a:lvl9pPr>
           </a:lstStyle>
           <a:p>
@@ -2104,7 +2104,7 @@
           <a:bodyPr anchor="b"/>
           <a:lstStyle>
             <a:lvl1pPr algn="l">
-              <a:defRPr sz="1500" b="1"/>
+              <a:defRPr sz="1150" b="1"/>
             </a:lvl1pPr>
           </a:lstStyle>
           <a:p>
@@ -2135,31 +2135,31 @@
           <a:bodyPr/>
           <a:lstStyle>
             <a:lvl1pPr>
-              <a:defRPr sz="2400"/>
+              <a:defRPr sz="1850"/>
             </a:lvl1pPr>
             <a:lvl2pPr>
-              <a:defRPr sz="2100"/>
+              <a:defRPr sz="1650"/>
             </a:lvl2pPr>
             <a:lvl3pPr>
-              <a:defRPr sz="1800"/>
+              <a:defRPr sz="1400"/>
             </a:lvl3pPr>
             <a:lvl4pPr>
-              <a:defRPr sz="1500"/>
+              <a:defRPr sz="1150"/>
             </a:lvl4pPr>
             <a:lvl5pPr>
-              <a:defRPr sz="1500"/>
+              <a:defRPr sz="1150"/>
             </a:lvl5pPr>
             <a:lvl6pPr>
-              <a:defRPr sz="1500"/>
+              <a:defRPr sz="1150"/>
             </a:lvl6pPr>
             <a:lvl7pPr>
-              <a:defRPr sz="1500"/>
+              <a:defRPr sz="1150"/>
             </a:lvl7pPr>
             <a:lvl8pPr>
-              <a:defRPr sz="1500"/>
+              <a:defRPr sz="1150"/>
             </a:lvl8pPr>
             <a:lvl9pPr>
-              <a:defRPr sz="1500"/>
+              <a:defRPr sz="1150"/>
             </a:lvl9pPr>
           </a:lstStyle>
           <a:p>
@@ -2220,39 +2220,39 @@
           <a:lstStyle>
             <a:lvl1pPr marL="0" indent="0">
               <a:buNone/>
-              <a:defRPr sz="1050"/>
+              <a:defRPr sz="800"/>
             </a:lvl1pPr>
             <a:lvl2pPr marL="342900" indent="0">
               <a:buNone/>
-              <a:defRPr sz="900"/>
+              <a:defRPr sz="700"/>
             </a:lvl2pPr>
             <a:lvl3pPr marL="685800" indent="0">
               <a:buNone/>
-              <a:defRPr sz="750"/>
+              <a:defRPr sz="700"/>
             </a:lvl3pPr>
             <a:lvl4pPr marL="1028700" indent="0">
               <a:buNone/>
-              <a:defRPr sz="675"/>
+              <a:defRPr sz="700"/>
             </a:lvl4pPr>
             <a:lvl5pPr marL="1371600" indent="0">
               <a:buNone/>
-              <a:defRPr sz="675"/>
+              <a:defRPr sz="700"/>
             </a:lvl5pPr>
             <a:lvl6pPr marL="1714500" indent="0">
               <a:buNone/>
-              <a:defRPr sz="675"/>
+              <a:defRPr sz="700"/>
             </a:lvl6pPr>
             <a:lvl7pPr marL="2057400" indent="0">
               <a:buNone/>
-              <a:defRPr sz="675"/>
+              <a:defRPr sz="700"/>
             </a:lvl7pPr>
             <a:lvl8pPr marL="2400300" indent="0">
               <a:buNone/>
-              <a:defRPr sz="675"/>
+              <a:defRPr sz="700"/>
             </a:lvl8pPr>
             <a:lvl9pPr marL="2743200" indent="0">
               <a:buNone/>
-              <a:defRPr sz="675"/>
+              <a:defRPr sz="700"/>
             </a:lvl9pPr>
           </a:lstStyle>
           <a:p>
@@ -2379,7 +2379,7 @@
           <a:bodyPr anchor="b"/>
           <a:lstStyle>
             <a:lvl1pPr algn="l">
-              <a:defRPr sz="1500" b="1"/>
+              <a:defRPr sz="1150" b="1"/>
             </a:lvl1pPr>
           </a:lstStyle>
           <a:p>
@@ -2411,39 +2411,39 @@
           <a:lstStyle>
             <a:lvl1pPr marL="0" indent="0">
               <a:buNone/>
-              <a:defRPr sz="2400"/>
+              <a:defRPr sz="1850"/>
             </a:lvl1pPr>
             <a:lvl2pPr marL="342900" indent="0">
               <a:buNone/>
-              <a:defRPr sz="2100"/>
+              <a:defRPr sz="1650"/>
             </a:lvl2pPr>
             <a:lvl3pPr marL="685800" indent="0">
               <a:buNone/>
-              <a:defRPr sz="1800"/>
+              <a:defRPr sz="1400"/>
             </a:lvl3pPr>
             <a:lvl4pPr marL="1028700" indent="0">
               <a:buNone/>
-              <a:defRPr sz="1500"/>
+              <a:defRPr sz="1150"/>
             </a:lvl4pPr>
             <a:lvl5pPr marL="1371600" indent="0">
               <a:buNone/>
-              <a:defRPr sz="1500"/>
+              <a:defRPr sz="1150"/>
             </a:lvl5pPr>
             <a:lvl6pPr marL="1714500" indent="0">
               <a:buNone/>
-              <a:defRPr sz="1500"/>
+              <a:defRPr sz="1150"/>
             </a:lvl6pPr>
             <a:lvl7pPr marL="2057400" indent="0">
               <a:buNone/>
-              <a:defRPr sz="1500"/>
+              <a:defRPr sz="1150"/>
             </a:lvl7pPr>
             <a:lvl8pPr marL="2400300" indent="0">
               <a:buNone/>
-              <a:defRPr sz="1500"/>
+              <a:defRPr sz="1150"/>
             </a:lvl8pPr>
             <a:lvl9pPr marL="2743200" indent="0">
               <a:buNone/>
-              <a:defRPr sz="1500"/>
+              <a:defRPr sz="1150"/>
             </a:lvl9pPr>
           </a:lstStyle>
           <a:p>
@@ -2472,39 +2472,39 @@
           <a:lstStyle>
             <a:lvl1pPr marL="0" indent="0">
               <a:buNone/>
-              <a:defRPr sz="1050"/>
+              <a:defRPr sz="800"/>
             </a:lvl1pPr>
             <a:lvl2pPr marL="342900" indent="0">
               <a:buNone/>
-              <a:defRPr sz="900"/>
+              <a:defRPr sz="700"/>
             </a:lvl2pPr>
             <a:lvl3pPr marL="685800" indent="0">
               <a:buNone/>
-              <a:defRPr sz="750"/>
+              <a:defRPr sz="700"/>
             </a:lvl3pPr>
             <a:lvl4pPr marL="1028700" indent="0">
               <a:buNone/>
-              <a:defRPr sz="675"/>
+              <a:defRPr sz="700"/>
             </a:lvl4pPr>
             <a:lvl5pPr marL="1371600" indent="0">
               <a:buNone/>
-              <a:defRPr sz="675"/>
+              <a:defRPr sz="700"/>
             </a:lvl5pPr>
             <a:lvl6pPr marL="1714500" indent="0">
               <a:buNone/>
-              <a:defRPr sz="675"/>
+              <a:defRPr sz="700"/>
             </a:lvl6pPr>
             <a:lvl7pPr marL="2057400" indent="0">
               <a:buNone/>
-              <a:defRPr sz="675"/>
+              <a:defRPr sz="700"/>
             </a:lvl7pPr>
             <a:lvl8pPr marL="2400300" indent="0">
               <a:buNone/>
-              <a:defRPr sz="675"/>
+              <a:defRPr sz="700"/>
             </a:lvl8pPr>
             <a:lvl9pPr marL="2743200" indent="0">
               <a:buNone/>
-              <a:defRPr sz="675"/>
+              <a:defRPr sz="700"/>
             </a:lvl9pPr>
           </a:lstStyle>
           <a:p>
@@ -2732,7 +2732,7 @@
           <a:bodyPr anchor="ctr" bIns="45720" lIns="91440" rIns="91440" rtlCol="0" tIns="45720" vert="horz"/>
           <a:lstStyle>
             <a:lvl1pPr algn="l">
-              <a:defRPr sz="900">
+              <a:defRPr sz="700">
                 <a:solidFill>
                   <a:schemeClr val="tx1">
                     <a:tint val="75000"/>
@@ -2773,7 +2773,7 @@
           <a:bodyPr anchor="ctr" bIns="45720" lIns="91440" rIns="91440" rtlCol="0" tIns="45720" vert="horz"/>
           <a:lstStyle>
             <a:lvl1pPr algn="ctr">
-              <a:defRPr sz="900">
+              <a:defRPr sz="700">
                 <a:solidFill>
                   <a:schemeClr val="tx1">
                     <a:tint val="75000"/>
@@ -2810,7 +2810,7 @@
           <a:bodyPr anchor="ctr" bIns="45720" lIns="91440" rIns="91440" rtlCol="0" tIns="45720" vert="horz"/>
           <a:lstStyle>
             <a:lvl1pPr algn="r">
-              <a:defRPr sz="900">
+              <a:defRPr sz="700">
                 <a:solidFill>
                   <a:schemeClr val="tx1">
                     <a:tint val="75000"/>
@@ -2856,7 +2856,7 @@
           <a:spcPct val="0"/>
         </a:spcBef>
         <a:buNone/>
-        <a:defRPr kern="1200" sz="3300">
+        <a:defRPr kern="1200" sz="2550">
           <a:solidFill>
             <a:schemeClr val="tx1"/>
           </a:solidFill>
@@ -2873,7 +2873,7 @@
         </a:spcBef>
         <a:buFont typeface="Arial"/>
         <a:buChar char="•"/>
-        <a:defRPr kern="1200" sz="2400">
+        <a:defRPr kern="1200" sz="1850">
           <a:solidFill>
             <a:schemeClr val="tx1"/>
           </a:solidFill>
@@ -2888,7 +2888,7 @@
         </a:spcBef>
         <a:buFont typeface="Arial"/>
         <a:buChar char="–"/>
-        <a:defRPr kern="1200" sz="2100">
+        <a:defRPr kern="1200" sz="1650">
           <a:solidFill>
             <a:schemeClr val="tx1"/>
           </a:solidFill>
@@ -2903,7 +2903,7 @@
         </a:spcBef>
         <a:buFont typeface="Arial"/>
         <a:buChar char="•"/>
-        <a:defRPr kern="1200" sz="1800">
+        <a:defRPr kern="1200" sz="1400">
           <a:solidFill>
             <a:schemeClr val="tx1"/>
           </a:solidFill>
@@ -2918,7 +2918,7 @@
         </a:spcBef>
         <a:buFont typeface="Arial"/>
         <a:buChar char="–"/>
-        <a:defRPr kern="1200" sz="1500">
+        <a:defRPr kern="1200" sz="1150">
           <a:solidFill>
             <a:schemeClr val="tx1"/>
           </a:solidFill>
@@ -2933,7 +2933,7 @@
         </a:spcBef>
         <a:buFont typeface="Arial"/>
         <a:buChar char="»"/>
-        <a:defRPr kern="1200" sz="1500">
+        <a:defRPr kern="1200" sz="1150">
           <a:solidFill>
             <a:schemeClr val="tx1"/>
           </a:solidFill>
@@ -2948,7 +2948,7 @@
         </a:spcBef>
         <a:buFont typeface="Arial"/>
         <a:buChar char="•"/>
-        <a:defRPr kern="1200" sz="1500">
+        <a:defRPr kern="1200" sz="1150">
           <a:solidFill>
             <a:schemeClr val="tx1"/>
           </a:solidFill>
@@ -2963,7 +2963,7 @@
         </a:spcBef>
         <a:buFont typeface="Arial"/>
         <a:buChar char="•"/>
-        <a:defRPr kern="1200" sz="1500">
+        <a:defRPr kern="1200" sz="1150">
           <a:solidFill>
             <a:schemeClr val="tx1"/>
           </a:solidFill>
@@ -2978,7 +2978,7 @@
         </a:spcBef>
         <a:buFont typeface="Arial"/>
         <a:buChar char="•"/>
-        <a:defRPr kern="1200" sz="1500">
+        <a:defRPr kern="1200" sz="1150">
           <a:solidFill>
             <a:schemeClr val="tx1"/>
           </a:solidFill>
@@ -2993,7 +2993,7 @@
         </a:spcBef>
         <a:buFont typeface="Arial"/>
         <a:buChar char="•"/>
-        <a:defRPr kern="1200" sz="1500">
+        <a:defRPr kern="1200" sz="1150">
           <a:solidFill>
             <a:schemeClr val="tx1"/>
           </a:solidFill>
@@ -3008,7 +3008,7 @@
         <a:defRPr lang="en-US"/>
       </a:defPPr>
       <a:lvl1pPr algn="l" defTabSz="342900" eaLnBrk="1" hangingPunct="1" latinLnBrk="0" marL="0" rtl="0">
-        <a:defRPr kern="1200" sz="1350">
+        <a:defRPr kern="1200" sz="1050">
           <a:solidFill>
             <a:schemeClr val="tx1"/>
           </a:solidFill>
@@ -3018,7 +3018,7 @@
         </a:defRPr>
       </a:lvl1pPr>
       <a:lvl2pPr algn="l" defTabSz="342900" eaLnBrk="1" hangingPunct="1" latinLnBrk="0" marL="342900" rtl="0">
-        <a:defRPr kern="1200" sz="1350">
+        <a:defRPr kern="1200" sz="1050">
           <a:solidFill>
             <a:schemeClr val="tx1"/>
           </a:solidFill>
@@ -3028,7 +3028,7 @@
         </a:defRPr>
       </a:lvl2pPr>
       <a:lvl3pPr algn="l" defTabSz="342900" eaLnBrk="1" hangingPunct="1" latinLnBrk="0" marL="685800" rtl="0">
-        <a:defRPr kern="1200" sz="1350">
+        <a:defRPr kern="1200" sz="1050">
           <a:solidFill>
             <a:schemeClr val="tx1"/>
           </a:solidFill>
@@ -3038,7 +3038,7 @@
         </a:defRPr>
       </a:lvl3pPr>
       <a:lvl4pPr algn="l" defTabSz="342900" eaLnBrk="1" hangingPunct="1" latinLnBrk="0" marL="1028700" rtl="0">
-        <a:defRPr kern="1200" sz="1350">
+        <a:defRPr kern="1200" sz="1050">
           <a:solidFill>
             <a:schemeClr val="tx1"/>
           </a:solidFill>
@@ -3048,7 +3048,7 @@
         </a:defRPr>
       </a:lvl4pPr>
       <a:lvl5pPr algn="l" defTabSz="342900" eaLnBrk="1" hangingPunct="1" latinLnBrk="0" marL="1371600" rtl="0">
-        <a:defRPr kern="1200" sz="1350">
+        <a:defRPr kern="1200" sz="1050">
           <a:solidFill>
             <a:schemeClr val="tx1"/>
           </a:solidFill>
@@ -3058,7 +3058,7 @@
         </a:defRPr>
       </a:lvl5pPr>
       <a:lvl6pPr algn="l" defTabSz="342900" eaLnBrk="1" hangingPunct="1" latinLnBrk="0" marL="1714500" rtl="0">
-        <a:defRPr kern="1200" sz="1350">
+        <a:defRPr kern="1200" sz="1050">
           <a:solidFill>
             <a:schemeClr val="tx1"/>
           </a:solidFill>
@@ -3068,7 +3068,7 @@
         </a:defRPr>
       </a:lvl6pPr>
       <a:lvl7pPr algn="l" defTabSz="342900" eaLnBrk="1" hangingPunct="1" latinLnBrk="0" marL="2057400" rtl="0">
-        <a:defRPr kern="1200" sz="1350">
+        <a:defRPr kern="1200" sz="1050">
           <a:solidFill>
             <a:schemeClr val="tx1"/>
           </a:solidFill>
@@ -3078,7 +3078,7 @@
         </a:defRPr>
       </a:lvl7pPr>
       <a:lvl8pPr algn="l" defTabSz="342900" eaLnBrk="1" hangingPunct="1" latinLnBrk="0" marL="2400300" rtl="0">
-        <a:defRPr kern="1200" sz="1350">
+        <a:defRPr kern="1200" sz="1050">
           <a:solidFill>
             <a:schemeClr val="tx1"/>
           </a:solidFill>
@@ -3088,7 +3088,7 @@
         </a:defRPr>
       </a:lvl8pPr>
       <a:lvl9pPr algn="l" defTabSz="342900" eaLnBrk="1" hangingPunct="1" latinLnBrk="0" marL="2743200" rtl="0">
-        <a:defRPr kern="1200" sz="1350">
+        <a:defRPr kern="1200" sz="1050">
           <a:solidFill>
             <a:schemeClr val="tx1"/>
           </a:solidFill>

--- a/07-trees-forests-boosting/slides.pptx
+++ b/07-trees-forests-boosting/slides.pptx
@@ -943,7 +943,7 @@
           <a:bodyPr anchor="t"/>
           <a:lstStyle>
             <a:lvl1pPr algn="l">
-              <a:defRPr sz="2350" b="1" cap="all"/>
+              <a:defRPr sz="1850" b="1" cap="all"/>
             </a:lvl1pPr>
           </a:lstStyle>
           <a:p>
@@ -975,7 +975,7 @@
           <a:lstStyle>
             <a:lvl1pPr marL="0" indent="0">
               <a:buNone/>
-              <a:defRPr sz="1150">
+              <a:defRPr sz="950">
                 <a:solidFill>
                   <a:schemeClr val="tx1">
                     <a:tint val="75000"/>
@@ -985,7 +985,7 @@
             </a:lvl1pPr>
             <a:lvl2pPr marL="342900" indent="0">
               <a:buNone/>
-              <a:defRPr sz="1050">
+              <a:defRPr sz="850">
                 <a:solidFill>
                   <a:schemeClr val="tx1">
                     <a:tint val="75000"/>
@@ -995,7 +995,7 @@
             </a:lvl2pPr>
             <a:lvl3pPr marL="685800" indent="0">
               <a:buNone/>
-              <a:defRPr sz="950">
+              <a:defRPr sz="750">
                 <a:solidFill>
                   <a:schemeClr val="tx1">
                     <a:tint val="75000"/>
@@ -1005,7 +1005,7 @@
             </a:lvl3pPr>
             <a:lvl4pPr marL="1028700" indent="0">
               <a:buNone/>
-              <a:defRPr sz="800">
+              <a:defRPr sz="650">
                 <a:solidFill>
                   <a:schemeClr val="tx1">
                     <a:tint val="75000"/>
@@ -1015,7 +1015,7 @@
             </a:lvl4pPr>
             <a:lvl5pPr marL="1371600" indent="0">
               <a:buNone/>
-              <a:defRPr sz="800">
+              <a:defRPr sz="650">
                 <a:solidFill>
                   <a:schemeClr val="tx1">
                     <a:tint val="75000"/>
@@ -1025,7 +1025,7 @@
             </a:lvl5pPr>
             <a:lvl6pPr marL="1714500" indent="0">
               <a:buNone/>
-              <a:defRPr sz="800">
+              <a:defRPr sz="650">
                 <a:solidFill>
                   <a:schemeClr val="tx1">
                     <a:tint val="75000"/>
@@ -1035,7 +1035,7 @@
             </a:lvl6pPr>
             <a:lvl7pPr marL="2057400" indent="0">
               <a:buNone/>
-              <a:defRPr sz="800">
+              <a:defRPr sz="650">
                 <a:solidFill>
                   <a:schemeClr val="tx1">
                     <a:tint val="75000"/>
@@ -1045,7 +1045,7 @@
             </a:lvl7pPr>
             <a:lvl8pPr marL="2400300" indent="0">
               <a:buNone/>
-              <a:defRPr sz="800">
+              <a:defRPr sz="650">
                 <a:solidFill>
                   <a:schemeClr val="tx1">
                     <a:tint val="75000"/>
@@ -1055,7 +1055,7 @@
             </a:lvl8pPr>
             <a:lvl9pPr marL="2743200" indent="0">
               <a:buNone/>
-              <a:defRPr sz="800">
+              <a:defRPr sz="650">
                 <a:solidFill>
                   <a:schemeClr val="tx1">
                     <a:tint val="75000"/>
@@ -1210,31 +1210,31 @@
           <a:bodyPr/>
           <a:lstStyle>
             <a:lvl1pPr>
-              <a:defRPr sz="1650"/>
+              <a:defRPr sz="1300"/>
             </a:lvl1pPr>
             <a:lvl2pPr>
-              <a:defRPr sz="1400"/>
+              <a:defRPr sz="1100"/>
             </a:lvl2pPr>
             <a:lvl3pPr>
-              <a:defRPr sz="1150"/>
+              <a:defRPr sz="950"/>
             </a:lvl3pPr>
             <a:lvl4pPr>
-              <a:defRPr sz="1050"/>
+              <a:defRPr sz="850"/>
             </a:lvl4pPr>
             <a:lvl5pPr>
-              <a:defRPr sz="1050"/>
+              <a:defRPr sz="850"/>
             </a:lvl5pPr>
             <a:lvl6pPr>
-              <a:defRPr sz="1050"/>
+              <a:defRPr sz="850"/>
             </a:lvl6pPr>
             <a:lvl7pPr>
-              <a:defRPr sz="1050"/>
+              <a:defRPr sz="850"/>
             </a:lvl7pPr>
             <a:lvl8pPr>
-              <a:defRPr sz="1050"/>
+              <a:defRPr sz="850"/>
             </a:lvl8pPr>
             <a:lvl9pPr>
-              <a:defRPr sz="1050"/>
+              <a:defRPr sz="850"/>
             </a:lvl9pPr>
           </a:lstStyle>
           <a:p>
@@ -1294,31 +1294,31 @@
           <a:bodyPr/>
           <a:lstStyle>
             <a:lvl1pPr>
-              <a:defRPr sz="1650"/>
+              <a:defRPr sz="1300"/>
             </a:lvl1pPr>
             <a:lvl2pPr>
-              <a:defRPr sz="1400"/>
+              <a:defRPr sz="1100"/>
             </a:lvl2pPr>
             <a:lvl3pPr>
-              <a:defRPr sz="1150"/>
+              <a:defRPr sz="950"/>
             </a:lvl3pPr>
             <a:lvl4pPr>
-              <a:defRPr sz="1050"/>
+              <a:defRPr sz="850"/>
             </a:lvl4pPr>
             <a:lvl5pPr>
-              <a:defRPr sz="1050"/>
+              <a:defRPr sz="850"/>
             </a:lvl5pPr>
             <a:lvl6pPr>
-              <a:defRPr sz="1050"/>
+              <a:defRPr sz="850"/>
             </a:lvl6pPr>
             <a:lvl7pPr>
-              <a:defRPr sz="1050"/>
+              <a:defRPr sz="850"/>
             </a:lvl7pPr>
             <a:lvl8pPr>
-              <a:defRPr sz="1050"/>
+              <a:defRPr sz="850"/>
             </a:lvl8pPr>
             <a:lvl9pPr>
-              <a:defRPr sz="1050"/>
+              <a:defRPr sz="850"/>
             </a:lvl9pPr>
           </a:lstStyle>
           <a:p>
@@ -1500,39 +1500,39 @@
           <a:lstStyle>
             <a:lvl1pPr marL="0" indent="0">
               <a:buNone/>
-              <a:defRPr sz="1400" b="1"/>
+              <a:defRPr sz="1100" b="1"/>
             </a:lvl1pPr>
             <a:lvl2pPr marL="342900" indent="0">
               <a:buNone/>
-              <a:defRPr sz="1150" b="1"/>
+              <a:defRPr sz="950" b="1"/>
             </a:lvl2pPr>
             <a:lvl3pPr marL="685800" indent="0">
               <a:buNone/>
-              <a:defRPr sz="1050" b="1"/>
+              <a:defRPr sz="850" b="1"/>
             </a:lvl3pPr>
             <a:lvl4pPr marL="1028700" indent="0">
               <a:buNone/>
-              <a:defRPr sz="950" b="1"/>
+              <a:defRPr sz="750" b="1"/>
             </a:lvl4pPr>
             <a:lvl5pPr marL="1371600" indent="0">
               <a:buNone/>
-              <a:defRPr sz="950" b="1"/>
+              <a:defRPr sz="750" b="1"/>
             </a:lvl5pPr>
             <a:lvl6pPr marL="1714500" indent="0">
               <a:buNone/>
-              <a:defRPr sz="950" b="1"/>
+              <a:defRPr sz="750" b="1"/>
             </a:lvl6pPr>
             <a:lvl7pPr marL="2057400" indent="0">
               <a:buNone/>
-              <a:defRPr sz="950" b="1"/>
+              <a:defRPr sz="750" b="1"/>
             </a:lvl7pPr>
             <a:lvl8pPr marL="2400300" indent="0">
               <a:buNone/>
-              <a:defRPr sz="950" b="1"/>
+              <a:defRPr sz="750" b="1"/>
             </a:lvl8pPr>
             <a:lvl9pPr marL="2743200" indent="0">
               <a:buNone/>
-              <a:defRPr sz="950" b="1"/>
+              <a:defRPr sz="750" b="1"/>
             </a:lvl9pPr>
           </a:lstStyle>
           <a:p>
@@ -1564,31 +1564,31 @@
           <a:bodyPr/>
           <a:lstStyle>
             <a:lvl1pPr>
-              <a:defRPr sz="1400"/>
+              <a:defRPr sz="1100"/>
             </a:lvl1pPr>
             <a:lvl2pPr>
-              <a:defRPr sz="1150"/>
+              <a:defRPr sz="950"/>
             </a:lvl2pPr>
             <a:lvl3pPr>
-              <a:defRPr sz="1050"/>
+              <a:defRPr sz="850"/>
             </a:lvl3pPr>
             <a:lvl4pPr>
-              <a:defRPr sz="950"/>
+              <a:defRPr sz="750"/>
             </a:lvl4pPr>
             <a:lvl5pPr>
-              <a:defRPr sz="950"/>
+              <a:defRPr sz="750"/>
             </a:lvl5pPr>
             <a:lvl6pPr>
-              <a:defRPr sz="950"/>
+              <a:defRPr sz="750"/>
             </a:lvl6pPr>
             <a:lvl7pPr>
-              <a:defRPr sz="950"/>
+              <a:defRPr sz="750"/>
             </a:lvl7pPr>
             <a:lvl8pPr>
-              <a:defRPr sz="950"/>
+              <a:defRPr sz="750"/>
             </a:lvl8pPr>
             <a:lvl9pPr>
-              <a:defRPr sz="950"/>
+              <a:defRPr sz="750"/>
             </a:lvl9pPr>
           </a:lstStyle>
           <a:p>
@@ -1649,39 +1649,39 @@
           <a:lstStyle>
             <a:lvl1pPr marL="0" indent="0">
               <a:buNone/>
-              <a:defRPr sz="1400" b="1"/>
+              <a:defRPr sz="1100" b="1"/>
             </a:lvl1pPr>
             <a:lvl2pPr marL="342900" indent="0">
               <a:buNone/>
-              <a:defRPr sz="1150" b="1"/>
+              <a:defRPr sz="950" b="1"/>
             </a:lvl2pPr>
             <a:lvl3pPr marL="685800" indent="0">
               <a:buNone/>
-              <a:defRPr sz="1050" b="1"/>
+              <a:defRPr sz="850" b="1"/>
             </a:lvl3pPr>
             <a:lvl4pPr marL="1028700" indent="0">
               <a:buNone/>
-              <a:defRPr sz="950" b="1"/>
+              <a:defRPr sz="750" b="1"/>
             </a:lvl4pPr>
             <a:lvl5pPr marL="1371600" indent="0">
               <a:buNone/>
-              <a:defRPr sz="950" b="1"/>
+              <a:defRPr sz="750" b="1"/>
             </a:lvl5pPr>
             <a:lvl6pPr marL="1714500" indent="0">
               <a:buNone/>
-              <a:defRPr sz="950" b="1"/>
+              <a:defRPr sz="750" b="1"/>
             </a:lvl6pPr>
             <a:lvl7pPr marL="2057400" indent="0">
               <a:buNone/>
-              <a:defRPr sz="950" b="1"/>
+              <a:defRPr sz="750" b="1"/>
             </a:lvl7pPr>
             <a:lvl8pPr marL="2400300" indent="0">
               <a:buNone/>
-              <a:defRPr sz="950" b="1"/>
+              <a:defRPr sz="750" b="1"/>
             </a:lvl8pPr>
             <a:lvl9pPr marL="2743200" indent="0">
               <a:buNone/>
-              <a:defRPr sz="950" b="1"/>
+              <a:defRPr sz="750" b="1"/>
             </a:lvl9pPr>
           </a:lstStyle>
           <a:p>
@@ -1713,31 +1713,31 @@
           <a:bodyPr/>
           <a:lstStyle>
             <a:lvl1pPr>
-              <a:defRPr sz="1400"/>
+              <a:defRPr sz="1100"/>
             </a:lvl1pPr>
             <a:lvl2pPr>
-              <a:defRPr sz="1150"/>
+              <a:defRPr sz="950"/>
             </a:lvl2pPr>
             <a:lvl3pPr>
-              <a:defRPr sz="1050"/>
+              <a:defRPr sz="850"/>
             </a:lvl3pPr>
             <a:lvl4pPr>
-              <a:defRPr sz="950"/>
+              <a:defRPr sz="750"/>
             </a:lvl4pPr>
             <a:lvl5pPr>
-              <a:defRPr sz="950"/>
+              <a:defRPr sz="750"/>
             </a:lvl5pPr>
             <a:lvl6pPr>
-              <a:defRPr sz="950"/>
+              <a:defRPr sz="750"/>
             </a:lvl6pPr>
             <a:lvl7pPr>
-              <a:defRPr sz="950"/>
+              <a:defRPr sz="750"/>
             </a:lvl7pPr>
             <a:lvl8pPr>
-              <a:defRPr sz="950"/>
+              <a:defRPr sz="750"/>
             </a:lvl8pPr>
             <a:lvl9pPr>
-              <a:defRPr sz="950"/>
+              <a:defRPr sz="750"/>
             </a:lvl9pPr>
           </a:lstStyle>
           <a:p>
@@ -2104,7 +2104,7 @@
           <a:bodyPr anchor="b"/>
           <a:lstStyle>
             <a:lvl1pPr algn="l">
-              <a:defRPr sz="1150" b="1"/>
+              <a:defRPr sz="950" b="1"/>
             </a:lvl1pPr>
           </a:lstStyle>
           <a:p>
@@ -2135,31 +2135,31 @@
           <a:bodyPr/>
           <a:lstStyle>
             <a:lvl1pPr>
-              <a:defRPr sz="1850"/>
+              <a:defRPr sz="1500"/>
             </a:lvl1pPr>
             <a:lvl2pPr>
-              <a:defRPr sz="1650"/>
+              <a:defRPr sz="1300"/>
             </a:lvl2pPr>
             <a:lvl3pPr>
-              <a:defRPr sz="1400"/>
+              <a:defRPr sz="1100"/>
             </a:lvl3pPr>
             <a:lvl4pPr>
-              <a:defRPr sz="1150"/>
+              <a:defRPr sz="950"/>
             </a:lvl4pPr>
             <a:lvl5pPr>
-              <a:defRPr sz="1150"/>
+              <a:defRPr sz="950"/>
             </a:lvl5pPr>
             <a:lvl6pPr>
-              <a:defRPr sz="1150"/>
+              <a:defRPr sz="950"/>
             </a:lvl6pPr>
             <a:lvl7pPr>
-              <a:defRPr sz="1150"/>
+              <a:defRPr sz="950"/>
             </a:lvl7pPr>
             <a:lvl8pPr>
-              <a:defRPr sz="1150"/>
+              <a:defRPr sz="950"/>
             </a:lvl8pPr>
             <a:lvl9pPr>
-              <a:defRPr sz="1150"/>
+              <a:defRPr sz="950"/>
             </a:lvl9pPr>
           </a:lstStyle>
           <a:p>
@@ -2220,39 +2220,39 @@
           <a:lstStyle>
             <a:lvl1pPr marL="0" indent="0">
               <a:buNone/>
-              <a:defRPr sz="800"/>
+              <a:defRPr sz="650"/>
             </a:lvl1pPr>
             <a:lvl2pPr marL="342900" indent="0">
               <a:buNone/>
-              <a:defRPr sz="700"/>
+              <a:defRPr sz="550"/>
             </a:lvl2pPr>
             <a:lvl3pPr marL="685800" indent="0">
               <a:buNone/>
-              <a:defRPr sz="700"/>
+              <a:defRPr sz="550"/>
             </a:lvl3pPr>
             <a:lvl4pPr marL="1028700" indent="0">
               <a:buNone/>
-              <a:defRPr sz="700"/>
+              <a:defRPr sz="550"/>
             </a:lvl4pPr>
             <a:lvl5pPr marL="1371600" indent="0">
               <a:buNone/>
-              <a:defRPr sz="700"/>
+              <a:defRPr sz="550"/>
             </a:lvl5pPr>
             <a:lvl6pPr marL="1714500" indent="0">
               <a:buNone/>
-              <a:defRPr sz="700"/>
+              <a:defRPr sz="550"/>
             </a:lvl6pPr>
             <a:lvl7pPr marL="2057400" indent="0">
               <a:buNone/>
-              <a:defRPr sz="700"/>
+              <a:defRPr sz="550"/>
             </a:lvl7pPr>
             <a:lvl8pPr marL="2400300" indent="0">
               <a:buNone/>
-              <a:defRPr sz="700"/>
+              <a:defRPr sz="550"/>
             </a:lvl8pPr>
             <a:lvl9pPr marL="2743200" indent="0">
               <a:buNone/>
-              <a:defRPr sz="700"/>
+              <a:defRPr sz="550"/>
             </a:lvl9pPr>
           </a:lstStyle>
           <a:p>
@@ -2379,7 +2379,7 @@
           <a:bodyPr anchor="b"/>
           <a:lstStyle>
             <a:lvl1pPr algn="l">
-              <a:defRPr sz="1150" b="1"/>
+              <a:defRPr sz="950" b="1"/>
             </a:lvl1pPr>
           </a:lstStyle>
           <a:p>
@@ -2411,39 +2411,39 @@
           <a:lstStyle>
             <a:lvl1pPr marL="0" indent="0">
               <a:buNone/>
-              <a:defRPr sz="1850"/>
+              <a:defRPr sz="1500"/>
             </a:lvl1pPr>
             <a:lvl2pPr marL="342900" indent="0">
               <a:buNone/>
-              <a:defRPr sz="1650"/>
+              <a:defRPr sz="1300"/>
             </a:lvl2pPr>
             <a:lvl3pPr marL="685800" indent="0">
               <a:buNone/>
-              <a:defRPr sz="1400"/>
+              <a:defRPr sz="1100"/>
             </a:lvl3pPr>
             <a:lvl4pPr marL="1028700" indent="0">
               <a:buNone/>
-              <a:defRPr sz="1150"/>
+              <a:defRPr sz="950"/>
             </a:lvl4pPr>
             <a:lvl5pPr marL="1371600" indent="0">
               <a:buNone/>
-              <a:defRPr sz="1150"/>
+              <a:defRPr sz="950"/>
             </a:lvl5pPr>
             <a:lvl6pPr marL="1714500" indent="0">
               <a:buNone/>
-              <a:defRPr sz="1150"/>
+              <a:defRPr sz="950"/>
             </a:lvl6pPr>
             <a:lvl7pPr marL="2057400" indent="0">
               <a:buNone/>
-              <a:defRPr sz="1150"/>
+              <a:defRPr sz="950"/>
             </a:lvl7pPr>
             <a:lvl8pPr marL="2400300" indent="0">
               <a:buNone/>
-              <a:defRPr sz="1150"/>
+              <a:defRPr sz="950"/>
             </a:lvl8pPr>
             <a:lvl9pPr marL="2743200" indent="0">
               <a:buNone/>
-              <a:defRPr sz="1150"/>
+              <a:defRPr sz="950"/>
             </a:lvl9pPr>
           </a:lstStyle>
           <a:p>
@@ -2472,39 +2472,39 @@
           <a:lstStyle>
             <a:lvl1pPr marL="0" indent="0">
               <a:buNone/>
-              <a:defRPr sz="800"/>
+              <a:defRPr sz="650"/>
             </a:lvl1pPr>
             <a:lvl2pPr marL="342900" indent="0">
               <a:buNone/>
-              <a:defRPr sz="700"/>
+              <a:defRPr sz="550"/>
             </a:lvl2pPr>
             <a:lvl3pPr marL="685800" indent="0">
               <a:buNone/>
-              <a:defRPr sz="700"/>
+              <a:defRPr sz="550"/>
             </a:lvl3pPr>
             <a:lvl4pPr marL="1028700" indent="0">
               <a:buNone/>
-              <a:defRPr sz="700"/>
+              <a:defRPr sz="550"/>
             </a:lvl4pPr>
             <a:lvl5pPr marL="1371600" indent="0">
               <a:buNone/>
-              <a:defRPr sz="700"/>
+              <a:defRPr sz="550"/>
             </a:lvl5pPr>
             <a:lvl6pPr marL="1714500" indent="0">
               <a:buNone/>
-              <a:defRPr sz="700"/>
+              <a:defRPr sz="550"/>
             </a:lvl6pPr>
             <a:lvl7pPr marL="2057400" indent="0">
               <a:buNone/>
-              <a:defRPr sz="700"/>
+              <a:defRPr sz="550"/>
             </a:lvl7pPr>
             <a:lvl8pPr marL="2400300" indent="0">
               <a:buNone/>
-              <a:defRPr sz="700"/>
+              <a:defRPr sz="550"/>
             </a:lvl8pPr>
             <a:lvl9pPr marL="2743200" indent="0">
               <a:buNone/>
-              <a:defRPr sz="700"/>
+              <a:defRPr sz="550"/>
             </a:lvl9pPr>
           </a:lstStyle>
           <a:p>
@@ -2732,7 +2732,7 @@
           <a:bodyPr anchor="ctr" bIns="45720" lIns="91440" rIns="91440" rtlCol="0" tIns="45720" vert="horz"/>
           <a:lstStyle>
             <a:lvl1pPr algn="l">
-              <a:defRPr sz="700">
+              <a:defRPr sz="550">
                 <a:solidFill>
                   <a:schemeClr val="tx1">
                     <a:tint val="75000"/>
@@ -2773,7 +2773,7 @@
           <a:bodyPr anchor="ctr" bIns="45720" lIns="91440" rIns="91440" rtlCol="0" tIns="45720" vert="horz"/>
           <a:lstStyle>
             <a:lvl1pPr algn="ctr">
-              <a:defRPr sz="700">
+              <a:defRPr sz="550">
                 <a:solidFill>
                   <a:schemeClr val="tx1">
                     <a:tint val="75000"/>
@@ -2810,7 +2810,7 @@
           <a:bodyPr anchor="ctr" bIns="45720" lIns="91440" rIns="91440" rtlCol="0" tIns="45720" vert="horz"/>
           <a:lstStyle>
             <a:lvl1pPr algn="r">
-              <a:defRPr sz="700">
+              <a:defRPr sz="550">
                 <a:solidFill>
                   <a:schemeClr val="tx1">
                     <a:tint val="75000"/>
@@ -2856,7 +2856,7 @@
           <a:spcPct val="0"/>
         </a:spcBef>
         <a:buNone/>
-        <a:defRPr kern="1200" sz="2550">
+        <a:defRPr kern="1200" sz="2050">
           <a:solidFill>
             <a:schemeClr val="tx1"/>
           </a:solidFill>
@@ -2873,7 +2873,7 @@
         </a:spcBef>
         <a:buFont typeface="Arial"/>
         <a:buChar char="•"/>
-        <a:defRPr kern="1200" sz="1850">
+        <a:defRPr kern="1200" sz="1500">
           <a:solidFill>
             <a:schemeClr val="tx1"/>
           </a:solidFill>
@@ -2888,7 +2888,7 @@
         </a:spcBef>
         <a:buFont typeface="Arial"/>
         <a:buChar char="–"/>
-        <a:defRPr kern="1200" sz="1650">
+        <a:defRPr kern="1200" sz="1300">
           <a:solidFill>
             <a:schemeClr val="tx1"/>
           </a:solidFill>
@@ -2903,7 +2903,7 @@
         </a:spcBef>
         <a:buFont typeface="Arial"/>
         <a:buChar char="•"/>
-        <a:defRPr kern="1200" sz="1400">
+        <a:defRPr kern="1200" sz="1100">
           <a:solidFill>
             <a:schemeClr val="tx1"/>
           </a:solidFill>
@@ -2918,7 +2918,7 @@
         </a:spcBef>
         <a:buFont typeface="Arial"/>
         <a:buChar char="–"/>
-        <a:defRPr kern="1200" sz="1150">
+        <a:defRPr kern="1200" sz="950">
           <a:solidFill>
             <a:schemeClr val="tx1"/>
           </a:solidFill>
@@ -2933,7 +2933,7 @@
         </a:spcBef>
         <a:buFont typeface="Arial"/>
         <a:buChar char="»"/>
-        <a:defRPr kern="1200" sz="1150">
+        <a:defRPr kern="1200" sz="950">
           <a:solidFill>
             <a:schemeClr val="tx1"/>
           </a:solidFill>
@@ -2948,7 +2948,7 @@
         </a:spcBef>
         <a:buFont typeface="Arial"/>
         <a:buChar char="•"/>
-        <a:defRPr kern="1200" sz="1150">
+        <a:defRPr kern="1200" sz="950">
           <a:solidFill>
             <a:schemeClr val="tx1"/>
           </a:solidFill>
@@ -2963,7 +2963,7 @@
         </a:spcBef>
         <a:buFont typeface="Arial"/>
         <a:buChar char="•"/>
-        <a:defRPr kern="1200" sz="1150">
+        <a:defRPr kern="1200" sz="950">
           <a:solidFill>
             <a:schemeClr val="tx1"/>
           </a:solidFill>
@@ -2978,7 +2978,7 @@
         </a:spcBef>
         <a:buFont typeface="Arial"/>
         <a:buChar char="•"/>
-        <a:defRPr kern="1200" sz="1150">
+        <a:defRPr kern="1200" sz="950">
           <a:solidFill>
             <a:schemeClr val="tx1"/>
           </a:solidFill>
@@ -2993,7 +2993,7 @@
         </a:spcBef>
         <a:buFont typeface="Arial"/>
         <a:buChar char="•"/>
-        <a:defRPr kern="1200" sz="1150">
+        <a:defRPr kern="1200" sz="950">
           <a:solidFill>
             <a:schemeClr val="tx1"/>
           </a:solidFill>
@@ -3008,7 +3008,7 @@
         <a:defRPr lang="en-US"/>
       </a:defPPr>
       <a:lvl1pPr algn="l" defTabSz="342900" eaLnBrk="1" hangingPunct="1" latinLnBrk="0" marL="0" rtl="0">
-        <a:defRPr kern="1200" sz="1050">
+        <a:defRPr kern="1200" sz="850">
           <a:solidFill>
             <a:schemeClr val="tx1"/>
           </a:solidFill>
@@ -3018,7 +3018,7 @@
         </a:defRPr>
       </a:lvl1pPr>
       <a:lvl2pPr algn="l" defTabSz="342900" eaLnBrk="1" hangingPunct="1" latinLnBrk="0" marL="342900" rtl="0">
-        <a:defRPr kern="1200" sz="1050">
+        <a:defRPr kern="1200" sz="850">
           <a:solidFill>
             <a:schemeClr val="tx1"/>
           </a:solidFill>
@@ -3028,7 +3028,7 @@
         </a:defRPr>
       </a:lvl2pPr>
       <a:lvl3pPr algn="l" defTabSz="342900" eaLnBrk="1" hangingPunct="1" latinLnBrk="0" marL="685800" rtl="0">
-        <a:defRPr kern="1200" sz="1050">
+        <a:defRPr kern="1200" sz="850">
           <a:solidFill>
             <a:schemeClr val="tx1"/>
           </a:solidFill>
@@ -3038,7 +3038,7 @@
         </a:defRPr>
       </a:lvl3pPr>
       <a:lvl4pPr algn="l" defTabSz="342900" eaLnBrk="1" hangingPunct="1" latinLnBrk="0" marL="1028700" rtl="0">
-        <a:defRPr kern="1200" sz="1050">
+        <a:defRPr kern="1200" sz="850">
           <a:solidFill>
             <a:schemeClr val="tx1"/>
           </a:solidFill>
@@ -3048,7 +3048,7 @@
         </a:defRPr>
       </a:lvl4pPr>
       <a:lvl5pPr algn="l" defTabSz="342900" eaLnBrk="1" hangingPunct="1" latinLnBrk="0" marL="1371600" rtl="0">
-        <a:defRPr kern="1200" sz="1050">
+        <a:defRPr kern="1200" sz="850">
           <a:solidFill>
             <a:schemeClr val="tx1"/>
           </a:solidFill>
@@ -3058,7 +3058,7 @@
         </a:defRPr>
       </a:lvl5pPr>
       <a:lvl6pPr algn="l" defTabSz="342900" eaLnBrk="1" hangingPunct="1" latinLnBrk="0" marL="1714500" rtl="0">
-        <a:defRPr kern="1200" sz="1050">
+        <a:defRPr kern="1200" sz="850">
           <a:solidFill>
             <a:schemeClr val="tx1"/>
           </a:solidFill>
@@ -3068,7 +3068,7 @@
         </a:defRPr>
       </a:lvl6pPr>
       <a:lvl7pPr algn="l" defTabSz="342900" eaLnBrk="1" hangingPunct="1" latinLnBrk="0" marL="2057400" rtl="0">
-        <a:defRPr kern="1200" sz="1050">
+        <a:defRPr kern="1200" sz="850">
           <a:solidFill>
             <a:schemeClr val="tx1"/>
           </a:solidFill>
@@ -3078,7 +3078,7 @@
         </a:defRPr>
       </a:lvl7pPr>
       <a:lvl8pPr algn="l" defTabSz="342900" eaLnBrk="1" hangingPunct="1" latinLnBrk="0" marL="2400300" rtl="0">
-        <a:defRPr kern="1200" sz="1050">
+        <a:defRPr kern="1200" sz="850">
           <a:solidFill>
             <a:schemeClr val="tx1"/>
           </a:solidFill>
@@ -3088,7 +3088,7 @@
         </a:defRPr>
       </a:lvl8pPr>
       <a:lvl9pPr algn="l" defTabSz="342900" eaLnBrk="1" hangingPunct="1" latinLnBrk="0" marL="2743200" rtl="0">
-        <a:defRPr kern="1200" sz="1050">
+        <a:defRPr kern="1200" sz="850">
           <a:solidFill>
             <a:schemeClr val="tx1"/>
           </a:solidFill>

--- a/07-trees-forests-boosting/slides.pptx
+++ b/07-trees-forests-boosting/slides.pptx
@@ -2825,6 +2825,72 @@
               <a:t>‹#›</a:t>
             </a:fld>
             <a:endParaRPr lang="en-US"/>
+          </a:p>
+        </p:txBody>
+      </p:sp>
+      <p:sp>
+        <p:nvSpPr>
+          <p:cNvPr id="7" name="Author Footer"/>
+          <p:cNvSpPr txBox="1"/>
+          <p:nvPr/>
+        </p:nvSpPr>
+        <p:spPr>
+          <a:xfrm>
+            <a:off x="457200" y="4735000"/>
+            <a:ext cx="5000000" cy="260000"/>
+          </a:xfrm>
+          <a:prstGeom prst="rect">
+            <a:avLst/>
+          </a:prstGeom>
+          <a:noFill/>
+        </p:spPr>
+        <p:txBody>
+          <a:bodyPr anchor="ctr" bIns="0" lIns="0" rIns="0" tIns="0" wrap="square"/>
+          <a:lstStyle/>
+          <a:p>
+            <a:pPr algn="l"/>
+            <a:r>
+              <a:rPr dirty="0" lang="en-US" sz="900">
+                <a:solidFill>
+                  <a:srgbClr val="6E7275"/>
+                </a:solidFill>
+                <a:latin typeface="+mn-lt"/>
+              </a:rPr>
+              <a:t>Thierry Warin, PhD</a:t>
+            </a:r>
+          </a:p>
+        </p:txBody>
+      </p:sp>
+      <p:sp>
+        <p:nvSpPr>
+          <p:cNvPr id="8" name="Slide Number Footer"/>
+          <p:cNvSpPr txBox="1"/>
+          <p:nvPr/>
+        </p:nvSpPr>
+        <p:spPr>
+          <a:xfrm>
+            <a:off x="7200000" y="4735000"/>
+            <a:ext cx="1486800" cy="260000"/>
+          </a:xfrm>
+          <a:prstGeom prst="rect">
+            <a:avLst/>
+          </a:prstGeom>
+          <a:noFill/>
+        </p:spPr>
+        <p:txBody>
+          <a:bodyPr anchor="ctr" bIns="0" lIns="0" rIns="0" tIns="0" wrap="square"/>
+          <a:lstStyle/>
+          <a:p>
+            <a:pPr algn="r"/>
+            <a:fld id="{9B1A2C3D-4E5F-6A7B-8C9D-0E1F2A3B4C5D}" type="slidenum">
+              <a:rPr dirty="0" lang="en-US" sz="900">
+                <a:solidFill>
+                  <a:srgbClr val="6E7275"/>
+                </a:solidFill>
+                <a:latin typeface="+mn-lt"/>
+              </a:rPr>
+              <a:t>2</a:t>
+            </a:fld>
           </a:p>
         </p:txBody>
       </p:sp>
@@ -3205,7 +3271,7 @@
             </a:pPr>
             <a:r>
               <a:rPr/>
-              <a:t>18 August 2026</a:t>
+              <a:t>19 August 2026</a:t>
             </a:r>
           </a:p>
         </p:txBody>

--- a/07-trees-forests-boosting/slides.pptx
+++ b/07-trees-forests-boosting/slides.pptx
@@ -35,6 +35,7 @@
     <p:sldId id="283" r:id="rId29"/>
     <p:sldId id="284" r:id="rId30"/>
     <p:sldId id="285" r:id="rId31"/>
+    <p:sldId id="286" r:id="rId32"/>
   </p:sldIdLst>
   <p:sldSz cx="9144000" cy="5143500" type="screen16x9"/>
   <p:notesSz cx="6858000" cy="9144000"/>
@@ -3210,7 +3211,7 @@
             </a:pPr>
             <a:r>
               <a:rPr/>
-              <a:t>Trees, Forests, and Boosting</a:t>
+              <a:t>Trees, Forests, and Gradient Boosting</a:t>
             </a:r>
           </a:p>
         </p:txBody>
@@ -3240,7 +3241,7 @@
             </a:pPr>
             <a:r>
               <a:rPr/>
-              <a:t>Session 07 · Flexible prediction, and the importance measures that mislead you</a:t>
+              <a:t>Session 07 · Lecture, first half</a:t>
             </a:r>
             <a:br/>
             <a:br/>
@@ -3271,7 +3272,7 @@
             </a:pPr>
             <a:r>
               <a:rPr/>
-              <a:t>19 August 2026</a:t>
+              <a:t>20 August 2026</a:t>
             </a:r>
           </a:p>
         </p:txBody>
@@ -3323,7 +3324,7 @@
             </a:pPr>
             <a:r>
               <a:rPr/>
-              <a:t>Forests</a:t>
+              <a:t>7.2 Cost-complexity pruning</a:t>
             </a:r>
           </a:p>
         </p:txBody>
@@ -3370,7 +3371,7 @@
             </a:pPr>
             <a:r>
               <a:rPr/>
-              <a:t>Bagging</a:t>
+              <a:t>Grow, then cut back</a:t>
             </a:r>
           </a:p>
         </p:txBody>
@@ -3397,18 +3398,27 @@
                 </a:pPr>
                 <a:r>
                   <a:rPr/>
-                  <a:t>Fit </a:t>
+                  <a:t>Grow a large tree </a:t>
                 </a:r>
                 <a14:m>
                   <m:oMath xmlns:m="http://schemas.openxmlformats.org/officeDocument/2006/math">
-                    <m:r>
-                      <m:t>B</m:t>
-                    </m:r>
+                    <m:sSub>
+                      <m:e>
+                        <m:r>
+                          <m:t>T</m:t>
+                        </m:r>
+                      </m:e>
+                      <m:sub>
+                        <m:r>
+                          <m:t>0</m:t>
+                        </m:r>
+                      </m:sub>
+                    </m:sSub>
                   </m:oMath>
                 </a14:m>
                 <a:r>
                   <a:rPr/>
-                  <a:t> trees on bootstrap resamples, average the predictions.</a:t>
+                  <a:t>, then choose a subtree minimising</a:t>
                 </a:r>
               </a:p>
               <a:p>
@@ -3423,24 +3433,13 @@
                     <m:oMath>
                       <m:sSub>
                         <m:e>
-                          <m:acc>
-                            <m:accPr>
-                              <m:chr m:val="̂"/>
-                            </m:accPr>
-                            <m:e>
-                              <m:r>
-                                <m:t>f</m:t>
-                              </m:r>
-                            </m:e>
-                          </m:acc>
+                          <m:r>
+                            <m:t>C</m:t>
+                          </m:r>
                         </m:e>
                         <m:sub>
                           <m:r>
-                            <m:rPr>
-                              <m:nor/>
-                              <m:sty m:val="p"/>
-                            </m:rPr>
-                            <m:t>bag</m:t>
+                            <m:t>γ</m:t>
                           </m:r>
                         </m:sub>
                       </m:sSub>
@@ -3453,7 +3452,7 @@
                         </m:dPr>
                         <m:e>
                           <m:r>
-                            <m:t>x</m:t>
+                            <m:t>T</m:t>
                           </m:r>
                         </m:e>
                       </m:d>
@@ -3463,21 +3462,6 @@
                         </m:rPr>
                         <m:t>=</m:t>
                       </m:r>
-                      <m:f>
-                        <m:fPr>
-                          <m:type m:val="bar"/>
-                        </m:fPr>
-                        <m:num>
-                          <m:r>
-                            <m:t>1</m:t>
-                          </m:r>
-                        </m:num>
-                        <m:den>
-                          <m:r>
-                            <m:t>B</m:t>
-                          </m:r>
-                        </m:den>
-                      </m:f>
                       <m:nary>
                         <m:naryPr>
                           <m:chr m:val="∑"/>
@@ -3487,7 +3471,7 @@
                         </m:naryPr>
                         <m:sub>
                           <m:r>
-                            <m:t>b</m:t>
+                            <m:t>m</m:t>
                           </m:r>
                           <m:r>
                             <m:rPr>
@@ -3500,131 +3484,151 @@
                           </m:r>
                         </m:sub>
                         <m:sup>
-                          <m:r>
-                            <m:t>B</m:t>
-                          </m:r>
+                          <m:d>
+                            <m:dPr>
+                              <m:begChr m:val="|"/>
+                              <m:sepChr m:val=""/>
+                              <m:endChr m:val="|"/>
+                              <m:grow/>
+                            </m:dPr>
+                            <m:e>
+                              <m:r>
+                                <m:t>T</m:t>
+                              </m:r>
+                            </m:e>
+                          </m:d>
                         </m:sup>
                         <m:e>
-                          <m:sSup>
-                            <m:e>
-                              <m:acc>
-                                <m:accPr>
-                                  <m:chr m:val="̂"/>
-                                </m:accPr>
+                          <m:nary>
+                            <m:naryPr>
+                              <m:chr m:val="∑"/>
+                              <m:limLoc m:val="undOvr"/>
+                              <m:subHide m:val="off"/>
+                              <m:supHide m:val="on"/>
+                            </m:naryPr>
+                            <m:sub>
+                              <m:sSub>
                                 <m:e>
                                   <m:r>
-                                    <m:t>f</m:t>
+                                    <m:t>x</m:t>
                                   </m:r>
                                 </m:e>
-                              </m:acc>
-                            </m:e>
-                            <m:sup>
+                                <m:sub>
+                                  <m:r>
+                                    <m:t>i</m:t>
+                                  </m:r>
+                                </m:sub>
+                              </m:sSub>
                               <m:r>
                                 <m:rPr>
                                   <m:sty m:val="p"/>
                                 </m:rPr>
-                                <m:t>*</m:t>
+                                <m:t>∈</m:t>
                               </m:r>
+                              <m:sSub>
+                                <m:e>
+                                  <m:r>
+                                    <m:t>R</m:t>
+                                  </m:r>
+                                </m:e>
+                                <m:sub>
+                                  <m:r>
+                                    <m:t>m</m:t>
+                                  </m:r>
+                                </m:sub>
+                              </m:sSub>
+                            </m:sub>
+                            <m:sup>
                               <m:r>
-                                <m:t>b</m:t>
+                                <m:t>​</m:t>
                               </m:r>
                             </m:sup>
-                          </m:sSup>
+                            <m:e>
+                              <m:sSup>
+                                <m:e>
+                                  <m:d>
+                                    <m:dPr>
+                                      <m:begChr m:val="("/>
+                                      <m:sepChr m:val=""/>
+                                      <m:endChr m:val=")"/>
+                                      <m:grow/>
+                                    </m:dPr>
+                                    <m:e>
+                                      <m:sSub>
+                                        <m:e>
+                                          <m:r>
+                                            <m:t>y</m:t>
+                                          </m:r>
+                                        </m:e>
+                                        <m:sub>
+                                          <m:r>
+                                            <m:t>i</m:t>
+                                          </m:r>
+                                        </m:sub>
+                                      </m:sSub>
+                                      <m:r>
+                                        <m:rPr>
+                                          <m:sty m:val="p"/>
+                                        </m:rPr>
+                                        <m:t>−</m:t>
+                                      </m:r>
+                                      <m:sSub>
+                                        <m:e>
+                                          <m:acc>
+                                            <m:accPr>
+                                              <m:chr m:val="̂"/>
+                                            </m:accPr>
+                                            <m:e>
+                                              <m:r>
+                                                <m:t>c</m:t>
+                                              </m:r>
+                                            </m:e>
+                                          </m:acc>
+                                        </m:e>
+                                        <m:sub>
+                                          <m:r>
+                                            <m:t>m</m:t>
+                                          </m:r>
+                                        </m:sub>
+                                      </m:sSub>
+                                    </m:e>
+                                  </m:d>
+                                </m:e>
+                                <m:sup>
+                                  <m:r>
+                                    <m:t>2</m:t>
+                                  </m:r>
+                                </m:sup>
+                              </m:sSup>
+                            </m:e>
+                          </m:nary>
                         </m:e>
                       </m:nary>
+                      <m:r>
+                        <m:rPr>
+                          <m:sty m:val="p"/>
+                        </m:rPr>
+                        <m:t>+</m:t>
+                      </m:r>
+                      <m:r>
+                        <m:t>γ</m:t>
+                      </m:r>
                       <m:d>
                         <m:dPr>
-                          <m:begChr m:val="("/>
+                          <m:begChr m:val="|"/>
                           <m:sepChr m:val=""/>
-                          <m:endChr m:val=")"/>
+                          <m:endChr m:val="|"/>
                           <m:grow/>
                         </m:dPr>
                         <m:e>
                           <m:r>
-                            <m:t>x</m:t>
+                            <m:t>T</m:t>
                           </m:r>
                         </m:e>
                       </m:d>
                     </m:oMath>
                   </m:oMathPara>
                 </a14:m>
-              </a:p>
-              <a:p>
-                <a:pPr lvl="0" indent="0" marL="0">
-                  <a:buNone/>
-                </a:pPr>
-                <a:r>
-                  <a:rPr/>
-                  <a:t>Averaging </a:t>
-                </a:r>
-                <a14:m>
-                  <m:oMath xmlns:m="http://schemas.openxmlformats.org/officeDocument/2006/math">
-                    <m:r>
-                      <m:t>B</m:t>
-                    </m:r>
-                  </m:oMath>
-                </a14:m>
-                <a:r>
-                  <a:rPr/>
-                  <a:t> iid quantities with variance </a:t>
-                </a:r>
-                <a14:m>
-                  <m:oMath xmlns:m="http://schemas.openxmlformats.org/officeDocument/2006/math">
-                    <m:sSup>
-                      <m:e>
-                        <m:r>
-                          <m:t>σ</m:t>
-                        </m:r>
-                      </m:e>
-                      <m:sup>
-                        <m:r>
-                          <m:t>2</m:t>
-                        </m:r>
-                      </m:sup>
-                    </m:sSup>
-                  </m:oMath>
-                </a14:m>
-                <a:r>
-                  <a:rPr/>
-                  <a:t> gives variance </a:t>
-                </a:r>
-                <a14:m>
-                  <m:oMath xmlns:m="http://schemas.openxmlformats.org/officeDocument/2006/math">
-                    <m:sSup>
-                      <m:e>
-                        <m:r>
-                          <m:t>σ</m:t>
-                        </m:r>
-                      </m:e>
-                      <m:sup>
-                        <m:r>
-                          <m:t>2</m:t>
-                        </m:r>
-                      </m:sup>
-                    </m:sSup>
-                    <m:r>
-                      <m:rPr>
-                        <m:sty m:val="p"/>
-                      </m:rPr>
-                      <m:t>/</m:t>
-                    </m:r>
-                    <m:r>
-                      <m:t>B</m:t>
-                    </m:r>
-                  </m:oMath>
-                </a14:m>
-                <a:r>
-                  <a:rPr/>
-                  <a:t> — but the trees are </a:t>
-                </a:r>
-                <a:r>
-                  <a:rPr b="1"/>
-                  <a:t>not</a:t>
-                </a:r>
-                <a:r>
-                  <a:rPr/>
-                  <a:t> independent, and that is the catch.</a:t>
-                </a:r>
               </a:p>
             </p:txBody>
           </p:sp>
@@ -3672,7 +3676,7 @@
             </a:pPr>
             <a:r>
               <a:rPr/>
-              <a:t>The random forest trick</a:t>
+              <a:t>Weakest-link pruning</a:t>
             </a:r>
           </a:p>
         </p:txBody>
@@ -3699,18 +3703,26 @@
                 </a:pPr>
                 <a:r>
                   <a:rPr/>
-                  <a:t>At each split, consider only a random subset of </a:t>
+                  <a:t>As </a:t>
                 </a:r>
                 <a14:m>
                   <m:oMath xmlns:m="http://schemas.openxmlformats.org/officeDocument/2006/math">
                     <m:r>
-                      <m:t>m</m:t>
+                      <m:t>γ</m:t>
                     </m:r>
                   </m:oMath>
                 </a14:m>
                 <a:r>
                   <a:rPr/>
-                  <a:t> predictors.</a:t>
+                  <a:t> increases from 0, the sequence of optimal subtrees is </a:t>
+                </a:r>
+                <a:r>
+                  <a:rPr b="1"/>
+                  <a:t>nested</a:t>
+                </a:r>
+                <a:r>
+                  <a:rPr/>
+                  <a:t>, obtained by successively collapsing the internal node with the smallest per-leaf increase in error.</a:t>
                 </a:r>
               </a:p>
               <a:p>
@@ -3719,15 +3731,37 @@
                 </a:pPr>
                 <a:r>
                   <a:rPr/>
-                  <a:t>This </a:t>
+                  <a:t>That gives a </a:t>
                 </a:r>
                 <a:r>
                   <a:rPr b="1"/>
-                  <a:t>decorrelates</a:t>
+                  <a:t>one-dimensional family</a:t>
                 </a:r>
                 <a:r>
                   <a:rPr/>
-                  <a:t> the trees. If one predictor dominates, every bagged tree splits on it first and they all look alike; forcing the algorithm to sometimes ignore it produces genuinely different trees, so averaging helps more.</a:t>
+                  <a:t> indexed by </a:t>
+                </a:r>
+                <a14:m>
+                  <m:oMath xmlns:m="http://schemas.openxmlformats.org/officeDocument/2006/math">
+                    <m:r>
+                      <m:t>γ</m:t>
+                    </m:r>
+                  </m:oMath>
+                </a14:m>
+                <a:r>
+                  <a:rPr/>
+                  <a:t> — selected by cross-validation, exactly as we selected </a:t>
+                </a:r>
+                <a14:m>
+                  <m:oMath xmlns:m="http://schemas.openxmlformats.org/officeDocument/2006/math">
+                    <m:r>
+                      <m:t>λ</m:t>
+                    </m:r>
+                  </m:oMath>
+                </a14:m>
+                <a:r>
+                  <a:rPr/>
+                  <a:t> in Session 05.</a:t>
                 </a:r>
               </a:p>
               <a:p>
@@ -3736,7 +3770,185 @@
                 </a:pPr>
                 <a:r>
                   <a:rPr/>
-                  <a:t>For correlated averages, variance falls to</a:t>
+                  <a:t>The structural parallel is worth noticing: </a:t>
+                </a:r>
+                <a:r>
+                  <a:rPr i="1"/>
+                  <a:t>every</a:t>
+                </a:r>
+                <a:r>
+                  <a:rPr/>
+                  <a:t> method in this course has a complexity dial and a CV procedure for setting it.</a:t>
+                </a:r>
+              </a:p>
+            </p:txBody>
+          </p:sp>
+        </mc:Choice>
+      </mc:AlternateContent>
+    </p:spTree>
+  </p:cSld>
+</p:sld>
+</file>
+
+<file path=ppt/slides/slide13.xml><?xml version="1.0" encoding="utf-8"?>
+<p:sld xmlns:a="http://schemas.openxmlformats.org/drawingml/2006/main" xmlns:r="http://schemas.openxmlformats.org/officeDocument/2006/relationships" xmlns:p="http://schemas.openxmlformats.org/presentationml/2006/main">
+  <p:cSld>
+    <p:spTree>
+      <p:nvGrpSpPr>
+        <p:cNvPr id="1" name=""/>
+        <p:cNvGrpSpPr/>
+        <p:nvPr/>
+      </p:nvGrpSpPr>
+      <p:grpSpPr>
+        <a:xfrm>
+          <a:off x="0" y="0"/>
+          <a:ext cx="0" cy="0"/>
+          <a:chOff x="0" y="0"/>
+          <a:chExt cx="0" cy="0"/>
+        </a:xfrm>
+      </p:grpSpPr>
+      <p:sp>
+        <p:nvSpPr>
+          <p:cNvPr id="2" name="Title 1"/>
+          <p:cNvSpPr>
+            <a:spLocks noGrp="1"/>
+          </p:cNvSpPr>
+          <p:nvPr>
+            <p:ph type="title"/>
+          </p:nvPr>
+        </p:nvSpPr>
+        <p:spPr>
+          <a:xfrm>
+            <a:off x="722313" y="3305176"/>
+            <a:ext cx="7772400" cy="1021556"/>
+          </a:xfrm>
+        </p:spPr>
+        <p:txBody>
+          <a:bodyPr/>
+          <a:lstStyle/>
+          <a:p>
+            <a:pPr lvl="0" indent="0" marL="0">
+              <a:buNone/>
+            </a:pPr>
+            <a:r>
+              <a:rPr/>
+              <a:t>7.3 Bagging</a:t>
+            </a:r>
+          </a:p>
+        </p:txBody>
+      </p:sp>
+    </p:spTree>
+  </p:cSld>
+</p:sld>
+</file>
+
+<file path=ppt/slides/slide14.xml><?xml version="1.0" encoding="utf-8"?>
+<p:sld xmlns:a="http://schemas.openxmlformats.org/drawingml/2006/main" xmlns:r="http://schemas.openxmlformats.org/officeDocument/2006/relationships" xmlns:p="http://schemas.openxmlformats.org/presentationml/2006/main">
+  <p:cSld>
+    <p:spTree>
+      <p:nvGrpSpPr>
+        <p:cNvPr id="1" name=""/>
+        <p:cNvGrpSpPr/>
+        <p:nvPr/>
+      </p:nvGrpSpPr>
+      <p:grpSpPr>
+        <a:xfrm>
+          <a:off x="0" y="0"/>
+          <a:ext cx="0" cy="0"/>
+          <a:chOff x="0" y="0"/>
+          <a:chExt cx="0" cy="0"/>
+        </a:xfrm>
+      </p:grpSpPr>
+      <p:sp>
+        <p:nvSpPr>
+          <p:cNvPr id="2" name="Title 1"/>
+          <p:cNvSpPr>
+            <a:spLocks noGrp="1"/>
+          </p:cNvSpPr>
+          <p:nvPr>
+            <p:ph type="title"/>
+          </p:nvPr>
+        </p:nvSpPr>
+        <p:spPr/>
+        <p:txBody>
+          <a:bodyPr/>
+          <a:lstStyle/>
+          <a:p>
+            <a:pPr lvl="0" indent="0" marL="0">
+              <a:buNone/>
+            </a:pPr>
+            <a:r>
+              <a:rPr/>
+              <a:t>The variance argument</a:t>
+            </a:r>
+          </a:p>
+        </p:txBody>
+      </p:sp>
+      <mc:AlternateContent xmlns:mc="http://schemas.openxmlformats.org/markup-compatibility/2006">
+        <mc:Choice xmlns:a14="http://schemas.microsoft.com/office/drawing/2010/main" Requires="a14">
+          <p:sp>
+            <p:nvSpPr>
+              <p:cNvPr id="3" name="Content Placeholder 2"/>
+              <p:cNvSpPr>
+                <a:spLocks noGrp="1"/>
+              </p:cNvSpPr>
+              <p:nvPr>
+                <p:ph idx="1"/>
+              </p:nvPr>
+            </p:nvSpPr>
+            <p:spPr/>
+            <p:txBody>
+              <a:bodyPr/>
+              <a:lstStyle/>
+              <a:p>
+                <a:pPr lvl="0" indent="0" marL="0">
+                  <a:buNone/>
+                </a:pPr>
+                <a:r>
+                  <a:rPr/>
+                  <a:t>Average </a:t>
+                </a:r>
+                <a14:m>
+                  <m:oMath xmlns:m="http://schemas.openxmlformats.org/officeDocument/2006/math">
+                    <m:r>
+                      <m:t>B</m:t>
+                    </m:r>
+                  </m:oMath>
+                </a14:m>
+                <a:r>
+                  <a:rPr/>
+                  <a:t> trees fitted on bootstrap samples. If each has variance </a:t>
+                </a:r>
+                <a14:m>
+                  <m:oMath xmlns:m="http://schemas.openxmlformats.org/officeDocument/2006/math">
+                    <m:sSup>
+                      <m:e>
+                        <m:r>
+                          <m:t>σ</m:t>
+                        </m:r>
+                      </m:e>
+                      <m:sup>
+                        <m:r>
+                          <m:t>2</m:t>
+                        </m:r>
+                      </m:sup>
+                    </m:sSup>
+                  </m:oMath>
+                </a14:m>
+                <a:r>
+                  <a:rPr/>
+                  <a:t> and any two have correlation </a:t>
+                </a:r>
+                <a14:m>
+                  <m:oMath xmlns:m="http://schemas.openxmlformats.org/officeDocument/2006/math">
+                    <m:r>
+                      <m:t>ρ</m:t>
+                    </m:r>
+                  </m:oMath>
+                </a14:m>
+                <a:r>
+                  <a:rPr/>
+                  <a:t>:</a:t>
                 </a:r>
               </a:p>
               <a:p>
@@ -3749,6 +3961,82 @@
                       <m:jc m:val="center"/>
                     </m:oMathParaPr>
                     <m:oMath>
+                      <m:r>
+                        <m:rPr>
+                          <m:sty m:val="p"/>
+                        </m:rPr>
+                        <m:t>Var</m:t>
+                      </m:r>
+                      <m:d>
+                        <m:dPr>
+                          <m:begChr m:val="("/>
+                          <m:sepChr m:val=""/>
+                          <m:endChr m:val=")"/>
+                          <m:grow/>
+                        </m:dPr>
+                        <m:e>
+                          <m:f>
+                            <m:fPr>
+                              <m:type m:val="bar"/>
+                            </m:fPr>
+                            <m:num>
+                              <m:r>
+                                <m:t>1</m:t>
+                              </m:r>
+                            </m:num>
+                            <m:den>
+                              <m:r>
+                                <m:t>B</m:t>
+                              </m:r>
+                            </m:den>
+                          </m:f>
+                          <m:nary>
+                            <m:naryPr>
+                              <m:chr m:val="∑"/>
+                              <m:limLoc m:val="undOvr"/>
+                              <m:subHide m:val="off"/>
+                              <m:supHide m:val="on"/>
+                            </m:naryPr>
+                            <m:sub>
+                              <m:r>
+                                <m:t>b</m:t>
+                              </m:r>
+                            </m:sub>
+                            <m:sup>
+                              <m:r>
+                                <m:t>​</m:t>
+                              </m:r>
+                            </m:sup>
+                            <m:e>
+                              <m:sSub>
+                                <m:e>
+                                  <m:acc>
+                                    <m:accPr>
+                                      <m:chr m:val="̂"/>
+                                    </m:accPr>
+                                    <m:e>
+                                      <m:r>
+                                        <m:t>f</m:t>
+                                      </m:r>
+                                    </m:e>
+                                  </m:acc>
+                                </m:e>
+                                <m:sub>
+                                  <m:r>
+                                    <m:t>b</m:t>
+                                  </m:r>
+                                </m:sub>
+                              </m:sSub>
+                            </m:e>
+                          </m:nary>
+                        </m:e>
+                      </m:d>
+                      <m:r>
+                        <m:rPr>
+                          <m:sty m:val="p"/>
+                        </m:rPr>
+                        <m:t>=</m:t>
+                      </m:r>
                       <m:r>
                         <m:t>ρ</m:t>
                       </m:r>
@@ -3806,178 +4094,71 @@
                           </m:r>
                         </m:sup>
                       </m:sSup>
+                      <m:r>
+                        <m:t> </m:t>
+                      </m:r>
+                      <m:limLow>
+                        <m:e>
+                          <m:limUpp>
+                            <m:e>
+                              <m:r>
+                                <m:rPr>
+                                  <m:sty m:val="p"/>
+                                </m:rPr>
+                                <m:t>→</m:t>
+                              </m:r>
+                            </m:e>
+                            <m:lim>
+                              <m:r>
+                                <m:t>​</m:t>
+                              </m:r>
+                            </m:lim>
+                          </m:limUpp>
+                        </m:e>
+                        <m:lim>
+                          <m:r>
+                            <m:t>B</m:t>
+                          </m:r>
+                          <m:r>
+                            <m:rPr>
+                              <m:sty m:val="p"/>
+                            </m:rPr>
+                            <m:t>→</m:t>
+                          </m:r>
+                          <m:r>
+                            <m:rPr>
+                              <m:sty m:val="p"/>
+                            </m:rPr>
+                            <m:t>∞</m:t>
+                          </m:r>
+                        </m:lim>
+                      </m:limLow>
+                      <m:r>
+                        <m:t> </m:t>
+                      </m:r>
+                      <m:r>
+                        <m:t>ρ</m:t>
+                      </m:r>
+                      <m:sSup>
+                        <m:e>
+                          <m:r>
+                            <m:t>σ</m:t>
+                          </m:r>
+                        </m:e>
+                        <m:sup>
+                          <m:r>
+                            <m:t>2</m:t>
+                          </m:r>
+                        </m:sup>
+                      </m:sSup>
                     </m:oMath>
                   </m:oMathPara>
                 </a14:m>
-              </a:p>
-              <a:p>
-                <a:pPr lvl="0" indent="0" marL="0">
-                  <a:buNone/>
-                </a:pPr>
-                <a:r>
-                  <a:rPr/>
-                  <a:t>More trees drive the second term to zero. Only decorrelation touches the first.</a:t>
-                </a:r>
               </a:p>
             </p:txBody>
           </p:sp>
         </mc:Choice>
       </mc:AlternateContent>
-    </p:spTree>
-  </p:cSld>
-</p:sld>
-</file>
-
-<file path=ppt/slides/slide13.xml><?xml version="1.0" encoding="utf-8"?>
-<p:sld xmlns:a="http://schemas.openxmlformats.org/drawingml/2006/main" xmlns:r="http://schemas.openxmlformats.org/officeDocument/2006/relationships" xmlns:p="http://schemas.openxmlformats.org/presentationml/2006/main">
-  <p:cSld>
-    <p:spTree>
-      <p:nvGrpSpPr>
-        <p:cNvPr id="1" name=""/>
-        <p:cNvGrpSpPr/>
-        <p:nvPr/>
-      </p:nvGrpSpPr>
-      <p:grpSpPr>
-        <a:xfrm>
-          <a:off x="0" y="0"/>
-          <a:ext cx="0" cy="0"/>
-          <a:chOff x="0" y="0"/>
-          <a:chExt cx="0" cy="0"/>
-        </a:xfrm>
-      </p:grpSpPr>
-      <p:sp>
-        <p:nvSpPr>
-          <p:cNvPr id="2" name="Title 1"/>
-          <p:cNvSpPr>
-            <a:spLocks noGrp="1"/>
-          </p:cNvSpPr>
-          <p:nvPr>
-            <p:ph type="title"/>
-          </p:nvPr>
-        </p:nvSpPr>
-        <p:spPr/>
-        <p:txBody>
-          <a:bodyPr/>
-          <a:lstStyle/>
-          <a:p>
-            <a:pPr lvl="0" indent="0" marL="0">
-              <a:buNone/>
-            </a:pPr>
-            <a:r>
-              <a:rPr/>
-              <a:t>Out-of-bag error</a:t>
-            </a:r>
-          </a:p>
-        </p:txBody>
-      </p:sp>
-      <p:sp>
-        <p:nvSpPr>
-          <p:cNvPr id="3" name="Content Placeholder 2"/>
-          <p:cNvSpPr>
-            <a:spLocks noGrp="1"/>
-          </p:cNvSpPr>
-          <p:nvPr>
-            <p:ph idx="1"/>
-          </p:nvPr>
-        </p:nvSpPr>
-        <p:spPr/>
-        <p:txBody>
-          <a:bodyPr/>
-          <a:lstStyle/>
-          <a:p>
-            <a:pPr lvl="0" indent="0" marL="0">
-              <a:buNone/>
-            </a:pPr>
-            <a:r>
-              <a:rPr/>
-              <a:t>Each tree omits about 37% of the data. Predict each observation using only the trees that never saw it.</a:t>
-            </a:r>
-          </a:p>
-          <a:p>
-            <a:pPr lvl="0"/>
-            <a:r>
-              <a:rPr/>
-              <a:t>A validation estimate for free</a:t>
-            </a:r>
-          </a:p>
-          <a:p>
-            <a:pPr lvl="0"/>
-            <a:r>
-              <a:rPr/>
-              <a:t>Roughly comparable to leave-one-out CV</a:t>
-            </a:r>
-          </a:p>
-          <a:p>
-            <a:pPr lvl="0" indent="0" marL="0">
-              <a:buNone/>
-            </a:pPr>
-            <a:r>
-              <a:rPr/>
-              <a:t>On </a:t>
-            </a:r>
-            <a:r>
-              <a:rPr b="1"/>
-              <a:t>this</a:t>
-            </a:r>
-            <a:r>
-              <a:rPr/>
-              <a:t> panel, OOB is still optimistic: the omitted rows include other years of the same country. Group-aware CV remains the honest number.</a:t>
-            </a:r>
-          </a:p>
-        </p:txBody>
-      </p:sp>
-    </p:spTree>
-  </p:cSld>
-</p:sld>
-</file>
-
-<file path=ppt/slides/slide14.xml><?xml version="1.0" encoding="utf-8"?>
-<p:sld xmlns:a="http://schemas.openxmlformats.org/drawingml/2006/main" xmlns:r="http://schemas.openxmlformats.org/officeDocument/2006/relationships" xmlns:p="http://schemas.openxmlformats.org/presentationml/2006/main">
-  <p:cSld>
-    <p:spTree>
-      <p:nvGrpSpPr>
-        <p:cNvPr id="1" name=""/>
-        <p:cNvGrpSpPr/>
-        <p:nvPr/>
-      </p:nvGrpSpPr>
-      <p:grpSpPr>
-        <a:xfrm>
-          <a:off x="0" y="0"/>
-          <a:ext cx="0" cy="0"/>
-          <a:chOff x="0" y="0"/>
-          <a:chExt cx="0" cy="0"/>
-        </a:xfrm>
-      </p:grpSpPr>
-      <p:sp>
-        <p:nvSpPr>
-          <p:cNvPr id="2" name="Title 1"/>
-          <p:cNvSpPr>
-            <a:spLocks noGrp="1"/>
-          </p:cNvSpPr>
-          <p:nvPr>
-            <p:ph type="title"/>
-          </p:nvPr>
-        </p:nvSpPr>
-        <p:spPr>
-          <a:xfrm>
-            <a:off x="722313" y="3305176"/>
-            <a:ext cx="7772400" cy="1021556"/>
-          </a:xfrm>
-        </p:spPr>
-        <p:txBody>
-          <a:bodyPr/>
-          <a:lstStyle/>
-          <a:p>
-            <a:pPr lvl="0" indent="0" marL="0">
-              <a:buNone/>
-            </a:pPr>
-            <a:r>
-              <a:rPr/>
-              <a:t>Boosting</a:t>
-            </a:r>
-          </a:p>
-        </p:txBody>
-      </p:sp>
     </p:spTree>
   </p:cSld>
 </p:sld>
@@ -4020,7 +4201,7 @@
             </a:pPr>
             <a:r>
               <a:rPr/>
-              <a:t>Fit the residual, slowly</a:t>
+              <a:t>Read that limit</a:t>
             </a:r>
           </a:p>
         </p:txBody>
@@ -4045,6 +4226,904 @@
                 <a:pPr lvl="0" indent="0" marL="0">
                   <a:buNone/>
                 </a:pPr>
+                <a:r>
+                  <a:rPr/>
+                  <a:t>Increasing </a:t>
+                </a:r>
+                <a14:m>
+                  <m:oMath xmlns:m="http://schemas.openxmlformats.org/officeDocument/2006/math">
+                    <m:r>
+                      <m:t>B</m:t>
+                    </m:r>
+                  </m:oMath>
+                </a14:m>
+                <a:r>
+                  <a:rPr/>
+                  <a:t> kills the second term but leaves </a:t>
+                </a:r>
+                <a14:m>
+                  <m:oMath xmlns:m="http://schemas.openxmlformats.org/officeDocument/2006/math">
+                    <m:r>
+                      <m:t>ρ</m:t>
+                    </m:r>
+                    <m:sSup>
+                      <m:e>
+                        <m:r>
+                          <m:t>σ</m:t>
+                        </m:r>
+                      </m:e>
+                      <m:sup>
+                        <m:r>
+                          <m:t>2</m:t>
+                        </m:r>
+                      </m:sup>
+                    </m:sSup>
+                  </m:oMath>
+                </a14:m>
+                <a:r>
+                  <a:rPr/>
+                  <a:t> </a:t>
+                </a:r>
+                <a:r>
+                  <a:rPr b="1"/>
+                  <a:t>untouched</a:t>
+                </a:r>
+                <a:r>
+                  <a:rPr/>
+                  <a:t>.</a:t>
+                </a:r>
+              </a:p>
+              <a:p>
+                <a:pPr lvl="0" indent="0" marL="0">
+                  <a:buNone/>
+                </a:pPr>
+                <a:r>
+                  <a:rPr b="1"/>
+                  <a:t>This is the entire motivation for random forests.</a:t>
+                </a:r>
+              </a:p>
+              <a:p>
+                <a:pPr lvl="0" indent="0" marL="0">
+                  <a:buNone/>
+                </a:pPr>
+                <a:r>
+                  <a:rPr/>
+                  <a:t>If one predictor is strongly dominant, every bagged tree splits on it first and the trees are nearly identical: </a:t>
+                </a:r>
+                <a14:m>
+                  <m:oMath xmlns:m="http://schemas.openxmlformats.org/officeDocument/2006/math">
+                    <m:r>
+                      <m:t>ρ</m:t>
+                    </m:r>
+                    <m:r>
+                      <m:rPr>
+                        <m:sty m:val="p"/>
+                      </m:rPr>
+                      <m:t>≈</m:t>
+                    </m:r>
+                    <m:r>
+                      <m:t>1</m:t>
+                    </m:r>
+                  </m:oMath>
+                </a14:m>
+                <a:r>
+                  <a:rPr/>
+                  <a:t>, and bagging buys almost nothing.</a:t>
+                </a:r>
+              </a:p>
+            </p:txBody>
+          </p:sp>
+        </mc:Choice>
+      </mc:AlternateContent>
+    </p:spTree>
+  </p:cSld>
+</p:sld>
+</file>
+
+<file path=ppt/slides/slide16.xml><?xml version="1.0" encoding="utf-8"?>
+<p:sld xmlns:a="http://schemas.openxmlformats.org/drawingml/2006/main" xmlns:r="http://schemas.openxmlformats.org/officeDocument/2006/relationships" xmlns:p="http://schemas.openxmlformats.org/presentationml/2006/main">
+  <p:cSld>
+    <p:spTree>
+      <p:nvGrpSpPr>
+        <p:cNvPr id="1" name=""/>
+        <p:cNvGrpSpPr/>
+        <p:nvPr/>
+      </p:nvGrpSpPr>
+      <p:grpSpPr>
+        <a:xfrm>
+          <a:off x="0" y="0"/>
+          <a:ext cx="0" cy="0"/>
+          <a:chOff x="0" y="0"/>
+          <a:chExt cx="0" cy="0"/>
+        </a:xfrm>
+      </p:grpSpPr>
+      <p:sp>
+        <p:nvSpPr>
+          <p:cNvPr id="2" name="Title 1"/>
+          <p:cNvSpPr>
+            <a:spLocks noGrp="1"/>
+          </p:cNvSpPr>
+          <p:nvPr>
+            <p:ph type="title"/>
+          </p:nvPr>
+        </p:nvSpPr>
+        <p:spPr/>
+        <p:txBody>
+          <a:bodyPr/>
+          <a:lstStyle/>
+          <a:p>
+            <a:pPr lvl="0" indent="0" marL="0">
+              <a:buNone/>
+            </a:pPr>
+            <a:r>
+              <a:rPr/>
+              <a:t>Random forests decorrelate</a:t>
+            </a:r>
+          </a:p>
+        </p:txBody>
+      </p:sp>
+      <mc:AlternateContent xmlns:mc="http://schemas.openxmlformats.org/markup-compatibility/2006">
+        <mc:Choice xmlns:a14="http://schemas.microsoft.com/office/drawing/2010/main" Requires="a14">
+          <p:sp>
+            <p:nvSpPr>
+              <p:cNvPr id="3" name="Content Placeholder 2"/>
+              <p:cNvSpPr>
+                <a:spLocks noGrp="1"/>
+              </p:cNvSpPr>
+              <p:nvPr>
+                <p:ph idx="1"/>
+              </p:nvPr>
+            </p:nvSpPr>
+            <p:spPr/>
+            <p:txBody>
+              <a:bodyPr/>
+              <a:lstStyle/>
+              <a:p>
+                <a:pPr lvl="0" indent="0" marL="0">
+                  <a:buNone/>
+                </a:pPr>
+                <a:r>
+                  <a:rPr/>
+                  <a:t>Restrict each split to a random subset of </a:t>
+                </a:r>
+                <a14:m>
+                  <m:oMath xmlns:m="http://schemas.openxmlformats.org/officeDocument/2006/math">
+                    <m:r>
+                      <m:t>m</m:t>
+                    </m:r>
+                  </m:oMath>
+                </a14:m>
+                <a:r>
+                  <a:rPr/>
+                  <a:t> features.</a:t>
+                </a:r>
+              </a:p>
+              <a:p>
+                <a:pPr lvl="0"/>
+                <a14:m>
+                  <m:oMath xmlns:m="http://schemas.openxmlformats.org/officeDocument/2006/math">
+                    <m:r>
+                      <m:t>m</m:t>
+                    </m:r>
+                    <m:r>
+                      <m:rPr>
+                        <m:sty m:val="p"/>
+                      </m:rPr>
+                      <m:t>=</m:t>
+                    </m:r>
+                    <m:r>
+                      <m:rPr>
+                        <m:sty m:val="p"/>
+                      </m:rPr>
+                      <m:t>⌊</m:t>
+                    </m:r>
+                    <m:rad>
+                      <m:radPr>
+                        <m:degHide m:val="on"/>
+                      </m:radPr>
+                      <m:deg/>
+                      <m:e>
+                        <m:r>
+                          <m:t>p</m:t>
+                        </m:r>
+                      </m:e>
+                    </m:rad>
+                    <m:r>
+                      <m:rPr>
+                        <m:sty m:val="p"/>
+                      </m:rPr>
+                      <m:t>⌋</m:t>
+                    </m:r>
+                  </m:oMath>
+                </a14:m>
+                <a:r>
+                  <a:rPr/>
+                  <a:t> for classification</a:t>
+                </a:r>
+              </a:p>
+              <a:p>
+                <a:pPr lvl="0"/>
+                <a14:m>
+                  <m:oMath xmlns:m="http://schemas.openxmlformats.org/officeDocument/2006/math">
+                    <m:r>
+                      <m:t>m</m:t>
+                    </m:r>
+                    <m:r>
+                      <m:rPr>
+                        <m:sty m:val="p"/>
+                      </m:rPr>
+                      <m:t>=</m:t>
+                    </m:r>
+                    <m:r>
+                      <m:rPr>
+                        <m:sty m:val="p"/>
+                      </m:rPr>
+                      <m:t>⌊</m:t>
+                    </m:r>
+                    <m:r>
+                      <m:t>p</m:t>
+                    </m:r>
+                    <m:r>
+                      <m:rPr>
+                        <m:sty m:val="p"/>
+                      </m:rPr>
+                      <m:t>/</m:t>
+                    </m:r>
+                    <m:r>
+                      <m:t>3</m:t>
+                    </m:r>
+                    <m:r>
+                      <m:rPr>
+                        <m:sty m:val="p"/>
+                      </m:rPr>
+                      <m:t>⌋</m:t>
+                    </m:r>
+                  </m:oMath>
+                </a14:m>
+                <a:r>
+                  <a:rPr/>
+                  <a:t> for regression</a:t>
+                </a:r>
+              </a:p>
+              <a:p>
+                <a:pPr lvl="0" indent="0" marL="0">
+                  <a:buNone/>
+                </a:pPr>
+                <a:r>
+                  <a:rPr/>
+                  <a:t>Lower </a:t>
+                </a:r>
+                <a14:m>
+                  <m:oMath xmlns:m="http://schemas.openxmlformats.org/officeDocument/2006/math">
+                    <m:r>
+                      <m:t>m</m:t>
+                    </m:r>
+                  </m:oMath>
+                </a14:m>
+                <a:r>
+                  <a:rPr/>
+                  <a:t> lowers </a:t>
+                </a:r>
+                <a14:m>
+                  <m:oMath xmlns:m="http://schemas.openxmlformats.org/officeDocument/2006/math">
+                    <m:r>
+                      <m:t>ρ</m:t>
+                    </m:r>
+                  </m:oMath>
+                </a14:m>
+                <a:r>
+                  <a:rPr/>
+                  <a:t> but </a:t>
+                </a:r>
+                <a:r>
+                  <a:rPr b="1"/>
+                  <a:t>raises individual-tree bias</a:t>
+                </a:r>
+                <a:r>
+                  <a:rPr/>
+                  <a:t> — a bias–variance tradeoff </a:t>
+                </a:r>
+                <a:r>
+                  <a:rPr i="1"/>
+                  <a:t>within</a:t>
+                </a:r>
+                <a:r>
+                  <a:rPr/>
+                  <a:t> the ensemble, tuned by CV.</a:t>
+                </a:r>
+              </a:p>
+            </p:txBody>
+          </p:sp>
+        </mc:Choice>
+      </mc:AlternateContent>
+    </p:spTree>
+  </p:cSld>
+</p:sld>
+</file>
+
+<file path=ppt/slides/slide17.xml><?xml version="1.0" encoding="utf-8"?>
+<p:sld xmlns:a="http://schemas.openxmlformats.org/drawingml/2006/main" xmlns:r="http://schemas.openxmlformats.org/officeDocument/2006/relationships" xmlns:p="http://schemas.openxmlformats.org/presentationml/2006/main">
+  <p:cSld>
+    <p:spTree>
+      <p:nvGrpSpPr>
+        <p:cNvPr id="1" name=""/>
+        <p:cNvGrpSpPr/>
+        <p:nvPr/>
+      </p:nvGrpSpPr>
+      <p:grpSpPr>
+        <a:xfrm>
+          <a:off x="0" y="0"/>
+          <a:ext cx="0" cy="0"/>
+          <a:chOff x="0" y="0"/>
+          <a:chExt cx="0" cy="0"/>
+        </a:xfrm>
+      </p:grpSpPr>
+      <p:sp>
+        <p:nvSpPr>
+          <p:cNvPr id="2" name="Title 1"/>
+          <p:cNvSpPr>
+            <a:spLocks noGrp="1"/>
+          </p:cNvSpPr>
+          <p:nvPr>
+            <p:ph type="title"/>
+          </p:nvPr>
+        </p:nvSpPr>
+        <p:spPr/>
+        <p:txBody>
+          <a:bodyPr/>
+          <a:lstStyle/>
+          <a:p>
+            <a:pPr lvl="0" indent="0" marL="0">
+              <a:buNone/>
+            </a:pPr>
+            <a:r>
+              <a:rPr/>
+              <a:t>Out-of-bag error, free</a:t>
+            </a:r>
+          </a:p>
+        </p:txBody>
+      </p:sp>
+      <mc:AlternateContent xmlns:mc="http://schemas.openxmlformats.org/markup-compatibility/2006">
+        <mc:Choice xmlns:a14="http://schemas.microsoft.com/office/drawing/2010/main" Requires="a14">
+          <p:sp>
+            <p:nvSpPr>
+              <p:cNvPr id="3" name="Content Placeholder 2"/>
+              <p:cNvSpPr>
+                <a:spLocks noGrp="1"/>
+              </p:cNvSpPr>
+              <p:nvPr>
+                <p:ph idx="1"/>
+              </p:nvPr>
+            </p:nvSpPr>
+            <p:spPr/>
+            <p:txBody>
+              <a:bodyPr/>
+              <a:lstStyle/>
+              <a:p>
+                <a:pPr lvl="0" indent="0" marL="0">
+                  <a:buNone/>
+                </a:pPr>
+                <a:r>
+                  <a:rPr/>
+                  <a:t>Each observation is out-of-bag for roughly</a:t>
+                </a:r>
+              </a:p>
+              <a:p>
+                <a:pPr lvl="0" indent="0" marL="0">
+                  <a:buNone/>
+                </a:pPr>
+                <a14:m>
+                  <m:oMathPara xmlns:m="http://schemas.openxmlformats.org/officeDocument/2006/math">
+                    <m:oMathParaPr>
+                      <m:jc m:val="center"/>
+                    </m:oMathParaPr>
+                    <m:oMath>
+                      <m:sSup>
+                        <m:e>
+                          <m:d>
+                            <m:dPr>
+                              <m:begChr m:val="("/>
+                              <m:sepChr m:val=""/>
+                              <m:endChr m:val=")"/>
+                              <m:grow/>
+                            </m:dPr>
+                            <m:e>
+                              <m:r>
+                                <m:t>1</m:t>
+                              </m:r>
+                              <m:r>
+                                <m:rPr>
+                                  <m:sty m:val="p"/>
+                                </m:rPr>
+                                <m:t>−</m:t>
+                              </m:r>
+                              <m:r>
+                                <m:t>1</m:t>
+                              </m:r>
+                              <m:r>
+                                <m:rPr>
+                                  <m:sty m:val="p"/>
+                                </m:rPr>
+                                <m:t>/</m:t>
+                              </m:r>
+                              <m:r>
+                                <m:t>n</m:t>
+                              </m:r>
+                            </m:e>
+                          </m:d>
+                        </m:e>
+                        <m:sup>
+                          <m:r>
+                            <m:t>n</m:t>
+                          </m:r>
+                        </m:sup>
+                      </m:sSup>
+                      <m:r>
+                        <m:rPr>
+                          <m:sty m:val="p"/>
+                        </m:rPr>
+                        <m:t>→</m:t>
+                      </m:r>
+                      <m:sSup>
+                        <m:e>
+                          <m:r>
+                            <m:t>e</m:t>
+                          </m:r>
+                        </m:e>
+                        <m:sup>
+                          <m:r>
+                            <m:rPr>
+                              <m:sty m:val="p"/>
+                            </m:rPr>
+                            <m:t>−</m:t>
+                          </m:r>
+                          <m:r>
+                            <m:t>1</m:t>
+                          </m:r>
+                        </m:sup>
+                      </m:sSup>
+                      <m:r>
+                        <m:rPr>
+                          <m:sty m:val="p"/>
+                        </m:rPr>
+                        <m:t>≈</m:t>
+                      </m:r>
+                      <m:r>
+                        <m:t>36.8</m:t>
+                      </m:r>
+                      <m:r>
+                        <m:rPr>
+                          <m:sty m:val="p"/>
+                        </m:rPr>
+                        <m:t>%</m:t>
+                      </m:r>
+                    </m:oMath>
+                  </m:oMathPara>
+                </a14:m>
+              </a:p>
+              <a:p>
+                <a:pPr lvl="0" indent="0" marL="0">
+                  <a:buNone/>
+                </a:pPr>
+                <a:r>
+                  <a:rPr/>
+                  <a:t>of trees, so the </a:t>
+                </a:r>
+                <a:r>
+                  <a:rPr b="1"/>
+                  <a:t>OOB error</a:t>
+                </a:r>
+                <a:r>
+                  <a:rPr/>
+                  <a:t> approximates CV error at no extra cost.</a:t>
+                </a:r>
+              </a:p>
+              <a:p>
+                <a:pPr lvl="0" indent="0" marL="0">
+                  <a:buNone/>
+                </a:pPr>
+                <a:r>
+                  <a:rPr/>
+                  <a:t>On a panel it is still optimistic — the omitted rows include other years of the same country. Group-aware CV remains the honest number.</a:t>
+                </a:r>
+              </a:p>
+            </p:txBody>
+          </p:sp>
+        </mc:Choice>
+      </mc:AlternateContent>
+    </p:spTree>
+  </p:cSld>
+</p:sld>
+</file>
+
+<file path=ppt/slides/slide18.xml><?xml version="1.0" encoding="utf-8"?>
+<p:sld xmlns:a="http://schemas.openxmlformats.org/drawingml/2006/main" xmlns:r="http://schemas.openxmlformats.org/officeDocument/2006/relationships" xmlns:p="http://schemas.openxmlformats.org/presentationml/2006/main">
+  <p:cSld>
+    <p:spTree>
+      <p:nvGrpSpPr>
+        <p:cNvPr id="1" name=""/>
+        <p:cNvGrpSpPr/>
+        <p:nvPr/>
+      </p:nvGrpSpPr>
+      <p:grpSpPr>
+        <a:xfrm>
+          <a:off x="0" y="0"/>
+          <a:ext cx="0" cy="0"/>
+          <a:chOff x="0" y="0"/>
+          <a:chExt cx="0" cy="0"/>
+        </a:xfrm>
+      </p:grpSpPr>
+      <p:sp>
+        <p:nvSpPr>
+          <p:cNvPr id="2" name="Title 1"/>
+          <p:cNvSpPr>
+            <a:spLocks noGrp="1"/>
+          </p:cNvSpPr>
+          <p:nvPr>
+            <p:ph type="title"/>
+          </p:nvPr>
+        </p:nvSpPr>
+        <p:spPr>
+          <a:xfrm>
+            <a:off x="722313" y="3305176"/>
+            <a:ext cx="7772400" cy="1021556"/>
+          </a:xfrm>
+        </p:spPr>
+        <p:txBody>
+          <a:bodyPr/>
+          <a:lstStyle/>
+          <a:p>
+            <a:pPr lvl="0" indent="0" marL="0">
+              <a:buNone/>
+            </a:pPr>
+            <a:r>
+              <a:rPr/>
+              <a:t>7.4 Gradient boosting</a:t>
+            </a:r>
+          </a:p>
+        </p:txBody>
+      </p:sp>
+    </p:spTree>
+  </p:cSld>
+</p:sld>
+</file>
+
+<file path=ppt/slides/slide19.xml><?xml version="1.0" encoding="utf-8"?>
+<p:sld xmlns:a="http://schemas.openxmlformats.org/drawingml/2006/main" xmlns:r="http://schemas.openxmlformats.org/officeDocument/2006/relationships" xmlns:p="http://schemas.openxmlformats.org/presentationml/2006/main">
+  <p:cSld>
+    <p:spTree>
+      <p:nvGrpSpPr>
+        <p:cNvPr id="1" name=""/>
+        <p:cNvGrpSpPr/>
+        <p:nvPr/>
+      </p:nvGrpSpPr>
+      <p:grpSpPr>
+        <a:xfrm>
+          <a:off x="0" y="0"/>
+          <a:ext cx="0" cy="0"/>
+          <a:chOff x="0" y="0"/>
+          <a:chExt cx="0" cy="0"/>
+        </a:xfrm>
+      </p:grpSpPr>
+      <p:sp>
+        <p:nvSpPr>
+          <p:cNvPr id="2" name="Title 1"/>
+          <p:cNvSpPr>
+            <a:spLocks noGrp="1"/>
+          </p:cNvSpPr>
+          <p:nvPr>
+            <p:ph type="title"/>
+          </p:nvPr>
+        </p:nvSpPr>
+        <p:spPr/>
+        <p:txBody>
+          <a:bodyPr/>
+          <a:lstStyle/>
+          <a:p>
+            <a:pPr lvl="0" indent="0" marL="0">
+              <a:buNone/>
+            </a:pPr>
+            <a:r>
+              <a:rPr/>
+              <a:t>Functional gradient descent</a:t>
+            </a:r>
+          </a:p>
+        </p:txBody>
+      </p:sp>
+      <mc:AlternateContent xmlns:mc="http://schemas.openxmlformats.org/markup-compatibility/2006">
+        <mc:Choice xmlns:a14="http://schemas.microsoft.com/office/drawing/2010/main" Requires="a14">
+          <p:sp>
+            <p:nvSpPr>
+              <p:cNvPr id="3" name="Content Placeholder 2"/>
+              <p:cNvSpPr>
+                <a:spLocks noGrp="1"/>
+              </p:cNvSpPr>
+              <p:nvPr>
+                <p:ph idx="1"/>
+              </p:nvPr>
+            </p:nvSpPr>
+            <p:spPr/>
+            <p:txBody>
+              <a:bodyPr/>
+              <a:lstStyle/>
+              <a:p>
+                <a:pPr lvl="0" indent="0" marL="0">
+                  <a:buNone/>
+                </a:pPr>
+                <a:r>
+                  <a:rPr/>
+                  <a:t>Instead of averaging independent trees, build them </a:t>
+                </a:r>
+                <a:r>
+                  <a:rPr b="1"/>
+                  <a:t>sequentially</a:t>
+                </a:r>
+                <a:r>
+                  <a:rPr/>
+                  <a:t>, each correcting its predecessor.</a:t>
+                </a:r>
+              </a:p>
+              <a:p>
+                <a:pPr lvl="0" indent="0" marL="0">
+                  <a:buNone/>
+                </a:pPr>
+                <a:r>
+                  <a:rPr/>
+                  <a:t>Think of minimising </a:t>
+                </a:r>
+                <a14:m>
+                  <m:oMath xmlns:m="http://schemas.openxmlformats.org/officeDocument/2006/math">
+                    <m:nary>
+                      <m:naryPr>
+                        <m:chr m:val="∑"/>
+                        <m:limLoc m:val="undOvr"/>
+                        <m:subHide m:val="off"/>
+                        <m:supHide m:val="on"/>
+                      </m:naryPr>
+                      <m:sub>
+                        <m:r>
+                          <m:t>i</m:t>
+                        </m:r>
+                      </m:sub>
+                      <m:sup>
+                        <m:r>
+                          <m:t>​</m:t>
+                        </m:r>
+                      </m:sup>
+                      <m:e>
+                        <m:r>
+                          <m:t>L</m:t>
+                        </m:r>
+                      </m:e>
+                    </m:nary>
+                    <m:d>
+                      <m:dPr>
+                        <m:begChr m:val="("/>
+                        <m:sepChr m:val=""/>
+                        <m:endChr m:val=")"/>
+                        <m:grow/>
+                      </m:dPr>
+                      <m:e>
+                        <m:sSub>
+                          <m:e>
+                            <m:r>
+                              <m:t>y</m:t>
+                            </m:r>
+                          </m:e>
+                          <m:sub>
+                            <m:r>
+                              <m:t>i</m:t>
+                            </m:r>
+                          </m:sub>
+                        </m:sSub>
+                        <m:r>
+                          <m:rPr>
+                            <m:sty m:val="p"/>
+                          </m:rPr>
+                          <m:t>,</m:t>
+                        </m:r>
+                        <m:r>
+                          <m:t>F</m:t>
+                        </m:r>
+                        <m:d>
+                          <m:dPr>
+                            <m:begChr m:val="("/>
+                            <m:sepChr m:val=""/>
+                            <m:endChr m:val=")"/>
+                            <m:grow/>
+                          </m:dPr>
+                          <m:e>
+                            <m:sSub>
+                              <m:e>
+                                <m:r>
+                                  <m:t>x</m:t>
+                                </m:r>
+                              </m:e>
+                              <m:sub>
+                                <m:r>
+                                  <m:t>i</m:t>
+                                </m:r>
+                              </m:sub>
+                            </m:sSub>
+                          </m:e>
+                        </m:d>
+                      </m:e>
+                    </m:d>
+                  </m:oMath>
+                </a14:m>
+                <a:r>
+                  <a:rPr/>
+                  <a:t> over the </a:t>
+                </a:r>
+                <a:r>
+                  <a:rPr i="1"/>
+                  <a:t>function</a:t>
+                </a:r>
+                <a:r>
+                  <a:rPr/>
+                  <a:t> </a:t>
+                </a:r>
+                <a14:m>
+                  <m:oMath xmlns:m="http://schemas.openxmlformats.org/officeDocument/2006/math">
+                    <m:r>
+                      <m:t>F</m:t>
+                    </m:r>
+                  </m:oMath>
+                </a14:m>
+                <a:r>
+                  <a:rPr/>
+                  <a:t>, by gradient descent </a:t>
+                </a:r>
+                <a:r>
+                  <a:rPr b="1"/>
+                  <a:t>in function space</a:t>
+                </a:r>
+                <a:r>
+                  <a:rPr/>
+                  <a:t>.</a:t>
+                </a:r>
+              </a:p>
+            </p:txBody>
+          </p:sp>
+        </mc:Choice>
+      </mc:AlternateContent>
+    </p:spTree>
+  </p:cSld>
+</p:sld>
+</file>
+
+<file path=ppt/slides/slide2.xml><?xml version="1.0" encoding="utf-8"?>
+<p:sld xmlns:a="http://schemas.openxmlformats.org/drawingml/2006/main" xmlns:r="http://schemas.openxmlformats.org/officeDocument/2006/relationships" xmlns:p="http://schemas.openxmlformats.org/presentationml/2006/main">
+  <p:cSld>
+    <p:spTree>
+      <p:nvGrpSpPr>
+        <p:cNvPr id="1" name=""/>
+        <p:cNvGrpSpPr/>
+        <p:nvPr/>
+      </p:nvGrpSpPr>
+      <p:grpSpPr>
+        <a:xfrm>
+          <a:off x="0" y="0"/>
+          <a:ext cx="0" cy="0"/>
+          <a:chOff x="0" y="0"/>
+          <a:chExt cx="0" cy="0"/>
+        </a:xfrm>
+      </p:grpSpPr>
+      <p:sp>
+        <p:nvSpPr>
+          <p:cNvPr id="3" name="Content Placeholder 2"/>
+          <p:cNvSpPr>
+            <a:spLocks noGrp="1"/>
+          </p:cNvSpPr>
+          <p:nvPr>
+            <p:ph idx="1"/>
+          </p:nvPr>
+        </p:nvSpPr>
+        <p:spPr/>
+        <p:txBody>
+          <a:bodyPr/>
+          <a:lstStyle/>
+          <a:p>
+            <a:pPr lvl="0" indent="0" marL="0">
+              <a:spcBef>
+                <a:spcPts val="3000"/>
+              </a:spcBef>
+              <a:buNone/>
+            </a:pPr>
+            <a:r>
+              <a:rPr b="1"/>
+              <a:t>If we abandon linearity, is interpretability recoverable?</a:t>
+            </a:r>
+          </a:p>
+        </p:txBody>
+      </p:sp>
+    </p:spTree>
+  </p:cSld>
+</p:sld>
+</file>
+
+<file path=ppt/slides/slide20.xml><?xml version="1.0" encoding="utf-8"?>
+<p:sld xmlns:a="http://schemas.openxmlformats.org/drawingml/2006/main" xmlns:r="http://schemas.openxmlformats.org/officeDocument/2006/relationships" xmlns:p="http://schemas.openxmlformats.org/presentationml/2006/main">
+  <p:cSld>
+    <p:spTree>
+      <p:nvGrpSpPr>
+        <p:cNvPr id="1" name=""/>
+        <p:cNvGrpSpPr/>
+        <p:nvPr/>
+      </p:nvGrpSpPr>
+      <p:grpSpPr>
+        <a:xfrm>
+          <a:off x="0" y="0"/>
+          <a:ext cx="0" cy="0"/>
+          <a:chOff x="0" y="0"/>
+          <a:chExt cx="0" cy="0"/>
+        </a:xfrm>
+      </p:grpSpPr>
+      <p:sp>
+        <p:nvSpPr>
+          <p:cNvPr id="2" name="Title 1"/>
+          <p:cNvSpPr>
+            <a:spLocks noGrp="1"/>
+          </p:cNvSpPr>
+          <p:nvPr>
+            <p:ph type="title"/>
+          </p:nvPr>
+        </p:nvSpPr>
+        <p:spPr/>
+        <p:txBody>
+          <a:bodyPr/>
+          <a:lstStyle/>
+          <a:p>
+            <a:pPr lvl="0" indent="0" marL="0">
+              <a:buNone/>
+            </a:pPr>
+            <a:r>
+              <a:rPr/>
+              <a:t>The pseudo-residual</a:t>
+            </a:r>
+          </a:p>
+        </p:txBody>
+      </p:sp>
+      <mc:AlternateContent xmlns:mc="http://schemas.openxmlformats.org/markup-compatibility/2006">
+        <mc:Choice xmlns:a14="http://schemas.microsoft.com/office/drawing/2010/main" Requires="a14">
+          <p:sp>
+            <p:nvSpPr>
+              <p:cNvPr id="3" name="Content Placeholder 2"/>
+              <p:cNvSpPr>
+                <a:spLocks noGrp="1"/>
+              </p:cNvSpPr>
+              <p:nvPr>
+                <p:ph idx="1"/>
+              </p:nvPr>
+            </p:nvSpPr>
+            <p:spPr/>
+            <p:txBody>
+              <a:bodyPr/>
+              <a:lstStyle/>
+              <a:p>
+                <a:pPr lvl="0" indent="0" marL="0">
+                  <a:buNone/>
+                </a:pPr>
+                <a:r>
+                  <a:rPr/>
+                  <a:t>At stage </a:t>
+                </a:r>
+                <a14:m>
+                  <m:oMath xmlns:m="http://schemas.openxmlformats.org/officeDocument/2006/math">
+                    <m:r>
+                      <m:t>m</m:t>
+                    </m:r>
+                  </m:oMath>
+                </a14:m>
+                <a:r>
+                  <a:rPr/>
+                  <a:t>, the negative gradient at the current fit:</a:t>
+                </a:r>
+              </a:p>
+              <a:p>
+                <a:pPr lvl="0" indent="0" marL="0">
+                  <a:buNone/>
+                </a:pPr>
                 <a14:m>
                   <m:oMathPara xmlns:m="http://schemas.openxmlformats.org/officeDocument/2006/math">
                     <m:oMathParaPr>
@@ -4053,16 +5132,496 @@
                     <m:oMath>
                       <m:sSub>
                         <m:e>
-                          <m:acc>
-                            <m:accPr>
-                              <m:chr m:val="̂"/>
-                            </m:accPr>
+                          <m:r>
+                            <m:t>r</m:t>
+                          </m:r>
+                        </m:e>
+                        <m:sub>
+                          <m:r>
+                            <m:t>i</m:t>
+                          </m:r>
+                          <m:r>
+                            <m:t>m</m:t>
+                          </m:r>
+                        </m:sub>
+                      </m:sSub>
+                      <m:r>
+                        <m:rPr>
+                          <m:sty m:val="p"/>
+                        </m:rPr>
+                        <m:t>=</m:t>
+                      </m:r>
+                      <m:r>
+                        <m:rPr>
+                          <m:sty m:val="p"/>
+                        </m:rPr>
+                        <m:t>−</m:t>
+                      </m:r>
+                      <m:sSub>
+                        <m:e>
+                          <m:d>
+                            <m:dPr>
+                              <m:begChr m:val="["/>
+                              <m:sepChr m:val=""/>
+                              <m:endChr m:val="]"/>
+                              <m:grow/>
+                            </m:dPr>
+                            <m:e>
+                              <m:f>
+                                <m:fPr>
+                                  <m:type m:val="bar"/>
+                                </m:fPr>
+                                <m:num>
+                                  <m:r>
+                                    <m:rPr>
+                                      <m:sty m:val="p"/>
+                                    </m:rPr>
+                                    <m:t>∂</m:t>
+                                  </m:r>
+                                  <m:r>
+                                    <m:t>L</m:t>
+                                  </m:r>
+                                  <m:d>
+                                    <m:dPr>
+                                      <m:begChr m:val="("/>
+                                      <m:sepChr m:val=""/>
+                                      <m:endChr m:val=")"/>
+                                      <m:grow/>
+                                    </m:dPr>
+                                    <m:e>
+                                      <m:sSub>
+                                        <m:e>
+                                          <m:r>
+                                            <m:t>y</m:t>
+                                          </m:r>
+                                        </m:e>
+                                        <m:sub>
+                                          <m:r>
+                                            <m:t>i</m:t>
+                                          </m:r>
+                                        </m:sub>
+                                      </m:sSub>
+                                      <m:r>
+                                        <m:rPr>
+                                          <m:sty m:val="p"/>
+                                        </m:rPr>
+                                        <m:t>,</m:t>
+                                      </m:r>
+                                      <m:r>
+                                        <m:t>F</m:t>
+                                      </m:r>
+                                      <m:d>
+                                        <m:dPr>
+                                          <m:begChr m:val="("/>
+                                          <m:sepChr m:val=""/>
+                                          <m:endChr m:val=")"/>
+                                          <m:grow/>
+                                        </m:dPr>
+                                        <m:e>
+                                          <m:sSub>
+                                            <m:e>
+                                              <m:r>
+                                                <m:t>x</m:t>
+                                              </m:r>
+                                            </m:e>
+                                            <m:sub>
+                                              <m:r>
+                                                <m:t>i</m:t>
+                                              </m:r>
+                                            </m:sub>
+                                          </m:sSub>
+                                        </m:e>
+                                      </m:d>
+                                    </m:e>
+                                  </m:d>
+                                </m:num>
+                                <m:den>
+                                  <m:r>
+                                    <m:rPr>
+                                      <m:sty m:val="p"/>
+                                    </m:rPr>
+                                    <m:t>∂</m:t>
+                                  </m:r>
+                                  <m:r>
+                                    <m:t>F</m:t>
+                                  </m:r>
+                                  <m:d>
+                                    <m:dPr>
+                                      <m:begChr m:val="("/>
+                                      <m:sepChr m:val=""/>
+                                      <m:endChr m:val=")"/>
+                                      <m:grow/>
+                                    </m:dPr>
+                                    <m:e>
+                                      <m:sSub>
+                                        <m:e>
+                                          <m:r>
+                                            <m:t>x</m:t>
+                                          </m:r>
+                                        </m:e>
+                                        <m:sub>
+                                          <m:r>
+                                            <m:t>i</m:t>
+                                          </m:r>
+                                        </m:sub>
+                                      </m:sSub>
+                                    </m:e>
+                                  </m:d>
+                                </m:den>
+                              </m:f>
+                            </m:e>
+                          </m:d>
+                        </m:e>
+                        <m:sub>
+                          <m:r>
+                            <m:t>F</m:t>
+                          </m:r>
+                          <m:r>
+                            <m:rPr>
+                              <m:sty m:val="p"/>
+                            </m:rPr>
+                            <m:t>=</m:t>
+                          </m:r>
+                          <m:sSub>
                             <m:e>
                               <m:r>
-                                <m:t>f</m:t>
+                                <m:t>F</m:t>
                               </m:r>
                             </m:e>
-                          </m:acc>
+                            <m:sub>
+                              <m:r>
+                                <m:t>m</m:t>
+                              </m:r>
+                              <m:r>
+                                <m:rPr>
+                                  <m:sty m:val="p"/>
+                                </m:rPr>
+                                <m:t>−</m:t>
+                              </m:r>
+                              <m:r>
+                                <m:t>1</m:t>
+                              </m:r>
+                            </m:sub>
+                          </m:sSub>
+                        </m:sub>
+                      </m:sSub>
+                    </m:oMath>
+                  </m:oMathPara>
+                </a14:m>
+              </a:p>
+              <a:p>
+                <a:pPr lvl="0"/>
+                <a:r>
+                  <a:rPr b="1"/>
+                  <a:t>Squared loss:</a:t>
+                </a:r>
+                <a:r>
+                  <a:rPr/>
+                  <a:t> </a:t>
+                </a:r>
+                <a14:m>
+                  <m:oMath xmlns:m="http://schemas.openxmlformats.org/officeDocument/2006/math">
+                    <m:sSub>
+                      <m:e>
+                        <m:r>
+                          <m:t>r</m:t>
+                        </m:r>
+                      </m:e>
+                      <m:sub>
+                        <m:r>
+                          <m:t>i</m:t>
+                        </m:r>
+                        <m:r>
+                          <m:t>m</m:t>
+                        </m:r>
+                      </m:sub>
+                    </m:sSub>
+                    <m:r>
+                      <m:rPr>
+                        <m:sty m:val="p"/>
+                      </m:rPr>
+                      <m:t>=</m:t>
+                    </m:r>
+                    <m:sSub>
+                      <m:e>
+                        <m:r>
+                          <m:t>y</m:t>
+                        </m:r>
+                      </m:e>
+                      <m:sub>
+                        <m:r>
+                          <m:t>i</m:t>
+                        </m:r>
+                      </m:sub>
+                    </m:sSub>
+                    <m:r>
+                      <m:rPr>
+                        <m:sty m:val="p"/>
+                      </m:rPr>
+                      <m:t>−</m:t>
+                    </m:r>
+                    <m:sSub>
+                      <m:e>
+                        <m:r>
+                          <m:t>F</m:t>
+                        </m:r>
+                      </m:e>
+                      <m:sub>
+                        <m:r>
+                          <m:t>m</m:t>
+                        </m:r>
+                        <m:r>
+                          <m:rPr>
+                            <m:sty m:val="p"/>
+                          </m:rPr>
+                          <m:t>−</m:t>
+                        </m:r>
+                        <m:r>
+                          <m:t>1</m:t>
+                        </m:r>
+                      </m:sub>
+                    </m:sSub>
+                    <m:d>
+                      <m:dPr>
+                        <m:begChr m:val="("/>
+                        <m:sepChr m:val=""/>
+                        <m:endChr m:val=")"/>
+                        <m:grow/>
+                      </m:dPr>
+                      <m:e>
+                        <m:sSub>
+                          <m:e>
+                            <m:r>
+                              <m:t>x</m:t>
+                            </m:r>
+                          </m:e>
+                          <m:sub>
+                            <m:r>
+                              <m:t>i</m:t>
+                            </m:r>
+                          </m:sub>
+                        </m:sSub>
+                      </m:e>
+                    </m:d>
+                  </m:oMath>
+                </a14:m>
+                <a:r>
+                  <a:rPr/>
+                  <a:t> — literally the residual</a:t>
+                </a:r>
+              </a:p>
+              <a:p>
+                <a:pPr lvl="0"/>
+                <a:r>
+                  <a:rPr b="1"/>
+                  <a:t>Logistic loss:</a:t>
+                </a:r>
+                <a:r>
+                  <a:rPr/>
+                  <a:t> </a:t>
+                </a:r>
+                <a14:m>
+                  <m:oMath xmlns:m="http://schemas.openxmlformats.org/officeDocument/2006/math">
+                    <m:sSub>
+                      <m:e>
+                        <m:r>
+                          <m:t>r</m:t>
+                        </m:r>
+                      </m:e>
+                      <m:sub>
+                        <m:r>
+                          <m:t>i</m:t>
+                        </m:r>
+                        <m:r>
+                          <m:t>m</m:t>
+                        </m:r>
+                      </m:sub>
+                    </m:sSub>
+                    <m:r>
+                      <m:rPr>
+                        <m:sty m:val="p"/>
+                      </m:rPr>
+                      <m:t>=</m:t>
+                    </m:r>
+                    <m:sSub>
+                      <m:e>
+                        <m:r>
+                          <m:t>y</m:t>
+                        </m:r>
+                      </m:e>
+                      <m:sub>
+                        <m:r>
+                          <m:t>i</m:t>
+                        </m:r>
+                      </m:sub>
+                    </m:sSub>
+                    <m:r>
+                      <m:rPr>
+                        <m:sty m:val="p"/>
+                      </m:rPr>
+                      <m:t>−</m:t>
+                    </m:r>
+                    <m:sSub>
+                      <m:e>
+                        <m:r>
+                          <m:t>p</m:t>
+                        </m:r>
+                      </m:e>
+                      <m:sub>
+                        <m:r>
+                          <m:t>m</m:t>
+                        </m:r>
+                        <m:r>
+                          <m:rPr>
+                            <m:sty m:val="p"/>
+                          </m:rPr>
+                          <m:t>−</m:t>
+                        </m:r>
+                        <m:r>
+                          <m:t>1</m:t>
+                        </m:r>
+                      </m:sub>
+                    </m:sSub>
+                    <m:d>
+                      <m:dPr>
+                        <m:begChr m:val="("/>
+                        <m:sepChr m:val=""/>
+                        <m:endChr m:val=")"/>
+                        <m:grow/>
+                      </m:dPr>
+                      <m:e>
+                        <m:sSub>
+                          <m:e>
+                            <m:r>
+                              <m:t>x</m:t>
+                            </m:r>
+                          </m:e>
+                          <m:sub>
+                            <m:r>
+                              <m:t>i</m:t>
+                            </m:r>
+                          </m:sub>
+                        </m:sSub>
+                      </m:e>
+                    </m:d>
+                  </m:oMath>
+                </a14:m>
+                <a:r>
+                  <a:rPr/>
+                  <a:t> — the same probability residual as Session 06</a:t>
+                </a:r>
+              </a:p>
+            </p:txBody>
+          </p:sp>
+        </mc:Choice>
+      </mc:AlternateContent>
+    </p:spTree>
+  </p:cSld>
+</p:sld>
+</file>
+
+<file path=ppt/slides/slide21.xml><?xml version="1.0" encoding="utf-8"?>
+<p:sld xmlns:a="http://schemas.openxmlformats.org/drawingml/2006/main" xmlns:r="http://schemas.openxmlformats.org/officeDocument/2006/relationships" xmlns:p="http://schemas.openxmlformats.org/presentationml/2006/main">
+  <p:cSld>
+    <p:spTree>
+      <p:nvGrpSpPr>
+        <p:cNvPr id="1" name=""/>
+        <p:cNvGrpSpPr/>
+        <p:nvPr/>
+      </p:nvGrpSpPr>
+      <p:grpSpPr>
+        <a:xfrm>
+          <a:off x="0" y="0"/>
+          <a:ext cx="0" cy="0"/>
+          <a:chOff x="0" y="0"/>
+          <a:chExt cx="0" cy="0"/>
+        </a:xfrm>
+      </p:grpSpPr>
+      <p:sp>
+        <p:nvSpPr>
+          <p:cNvPr id="2" name="Title 1"/>
+          <p:cNvSpPr>
+            <a:spLocks noGrp="1"/>
+          </p:cNvSpPr>
+          <p:nvPr>
+            <p:ph type="title"/>
+          </p:nvPr>
+        </p:nvSpPr>
+        <p:spPr/>
+        <p:txBody>
+          <a:bodyPr/>
+          <a:lstStyle/>
+          <a:p>
+            <a:pPr lvl="0" indent="0" marL="0">
+              <a:buNone/>
+            </a:pPr>
+            <a:r>
+              <a:rPr/>
+              <a:t>The update</a:t>
+            </a:r>
+          </a:p>
+        </p:txBody>
+      </p:sp>
+      <mc:AlternateContent xmlns:mc="http://schemas.openxmlformats.org/markup-compatibility/2006">
+        <mc:Choice xmlns:a14="http://schemas.microsoft.com/office/drawing/2010/main" Requires="a14">
+          <p:sp>
+            <p:nvSpPr>
+              <p:cNvPr id="3" name="Content Placeholder 2"/>
+              <p:cNvSpPr>
+                <a:spLocks noGrp="1"/>
+              </p:cNvSpPr>
+              <p:nvPr>
+                <p:ph idx="1"/>
+              </p:nvPr>
+            </p:nvSpPr>
+            <p:spPr/>
+            <p:txBody>
+              <a:bodyPr/>
+              <a:lstStyle/>
+              <a:p>
+                <a:pPr lvl="0" indent="0" marL="0">
+                  <a:buNone/>
+                </a:pPr>
+                <a:r>
+                  <a:rPr/>
+                  <a:t>Fit a small tree </a:t>
+                </a:r>
+                <a14:m>
+                  <m:oMath xmlns:m="http://schemas.openxmlformats.org/officeDocument/2006/math">
+                    <m:sSub>
+                      <m:e>
+                        <m:r>
+                          <m:t>h</m:t>
+                        </m:r>
+                      </m:e>
+                      <m:sub>
+                        <m:r>
+                          <m:t>m</m:t>
+                        </m:r>
+                      </m:sub>
+                    </m:sSub>
+                  </m:oMath>
+                </a14:m>
+                <a:r>
+                  <a:rPr/>
+                  <a:t> to the pseudo-residuals:</a:t>
+                </a:r>
+              </a:p>
+              <a:p>
+                <a:pPr lvl="0" indent="0" marL="0">
+                  <a:buNone/>
+                </a:pPr>
+                <a14:m>
+                  <m:oMathPara xmlns:m="http://schemas.openxmlformats.org/officeDocument/2006/math">
+                    <m:oMathParaPr>
+                      <m:jc m:val="center"/>
+                    </m:oMathParaPr>
+                    <m:oMath>
+                      <m:sSub>
+                        <m:e>
+                          <m:r>
+                            <m:t>F</m:t>
+                          </m:r>
                         </m:e>
                         <m:sub>
                           <m:r>
@@ -4091,16 +5650,9 @@
                       </m:r>
                       <m:sSub>
                         <m:e>
-                          <m:acc>
-                            <m:accPr>
-                              <m:chr m:val="̂"/>
-                            </m:accPr>
-                            <m:e>
-                              <m:r>
-                                <m:t>f</m:t>
-                              </m:r>
-                            </m:e>
-                          </m:acc>
+                          <m:r>
+                            <m:t>F</m:t>
+                          </m:r>
                         </m:e>
                         <m:sub>
                           <m:r>
@@ -4137,14 +5689,23 @@
                         <m:t>+</m:t>
                       </m:r>
                       <m:r>
-                        <m:t>η</m:t>
+                        <m:t>ν</m:t>
                       </m:r>
                       <m:r>
-                        <m:rPr>
-                          <m:sty m:val="p"/>
-                        </m:rPr>
-                        <m:t>⋅</m:t>
+                        <m:t> </m:t>
                       </m:r>
+                      <m:sSub>
+                        <m:e>
+                          <m:r>
+                            <m:t>γ</m:t>
+                          </m:r>
+                        </m:e>
+                        <m:sub>
+                          <m:r>
+                            <m:t>m</m:t>
+                          </m:r>
+                        </m:sub>
+                      </m:sSub>
                       <m:sSub>
                         <m:e>
                           <m:r>
@@ -4170,6 +5731,36 @@
                           </m:r>
                         </m:e>
                       </m:d>
+                      <m:r>
+                        <m:rPr>
+                          <m:sty m:val="p"/>
+                        </m:rPr>
+                        <m:t>,</m:t>
+                      </m:r>
+                      <m:r>
+                        <m:t>  </m:t>
+                      </m:r>
+                      <m:r>
+                        <m:t>0</m:t>
+                      </m:r>
+                      <m:r>
+                        <m:rPr>
+                          <m:sty m:val="p"/>
+                        </m:rPr>
+                        <m:t>&lt;</m:t>
+                      </m:r>
+                      <m:r>
+                        <m:t>ν</m:t>
+                      </m:r>
+                      <m:r>
+                        <m:rPr>
+                          <m:sty m:val="p"/>
+                        </m:rPr>
+                        <m:t>≤</m:t>
+                      </m:r>
+                      <m:r>
+                        <m:t>1</m:t>
+                      </m:r>
                     </m:oMath>
                   </m:oMathPara>
                 </a14:m>
@@ -4180,705 +5771,64 @@
                 </a:pPr>
                 <a:r>
                   <a:rPr/>
-                  <a:t>where </a:t>
+                  <a:t>The </a:t>
                 </a:r>
-                <a14:m>
-                  <m:oMath xmlns:m="http://schemas.openxmlformats.org/officeDocument/2006/math">
-                    <m:sSub>
-                      <m:e>
-                        <m:r>
-                          <m:t>h</m:t>
-                        </m:r>
-                      </m:e>
-                      <m:sub>
-                        <m:r>
-                          <m:t>m</m:t>
-                        </m:r>
-                      </m:sub>
-                    </m:sSub>
-                  </m:oMath>
-                </a14:m>
+                <a:r>
+                  <a:rPr b="1"/>
+                  <a:t>shrinkage</a:t>
+                </a:r>
                 <a:r>
                   <a:rPr/>
-                  <a:t> is a small tree fit to what remains unexplained, and </a:t>
+                  <a:t> </a:t>
                 </a:r>
                 <a14:m>
                   <m:oMath xmlns:m="http://schemas.openxmlformats.org/officeDocument/2006/math">
                     <m:r>
-                      <m:t>η</m:t>
+                      <m:t>ν</m:t>
                     </m:r>
                   </m:oMath>
                 </a14:m>
                 <a:r>
                   <a:rPr/>
-                  <a:t> is the learning rate.</a:t>
-                </a:r>
-              </a:p>
-              <a:p>
-                <a:pPr lvl="0"/>
-                <a:r>
-                  <a:rPr/>
-                  <a:t>Forests average </a:t>
-                </a:r>
-                <a:r>
-                  <a:rPr b="1"/>
-                  <a:t>independent</a:t>
-                </a:r>
-                <a:r>
-                  <a:rPr/>
-                  <a:t> trees, reducing variance</a:t>
-                </a:r>
-              </a:p>
-              <a:p>
-                <a:pPr lvl="0"/>
-                <a:r>
-                  <a:rPr/>
-                  <a:t>Boosting adds </a:t>
-                </a:r>
-                <a:r>
-                  <a:rPr b="1"/>
-                  <a:t>dependent</a:t>
-                </a:r>
-                <a:r>
-                  <a:rPr/>
-                  <a:t> trees, reducing bias</a:t>
-                </a:r>
-              </a:p>
-            </p:txBody>
-          </p:sp>
-        </mc:Choice>
-      </mc:AlternateContent>
-    </p:spTree>
-  </p:cSld>
-</p:sld>
-</file>
-
-<file path=ppt/slides/slide16.xml><?xml version="1.0" encoding="UTF-8"?><p:sld xmlns:a="http://schemas.openxmlformats.org/drawingml/2006/main" xmlns:r="http://schemas.openxmlformats.org/officeDocument/2006/relationships" xmlns:p="http://schemas.openxmlformats.org/presentationml/2006/main"><p:cSld><p:spTree><p:nvGrpSpPr><p:cNvPr id="1" name="" /><p:cNvGrpSpPr /><p:nvPr /></p:nvGrpSpPr><p:grpSpPr><a:xfrm><a:off x="0" y="0" /><a:ext cx="0" cy="0" /><a:chOff x="0" y="0" /><a:chExt cx="0" cy="0" /></a:xfrm></p:grpSpPr><p:sp><p:nvSpPr><p:cNvPr id="2" name="Title 1" /><p:cNvSpPr><a:spLocks noGrp="1" /></p:cNvSpPr><p:nvPr><p:ph type="title" /></p:nvPr></p:nvSpPr><p:spPr /><p:txBody><a:bodyPr /><a:lstStyle /><a:p><a:pPr lvl="0" indent="0" marL="0"><a:buNone /></a:pPr><a:r><a:rPr /><a:t>The three knobs</a:t></a:r></a:p></p:txBody></p:sp><p:graphicFrame><p:nvGraphicFramePr><p:cNvPr id="6" name="Content Placeholder 5" /><p:cNvGraphicFramePr><a:graphicFrameLocks noGrp="1" /></p:cNvGraphicFramePr><p:nvPr><p:ph idx="1" /></p:nvPr></p:nvGraphicFramePr><p:xfrm><a:off x="457200" y="1193800" /><a:ext cx="8229600" cy="3390900" /></p:xfrm><a:graphic><a:graphicData uri="http://schemas.openxmlformats.org/drawingml/2006/table"><a:tbl><a:tblPr firstRow="1" bandRow="1"><a:tableStyleId>{5C22544A-7EE6-4342-B048-85BDC9FD1C3A}</a:tableStyleId></a:tblPr><a:tblGrid><a:gridCol w="4114800" /><a:gridCol w="4114800" /></a:tblGrid><a:tr h="0"><a:tc><a:txBody><a:bodyPr /><a:lstStyle /><a:p><a:pPr lvl="0" indent="0" marL="0"><a:buNone /></a:pPr><a:r><a:rPr /><a:t>Knob</a:t></a:r></a:p></a:txBody><a:tcPr /></a:tc><a:tc><a:txBody><a:bodyPr /><a:lstStyle /><a:p><a:pPr lvl="0" indent="0" marL="0"><a:buNone /></a:pPr><a:r><a:rPr /><a:t>Effect</a:t></a:r></a:p></a:txBody><a:tcPr /></a:tc></a:tr><a:tr h="0"><a:tc><a:txBody><a:bodyPr /><a:lstStyle /><a:p><a:pPr lvl="0" indent="0" marL="0"><a:buNone /></a:pPr><a:r><a:rPr b="1" /><a:t>Learning rate</a:t></a:r><a:r><a:rPr /><a:t> </a:t></a:r><a14:m><m:oMath xmlns:m="http://schemas.openxmlformats.org/officeDocument/2006/math"><m:r><m:t>η</m:t></m:r></m:oMath></a14:m></a:p></a:txBody></a:tc><a:tc><a:txBody><a:bodyPr /><a:lstStyle /><a:p><a:pPr lvl="0" indent="0" marL="0"><a:buNone /></a:pPr><a:r><a:rPr /><a:t>Smaller learns more slowly and generalises better</a:t></a:r></a:p></a:txBody></a:tc></a:tr><a:tr h="0"><a:tc><a:txBody><a:bodyPr /><a:lstStyle /><a:p><a:pPr lvl="0" indent="0" marL="0"><a:buNone /></a:pPr><a:r><a:rPr b="1" /><a:t>Number of trees</a:t></a:r></a:p></a:txBody></a:tc><a:tc><a:txBody><a:bodyPr /><a:lstStyle /><a:p><a:pPr lvl="0" indent="0" marL="0"><a:buNone /></a:pPr><a:r><a:rPr /><a:t>Too many </a:t></a:r><a:r><a:rPr i="1" /><a:t>will</a:t></a:r><a:r><a:rPr /><a:t> overfit — unlike a forest</a:t></a:r></a:p></a:txBody></a:tc></a:tr><a:tr h="0"><a:tc><a:txBody><a:bodyPr /><a:lstStyle /><a:p><a:pPr lvl="0" indent="0" marL="0"><a:buNone /></a:pPr><a:r><a:rPr b="1" /><a:t>Depth</a:t></a:r></a:p></a:txBody></a:tc><a:tc><a:txBody><a:bodyPr /><a:lstStyle /><a:p><a:pPr lvl="0" indent="0" marL="0"><a:buNone /></a:pPr><a:r><a:rPr /><a:t>Depth </a:t></a:r><a14:m><m:oMath xmlns:m="http://schemas.openxmlformats.org/officeDocument/2006/math"><m:r><m:t>d</m:t></m:r></m:oMath></a14:m><a:r><a:rPr /><a:t> allows </a:t></a:r><a14:m><m:oMath xmlns:m="http://schemas.openxmlformats.org/officeDocument/2006/math"><m:r><m:t>d</m:t></m:r></m:oMath></a14:m><a:r><a:rPr /><a:t>-way interactions</a:t></a:r></a:p></a:txBody></a:tc></a:tr></a:tbl></a:graphicData></a:graphic></p:graphicFrame></p:spTree></p:cSld></p:sld>
-</file>
-
-<file path=ppt/slides/slide17.xml><?xml version="1.0" encoding="utf-8"?>
-<p:sld xmlns:a="http://schemas.openxmlformats.org/drawingml/2006/main" xmlns:r="http://schemas.openxmlformats.org/officeDocument/2006/relationships" xmlns:p="http://schemas.openxmlformats.org/presentationml/2006/main">
-  <p:cSld>
-    <p:spTree>
-      <p:nvGrpSpPr>
-        <p:cNvPr id="1" name=""/>
-        <p:cNvGrpSpPr/>
-        <p:nvPr/>
-      </p:nvGrpSpPr>
-      <p:grpSpPr>
-        <a:xfrm>
-          <a:off x="0" y="0"/>
-          <a:ext cx="0" cy="0"/>
-          <a:chOff x="0" y="0"/>
-          <a:chExt cx="0" cy="0"/>
-        </a:xfrm>
-      </p:grpSpPr>
-      <p:sp>
-        <p:nvSpPr>
-          <p:cNvPr id="3" name="Content Placeholder 2"/>
-          <p:cNvSpPr>
-            <a:spLocks noGrp="1"/>
-          </p:cNvSpPr>
-          <p:nvPr>
-            <p:ph idx="1"/>
-          </p:nvPr>
-        </p:nvSpPr>
-        <p:spPr/>
-        <p:txBody>
-          <a:bodyPr/>
-          <a:lstStyle/>
-          <a:p>
-            <a:pPr lvl="0" indent="0" marL="0">
-              <a:buNone/>
-            </a:pPr>
-            <a:r>
-              <a:rPr/>
-              <a:t>A random forest does not overfit as you add trees. </a:t>
-            </a:r>
-            <a:r>
-              <a:rPr b="1"/>
-              <a:t>A boosted model does.</a:t>
-            </a:r>
-            <a:r>
-              <a:rPr/>
-              <a:t> The stopping point must be chosen on validation data.</a:t>
-            </a:r>
-          </a:p>
-        </p:txBody>
-      </p:sp>
-    </p:spTree>
-  </p:cSld>
-</p:sld>
-</file>
-
-<file path=ppt/slides/slide18.xml><?xml version="1.0" encoding="utf-8"?>
-<p:sld xmlns:a="http://schemas.openxmlformats.org/drawingml/2006/main" xmlns:r="http://schemas.openxmlformats.org/officeDocument/2006/relationships" xmlns:p="http://schemas.openxmlformats.org/presentationml/2006/main">
-  <p:cSld>
-    <p:spTree>
-      <p:nvGrpSpPr>
-        <p:cNvPr id="1" name=""/>
-        <p:cNvGrpSpPr/>
-        <p:nvPr/>
-      </p:nvGrpSpPr>
-      <p:grpSpPr>
-        <a:xfrm>
-          <a:off x="0" y="0"/>
-          <a:ext cx="0" cy="0"/>
-          <a:chOff x="0" y="0"/>
-          <a:chExt cx="0" cy="0"/>
-        </a:xfrm>
-      </p:grpSpPr>
-      <p:sp>
-        <p:nvSpPr>
-          <p:cNvPr id="2" name="Title 1"/>
-          <p:cNvSpPr>
-            <a:spLocks noGrp="1"/>
-          </p:cNvSpPr>
-          <p:nvPr>
-            <p:ph type="title"/>
-          </p:nvPr>
-        </p:nvSpPr>
-        <p:spPr/>
-        <p:txBody>
-          <a:bodyPr/>
-          <a:lstStyle/>
-          <a:p>
-            <a:pPr lvl="0" indent="0" marL="0">
-              <a:buNone/>
-            </a:pPr>
-            <a:r>
-              <a:rPr/>
-              <a:t>Which to reach for</a:t>
-            </a:r>
-          </a:p>
-        </p:txBody>
-      </p:sp>
-      <p:sp>
-        <p:nvSpPr>
-          <p:cNvPr id="3" name="Content Placeholder 2"/>
-          <p:cNvSpPr>
-            <a:spLocks noGrp="1"/>
-          </p:cNvSpPr>
-          <p:nvPr>
-            <p:ph idx="1"/>
-          </p:nvPr>
-        </p:nvSpPr>
-        <p:spPr/>
-        <p:txBody>
-          <a:bodyPr/>
-          <a:lstStyle/>
-          <a:p>
-            <a:pPr lvl="0"/>
-            <a:r>
-              <a:rPr b="1"/>
-              <a:t>Random forest</a:t>
-            </a:r>
-            <a:r>
-              <a:rPr/>
-              <a:t> — few knobs, hard to break, a strong baseline in one line</a:t>
-            </a:r>
-          </a:p>
-          <a:p>
-            <a:pPr lvl="0"/>
-            <a:r>
-              <a:rPr b="1"/>
-              <a:t>Boosting</a:t>
-            </a:r>
-            <a:r>
-              <a:rPr/>
-              <a:t> — usually wins on tabular data, and demands tuning to do so</a:t>
-            </a:r>
-          </a:p>
-          <a:p>
-            <a:pPr lvl="0" indent="0" marL="0">
-              <a:buNone/>
-            </a:pPr>
-            <a:r>
-              <a:rPr/>
-              <a:t>Start with a forest. If a tuned boosted model cannot beat it by a margin you would defend, report the forest and spend your time elsewhere.</a:t>
-            </a:r>
-          </a:p>
-        </p:txBody>
-      </p:sp>
-    </p:spTree>
-  </p:cSld>
-</p:sld>
-</file>
-
-<file path=ppt/slides/slide19.xml><?xml version="1.0" encoding="utf-8"?>
-<p:sld xmlns:a="http://schemas.openxmlformats.org/drawingml/2006/main" xmlns:r="http://schemas.openxmlformats.org/officeDocument/2006/relationships" xmlns:p="http://schemas.openxmlformats.org/presentationml/2006/main">
-  <p:cSld>
-    <p:spTree>
-      <p:nvGrpSpPr>
-        <p:cNvPr id="1" name=""/>
-        <p:cNvGrpSpPr/>
-        <p:nvPr/>
-      </p:nvGrpSpPr>
-      <p:grpSpPr>
-        <a:xfrm>
-          <a:off x="0" y="0"/>
-          <a:ext cx="0" cy="0"/>
-          <a:chOff x="0" y="0"/>
-          <a:chExt cx="0" cy="0"/>
-        </a:xfrm>
-      </p:grpSpPr>
-      <p:sp>
-        <p:nvSpPr>
-          <p:cNvPr id="2" name="Title 1"/>
-          <p:cNvSpPr>
-            <a:spLocks noGrp="1"/>
-          </p:cNvSpPr>
-          <p:nvPr>
-            <p:ph type="title"/>
-          </p:nvPr>
-        </p:nvSpPr>
-        <p:spPr>
-          <a:xfrm>
-            <a:off x="722313" y="3305176"/>
-            <a:ext cx="7772400" cy="1021556"/>
-          </a:xfrm>
-        </p:spPr>
-        <p:txBody>
-          <a:bodyPr/>
-          <a:lstStyle/>
-          <a:p>
-            <a:pPr lvl="0" indent="0" marL="0">
-              <a:buNone/>
-            </a:pPr>
-            <a:r>
-              <a:rPr/>
-              <a:t>Doing it</a:t>
-            </a:r>
-          </a:p>
-        </p:txBody>
-      </p:sp>
-    </p:spTree>
-  </p:cSld>
-</p:sld>
-</file>
-
-<file path=ppt/slides/slide2.xml><?xml version="1.0" encoding="utf-8"?>
-<p:sld xmlns:a="http://schemas.openxmlformats.org/drawingml/2006/main" xmlns:r="http://schemas.openxmlformats.org/officeDocument/2006/relationships" xmlns:p="http://schemas.openxmlformats.org/presentationml/2006/main">
-  <p:cSld>
-    <p:spTree>
-      <p:nvGrpSpPr>
-        <p:cNvPr id="1" name=""/>
-        <p:cNvGrpSpPr/>
-        <p:nvPr/>
-      </p:nvGrpSpPr>
-      <p:grpSpPr>
-        <a:xfrm>
-          <a:off x="0" y="0"/>
-          <a:ext cx="0" cy="0"/>
-          <a:chOff x="0" y="0"/>
-          <a:chExt cx="0" cy="0"/>
-        </a:xfrm>
-      </p:grpSpPr>
-      <p:sp>
-        <p:nvSpPr>
-          <p:cNvPr id="2" name="Title 1"/>
-          <p:cNvSpPr>
-            <a:spLocks noGrp="1"/>
-          </p:cNvSpPr>
-          <p:nvPr>
-            <p:ph type="title"/>
-          </p:nvPr>
-        </p:nvSpPr>
-        <p:spPr>
-          <a:xfrm>
-            <a:off x="722313" y="3305176"/>
-            <a:ext cx="7772400" cy="1021556"/>
-          </a:xfrm>
-        </p:spPr>
-        <p:txBody>
-          <a:bodyPr/>
-          <a:lstStyle/>
-          <a:p>
-            <a:pPr lvl="0" indent="0" marL="0">
-              <a:buNone/>
-            </a:pPr>
-            <a:r>
-              <a:rPr/>
-              <a:t>Where we are</a:t>
-            </a:r>
-          </a:p>
-        </p:txBody>
-      </p:sp>
-    </p:spTree>
-  </p:cSld>
-</p:sld>
-</file>
-
-<file path=ppt/slides/slide20.xml><?xml version="1.0" encoding="utf-8"?>
-<p:sld xmlns:a="http://schemas.openxmlformats.org/drawingml/2006/main" xmlns:r="http://schemas.openxmlformats.org/officeDocument/2006/relationships" xmlns:p="http://schemas.openxmlformats.org/presentationml/2006/main">
-  <p:cSld>
-    <p:spTree>
-      <p:nvGrpSpPr>
-        <p:cNvPr id="1" name=""/>
-        <p:cNvGrpSpPr/>
-        <p:nvPr/>
-      </p:nvGrpSpPr>
-      <p:grpSpPr>
-        <a:xfrm>
-          <a:off x="0" y="0"/>
-          <a:ext cx="0" cy="0"/>
-          <a:chOff x="0" y="0"/>
-          <a:chExt cx="0" cy="0"/>
-        </a:xfrm>
-      </p:grpSpPr>
-      <p:sp>
-        <p:nvSpPr>
-          <p:cNvPr id="2" name="Title 1"/>
-          <p:cNvSpPr>
-            <a:spLocks noGrp="1"/>
-          </p:cNvSpPr>
-          <p:nvPr>
-            <p:ph type="title"/>
-          </p:nvPr>
-        </p:nvSpPr>
-        <p:spPr/>
-        <p:txBody>
-          <a:bodyPr/>
-          <a:lstStyle/>
-          <a:p>
-            <a:pPr lvl="0" indent="0" marL="0">
-              <a:buNone/>
-            </a:pPr>
-            <a:r>
-              <a:rPr/>
-              <a:t>Build the panel</a:t>
-            </a:r>
-          </a:p>
-        </p:txBody>
-      </p:sp>
-      <mc:AlternateContent xmlns:mc="http://schemas.openxmlformats.org/markup-compatibility/2006">
-        <mc:Choice xmlns:a14="http://schemas.microsoft.com/office/drawing/2010/main" Requires="a14">
-          <p:sp>
-            <p:nvSpPr>
-              <p:cNvPr id="3" name="Content Placeholder 2"/>
-              <p:cNvSpPr>
-                <a:spLocks noGrp="1"/>
-              </p:cNvSpPr>
-              <p:nvPr>
-                <p:ph idx="1"/>
-              </p:nvPr>
-            </p:nvSpPr>
-            <p:spPr/>
-            <p:txBody>
-              <a:bodyPr/>
-              <a:lstStyle/>
-              <a:p>
-                <a:pPr lvl="0" indent="0">
-                  <a:buNone/>
-                </a:pPr>
-                <a:r>
-                  <a:rPr b="1">
-                    <a:solidFill>
-                      <a:srgbClr val="008000"/>
-                    </a:solidFill>
-                    <a:latin typeface="Courier"/>
-                  </a:rPr>
-                  <a:t>import</a:t>
-                </a:r>
-                <a:r>
-                  <a:rPr>
-                    <a:latin typeface="Courier"/>
-                  </a:rPr>
-                  <a:t> pandas </a:t>
-                </a:r>
-                <a:r>
-                  <a:rPr b="1">
-                    <a:solidFill>
-                      <a:srgbClr val="008000"/>
-                    </a:solidFill>
-                    <a:latin typeface="Courier"/>
-                  </a:rPr>
-                  <a:t>as</a:t>
-                </a:r>
-                <a:r>
-                  <a:rPr>
-                    <a:latin typeface="Courier"/>
-                  </a:rPr>
-                  <a:t> pd</a:t>
-                </a:r>
-                <a:br/>
-                <a:br/>
-                <a:r>
-                  <a:rPr>
-                    <a:latin typeface="Courier"/>
-                  </a:rPr>
-                  <a:t>core </a:t>
-                </a:r>
-                <a:r>
-                  <a:rPr>
-                    <a:solidFill>
-                      <a:srgbClr val="666666"/>
-                    </a:solidFill>
-                    <a:latin typeface="Courier"/>
-                  </a:rPr>
-                  <a:t>=</a:t>
-                </a:r>
-                <a:r>
-                  <a:rPr>
-                    <a:latin typeface="Courier"/>
-                  </a:rPr>
-                  <a:t> pd.read_parquet(</a:t>
-                </a:r>
-                <a:r>
-                  <a:rPr>
-                    <a:solidFill>
-                      <a:srgbClr val="4070A0"/>
-                    </a:solidFill>
-                    <a:latin typeface="Courier"/>
-                  </a:rPr>
-                  <a:t>"data/spine/core.parquet"</a:t>
-                </a:r>
-                <a:r>
-                  <a:rPr>
-                    <a:latin typeface="Courier"/>
-                  </a:rPr>
-                  <a:t>)</a:t>
-                </a:r>
-                <a:br/>
-                <a:r>
-                  <a:rPr>
-                    <a:latin typeface="Courier"/>
-                  </a:rPr>
-                  <a:t>c    </a:t>
-                </a:r>
-                <a:r>
-                  <a:rPr>
-                    <a:solidFill>
-                      <a:srgbClr val="666666"/>
-                    </a:solidFill>
-                    <a:latin typeface="Courier"/>
-                  </a:rPr>
-                  <a:t>=</a:t>
-                </a:r>
-                <a:r>
-                  <a:rPr>
-                    <a:latin typeface="Courier"/>
-                  </a:rPr>
-                  <a:t> pd.read_parquet(</a:t>
-                </a:r>
-                <a:r>
-                  <a:rPr>
-                    <a:solidFill>
-                      <a:srgbClr val="4070A0"/>
-                    </a:solidFill>
-                    <a:latin typeface="Courier"/>
-                  </a:rPr>
-                  <a:t>"data/spine/angle_c_country.parquet"</a:t>
-                </a:r>
-                <a:r>
-                  <a:rPr>
-                    <a:latin typeface="Courier"/>
-                  </a:rPr>
-                  <a:t>)</a:t>
-                </a:r>
-                <a:br/>
-                <a:br/>
-                <a:r>
-                  <a:rPr>
-                    <a:latin typeface="Courier"/>
-                  </a:rPr>
-                  <a:t>df </a:t>
-                </a:r>
-                <a:r>
-                  <a:rPr>
-                    <a:solidFill>
-                      <a:srgbClr val="666666"/>
-                    </a:solidFill>
-                    <a:latin typeface="Courier"/>
-                  </a:rPr>
-                  <a:t>=</a:t>
-                </a:r>
-                <a:r>
-                  <a:rPr>
-                    <a:latin typeface="Courier"/>
-                  </a:rPr>
-                  <a:t> core.merge(c.drop(columns</a:t>
-                </a:r>
-                <a:r>
-                  <a:rPr>
-                    <a:solidFill>
-                      <a:srgbClr val="666666"/>
-                    </a:solidFill>
-                    <a:latin typeface="Courier"/>
-                  </a:rPr>
-                  <a:t>=</a:t>
-                </a:r>
-                <a:r>
-                  <a:rPr>
-                    <a:latin typeface="Courier"/>
-                  </a:rPr>
-                  <a:t>[</a:t>
-                </a:r>
-                <a:r>
-                  <a:rPr>
-                    <a:solidFill>
-                      <a:srgbClr val="4070A0"/>
-                    </a:solidFill>
-                    <a:latin typeface="Courier"/>
-                  </a:rPr>
-                  <a:t>"flag"</a:t>
-                </a:r>
-                <a:r>
-                  <a:rPr>
-                    <a:latin typeface="Courier"/>
-                  </a:rPr>
-                  <a:t>]), on</a:t>
-                </a:r>
-                <a:r>
-                  <a:rPr>
-                    <a:solidFill>
-                      <a:srgbClr val="666666"/>
-                    </a:solidFill>
-                    <a:latin typeface="Courier"/>
-                  </a:rPr>
-                  <a:t>=</a:t>
-                </a:r>
-                <a:r>
-                  <a:rPr>
-                    <a:latin typeface="Courier"/>
-                  </a:rPr>
-                  <a:t>[</a:t>
-                </a:r>
-                <a:r>
-                  <a:rPr>
-                    <a:solidFill>
-                      <a:srgbClr val="4070A0"/>
-                    </a:solidFill>
-                    <a:latin typeface="Courier"/>
-                  </a:rPr>
-                  <a:t>"geo"</a:t>
-                </a:r>
-                <a:r>
-                  <a:rPr>
-                    <a:latin typeface="Courier"/>
-                  </a:rPr>
-                  <a:t>, </a:t>
-                </a:r>
-                <a:r>
-                  <a:rPr>
-                    <a:solidFill>
-                      <a:srgbClr val="4070A0"/>
-                    </a:solidFill>
-                    <a:latin typeface="Courier"/>
-                  </a:rPr>
-                  <a:t>"time"</a:t>
-                </a:r>
-                <a:r>
-                  <a:rPr>
-                    <a:latin typeface="Courier"/>
-                  </a:rPr>
-                  <a:t>], how</a:t>
-                </a:r>
-                <a:r>
-                  <a:rPr>
-                    <a:solidFill>
-                      <a:srgbClr val="666666"/>
-                    </a:solidFill>
-                    <a:latin typeface="Courier"/>
-                  </a:rPr>
-                  <a:t>=</a:t>
-                </a:r>
-                <a:r>
-                  <a:rPr>
-                    <a:solidFill>
-                      <a:srgbClr val="4070A0"/>
-                    </a:solidFill>
-                    <a:latin typeface="Courier"/>
-                  </a:rPr>
-                  <a:t>"inner"</a:t>
-                </a:r>
-                <a:r>
-                  <a:rPr>
-                    <a:latin typeface="Courier"/>
-                  </a:rPr>
-                  <a:t>)</a:t>
-                </a:r>
-                <a:br/>
-                <a:r>
-                  <a:rPr>
-                    <a:latin typeface="Courier"/>
-                  </a:rPr>
-                  <a:t>d  </a:t>
-                </a:r>
-                <a:r>
-                  <a:rPr>
-                    <a:solidFill>
-                      <a:srgbClr val="666666"/>
-                    </a:solidFill>
-                    <a:latin typeface="Courier"/>
-                  </a:rPr>
-                  <a:t>=</a:t>
-                </a:r>
-                <a:r>
-                  <a:rPr>
-                    <a:latin typeface="Courier"/>
-                  </a:rPr>
-                  <a:t> df.dropna(subset</a:t>
-                </a:r>
-                <a:r>
-                  <a:rPr>
-                    <a:solidFill>
-                      <a:srgbClr val="666666"/>
-                    </a:solidFill>
-                    <a:latin typeface="Courier"/>
-                  </a:rPr>
-                  <a:t>=</a:t>
-                </a:r>
-                <a:r>
-                  <a:rPr>
-                    <a:latin typeface="Courier"/>
-                  </a:rPr>
-                  <a:t>[</a:t>
-                </a:r>
-                <a:r>
-                  <a:rPr>
-                    <a:solidFill>
-                      <a:srgbClr val="4070A0"/>
-                    </a:solidFill>
-                    <a:latin typeface="Courier"/>
-                  </a:rPr>
-                  <a:t>"prod_growth"</a:t>
-                </a:r>
-                <a:r>
-                  <a:rPr>
-                    <a:latin typeface="Courier"/>
-                  </a:rPr>
-                  <a:t>]).copy()</a:t>
-                </a:r>
-                <a:br/>
-                <a:r>
-                  <a:rPr>
-                    <a:solidFill>
-                      <a:srgbClr val="008000"/>
-                    </a:solidFill>
-                    <a:latin typeface="Courier"/>
-                  </a:rPr>
-                  <a:t>print</a:t>
-                </a:r>
-                <a:r>
-                  <a:rPr>
-                    <a:latin typeface="Courier"/>
-                  </a:rPr>
-                  <a:t>(d.shape)</a:t>
-                </a:r>
-              </a:p>
-              <a:p>
-                <a:pPr lvl="0" indent="0" marL="0">
-                  <a:buNone/>
-                </a:pPr>
-                <a:r>
-                  <a:rPr/>
-                  <a:t>The merge restricts you to 2014–2024, because that is where the adoption module exists. Say so when you report </a:t>
+                  <a:t> is essential: small </a:t>
                 </a:r>
                 <a14:m>
                   <m:oMath xmlns:m="http://schemas.openxmlformats.org/officeDocument/2006/math">
                     <m:r>
-                      <m:t>n</m:t>
+                      <m:t>ν</m:t>
+                    </m:r>
+                  </m:oMath>
+                </a14:m>
+                <a:r>
+                  <a:rPr/>
+                  <a:t> (0.01–0.1) with many trees generalises far better than large </a:t>
+                </a:r>
+                <a14:m>
+                  <m:oMath xmlns:m="http://schemas.openxmlformats.org/officeDocument/2006/math">
+                    <m:r>
+                      <m:t>ν</m:t>
+                    </m:r>
+                  </m:oMath>
+                </a14:m>
+                <a:r>
+                  <a:rPr/>
+                  <a:t> with few. Halving </a:t>
+                </a:r>
+                <a14:m>
+                  <m:oMath xmlns:m="http://schemas.openxmlformats.org/officeDocument/2006/math">
+                    <m:r>
+                      <m:t>ν</m:t>
+                    </m:r>
+                  </m:oMath>
+                </a14:m>
+                <a:r>
+                  <a:rPr/>
+                  <a:t> roughly doubles the required </a:t>
+                </a:r>
+                <a14:m>
+                  <m:oMath xmlns:m="http://schemas.openxmlformats.org/officeDocument/2006/math">
+                    <m:r>
+                      <m:t>M</m:t>
                     </m:r>
                   </m:oMath>
                 </a14:m>
@@ -4896,1164 +5846,7 @@
 </p:sld>
 </file>
 
-<file path=ppt/slides/slide21.xml><?xml version="1.0" encoding="utf-8"?>
-<p:sld xmlns:a="http://schemas.openxmlformats.org/drawingml/2006/main" xmlns:r="http://schemas.openxmlformats.org/officeDocument/2006/relationships" xmlns:p="http://schemas.openxmlformats.org/presentationml/2006/main">
-  <p:cSld>
-    <p:spTree>
-      <p:nvGrpSpPr>
-        <p:cNvPr id="1" name=""/>
-        <p:cNvGrpSpPr/>
-        <p:nvPr/>
-      </p:nvGrpSpPr>
-      <p:grpSpPr>
-        <a:xfrm>
-          <a:off x="0" y="0"/>
-          <a:ext cx="0" cy="0"/>
-          <a:chOff x="0" y="0"/>
-          <a:chExt cx="0" cy="0"/>
-        </a:xfrm>
-      </p:grpSpPr>
-      <p:sp>
-        <p:nvSpPr>
-          <p:cNvPr id="2" name="Title 1"/>
-          <p:cNvSpPr>
-            <a:spLocks noGrp="1"/>
-          </p:cNvSpPr>
-          <p:nvPr>
-            <p:ph type="title"/>
-          </p:nvPr>
-        </p:nvSpPr>
-        <p:spPr/>
-        <p:txBody>
-          <a:bodyPr/>
-          <a:lstStyle/>
-          <a:p>
-            <a:pPr lvl="0" indent="0" marL="0">
-              <a:buNone/>
-            </a:pPr>
-            <a:r>
-              <a:rPr/>
-              <a:t>Forest, honestly validated</a:t>
-            </a:r>
-          </a:p>
-        </p:txBody>
-      </p:sp>
-      <p:sp>
-        <p:nvSpPr>
-          <p:cNvPr id="3" name="Content Placeholder 2"/>
-          <p:cNvSpPr>
-            <a:spLocks noGrp="1"/>
-          </p:cNvSpPr>
-          <p:nvPr>
-            <p:ph idx="1"/>
-          </p:nvPr>
-        </p:nvSpPr>
-        <p:spPr/>
-        <p:txBody>
-          <a:bodyPr/>
-          <a:lstStyle/>
-          <a:p>
-            <a:pPr lvl="0" indent="0">
-              <a:buNone/>
-            </a:pPr>
-            <a:r>
-              <a:rPr b="1">
-                <a:solidFill>
-                  <a:srgbClr val="008000"/>
-                </a:solidFill>
-                <a:latin typeface="Courier"/>
-              </a:rPr>
-              <a:t>import</a:t>
-            </a:r>
-            <a:r>
-              <a:rPr>
-                <a:latin typeface="Courier"/>
-              </a:rPr>
-              <a:t> numpy </a:t>
-            </a:r>
-            <a:r>
-              <a:rPr b="1">
-                <a:solidFill>
-                  <a:srgbClr val="008000"/>
-                </a:solidFill>
-                <a:latin typeface="Courier"/>
-              </a:rPr>
-              <a:t>as</a:t>
-            </a:r>
-            <a:r>
-              <a:rPr>
-                <a:latin typeface="Courier"/>
-              </a:rPr>
-              <a:t> np</a:t>
-            </a:r>
-            <a:br/>
-            <a:r>
-              <a:rPr b="1">
-                <a:solidFill>
-                  <a:srgbClr val="008000"/>
-                </a:solidFill>
-                <a:latin typeface="Courier"/>
-              </a:rPr>
-              <a:t>from</a:t>
-            </a:r>
-            <a:r>
-              <a:rPr>
-                <a:latin typeface="Courier"/>
-              </a:rPr>
-              <a:t> sklearn.ensemble </a:t>
-            </a:r>
-            <a:r>
-              <a:rPr b="1">
-                <a:solidFill>
-                  <a:srgbClr val="008000"/>
-                </a:solidFill>
-                <a:latin typeface="Courier"/>
-              </a:rPr>
-              <a:t>import</a:t>
-            </a:r>
-            <a:r>
-              <a:rPr>
-                <a:latin typeface="Courier"/>
-              </a:rPr>
-              <a:t> RandomForestRegressor</a:t>
-            </a:r>
-            <a:br/>
-            <a:r>
-              <a:rPr b="1">
-                <a:solidFill>
-                  <a:srgbClr val="008000"/>
-                </a:solidFill>
-                <a:latin typeface="Courier"/>
-              </a:rPr>
-              <a:t>from</a:t>
-            </a:r>
-            <a:r>
-              <a:rPr>
-                <a:latin typeface="Courier"/>
-              </a:rPr>
-              <a:t> sklearn.model_selection </a:t>
-            </a:r>
-            <a:r>
-              <a:rPr b="1">
-                <a:solidFill>
-                  <a:srgbClr val="008000"/>
-                </a:solidFill>
-                <a:latin typeface="Courier"/>
-              </a:rPr>
-              <a:t>import</a:t>
-            </a:r>
-            <a:r>
-              <a:rPr>
-                <a:latin typeface="Courier"/>
-              </a:rPr>
-              <a:t> cross_val_score, GroupKFold</a:t>
-            </a:r>
-            <a:br/>
-            <a:br/>
-            <a:r>
-              <a:rPr>
-                <a:latin typeface="Courier"/>
-              </a:rPr>
-              <a:t>feat </a:t>
-            </a:r>
-            <a:r>
-              <a:rPr>
-                <a:solidFill>
-                  <a:srgbClr val="666666"/>
-                </a:solidFill>
-                <a:latin typeface="Courier"/>
-              </a:rPr>
-              <a:t>=</a:t>
-            </a:r>
-            <a:r>
-              <a:rPr>
-                <a:latin typeface="Courier"/>
-              </a:rPr>
-              <a:t> [c_ </a:t>
-            </a:r>
-            <a:r>
-              <a:rPr b="1">
-                <a:solidFill>
-                  <a:srgbClr val="007020"/>
-                </a:solidFill>
-                <a:latin typeface="Courier"/>
-              </a:rPr>
-              <a:t>for</a:t>
-            </a:r>
-            <a:r>
-              <a:rPr>
-                <a:latin typeface="Courier"/>
-              </a:rPr>
-              <a:t> c_ </a:t>
-            </a:r>
-            <a:r>
-              <a:rPr b="1">
-                <a:solidFill>
-                  <a:srgbClr val="007020"/>
-                </a:solidFill>
-                <a:latin typeface="Courier"/>
-              </a:rPr>
-              <a:t>in</a:t>
-            </a:r>
-            <a:r>
-              <a:rPr>
-                <a:latin typeface="Courier"/>
-              </a:rPr>
-              <a:t> d.columns</a:t>
-            </a:r>
-            <a:br/>
-            <a:r>
-              <a:rPr>
-                <a:latin typeface="Courier"/>
-              </a:rPr>
-              <a:t>        </a:t>
-            </a:r>
-            <a:r>
-              <a:rPr b="1">
-                <a:solidFill>
-                  <a:srgbClr val="007020"/>
-                </a:solidFill>
-                <a:latin typeface="Courier"/>
-              </a:rPr>
-              <a:t>if</a:t>
-            </a:r>
-            <a:r>
-              <a:rPr>
-                <a:latin typeface="Courier"/>
-              </a:rPr>
-              <a:t> c_ </a:t>
-            </a:r>
-            <a:r>
-              <a:rPr b="1">
-                <a:solidFill>
-                  <a:srgbClr val="007020"/>
-                </a:solidFill>
-                <a:latin typeface="Courier"/>
-              </a:rPr>
-              <a:t>not</a:t>
-            </a:r>
-            <a:r>
-              <a:rPr>
-                <a:latin typeface="Courier"/>
-              </a:rPr>
-              <a:t> </a:t>
-            </a:r>
-            <a:r>
-              <a:rPr b="1">
-                <a:solidFill>
-                  <a:srgbClr val="007020"/>
-                </a:solidFill>
-                <a:latin typeface="Courier"/>
-              </a:rPr>
-              <a:t>in</a:t>
-            </a:r>
-            <a:r>
-              <a:rPr>
-                <a:latin typeface="Courier"/>
-              </a:rPr>
-              <a:t> (</a:t>
-            </a:r>
-            <a:r>
-              <a:rPr>
-                <a:solidFill>
-                  <a:srgbClr val="4070A0"/>
-                </a:solidFill>
-                <a:latin typeface="Courier"/>
-              </a:rPr>
-              <a:t>"geo"</a:t>
-            </a:r>
-            <a:r>
-              <a:rPr>
-                <a:latin typeface="Courier"/>
-              </a:rPr>
-              <a:t>, </a:t>
-            </a:r>
-            <a:r>
-              <a:rPr>
-                <a:solidFill>
-                  <a:srgbClr val="4070A0"/>
-                </a:solidFill>
-                <a:latin typeface="Courier"/>
-              </a:rPr>
-              <a:t>"time"</a:t>
-            </a:r>
-            <a:r>
-              <a:rPr>
-                <a:latin typeface="Courier"/>
-              </a:rPr>
-              <a:t>, </a:t>
-            </a:r>
-            <a:r>
-              <a:rPr>
-                <a:solidFill>
-                  <a:srgbClr val="4070A0"/>
-                </a:solidFill>
-                <a:latin typeface="Courier"/>
-              </a:rPr>
-              <a:t>"flag"</a:t>
-            </a:r>
-            <a:r>
-              <a:rPr>
-                <a:latin typeface="Courier"/>
-              </a:rPr>
-              <a:t>, </a:t>
-            </a:r>
-            <a:r>
-              <a:rPr>
-                <a:solidFill>
-                  <a:srgbClr val="4070A0"/>
-                </a:solidFill>
-                <a:latin typeface="Courier"/>
-              </a:rPr>
-              <a:t>"prod_growth"</a:t>
-            </a:r>
-            <a:r>
-              <a:rPr>
-                <a:latin typeface="Courier"/>
-              </a:rPr>
-              <a:t>,</a:t>
-            </a:r>
-            <a:br/>
-            <a:r>
-              <a:rPr>
-                <a:latin typeface="Courier"/>
-              </a:rPr>
-              <a:t>                      </a:t>
-            </a:r>
-            <a:r>
-              <a:rPr>
-                <a:solidFill>
-                  <a:srgbClr val="4070A0"/>
-                </a:solidFill>
-                <a:latin typeface="Courier"/>
-              </a:rPr>
-              <a:t>"falling_behind"</a:t>
-            </a:r>
-            <a:r>
-              <a:rPr>
-                <a:latin typeface="Courier"/>
-              </a:rPr>
-              <a:t>, </a:t>
-            </a:r>
-            <a:r>
-              <a:rPr>
-                <a:solidFill>
-                  <a:srgbClr val="4070A0"/>
-                </a:solidFill>
-                <a:latin typeface="Courier"/>
-              </a:rPr>
-              <a:t>"falling_behind_next"</a:t>
-            </a:r>
-            <a:r>
-              <a:rPr>
-                <a:latin typeface="Courier"/>
-              </a:rPr>
-              <a:t>)]</a:t>
-            </a:r>
-            <a:br/>
-            <a:r>
-              <a:rPr>
-                <a:latin typeface="Courier"/>
-              </a:rPr>
-              <a:t>X, y, g </a:t>
-            </a:r>
-            <a:r>
-              <a:rPr>
-                <a:solidFill>
-                  <a:srgbClr val="666666"/>
-                </a:solidFill>
-                <a:latin typeface="Courier"/>
-              </a:rPr>
-              <a:t>=</a:t>
-            </a:r>
-            <a:r>
-              <a:rPr>
-                <a:latin typeface="Courier"/>
-              </a:rPr>
-              <a:t> d[feat].fillna(d[feat].median(numeric_only</a:t>
-            </a:r>
-            <a:r>
-              <a:rPr>
-                <a:solidFill>
-                  <a:srgbClr val="666666"/>
-                </a:solidFill>
-                <a:latin typeface="Courier"/>
-              </a:rPr>
-              <a:t>=</a:t>
-            </a:r>
-            <a:r>
-              <a:rPr>
-                <a:solidFill>
-                  <a:srgbClr val="19177C"/>
-                </a:solidFill>
-                <a:latin typeface="Courier"/>
-              </a:rPr>
-              <a:t>True</a:t>
-            </a:r>
-            <a:r>
-              <a:rPr>
-                <a:latin typeface="Courier"/>
-              </a:rPr>
-              <a:t>)), d[</a:t>
-            </a:r>
-            <a:r>
-              <a:rPr>
-                <a:solidFill>
-                  <a:srgbClr val="4070A0"/>
-                </a:solidFill>
-                <a:latin typeface="Courier"/>
-              </a:rPr>
-              <a:t>"prod_growth"</a:t>
-            </a:r>
-            <a:r>
-              <a:rPr>
-                <a:latin typeface="Courier"/>
-              </a:rPr>
-              <a:t>], d[</a:t>
-            </a:r>
-            <a:r>
-              <a:rPr>
-                <a:solidFill>
-                  <a:srgbClr val="4070A0"/>
-                </a:solidFill>
-                <a:latin typeface="Courier"/>
-              </a:rPr>
-              <a:t>"geo"</a:t>
-            </a:r>
-            <a:r>
-              <a:rPr>
-                <a:latin typeface="Courier"/>
-              </a:rPr>
-              <a:t>]</a:t>
-            </a:r>
-            <a:br/>
-            <a:br/>
-            <a:r>
-              <a:rPr>
-                <a:latin typeface="Courier"/>
-              </a:rPr>
-              <a:t>rf </a:t>
-            </a:r>
-            <a:r>
-              <a:rPr>
-                <a:solidFill>
-                  <a:srgbClr val="666666"/>
-                </a:solidFill>
-                <a:latin typeface="Courier"/>
-              </a:rPr>
-              <a:t>=</a:t>
-            </a:r>
-            <a:r>
-              <a:rPr>
-                <a:latin typeface="Courier"/>
-              </a:rPr>
-              <a:t> RandomForestRegressor(n_estimators</a:t>
-            </a:r>
-            <a:r>
-              <a:rPr>
-                <a:solidFill>
-                  <a:srgbClr val="666666"/>
-                </a:solidFill>
-                <a:latin typeface="Courier"/>
-              </a:rPr>
-              <a:t>=</a:t>
-            </a:r>
-            <a:r>
-              <a:rPr>
-                <a:solidFill>
-                  <a:srgbClr val="40A070"/>
-                </a:solidFill>
-                <a:latin typeface="Courier"/>
-              </a:rPr>
-              <a:t>500</a:t>
-            </a:r>
-            <a:r>
-              <a:rPr>
-                <a:latin typeface="Courier"/>
-              </a:rPr>
-              <a:t>, min_samples_leaf</a:t>
-            </a:r>
-            <a:r>
-              <a:rPr>
-                <a:solidFill>
-                  <a:srgbClr val="666666"/>
-                </a:solidFill>
-                <a:latin typeface="Courier"/>
-              </a:rPr>
-              <a:t>=</a:t>
-            </a:r>
-            <a:r>
-              <a:rPr>
-                <a:solidFill>
-                  <a:srgbClr val="40A070"/>
-                </a:solidFill>
-                <a:latin typeface="Courier"/>
-              </a:rPr>
-              <a:t>3</a:t>
-            </a:r>
-            <a:r>
-              <a:rPr>
-                <a:latin typeface="Courier"/>
-              </a:rPr>
-              <a:t>, random_state</a:t>
-            </a:r>
-            <a:r>
-              <a:rPr>
-                <a:solidFill>
-                  <a:srgbClr val="666666"/>
-                </a:solidFill>
-                <a:latin typeface="Courier"/>
-              </a:rPr>
-              <a:t>=</a:t>
-            </a:r>
-            <a:r>
-              <a:rPr>
-                <a:solidFill>
-                  <a:srgbClr val="40A070"/>
-                </a:solidFill>
-                <a:latin typeface="Courier"/>
-              </a:rPr>
-              <a:t>60033</a:t>
-            </a:r>
-            <a:r>
-              <a:rPr>
-                <a:latin typeface="Courier"/>
-              </a:rPr>
-              <a:t>)</a:t>
-            </a:r>
-            <a:br/>
-            <a:r>
-              <a:rPr>
-                <a:latin typeface="Courier"/>
-              </a:rPr>
-              <a:t>sc </a:t>
-            </a:r>
-            <a:r>
-              <a:rPr>
-                <a:solidFill>
-                  <a:srgbClr val="666666"/>
-                </a:solidFill>
-                <a:latin typeface="Courier"/>
-              </a:rPr>
-              <a:t>=</a:t>
-            </a:r>
-            <a:r>
-              <a:rPr>
-                <a:latin typeface="Courier"/>
-              </a:rPr>
-              <a:t> cross_val_score(rf, X, y, cv</a:t>
-            </a:r>
-            <a:r>
-              <a:rPr>
-                <a:solidFill>
-                  <a:srgbClr val="666666"/>
-                </a:solidFill>
-                <a:latin typeface="Courier"/>
-              </a:rPr>
-              <a:t>=</a:t>
-            </a:r>
-            <a:r>
-              <a:rPr>
-                <a:latin typeface="Courier"/>
-              </a:rPr>
-              <a:t>GroupKFold(</a:t>
-            </a:r>
-            <a:r>
-              <a:rPr>
-                <a:solidFill>
-                  <a:srgbClr val="40A070"/>
-                </a:solidFill>
-                <a:latin typeface="Courier"/>
-              </a:rPr>
-              <a:t>5</a:t>
-            </a:r>
-            <a:r>
-              <a:rPr>
-                <a:latin typeface="Courier"/>
-              </a:rPr>
-              <a:t>).split(X, y, g),</a:t>
-            </a:r>
-            <a:br/>
-            <a:r>
-              <a:rPr>
-                <a:latin typeface="Courier"/>
-              </a:rPr>
-              <a:t>                     scoring</a:t>
-            </a:r>
-            <a:r>
-              <a:rPr>
-                <a:solidFill>
-                  <a:srgbClr val="666666"/>
-                </a:solidFill>
-                <a:latin typeface="Courier"/>
-              </a:rPr>
-              <a:t>=</a:t>
-            </a:r>
-            <a:r>
-              <a:rPr>
-                <a:solidFill>
-                  <a:srgbClr val="4070A0"/>
-                </a:solidFill>
-                <a:latin typeface="Courier"/>
-              </a:rPr>
-              <a:t>"neg_root_mean_squared_error"</a:t>
-            </a:r>
-            <a:r>
-              <a:rPr>
-                <a:latin typeface="Courier"/>
-              </a:rPr>
-              <a:t>)</a:t>
-            </a:r>
-            <a:br/>
-            <a:r>
-              <a:rPr>
-                <a:solidFill>
-                  <a:srgbClr val="008000"/>
-                </a:solidFill>
-                <a:latin typeface="Courier"/>
-              </a:rPr>
-              <a:t>print</a:t>
-            </a:r>
-            <a:r>
-              <a:rPr>
-                <a:latin typeface="Courier"/>
-              </a:rPr>
-              <a:t>(</a:t>
-            </a:r>
-            <a:r>
-              <a:rPr>
-                <a:solidFill>
-                  <a:srgbClr val="4070A0"/>
-                </a:solidFill>
-                <a:latin typeface="Courier"/>
-              </a:rPr>
-              <a:t>"grouped CV RMSE:"</a:t>
-            </a:r>
-            <a:r>
-              <a:rPr>
-                <a:latin typeface="Courier"/>
-              </a:rPr>
-              <a:t>, </a:t>
-            </a:r>
-            <a:r>
-              <a:rPr>
-                <a:solidFill>
-                  <a:srgbClr val="008000"/>
-                </a:solidFill>
-                <a:latin typeface="Courier"/>
-              </a:rPr>
-              <a:t>round</a:t>
-            </a:r>
-            <a:r>
-              <a:rPr>
-                <a:latin typeface="Courier"/>
-              </a:rPr>
-              <a:t>(</a:t>
-            </a:r>
-            <a:r>
-              <a:rPr>
-                <a:solidFill>
-                  <a:srgbClr val="666666"/>
-                </a:solidFill>
-                <a:latin typeface="Courier"/>
-              </a:rPr>
-              <a:t>-</a:t>
-            </a:r>
-            <a:r>
-              <a:rPr>
-                <a:latin typeface="Courier"/>
-              </a:rPr>
-              <a:t>sc.mean(), </a:t>
-            </a:r>
-            <a:r>
-              <a:rPr>
-                <a:solidFill>
-                  <a:srgbClr val="40A070"/>
-                </a:solidFill>
-                <a:latin typeface="Courier"/>
-              </a:rPr>
-              <a:t>3</a:t>
-            </a:r>
-            <a:r>
-              <a:rPr>
-                <a:latin typeface="Courier"/>
-              </a:rPr>
-              <a:t>))</a:t>
-            </a:r>
-          </a:p>
-        </p:txBody>
-      </p:sp>
-    </p:spTree>
-  </p:cSld>
-</p:sld>
-</file>
-
-<file path=ppt/slides/slide22.xml><?xml version="1.0" encoding="utf-8"?>
-<p:sld xmlns:a="http://schemas.openxmlformats.org/drawingml/2006/main" xmlns:r="http://schemas.openxmlformats.org/officeDocument/2006/relationships" xmlns:p="http://schemas.openxmlformats.org/presentationml/2006/main">
-  <p:cSld>
-    <p:spTree>
-      <p:nvGrpSpPr>
-        <p:cNvPr id="1" name=""/>
-        <p:cNvGrpSpPr/>
-        <p:nvPr/>
-      </p:nvGrpSpPr>
-      <p:grpSpPr>
-        <a:xfrm>
-          <a:off x="0" y="0"/>
-          <a:ext cx="0" cy="0"/>
-          <a:chOff x="0" y="0"/>
-          <a:chExt cx="0" cy="0"/>
-        </a:xfrm>
-      </p:grpSpPr>
-      <p:sp>
-        <p:nvSpPr>
-          <p:cNvPr id="2" name="Title 1"/>
-          <p:cNvSpPr>
-            <a:spLocks noGrp="1"/>
-          </p:cNvSpPr>
-          <p:nvPr>
-            <p:ph type="title"/>
-          </p:nvPr>
-        </p:nvSpPr>
-        <p:spPr/>
-        <p:txBody>
-          <a:bodyPr/>
-          <a:lstStyle/>
-          <a:p>
-            <a:pPr lvl="0" indent="0" marL="0">
-              <a:buNone/>
-            </a:pPr>
-            <a:r>
-              <a:rPr/>
-              <a:t>Gradient boosting</a:t>
-            </a:r>
-          </a:p>
-        </p:txBody>
-      </p:sp>
-      <p:sp>
-        <p:nvSpPr>
-          <p:cNvPr id="3" name="Content Placeholder 2"/>
-          <p:cNvSpPr>
-            <a:spLocks noGrp="1"/>
-          </p:cNvSpPr>
-          <p:nvPr>
-            <p:ph idx="1"/>
-          </p:nvPr>
-        </p:nvSpPr>
-        <p:spPr/>
-        <p:txBody>
-          <a:bodyPr/>
-          <a:lstStyle/>
-          <a:p>
-            <a:pPr lvl="0" indent="0">
-              <a:buNone/>
-            </a:pPr>
-            <a:r>
-              <a:rPr b="1">
-                <a:solidFill>
-                  <a:srgbClr val="008000"/>
-                </a:solidFill>
-                <a:latin typeface="Courier"/>
-              </a:rPr>
-              <a:t>from</a:t>
-            </a:r>
-            <a:r>
-              <a:rPr>
-                <a:latin typeface="Courier"/>
-              </a:rPr>
-              <a:t> sklearn.ensemble </a:t>
-            </a:r>
-            <a:r>
-              <a:rPr b="1">
-                <a:solidFill>
-                  <a:srgbClr val="008000"/>
-                </a:solidFill>
-                <a:latin typeface="Courier"/>
-              </a:rPr>
-              <a:t>import</a:t>
-            </a:r>
-            <a:r>
-              <a:rPr>
-                <a:latin typeface="Courier"/>
-              </a:rPr>
-              <a:t> HistGradientBoostingRegressor</a:t>
-            </a:r>
-            <a:br/>
-            <a:br/>
-            <a:r>
-              <a:rPr>
-                <a:latin typeface="Courier"/>
-              </a:rPr>
-              <a:t>hgb </a:t>
-            </a:r>
-            <a:r>
-              <a:rPr>
-                <a:solidFill>
-                  <a:srgbClr val="666666"/>
-                </a:solidFill>
-                <a:latin typeface="Courier"/>
-              </a:rPr>
-              <a:t>=</a:t>
-            </a:r>
-            <a:r>
-              <a:rPr>
-                <a:latin typeface="Courier"/>
-              </a:rPr>
-              <a:t> HistGradientBoostingRegressor(</a:t>
-            </a:r>
-            <a:br/>
-            <a:r>
-              <a:rPr>
-                <a:latin typeface="Courier"/>
-              </a:rPr>
-              <a:t>    learning_rate</a:t>
-            </a:r>
-            <a:r>
-              <a:rPr>
-                <a:solidFill>
-                  <a:srgbClr val="666666"/>
-                </a:solidFill>
-                <a:latin typeface="Courier"/>
-              </a:rPr>
-              <a:t>=</a:t>
-            </a:r>
-            <a:r>
-              <a:rPr>
-                <a:solidFill>
-                  <a:srgbClr val="40A070"/>
-                </a:solidFill>
-                <a:latin typeface="Courier"/>
-              </a:rPr>
-              <a:t>0.05</a:t>
-            </a:r>
-            <a:r>
-              <a:rPr>
-                <a:latin typeface="Courier"/>
-              </a:rPr>
-              <a:t>, max_depth</a:t>
-            </a:r>
-            <a:r>
-              <a:rPr>
-                <a:solidFill>
-                  <a:srgbClr val="666666"/>
-                </a:solidFill>
-                <a:latin typeface="Courier"/>
-              </a:rPr>
-              <a:t>=</a:t>
-            </a:r>
-            <a:r>
-              <a:rPr>
-                <a:solidFill>
-                  <a:srgbClr val="40A070"/>
-                </a:solidFill>
-                <a:latin typeface="Courier"/>
-              </a:rPr>
-              <a:t>3</a:t>
-            </a:r>
-            <a:r>
-              <a:rPr>
-                <a:latin typeface="Courier"/>
-              </a:rPr>
-              <a:t>, max_iter</a:t>
-            </a:r>
-            <a:r>
-              <a:rPr>
-                <a:solidFill>
-                  <a:srgbClr val="666666"/>
-                </a:solidFill>
-                <a:latin typeface="Courier"/>
-              </a:rPr>
-              <a:t>=</a:t>
-            </a:r>
-            <a:r>
-              <a:rPr>
-                <a:solidFill>
-                  <a:srgbClr val="40A070"/>
-                </a:solidFill>
-                <a:latin typeface="Courier"/>
-              </a:rPr>
-              <a:t>600</a:t>
-            </a:r>
-            <a:r>
-              <a:rPr>
-                <a:latin typeface="Courier"/>
-              </a:rPr>
-              <a:t>,</a:t>
-            </a:r>
-            <a:br/>
-            <a:r>
-              <a:rPr>
-                <a:latin typeface="Courier"/>
-              </a:rPr>
-              <a:t>    early_stopping</a:t>
-            </a:r>
-            <a:r>
-              <a:rPr>
-                <a:solidFill>
-                  <a:srgbClr val="666666"/>
-                </a:solidFill>
-                <a:latin typeface="Courier"/>
-              </a:rPr>
-              <a:t>=</a:t>
-            </a:r>
-            <a:r>
-              <a:rPr>
-                <a:solidFill>
-                  <a:srgbClr val="19177C"/>
-                </a:solidFill>
-                <a:latin typeface="Courier"/>
-              </a:rPr>
-              <a:t>True</a:t>
-            </a:r>
-            <a:r>
-              <a:rPr>
-                <a:latin typeface="Courier"/>
-              </a:rPr>
-              <a:t>, validation_fraction</a:t>
-            </a:r>
-            <a:r>
-              <a:rPr>
-                <a:solidFill>
-                  <a:srgbClr val="666666"/>
-                </a:solidFill>
-                <a:latin typeface="Courier"/>
-              </a:rPr>
-              <a:t>=</a:t>
-            </a:r>
-            <a:r>
-              <a:rPr>
-                <a:solidFill>
-                  <a:srgbClr val="40A070"/>
-                </a:solidFill>
-                <a:latin typeface="Courier"/>
-              </a:rPr>
-              <a:t>0.2</a:t>
-            </a:r>
-            <a:r>
-              <a:rPr>
-                <a:latin typeface="Courier"/>
-              </a:rPr>
-              <a:t>, random_state</a:t>
-            </a:r>
-            <a:r>
-              <a:rPr>
-                <a:solidFill>
-                  <a:srgbClr val="666666"/>
-                </a:solidFill>
-                <a:latin typeface="Courier"/>
-              </a:rPr>
-              <a:t>=</a:t>
-            </a:r>
-            <a:r>
-              <a:rPr>
-                <a:solidFill>
-                  <a:srgbClr val="40A070"/>
-                </a:solidFill>
-                <a:latin typeface="Courier"/>
-              </a:rPr>
-              <a:t>60033</a:t>
-            </a:r>
-            <a:r>
-              <a:rPr>
-                <a:latin typeface="Courier"/>
-              </a:rPr>
-              <a:t>,</a:t>
-            </a:r>
-            <a:br/>
-            <a:r>
-              <a:rPr>
-                <a:latin typeface="Courier"/>
-              </a:rPr>
-              <a:t>)</a:t>
-            </a:r>
-            <a:br/>
-            <a:r>
-              <a:rPr>
-                <a:latin typeface="Courier"/>
-              </a:rPr>
-              <a:t>sc </a:t>
-            </a:r>
-            <a:r>
-              <a:rPr>
-                <a:solidFill>
-                  <a:srgbClr val="666666"/>
-                </a:solidFill>
-                <a:latin typeface="Courier"/>
-              </a:rPr>
-              <a:t>=</a:t>
-            </a:r>
-            <a:r>
-              <a:rPr>
-                <a:latin typeface="Courier"/>
-              </a:rPr>
-              <a:t> cross_val_score(hgb, X, y, cv</a:t>
-            </a:r>
-            <a:r>
-              <a:rPr>
-                <a:solidFill>
-                  <a:srgbClr val="666666"/>
-                </a:solidFill>
-                <a:latin typeface="Courier"/>
-              </a:rPr>
-              <a:t>=</a:t>
-            </a:r>
-            <a:r>
-              <a:rPr>
-                <a:latin typeface="Courier"/>
-              </a:rPr>
-              <a:t>GroupKFold(</a:t>
-            </a:r>
-            <a:r>
-              <a:rPr>
-                <a:solidFill>
-                  <a:srgbClr val="40A070"/>
-                </a:solidFill>
-                <a:latin typeface="Courier"/>
-              </a:rPr>
-              <a:t>5</a:t>
-            </a:r>
-            <a:r>
-              <a:rPr>
-                <a:latin typeface="Courier"/>
-              </a:rPr>
-              <a:t>).split(X, y, g),</a:t>
-            </a:r>
-            <a:br/>
-            <a:r>
-              <a:rPr>
-                <a:latin typeface="Courier"/>
-              </a:rPr>
-              <a:t>                     scoring</a:t>
-            </a:r>
-            <a:r>
-              <a:rPr>
-                <a:solidFill>
-                  <a:srgbClr val="666666"/>
-                </a:solidFill>
-                <a:latin typeface="Courier"/>
-              </a:rPr>
-              <a:t>=</a:t>
-            </a:r>
-            <a:r>
-              <a:rPr>
-                <a:solidFill>
-                  <a:srgbClr val="4070A0"/>
-                </a:solidFill>
-                <a:latin typeface="Courier"/>
-              </a:rPr>
-              <a:t>"neg_root_mean_squared_error"</a:t>
-            </a:r>
-            <a:r>
-              <a:rPr>
-                <a:latin typeface="Courier"/>
-              </a:rPr>
-              <a:t>)</a:t>
-            </a:r>
-            <a:br/>
-            <a:r>
-              <a:rPr>
-                <a:solidFill>
-                  <a:srgbClr val="008000"/>
-                </a:solidFill>
-                <a:latin typeface="Courier"/>
-              </a:rPr>
-              <a:t>print</a:t>
-            </a:r>
-            <a:r>
-              <a:rPr>
-                <a:latin typeface="Courier"/>
-              </a:rPr>
-              <a:t>(</a:t>
-            </a:r>
-            <a:r>
-              <a:rPr>
-                <a:solidFill>
-                  <a:srgbClr val="4070A0"/>
-                </a:solidFill>
-                <a:latin typeface="Courier"/>
-              </a:rPr>
-              <a:t>"boosted grouped CV RMSE:"</a:t>
-            </a:r>
-            <a:r>
-              <a:rPr>
-                <a:latin typeface="Courier"/>
-              </a:rPr>
-              <a:t>, </a:t>
-            </a:r>
-            <a:r>
-              <a:rPr>
-                <a:solidFill>
-                  <a:srgbClr val="008000"/>
-                </a:solidFill>
-                <a:latin typeface="Courier"/>
-              </a:rPr>
-              <a:t>round</a:t>
-            </a:r>
-            <a:r>
-              <a:rPr>
-                <a:latin typeface="Courier"/>
-              </a:rPr>
-              <a:t>(</a:t>
-            </a:r>
-            <a:r>
-              <a:rPr>
-                <a:solidFill>
-                  <a:srgbClr val="666666"/>
-                </a:solidFill>
-                <a:latin typeface="Courier"/>
-              </a:rPr>
-              <a:t>-</a:t>
-            </a:r>
-            <a:r>
-              <a:rPr>
-                <a:latin typeface="Courier"/>
-              </a:rPr>
-              <a:t>sc.mean(), </a:t>
-            </a:r>
-            <a:r>
-              <a:rPr>
-                <a:solidFill>
-                  <a:srgbClr val="40A070"/>
-                </a:solidFill>
-                <a:latin typeface="Courier"/>
-              </a:rPr>
-              <a:t>3</a:t>
-            </a:r>
-            <a:r>
-              <a:rPr>
-                <a:latin typeface="Courier"/>
-              </a:rPr>
-              <a:t>))</a:t>
-            </a:r>
-          </a:p>
-          <a:p>
-            <a:pPr lvl="0" indent="0" marL="0">
-              <a:buNone/>
-            </a:pPr>
-            <a:r>
-              <a:rPr>
-                <a:latin typeface="Courier"/>
-              </a:rPr>
-              <a:t>HistGradientBoosting</a:t>
-            </a:r>
-            <a:r>
-              <a:rPr/>
-              <a:t> handles NaN natively, so you can drop the imputation and compare. Whether that </a:t>
-            </a:r>
-            <a:r>
-              <a:rPr i="1"/>
-              <a:t>helps</a:t>
-            </a:r>
-            <a:r>
-              <a:rPr/>
-              <a:t> is an empirical question — run it.</a:t>
-            </a:r>
-          </a:p>
-        </p:txBody>
-      </p:sp>
-    </p:spTree>
-  </p:cSld>
-</p:sld>
+<file path=ppt/slides/slide22.xml><?xml version="1.0" encoding="UTF-8"?><p:sld xmlns:a="http://schemas.openxmlformats.org/drawingml/2006/main" xmlns:r="http://schemas.openxmlformats.org/officeDocument/2006/relationships" xmlns:p="http://schemas.openxmlformats.org/presentationml/2006/main"><p:cSld><p:spTree><p:nvGrpSpPr><p:cNvPr id="1" name="" /><p:cNvGrpSpPr /><p:nvPr /></p:nvGrpSpPr><p:grpSpPr><a:xfrm><a:off x="0" y="0" /><a:ext cx="0" cy="0" /><a:chOff x="0" y="0" /><a:chExt cx="0" cy="0" /></a:xfrm></p:grpSpPr><p:sp><p:nvSpPr><p:cNvPr id="2" name="Title 1" /><p:cNvSpPr><a:spLocks noGrp="1" /></p:cNvSpPr><p:nvPr><p:ph type="title" /></p:nvPr></p:nvSpPr><p:spPr /><p:txBody><a:bodyPr /><a:lstStyle /><a:p><a:pPr lvl="0" indent="0" marL="0"><a:buNone /></a:pPr><a:r><a:rPr /><a:t>Three interacting knobs</a:t></a:r></a:p></p:txBody></p:sp><p:graphicFrame><p:nvGraphicFramePr><p:cNvPr id="6" name="Content Placeholder 5" /><p:cNvGraphicFramePr><a:graphicFrameLocks noGrp="1" /></p:cNvGraphicFramePr><p:nvPr><p:ph idx="1" /></p:nvPr></p:nvGraphicFramePr><p:xfrm><a:off x="457200" y="1193800" /><a:ext cx="8229600" cy="3390900" /></p:xfrm><a:graphic><a:graphicData uri="http://schemas.openxmlformats.org/drawingml/2006/table"><a:tbl><a:tblPr firstRow="1" bandRow="1"><a:tableStyleId>{5C22544A-7EE6-4342-B048-85BDC9FD1C3A}</a:tableStyleId></a:tblPr><a:tblGrid><a:gridCol w="4114800" /><a:gridCol w="4114800" /></a:tblGrid><a:tr h="0"><a:tc><a:txBody><a:bodyPr /><a:lstStyle /><a:p><a:pPr lvl="0" indent="0" marL="0"><a:buNone /></a:pPr><a:r><a:rPr /><a:t>Knob</a:t></a:r></a:p></a:txBody><a:tcPr /></a:tc><a:tc><a:txBody><a:bodyPr /><a:lstStyle /><a:p><a:pPr lvl="0" indent="0" marL="0"><a:buNone /></a:pPr><a:r><a:rPr /><a:t>Controls</a:t></a:r></a:p></a:txBody><a:tcPr /></a:tc></a:tr><a:tr h="0"><a:tc><a:txBody><a:bodyPr /><a:lstStyle /><a:p><a:pPr lvl="0" indent="0" marL="0"><a:buNone /></a:pPr><a14:m><m:oMath xmlns:m="http://schemas.openxmlformats.org/officeDocument/2006/math"><m:r><m:t>ν</m:t></m:r></m:oMath></a14:m></a:p></a:txBody></a:tc><a:tc><a:txBody><a:bodyPr /><a:lstStyle /><a:p><a:pPr lvl="0" indent="0" marL="0"><a:buNone /></a:pPr><a:r><a:rPr /><a:t>learning rate — smaller generalises better</a:t></a:r></a:p></a:txBody></a:tc></a:tr><a:tr h="0"><a:tc><a:txBody><a:bodyPr /><a:lstStyle /><a:p><a:pPr lvl="0" indent="0" marL="0"><a:buNone /></a:pPr><a14:m><m:oMath xmlns:m="http://schemas.openxmlformats.org/officeDocument/2006/math"><m:r><m:t>M</m:t></m:r></m:oMath></a14:m></a:p></a:txBody></a:tc><a:tc><a:txBody><a:bodyPr /><a:lstStyle /><a:p><a:pPr lvl="0" indent="0" marL="0"><a:buNone /></a:pPr><a:r><a:rPr /><a:t>number of trees — </a:t></a:r><a:r><a:rPr b="1" /><a:t>too many overfits</a:t></a:r><a:r><a:rPr /><a:t>, unlike a forest</a:t></a:r></a:p></a:txBody></a:tc></a:tr><a:tr h="0"><a:tc><a:txBody><a:bodyPr /><a:lstStyle /><a:p><a:pPr lvl="0" indent="0" marL="0"><a:buNone /></a:pPr><a14:m><m:oMath xmlns:m="http://schemas.openxmlformats.org/officeDocument/2006/math"><m:r><m:t>d</m:t></m:r></m:oMath></a14:m></a:p></a:txBody></a:tc><a:tc><a:txBody><a:bodyPr /><a:lstStyle /><a:p><a:pPr lvl="0" indent="0" marL="0"><a:buNone /></a:pPr><a:r><a:rPr /><a:t>tree depth — maximum interaction order: </a:t></a:r><a14:m><m:oMath xmlns:m="http://schemas.openxmlformats.org/officeDocument/2006/math"><m:r><m:t>d</m:t></m:r><m:r><m:rPr><m:sty m:val="p" /></m:rPr><m:t>=</m:t></m:r><m:r><m:t>1</m:t></m:r></m:oMath></a14:m><a:r><a:rPr /><a:t> additive, </a:t></a:r><a14:m><m:oMath xmlns:m="http://schemas.openxmlformats.org/officeDocument/2006/math"><m:r><m:t>d</m:t></m:r><m:r><m:rPr><m:sty m:val="p" /></m:rPr><m:t>=</m:t></m:r><m:r><m:t>2</m:t></m:r></m:oMath></a14:m><a:r><a:rPr /><a:t> two-way</a:t></a:r></a:p></a:txBody></a:tc></a:tr></a:tbl></a:graphicData></a:graphic></p:graphicFrame></p:spTree></p:cSld></p:sld>
 </file>
 
 <file path=ppt/slides/slide23.xml><?xml version="1.0" encoding="utf-8"?>
@@ -6075,20 +5868,15 @@
       </p:grpSpPr>
       <p:sp>
         <p:nvSpPr>
-          <p:cNvPr id="2" name="Title 1"/>
-          <p:cNvSpPr>
-            <a:spLocks noGrp="1"/>
-          </p:cNvSpPr>
-          <p:nvPr>
-            <p:ph type="title"/>
-          </p:nvPr>
-        </p:nvSpPr>
-        <p:spPr>
-          <a:xfrm>
-            <a:off x="722313" y="3305176"/>
-            <a:ext cx="7772400" cy="1021556"/>
-          </a:xfrm>
-        </p:spPr>
+          <p:cNvPr id="3" name="Content Placeholder 2"/>
+          <p:cNvSpPr>
+            <a:spLocks noGrp="1"/>
+          </p:cNvSpPr>
+          <p:nvPr>
+            <p:ph idx="1"/>
+          </p:nvPr>
+        </p:nvSpPr>
+        <p:spPr/>
         <p:txBody>
           <a:bodyPr/>
           <a:lstStyle/>
@@ -6098,7 +5886,15 @@
             </a:pPr>
             <a:r>
               <a:rPr/>
-              <a:t>Interpretation</a:t>
+              <a:t>A random forest does not overfit as you add trees. </a:t>
+            </a:r>
+            <a:r>
+              <a:rPr b="1"/>
+              <a:t>A boosted model does.</a:t>
+            </a:r>
+            <a:r>
+              <a:rPr/>
+              <a:t> The stopping point must be chosen on validation data.</a:t>
             </a:r>
           </a:p>
         </p:txBody>
@@ -6145,98 +5941,475 @@
             </a:pPr>
             <a:r>
               <a:rPr/>
-              <a:t>Impurity importance is biased</a:t>
-            </a:r>
-          </a:p>
-        </p:txBody>
-      </p:sp>
-      <p:sp>
-        <p:nvSpPr>
-          <p:cNvPr id="3" name="Content Placeholder 2"/>
-          <p:cNvSpPr>
-            <a:spLocks noGrp="1"/>
-          </p:cNvSpPr>
-          <p:nvPr>
-            <p:ph idx="1"/>
-          </p:nvPr>
-        </p:nvSpPr>
-        <p:spPr/>
-        <p:txBody>
-          <a:bodyPr/>
-          <a:lstStyle/>
-          <a:p>
-            <a:pPr lvl="0" indent="0" marL="0">
-              <a:buNone/>
-            </a:pPr>
-            <a:r>
-              <a:rPr>
-                <a:latin typeface="Courier"/>
-              </a:rPr>
-              <a:t>feature_importances_</a:t>
-            </a:r>
-            <a:r>
-              <a:rPr/>
-              <a:t> counts how much each split reduced impurity. It systematically favours:</a:t>
-            </a:r>
-          </a:p>
-          <a:p>
-            <a:pPr lvl="0"/>
-            <a:r>
-              <a:rPr b="1"/>
-              <a:t>high-cardinality</a:t>
-            </a:r>
-            <a:r>
-              <a:rPr/>
-              <a:t> predictors — more cut points to try</a:t>
-            </a:r>
-          </a:p>
-          <a:p>
-            <a:pPr lvl="0"/>
-            <a:r>
-              <a:rPr b="1"/>
-              <a:t>continuous</a:t>
-            </a:r>
-            <a:r>
-              <a:rPr/>
-              <a:t> over binary</a:t>
-            </a:r>
-          </a:p>
-          <a:p>
-            <a:pPr lvl="0"/>
-            <a:r>
-              <a:rPr/>
-              <a:t>one member of a </a:t>
-            </a:r>
-            <a:r>
-              <a:rPr b="1"/>
-              <a:t>correlated group</a:t>
-            </a:r>
-            <a:r>
-              <a:rPr/>
-              <a:t>, arbitrarily</a:t>
-            </a:r>
-          </a:p>
-          <a:p>
-            <a:pPr lvl="0" indent="0" marL="0">
-              <a:buNone/>
-            </a:pPr>
-            <a:r>
-              <a:rPr/>
-              <a:t>The </a:t>
-            </a:r>
-            <a:r>
-              <a:rPr>
-                <a:latin typeface="Courier"/>
-              </a:rPr>
-              <a:t>aux_*</a:t>
-            </a:r>
-            <a:r>
-              <a:rPr/>
-              <a:t> columns in this panel are continuous and correlated. Impurity importance will flatter them. Do not report it.</a:t>
-            </a:r>
-          </a:p>
-        </p:txBody>
-      </p:sp>
+              <a:t>What XGBoost and LightGBM add</a:t>
+            </a:r>
+          </a:p>
+        </p:txBody>
+      </p:sp>
+      <mc:AlternateContent xmlns:mc="http://schemas.openxmlformats.org/markup-compatibility/2006">
+        <mc:Choice xmlns:a14="http://schemas.microsoft.com/office/drawing/2010/main" Requires="a14">
+          <p:sp>
+            <p:nvSpPr>
+              <p:cNvPr id="3" name="Content Placeholder 2"/>
+              <p:cNvSpPr>
+                <a:spLocks noGrp="1"/>
+              </p:cNvSpPr>
+              <p:nvPr>
+                <p:ph idx="1"/>
+              </p:nvPr>
+            </p:nvSpPr>
+            <p:spPr/>
+            <p:txBody>
+              <a:bodyPr/>
+              <a:lstStyle/>
+              <a:p>
+                <a:pPr lvl="0" indent="0" marL="0">
+                  <a:buNone/>
+                </a:pPr>
+                <a:r>
+                  <a:rPr/>
+                  <a:t>A second-order expansion and an explicit penalty:</a:t>
+                </a:r>
+              </a:p>
+              <a:p>
+                <a:pPr lvl="0" indent="0" marL="0">
+                  <a:buNone/>
+                </a:pPr>
+                <a14:m>
+                  <m:oMathPara xmlns:m="http://schemas.openxmlformats.org/officeDocument/2006/math">
+                    <m:oMathParaPr>
+                      <m:jc m:val="center"/>
+                    </m:oMathParaPr>
+                    <m:oMath>
+                      <m:sSup>
+                        <m:e>
+                          <m:r>
+                            <m:rPr>
+                              <m:sty m:val="p"/>
+                              <m:scr m:val="script"/>
+                            </m:rPr>
+                            <m:t>L</m:t>
+                          </m:r>
+                        </m:e>
+                        <m:sup>
+                          <m:d>
+                            <m:dPr>
+                              <m:begChr m:val="("/>
+                              <m:sepChr m:val=""/>
+                              <m:endChr m:val=")"/>
+                              <m:grow/>
+                            </m:dPr>
+                            <m:e>
+                              <m:r>
+                                <m:t>m</m:t>
+                              </m:r>
+                            </m:e>
+                          </m:d>
+                        </m:sup>
+                      </m:sSup>
+                      <m:r>
+                        <m:rPr>
+                          <m:sty m:val="p"/>
+                        </m:rPr>
+                        <m:t>≈</m:t>
+                      </m:r>
+                      <m:nary>
+                        <m:naryPr>
+                          <m:chr m:val="∑"/>
+                          <m:limLoc m:val="undOvr"/>
+                          <m:subHide m:val="off"/>
+                          <m:supHide m:val="on"/>
+                        </m:naryPr>
+                        <m:sub>
+                          <m:r>
+                            <m:t>i</m:t>
+                          </m:r>
+                        </m:sub>
+                        <m:sup>
+                          <m:r>
+                            <m:t>​</m:t>
+                          </m:r>
+                        </m:sup>
+                        <m:e>
+                          <m:d>
+                            <m:dPr>
+                              <m:begChr m:val="["/>
+                              <m:sepChr m:val=""/>
+                              <m:endChr m:val="]"/>
+                              <m:grow/>
+                            </m:dPr>
+                            <m:e>
+                              <m:sSub>
+                                <m:e>
+                                  <m:r>
+                                    <m:t>g</m:t>
+                                  </m:r>
+                                </m:e>
+                                <m:sub>
+                                  <m:r>
+                                    <m:t>i</m:t>
+                                  </m:r>
+                                </m:sub>
+                              </m:sSub>
+                              <m:sSub>
+                                <m:e>
+                                  <m:r>
+                                    <m:t>h</m:t>
+                                  </m:r>
+                                </m:e>
+                                <m:sub>
+                                  <m:r>
+                                    <m:t>m</m:t>
+                                  </m:r>
+                                </m:sub>
+                              </m:sSub>
+                              <m:d>
+                                <m:dPr>
+                                  <m:begChr m:val="("/>
+                                  <m:sepChr m:val=""/>
+                                  <m:endChr m:val=")"/>
+                                  <m:grow/>
+                                </m:dPr>
+                                <m:e>
+                                  <m:sSub>
+                                    <m:e>
+                                      <m:r>
+                                        <m:t>x</m:t>
+                                      </m:r>
+                                    </m:e>
+                                    <m:sub>
+                                      <m:r>
+                                        <m:t>i</m:t>
+                                      </m:r>
+                                    </m:sub>
+                                  </m:sSub>
+                                </m:e>
+                              </m:d>
+                              <m:r>
+                                <m:rPr>
+                                  <m:sty m:val="p"/>
+                                </m:rPr>
+                                <m:t>+</m:t>
+                              </m:r>
+                              <m:f>
+                                <m:fPr>
+                                  <m:type m:val="lin"/>
+                                </m:fPr>
+                                <m:num>
+                                  <m:r>
+                                    <m:t>1</m:t>
+                                  </m:r>
+                                </m:num>
+                                <m:den>
+                                  <m:r>
+                                    <m:t>2</m:t>
+                                  </m:r>
+                                </m:den>
+                              </m:f>
+                              <m:sSub>
+                                <m:e>
+                                  <m:r>
+                                    <m:t>h</m:t>
+                                  </m:r>
+                                </m:e>
+                                <m:sub>
+                                  <m:r>
+                                    <m:t>i</m:t>
+                                  </m:r>
+                                </m:sub>
+                              </m:sSub>
+                              <m:sSub>
+                                <m:e>
+                                  <m:r>
+                                    <m:t>h</m:t>
+                                  </m:r>
+                                </m:e>
+                                <m:sub>
+                                  <m:r>
+                                    <m:t>m</m:t>
+                                  </m:r>
+                                </m:sub>
+                              </m:sSub>
+                              <m:sSup>
+                                <m:e>
+                                  <m:d>
+                                    <m:dPr>
+                                      <m:begChr m:val="("/>
+                                      <m:sepChr m:val=""/>
+                                      <m:endChr m:val=")"/>
+                                      <m:grow/>
+                                    </m:dPr>
+                                    <m:e>
+                                      <m:sSub>
+                                        <m:e>
+                                          <m:r>
+                                            <m:t>x</m:t>
+                                          </m:r>
+                                        </m:e>
+                                        <m:sub>
+                                          <m:r>
+                                            <m:t>i</m:t>
+                                          </m:r>
+                                        </m:sub>
+                                      </m:sSub>
+                                    </m:e>
+                                  </m:d>
+                                </m:e>
+                                <m:sup>
+                                  <m:r>
+                                    <m:t>2</m:t>
+                                  </m:r>
+                                </m:sup>
+                              </m:sSup>
+                            </m:e>
+                          </m:d>
+                        </m:e>
+                      </m:nary>
+                      <m:r>
+                        <m:rPr>
+                          <m:sty m:val="p"/>
+                        </m:rPr>
+                        <m:t>+</m:t>
+                      </m:r>
+                      <m:r>
+                        <m:t>Ω</m:t>
+                      </m:r>
+                      <m:d>
+                        <m:dPr>
+                          <m:begChr m:val="("/>
+                          <m:sepChr m:val=""/>
+                          <m:endChr m:val=")"/>
+                          <m:grow/>
+                        </m:dPr>
+                        <m:e>
+                          <m:sSub>
+                            <m:e>
+                              <m:r>
+                                <m:t>h</m:t>
+                              </m:r>
+                            </m:e>
+                            <m:sub>
+                              <m:r>
+                                <m:t>m</m:t>
+                              </m:r>
+                            </m:sub>
+                          </m:sSub>
+                        </m:e>
+                      </m:d>
+                    </m:oMath>
+                  </m:oMathPara>
+                </a14:m>
+              </a:p>
+              <a:p>
+                <a:pPr lvl="0" indent="0" marL="0">
+                  <a:buNone/>
+                </a:pPr>
+                <a14:m>
+                  <m:oMathPara xmlns:m="http://schemas.openxmlformats.org/officeDocument/2006/math">
+                    <m:oMathParaPr>
+                      <m:jc m:val="center"/>
+                    </m:oMathParaPr>
+                    <m:oMath>
+                      <m:r>
+                        <m:t>Ω</m:t>
+                      </m:r>
+                      <m:d>
+                        <m:dPr>
+                          <m:begChr m:val="("/>
+                          <m:sepChr m:val=""/>
+                          <m:endChr m:val=")"/>
+                          <m:grow/>
+                        </m:dPr>
+                        <m:e>
+                          <m:r>
+                            <m:t>h</m:t>
+                          </m:r>
+                        </m:e>
+                      </m:d>
+                      <m:r>
+                        <m:rPr>
+                          <m:sty m:val="p"/>
+                        </m:rPr>
+                        <m:t>=</m:t>
+                      </m:r>
+                      <m:r>
+                        <m:t>γ</m:t>
+                      </m:r>
+                      <m:d>
+                        <m:dPr>
+                          <m:begChr m:val="|"/>
+                          <m:sepChr m:val=""/>
+                          <m:endChr m:val="|"/>
+                          <m:grow/>
+                        </m:dPr>
+                        <m:e>
+                          <m:r>
+                            <m:t>T</m:t>
+                          </m:r>
+                        </m:e>
+                      </m:d>
+                      <m:r>
+                        <m:rPr>
+                          <m:sty m:val="p"/>
+                        </m:rPr>
+                        <m:t>+</m:t>
+                      </m:r>
+                      <m:f>
+                        <m:fPr>
+                          <m:type m:val="lin"/>
+                        </m:fPr>
+                        <m:num>
+                          <m:r>
+                            <m:t>1</m:t>
+                          </m:r>
+                        </m:num>
+                        <m:den>
+                          <m:r>
+                            <m:t>2</m:t>
+                          </m:r>
+                        </m:den>
+                      </m:f>
+                      <m:r>
+                        <m:t>λ</m:t>
+                      </m:r>
+                      <m:r>
+                        <m:rPr>
+                          <m:sty m:val="p"/>
+                        </m:rPr>
+                        <m:t>∥</m:t>
+                      </m:r>
+                      <m:r>
+                        <m:t>w</m:t>
+                      </m:r>
+                      <m:sSup>
+                        <m:e>
+                          <m:r>
+                            <m:rPr>
+                              <m:sty m:val="p"/>
+                            </m:rPr>
+                            <m:t>∥</m:t>
+                          </m:r>
+                        </m:e>
+                        <m:sup>
+                          <m:r>
+                            <m:t>2</m:t>
+                          </m:r>
+                        </m:sup>
+                      </m:sSup>
+                    </m:oMath>
+                  </m:oMathPara>
+                </a14:m>
+              </a:p>
+              <a:p>
+                <a:pPr lvl="0" indent="0" marL="0">
+                  <a:buNone/>
+                </a:pPr>
+                <a:r>
+                  <a:rPr/>
+                  <a:t>Solving for the optimal leaf weights gives</a:t>
+                </a:r>
+              </a:p>
+              <a:p>
+                <a:pPr lvl="0" indent="0" marL="0">
+                  <a:buNone/>
+                </a:pPr>
+                <a14:m>
+                  <m:oMathPara xmlns:m="http://schemas.openxmlformats.org/officeDocument/2006/math">
+                    <m:oMathParaPr>
+                      <m:jc m:val="center"/>
+                    </m:oMathParaPr>
+                    <m:oMath>
+                      <m:sSubSup>
+                        <m:e>
+                          <m:r>
+                            <m:t>w</m:t>
+                          </m:r>
+                        </m:e>
+                        <m:sub>
+                          <m:r>
+                            <m:t>j</m:t>
+                          </m:r>
+                        </m:sub>
+                        <m:sup>
+                          <m:r>
+                            <m:rPr>
+                              <m:sty m:val="p"/>
+                            </m:rPr>
+                            <m:t>⋆</m:t>
+                          </m:r>
+                        </m:sup>
+                      </m:sSubSup>
+                      <m:r>
+                        <m:rPr>
+                          <m:sty m:val="p"/>
+                        </m:rPr>
+                        <m:t>=</m:t>
+                      </m:r>
+                      <m:r>
+                        <m:rPr>
+                          <m:sty m:val="p"/>
+                        </m:rPr>
+                        <m:t>−</m:t>
+                      </m:r>
+                      <m:f>
+                        <m:fPr>
+                          <m:type m:val="bar"/>
+                        </m:fPr>
+                        <m:num>
+                          <m:sSub>
+                            <m:e>
+                              <m:r>
+                                <m:t>G</m:t>
+                              </m:r>
+                            </m:e>
+                            <m:sub>
+                              <m:r>
+                                <m:t>j</m:t>
+                              </m:r>
+                            </m:sub>
+                          </m:sSub>
+                        </m:num>
+                        <m:den>
+                          <m:sSub>
+                            <m:e>
+                              <m:r>
+                                <m:t>H</m:t>
+                              </m:r>
+                            </m:e>
+                            <m:sub>
+                              <m:r>
+                                <m:t>j</m:t>
+                              </m:r>
+                            </m:sub>
+                          </m:sSub>
+                          <m:r>
+                            <m:rPr>
+                              <m:sty m:val="p"/>
+                            </m:rPr>
+                            <m:t>+</m:t>
+                          </m:r>
+                          <m:r>
+                            <m:t>λ</m:t>
+                          </m:r>
+                        </m:den>
+                      </m:f>
+                    </m:oMath>
+                  </m:oMathPara>
+                </a14:m>
+              </a:p>
+              <a:p>
+                <a:pPr lvl="0" indent="0" marL="0">
+                  <a:buNone/>
+                </a:pPr>
+                <a:r>
+                  <a:rPr/>
+                  <a:t>Regularisation reappearing, in a third guise.</a:t>
+                </a:r>
+              </a:p>
+            </p:txBody>
+          </p:sp>
+        </mc:Choice>
+      </mc:AlternateContent>
     </p:spTree>
   </p:cSld>
 </p:sld>
@@ -6269,7 +6442,12 @@
             <p:ph type="title"/>
           </p:nvPr>
         </p:nvSpPr>
-        <p:spPr/>
+        <p:spPr>
+          <a:xfrm>
+            <a:off x="722313" y="3305176"/>
+            <a:ext cx="7772400" cy="1021556"/>
+          </a:xfrm>
+        </p:spPr>
         <p:txBody>
           <a:bodyPr/>
           <a:lstStyle/>
@@ -6279,275 +6457,7 @@
             </a:pPr>
             <a:r>
               <a:rPr/>
-              <a:t>Permutation importance instead</a:t>
-            </a:r>
-          </a:p>
-        </p:txBody>
-      </p:sp>
-      <p:sp>
-        <p:nvSpPr>
-          <p:cNvPr id="3" name="Content Placeholder 2"/>
-          <p:cNvSpPr>
-            <a:spLocks noGrp="1"/>
-          </p:cNvSpPr>
-          <p:nvPr>
-            <p:ph idx="1"/>
-          </p:nvPr>
-        </p:nvSpPr>
-        <p:spPr/>
-        <p:txBody>
-          <a:bodyPr/>
-          <a:lstStyle/>
-          <a:p>
-            <a:pPr lvl="0" indent="0">
-              <a:buNone/>
-            </a:pPr>
-            <a:r>
-              <a:rPr b="1">
-                <a:solidFill>
-                  <a:srgbClr val="008000"/>
-                </a:solidFill>
-                <a:latin typeface="Courier"/>
-              </a:rPr>
-              <a:t>from</a:t>
-            </a:r>
-            <a:r>
-              <a:rPr>
-                <a:latin typeface="Courier"/>
-              </a:rPr>
-              <a:t> sklearn.inspection </a:t>
-            </a:r>
-            <a:r>
-              <a:rPr b="1">
-                <a:solidFill>
-                  <a:srgbClr val="008000"/>
-                </a:solidFill>
-                <a:latin typeface="Courier"/>
-              </a:rPr>
-              <a:t>import</a:t>
-            </a:r>
-            <a:r>
-              <a:rPr>
-                <a:latin typeface="Courier"/>
-              </a:rPr>
-              <a:t> permutation_importance</a:t>
-            </a:r>
-            <a:br/>
-            <a:br/>
-            <a:r>
-              <a:rPr>
-                <a:latin typeface="Courier"/>
-              </a:rPr>
-              <a:t>rf.fit(X, y)</a:t>
-            </a:r>
-            <a:br/>
-            <a:r>
-              <a:rPr>
-                <a:latin typeface="Courier"/>
-              </a:rPr>
-              <a:t>r </a:t>
-            </a:r>
-            <a:r>
-              <a:rPr>
-                <a:solidFill>
-                  <a:srgbClr val="666666"/>
-                </a:solidFill>
-                <a:latin typeface="Courier"/>
-              </a:rPr>
-              <a:t>=</a:t>
-            </a:r>
-            <a:r>
-              <a:rPr>
-                <a:latin typeface="Courier"/>
-              </a:rPr>
-              <a:t> permutation_importance(rf, X, y, n_repeats</a:t>
-            </a:r>
-            <a:r>
-              <a:rPr>
-                <a:solidFill>
-                  <a:srgbClr val="666666"/>
-                </a:solidFill>
-                <a:latin typeface="Courier"/>
-              </a:rPr>
-              <a:t>=</a:t>
-            </a:r>
-            <a:r>
-              <a:rPr>
-                <a:solidFill>
-                  <a:srgbClr val="40A070"/>
-                </a:solidFill>
-                <a:latin typeface="Courier"/>
-              </a:rPr>
-              <a:t>20</a:t>
-            </a:r>
-            <a:r>
-              <a:rPr>
-                <a:latin typeface="Courier"/>
-              </a:rPr>
-              <a:t>, random_state</a:t>
-            </a:r>
-            <a:r>
-              <a:rPr>
-                <a:solidFill>
-                  <a:srgbClr val="666666"/>
-                </a:solidFill>
-                <a:latin typeface="Courier"/>
-              </a:rPr>
-              <a:t>=</a:t>
-            </a:r>
-            <a:r>
-              <a:rPr>
-                <a:solidFill>
-                  <a:srgbClr val="40A070"/>
-                </a:solidFill>
-                <a:latin typeface="Courier"/>
-              </a:rPr>
-              <a:t>60033</a:t>
-            </a:r>
-            <a:r>
-              <a:rPr>
-                <a:latin typeface="Courier"/>
-              </a:rPr>
-              <a:t>)</a:t>
-            </a:r>
-            <a:br/>
-            <a:r>
-              <a:rPr>
-                <a:latin typeface="Courier"/>
-              </a:rPr>
-              <a:t>imp </a:t>
-            </a:r>
-            <a:r>
-              <a:rPr>
-                <a:solidFill>
-                  <a:srgbClr val="666666"/>
-                </a:solidFill>
-                <a:latin typeface="Courier"/>
-              </a:rPr>
-              <a:t>=</a:t>
-            </a:r>
-            <a:r>
-              <a:rPr>
-                <a:latin typeface="Courier"/>
-              </a:rPr>
-              <a:t> pd.Series(r.importances_mean, index</a:t>
-            </a:r>
-            <a:r>
-              <a:rPr>
-                <a:solidFill>
-                  <a:srgbClr val="666666"/>
-                </a:solidFill>
-                <a:latin typeface="Courier"/>
-              </a:rPr>
-              <a:t>=</a:t>
-            </a:r>
-            <a:r>
-              <a:rPr>
-                <a:latin typeface="Courier"/>
-              </a:rPr>
-              <a:t>X.columns).sort_values(ascending</a:t>
-            </a:r>
-            <a:r>
-              <a:rPr>
-                <a:solidFill>
-                  <a:srgbClr val="666666"/>
-                </a:solidFill>
-                <a:latin typeface="Courier"/>
-              </a:rPr>
-              <a:t>=</a:t>
-            </a:r>
-            <a:r>
-              <a:rPr>
-                <a:solidFill>
-                  <a:srgbClr val="19177C"/>
-                </a:solidFill>
-                <a:latin typeface="Courier"/>
-              </a:rPr>
-              <a:t>False</a:t>
-            </a:r>
-            <a:r>
-              <a:rPr>
-                <a:latin typeface="Courier"/>
-              </a:rPr>
-              <a:t>)</a:t>
-            </a:r>
-            <a:br/>
-            <a:r>
-              <a:rPr>
-                <a:solidFill>
-                  <a:srgbClr val="008000"/>
-                </a:solidFill>
-                <a:latin typeface="Courier"/>
-              </a:rPr>
-              <a:t>print</a:t>
-            </a:r>
-            <a:r>
-              <a:rPr>
-                <a:latin typeface="Courier"/>
-              </a:rPr>
-              <a:t>(imp.head(</a:t>
-            </a:r>
-            <a:r>
-              <a:rPr>
-                <a:solidFill>
-                  <a:srgbClr val="40A070"/>
-                </a:solidFill>
-                <a:latin typeface="Courier"/>
-              </a:rPr>
-              <a:t>10</a:t>
-            </a:r>
-            <a:r>
-              <a:rPr>
-                <a:latin typeface="Courier"/>
-              </a:rPr>
-              <a:t>).</a:t>
-            </a:r>
-            <a:r>
-              <a:rPr>
-                <a:solidFill>
-                  <a:srgbClr val="008000"/>
-                </a:solidFill>
-                <a:latin typeface="Courier"/>
-              </a:rPr>
-              <a:t>round</a:t>
-            </a:r>
-            <a:r>
-              <a:rPr>
-                <a:latin typeface="Courier"/>
-              </a:rPr>
-              <a:t>(</a:t>
-            </a:r>
-            <a:r>
-              <a:rPr>
-                <a:solidFill>
-                  <a:srgbClr val="40A070"/>
-                </a:solidFill>
-                <a:latin typeface="Courier"/>
-              </a:rPr>
-              <a:t>4</a:t>
-            </a:r>
-            <a:r>
-              <a:rPr>
-                <a:latin typeface="Courier"/>
-              </a:rPr>
-              <a:t>))</a:t>
-            </a:r>
-          </a:p>
-          <a:p>
-            <a:pPr lvl="0" indent="0" marL="0">
-              <a:buNone/>
-            </a:pPr>
-            <a:r>
-              <a:rPr/>
-              <a:t>This measures how much prediction </a:t>
-            </a:r>
-            <a:r>
-              <a:rPr b="1"/>
-              <a:t>degrades</a:t>
-            </a:r>
-            <a:r>
-              <a:rPr/>
-              <a:t> when a column is shuffled — a question about the fitted model, in the units of the loss.</a:t>
+              <a:t>7.5 Recovering interpretation</a:t>
             </a:r>
           </a:p>
         </p:txBody>
@@ -6594,452 +6504,7 @@
             </a:pPr>
             <a:r>
               <a:rPr/>
-              <a:t>Permutation importance is also not causal</a:t>
-            </a:r>
-          </a:p>
-        </p:txBody>
-      </p:sp>
-      <p:sp>
-        <p:nvSpPr>
-          <p:cNvPr id="3" name="Content Placeholder 2"/>
-          <p:cNvSpPr>
-            <a:spLocks noGrp="1"/>
-          </p:cNvSpPr>
-          <p:nvPr>
-            <p:ph idx="1"/>
-          </p:nvPr>
-        </p:nvSpPr>
-        <p:spPr/>
-        <p:txBody>
-          <a:bodyPr/>
-          <a:lstStyle/>
-          <a:p>
-            <a:pPr lvl="0" indent="0" marL="0">
-              <a:buNone/>
-            </a:pPr>
-            <a:r>
-              <a:rPr/>
-              <a:t>Shuffling a column breaks its relationship with </a:t>
-            </a:r>
-            <a:r>
-              <a:rPr b="1"/>
-              <a:t>everything</a:t>
-            </a:r>
-            <a:r>
-              <a:rPr/>
-              <a:t>, including its correlations with other predictors. With correlated inputs, the importance is shared unpredictably and the shuffled rows may be economically impossible combinations.</a:t>
-            </a:r>
-          </a:p>
-          <a:p>
-            <a:pPr lvl="0" indent="0" marL="0">
-              <a:buNone/>
-            </a:pPr>
-            <a:r>
-              <a:rPr/>
-              <a:t>It answers “what does this model lean on?” It does not answer “what would happen if this changed?” Session 10 answers the second, and it needs a different design.</a:t>
-            </a:r>
-          </a:p>
-        </p:txBody>
-      </p:sp>
-    </p:spTree>
-  </p:cSld>
-</p:sld>
-</file>
-
-<file path=ppt/slides/slide27.xml><?xml version="1.0" encoding="utf-8"?>
-<p:sld xmlns:a="http://schemas.openxmlformats.org/drawingml/2006/main" xmlns:r="http://schemas.openxmlformats.org/officeDocument/2006/relationships" xmlns:p="http://schemas.openxmlformats.org/presentationml/2006/main">
-  <p:cSld>
-    <p:spTree>
-      <p:nvGrpSpPr>
-        <p:cNvPr id="1" name=""/>
-        <p:cNvGrpSpPr/>
-        <p:nvPr/>
-      </p:nvGrpSpPr>
-      <p:grpSpPr>
-        <a:xfrm>
-          <a:off x="0" y="0"/>
-          <a:ext cx="0" cy="0"/>
-          <a:chOff x="0" y="0"/>
-          <a:chExt cx="0" cy="0"/>
-        </a:xfrm>
-      </p:grpSpPr>
-      <p:sp>
-        <p:nvSpPr>
-          <p:cNvPr id="2" name="Title 1"/>
-          <p:cNvSpPr>
-            <a:spLocks noGrp="1"/>
-          </p:cNvSpPr>
-          <p:nvPr>
-            <p:ph type="title"/>
-          </p:nvPr>
-        </p:nvSpPr>
-        <p:spPr/>
-        <p:txBody>
-          <a:bodyPr/>
-          <a:lstStyle/>
-          <a:p>
-            <a:pPr lvl="0" indent="0" marL="0">
-              <a:buNone/>
-            </a:pPr>
-            <a:r>
-              <a:rPr/>
-              <a:t>Partial dependence</a:t>
-            </a:r>
-          </a:p>
-        </p:txBody>
-      </p:sp>
-      <p:sp>
-        <p:nvSpPr>
-          <p:cNvPr id="3" name="Content Placeholder 2"/>
-          <p:cNvSpPr>
-            <a:spLocks noGrp="1"/>
-          </p:cNvSpPr>
-          <p:nvPr>
-            <p:ph idx="1"/>
-          </p:nvPr>
-        </p:nvSpPr>
-        <p:spPr/>
-        <p:txBody>
-          <a:bodyPr/>
-          <a:lstStyle/>
-          <a:p>
-            <a:pPr lvl="0" indent="0">
-              <a:buNone/>
-            </a:pPr>
-            <a:r>
-              <a:rPr b="1">
-                <a:solidFill>
-                  <a:srgbClr val="008000"/>
-                </a:solidFill>
-                <a:latin typeface="Courier"/>
-              </a:rPr>
-              <a:t>from</a:t>
-            </a:r>
-            <a:r>
-              <a:rPr>
-                <a:latin typeface="Courier"/>
-              </a:rPr>
-              <a:t> sklearn.inspection </a:t>
-            </a:r>
-            <a:r>
-              <a:rPr b="1">
-                <a:solidFill>
-                  <a:srgbClr val="008000"/>
-                </a:solidFill>
-                <a:latin typeface="Courier"/>
-              </a:rPr>
-              <a:t>import</a:t>
-            </a:r>
-            <a:r>
-              <a:rPr>
-                <a:latin typeface="Courier"/>
-              </a:rPr>
-              <a:t> PartialDependenceDisplay</a:t>
-            </a:r>
-            <a:br/>
-            <a:r>
-              <a:rPr b="1">
-                <a:solidFill>
-                  <a:srgbClr val="008000"/>
-                </a:solidFill>
-                <a:latin typeface="Courier"/>
-              </a:rPr>
-              <a:t>import</a:t>
-            </a:r>
-            <a:r>
-              <a:rPr>
-                <a:latin typeface="Courier"/>
-              </a:rPr>
-              <a:t> matplotlib.pyplot </a:t>
-            </a:r>
-            <a:r>
-              <a:rPr b="1">
-                <a:solidFill>
-                  <a:srgbClr val="008000"/>
-                </a:solidFill>
-                <a:latin typeface="Courier"/>
-              </a:rPr>
-              <a:t>as</a:t>
-            </a:r>
-            <a:r>
-              <a:rPr>
-                <a:latin typeface="Courier"/>
-              </a:rPr>
-              <a:t> plt</a:t>
-            </a:r>
-            <a:br/>
-            <a:br/>
-            <a:r>
-              <a:rPr>
-                <a:latin typeface="Courier"/>
-              </a:rPr>
-              <a:t>PartialDependenceDisplay.from_estimator(</a:t>
-            </a:r>
-            <a:br/>
-            <a:r>
-              <a:rPr>
-                <a:latin typeface="Courier"/>
-              </a:rPr>
-              <a:t>    rf, X, features</a:t>
-            </a:r>
-            <a:r>
-              <a:rPr>
-                <a:solidFill>
-                  <a:srgbClr val="666666"/>
-                </a:solidFill>
-                <a:latin typeface="Courier"/>
-              </a:rPr>
-              <a:t>=</a:t>
-            </a:r>
-            <a:r>
-              <a:rPr>
-                <a:latin typeface="Courier"/>
-              </a:rPr>
-              <a:t>[</a:t>
-            </a:r>
-            <a:r>
-              <a:rPr>
-                <a:solidFill>
-                  <a:srgbClr val="4070A0"/>
-                </a:solidFill>
-                <a:latin typeface="Courier"/>
-              </a:rPr>
-              <a:t>"gdp_pc_eur"</a:t>
-            </a:r>
-            <a:r>
-              <a:rPr>
-                <a:latin typeface="Courier"/>
-              </a:rPr>
-              <a:t>, </a:t>
-            </a:r>
-            <a:r>
-              <a:rPr>
-                <a:solidFill>
-                  <a:srgbClr val="4070A0"/>
-                </a:solidFill>
-                <a:latin typeface="Courier"/>
-              </a:rPr>
-              <a:t>"cloud_use"</a:t>
-            </a:r>
-            <a:r>
-              <a:rPr>
-                <a:latin typeface="Courier"/>
-              </a:rPr>
-              <a:t>], kind</a:t>
-            </a:r>
-            <a:r>
-              <a:rPr>
-                <a:solidFill>
-                  <a:srgbClr val="666666"/>
-                </a:solidFill>
-                <a:latin typeface="Courier"/>
-              </a:rPr>
-              <a:t>=</a:t>
-            </a:r>
-            <a:r>
-              <a:rPr>
-                <a:solidFill>
-                  <a:srgbClr val="4070A0"/>
-                </a:solidFill>
-                <a:latin typeface="Courier"/>
-              </a:rPr>
-              <a:t>"average"</a:t>
-            </a:r>
-            <a:r>
-              <a:rPr>
-                <a:latin typeface="Courier"/>
-              </a:rPr>
-              <a:t>)</a:t>
-            </a:r>
-            <a:br/>
-            <a:r>
-              <a:rPr>
-                <a:latin typeface="Courier"/>
-              </a:rPr>
-              <a:t>plt.tight_layout()</a:t>
-            </a:r>
-          </a:p>
-          <a:p>
-            <a:pPr lvl="0" indent="0" marL="0">
-              <a:buNone/>
-            </a:pPr>
-            <a:r>
-              <a:rPr/>
-              <a:t>A PDP shows the average fitted relationship, holding the rest at their observed values. It is the honest way to show a nonlinearity you found.</a:t>
-            </a:r>
-          </a:p>
-        </p:txBody>
-      </p:sp>
-    </p:spTree>
-  </p:cSld>
-</p:sld>
-</file>
-
-<file path=ppt/slides/slide28.xml><?xml version="1.0" encoding="utf-8"?>
-<p:sld xmlns:a="http://schemas.openxmlformats.org/drawingml/2006/main" xmlns:r="http://schemas.openxmlformats.org/officeDocument/2006/relationships" xmlns:p="http://schemas.openxmlformats.org/presentationml/2006/main">
-  <p:cSld>
-    <p:spTree>
-      <p:nvGrpSpPr>
-        <p:cNvPr id="1" name=""/>
-        <p:cNvGrpSpPr/>
-        <p:nvPr/>
-      </p:nvGrpSpPr>
-      <p:grpSpPr>
-        <a:xfrm>
-          <a:off x="0" y="0"/>
-          <a:ext cx="0" cy="0"/>
-          <a:chOff x="0" y="0"/>
-          <a:chExt cx="0" cy="0"/>
-        </a:xfrm>
-      </p:grpSpPr>
-      <p:sp>
-        <p:nvSpPr>
-          <p:cNvPr id="2" name="Title 1"/>
-          <p:cNvSpPr>
-            <a:spLocks noGrp="1"/>
-          </p:cNvSpPr>
-          <p:nvPr>
-            <p:ph type="title"/>
-          </p:nvPr>
-        </p:nvSpPr>
-        <p:spPr/>
-        <p:txBody>
-          <a:bodyPr/>
-          <a:lstStyle/>
-          <a:p>
-            <a:pPr lvl="0" indent="0" marL="0">
-              <a:buNone/>
-            </a:pPr>
-            <a:r>
-              <a:rPr/>
-              <a:t>What to report</a:t>
-            </a:r>
-          </a:p>
-        </p:txBody>
-      </p:sp>
-      <p:sp>
-        <p:nvSpPr>
-          <p:cNvPr id="3" name="Content Placeholder 2"/>
-          <p:cNvSpPr>
-            <a:spLocks noGrp="1"/>
-          </p:cNvSpPr>
-          <p:nvPr>
-            <p:ph idx="1"/>
-          </p:nvPr>
-        </p:nvSpPr>
-        <p:spPr/>
-        <p:txBody>
-          <a:bodyPr/>
-          <a:lstStyle/>
-          <a:p>
-            <a:pPr lvl="0"/>
-            <a:r>
-              <a:rPr/>
-              <a:t>Grouped CV error for </a:t>
-            </a:r>
-            <a:r>
-              <a:rPr b="1"/>
-              <a:t>both</a:t>
-            </a:r>
-            <a:r>
-              <a:rPr/>
-              <a:t> models, and the baseline they beat</a:t>
-            </a:r>
-          </a:p>
-          <a:p>
-            <a:pPr lvl="0"/>
-            <a:r>
-              <a:rPr b="1"/>
-              <a:t>Permutation</a:t>
-            </a:r>
-            <a:r>
-              <a:rPr/>
-              <a:t> importance, never impurity importance</a:t>
-            </a:r>
-          </a:p>
-          <a:p>
-            <a:pPr lvl="0"/>
-            <a:r>
-              <a:rPr/>
-              <a:t>One or two partial-dependence plots for the relationships you claim</a:t>
-            </a:r>
-          </a:p>
-          <a:p>
-            <a:pPr lvl="0"/>
-            <a:r>
-              <a:rPr/>
-              <a:t>The tuning you did, and on which folds</a:t>
-            </a:r>
-          </a:p>
-          <a:p>
-            <a:pPr lvl="0"/>
-            <a:r>
-              <a:rPr/>
-              <a:t>That every statement is about </a:t>
-            </a:r>
-            <a:r>
-              <a:rPr b="1"/>
-              <a:t>prediction</a:t>
-            </a:r>
-            <a:r>
-              <a:rPr/>
-              <a:t>, not effect</a:t>
-            </a:r>
-          </a:p>
-          <a:p>
-            <a:pPr lvl="0" indent="0" marL="0">
-              <a:buNone/>
-            </a:pPr>
-            <a:r>
-              <a:rPr/>
-              <a:t>Never write “cloud adoption drives productivity growth” from a forest. Write “cloud adoption is among the predictors the model relies on most.”</a:t>
-            </a:r>
-          </a:p>
-        </p:txBody>
-      </p:sp>
-    </p:spTree>
-  </p:cSld>
-</p:sld>
-</file>
-
-<file path=ppt/slides/slide29.xml><?xml version="1.0" encoding="utf-8"?>
-<p:sld xmlns:a="http://schemas.openxmlformats.org/drawingml/2006/main" xmlns:r="http://schemas.openxmlformats.org/officeDocument/2006/relationships" xmlns:p="http://schemas.openxmlformats.org/presentationml/2006/main">
-  <p:cSld>
-    <p:spTree>
-      <p:nvGrpSpPr>
-        <p:cNvPr id="1" name=""/>
-        <p:cNvGrpSpPr/>
-        <p:nvPr/>
-      </p:nvGrpSpPr>
-      <p:grpSpPr>
-        <a:xfrm>
-          <a:off x="0" y="0"/>
-          <a:ext cx="0" cy="0"/>
-          <a:chOff x="0" y="0"/>
-          <a:chExt cx="0" cy="0"/>
-        </a:xfrm>
-      </p:grpSpPr>
-      <p:sp>
-        <p:nvSpPr>
-          <p:cNvPr id="2" name="Title 1"/>
-          <p:cNvSpPr>
-            <a:spLocks noGrp="1"/>
-          </p:cNvSpPr>
-          <p:nvPr>
-            <p:ph type="title"/>
-          </p:nvPr>
-        </p:nvSpPr>
-        <p:spPr/>
-        <p:txBody>
-          <a:bodyPr/>
-          <a:lstStyle/>
-          <a:p>
-            <a:pPr lvl="0" indent="0" marL="0">
-              <a:buNone/>
-            </a:pPr>
-            <a:r>
-              <a:rPr/>
-              <a:t>Common mistakes</a:t>
+              <a:t>The five tools</a:t>
             </a:r>
           </a:p>
         </p:txBody>
@@ -7079,7 +6544,7 @@
                       </a:pPr>
                       <a:r>
                         <a:rPr/>
-                        <a:t>Mistake</a:t>
+                        <a:t>Method</a:t>
                       </a:r>
                     </a:p>
                   </a:txBody>
@@ -7095,7 +6560,7 @@
                       </a:pPr>
                       <a:r>
                         <a:rPr/>
-                        <a:t>Consequence</a:t>
+                        <a:t>What it answers</a:t>
                       </a:r>
                     </a:p>
                   </a:txBody>
@@ -7113,7 +6578,7 @@
                       </a:pPr>
                       <a:r>
                         <a:rPr/>
-                        <a:t>Impurity importance in a table</a:t>
+                        <a:t>Impurity importance</a:t>
                       </a:r>
                     </a:p>
                   </a:txBody>
@@ -7128,7 +6593,39 @@
                       </a:pPr>
                       <a:r>
                         <a:rPr/>
-                        <a:t>Biased toward continuous and correlated</a:t>
+                        <a:t>how often and how usefully a feature was split on</a:t>
+                      </a:r>
+                    </a:p>
+                  </a:txBody>
+                </a:tc>
+              </a:tr>
+              <a:tr h="0">
+                <a:tc>
+                  <a:txBody>
+                    <a:bodyPr/>
+                    <a:lstStyle/>
+                    <a:p>
+                      <a:pPr lvl="0" indent="0" marL="0">
+                        <a:buNone/>
+                      </a:pPr>
+                      <a:r>
+                        <a:rPr b="1"/>
+                        <a:t>Permutation importance</a:t>
+                      </a:r>
+                    </a:p>
+                  </a:txBody>
+                </a:tc>
+                <a:tc>
+                  <a:txBody>
+                    <a:bodyPr/>
+                    <a:lstStyle/>
+                    <a:p>
+                      <a:pPr lvl="0" indent="0" marL="0">
+                        <a:buNone/>
+                      </a:pPr>
+                      <a:r>
+                        <a:rPr/>
+                        <a:t>how much test error rises when the feature is scrambled</a:t>
                       </a:r>
                     </a:p>
                   </a:txBody>
@@ -7145,7 +6642,7 @@
                       </a:pPr>
                       <a:r>
                         <a:rPr/>
-                        <a:t>Importance read causally</a:t>
+                        <a:t>Partial dependence</a:t>
                       </a:r>
                     </a:p>
                   </a:txBody>
@@ -7160,7 +6657,7 @@
                       </a:pPr>
                       <a:r>
                         <a:rPr/>
-                        <a:t>The central error of applied ML</a:t>
+                        <a:t>average marginal relationship</a:t>
                       </a:r>
                     </a:p>
                   </a:txBody>
@@ -7177,7 +6674,7 @@
                       </a:pPr>
                       <a:r>
                         <a:rPr/>
-                        <a:t>OOB reported on a panel</a:t>
+                        <a:t>ICE curves</a:t>
                       </a:r>
                     </a:p>
                   </a:txBody>
@@ -7192,7 +6689,7 @@
                       </a:pPr>
                       <a:r>
                         <a:rPr/>
-                        <a:t>Optimistic; countries repeat</a:t>
+                        <a:t>the per-observation version of a PDP</a:t>
                       </a:r>
                     </a:p>
                   </a:txBody>
@@ -7208,8 +6705,8 @@
                         <a:buNone/>
                       </a:pPr>
                       <a:r>
-                        <a:rPr/>
-                        <a:t>Boosting without early stopping</a:t>
+                        <a:rPr b="1"/>
+                        <a:t>SHAP</a:t>
                       </a:r>
                     </a:p>
                   </a:txBody>
@@ -7224,39 +6721,7 @@
                       </a:pPr>
                       <a:r>
                         <a:rPr/>
-                        <a:t>Overfits as trees accumulate</a:t>
-                      </a:r>
-                    </a:p>
-                  </a:txBody>
-                </a:tc>
-              </a:tr>
-              <a:tr h="0">
-                <a:tc>
-                  <a:txBody>
-                    <a:bodyPr/>
-                    <a:lstStyle/>
-                    <a:p>
-                      <a:pPr lvl="0" indent="0" marL="0">
-                        <a:buNone/>
-                      </a:pPr>
-                      <a:r>
-                        <a:rPr/>
-                        <a:t>Tuning and evaluating on one split</a:t>
-                      </a:r>
-                    </a:p>
-                  </a:txBody>
-                </a:tc>
-                <a:tc>
-                  <a:txBody>
-                    <a:bodyPr/>
-                    <a:lstStyle/>
-                    <a:p>
-                      <a:pPr lvl="0" indent="0" marL="0">
-                        <a:buNone/>
-                      </a:pPr>
-                      <a:r>
-                        <a:rPr/>
-                        <a:t>The estimate is training error</a:t>
+                        <a:t>additive attribution per prediction, from cooperative game theory</a:t>
                       </a:r>
                     </a:p>
                   </a:txBody>
@@ -7266,6 +6731,175 @@
           </a:graphicData>
         </a:graphic>
       </p:graphicFrame>
+    </p:spTree>
+  </p:cSld>
+</p:sld>
+</file>
+
+<file path=ppt/slides/slide27.xml><?xml version="1.0" encoding="UTF-8"?><p:sld xmlns:a="http://schemas.openxmlformats.org/drawingml/2006/main" xmlns:r="http://schemas.openxmlformats.org/officeDocument/2006/relationships" xmlns:p="http://schemas.openxmlformats.org/presentationml/2006/main"><p:cSld><p:spTree><p:nvGrpSpPr><p:cNvPr id="1" name="" /><p:cNvGrpSpPr /><p:nvPr /></p:nvGrpSpPr><p:grpSpPr><a:xfrm><a:off x="0" y="0" /><a:ext cx="0" cy="0" /><a:chOff x="0" y="0" /><a:chExt cx="0" cy="0" /></a:xfrm></p:grpSpPr><p:sp><p:nvSpPr><p:cNvPr id="2" name="Title 1" /><p:cNvSpPr><a:spLocks noGrp="1" /></p:cNvSpPr><p:nvPr><p:ph type="title" /></p:nvPr></p:nvSpPr><p:spPr /><p:txBody><a:bodyPr /><a:lstStyle /><a:p><a:pPr lvl="0" indent="0" marL="0"><a:buNone /></a:pPr><a:r><a:rPr /><a:t>And their caveats</a:t></a:r></a:p></p:txBody></p:sp><p:graphicFrame><p:nvGraphicFramePr><p:cNvPr id="6" name="Content Placeholder 5" /><p:cNvGraphicFramePr><a:graphicFrameLocks noGrp="1" /></p:cNvGraphicFramePr><p:nvPr><p:ph idx="1" /></p:nvPr></p:nvGraphicFramePr><p:xfrm><a:off x="457200" y="1193800" /><a:ext cx="8229600" cy="3390900" /></p:xfrm><a:graphic><a:graphicData uri="http://schemas.openxmlformats.org/drawingml/2006/table"><a:tbl><a:tblPr firstRow="1" bandRow="1"><a:tableStyleId>{5C22544A-7EE6-4342-B048-85BDC9FD1C3A}</a:tableStyleId></a:tblPr><a:tblGrid><a:gridCol w="4114800" /><a:gridCol w="4114800" /></a:tblGrid><a:tr h="0"><a:tc><a:txBody><a:bodyPr /><a:lstStyle /><a:p><a:pPr lvl="0" indent="0" marL="0"><a:buNone /></a:pPr><a:r><a:rPr /><a:t>Method</a:t></a:r></a:p></a:txBody><a:tcPr /></a:tc><a:tc><a:txBody><a:bodyPr /><a:lstStyle /><a:p><a:pPr lvl="0" indent="0" marL="0"><a:buNone /></a:pPr><a:r><a:rPr /><a:t>Caveat</a:t></a:r></a:p></a:txBody><a:tcPr /></a:tc></a:tr><a:tr h="0"><a:tc><a:txBody><a:bodyPr /><a:lstStyle /><a:p><a:pPr lvl="0" indent="0" marL="0"><a:buNone /></a:pPr><a:r><a:rPr /><a:t>Impurity importance</a:t></a:r></a:p></a:txBody></a:tc><a:tc><a:txBody><a:bodyPr /><a:lstStyle /><a:p><a:pPr lvl="0" indent="0" marL="0"><a:buNone /></a:pPr><a:r><a:rPr /><a:t>Biased toward high-cardinality features; computed </a:t></a:r><a:r><a:rPr b="1" /><a:t>in-sample</a:t></a:r></a:p></a:txBody></a:tc></a:tr><a:tr h="0"><a:tc><a:txBody><a:bodyPr /><a:lstStyle /><a:p><a:pPr lvl="0" indent="0" marL="0"><a:buNone /></a:pPr><a:r><a:rPr b="1" /><a:t>Permutation importance</a:t></a:r></a:p></a:txBody></a:tc><a:tc><a:txBody><a:bodyPr /><a:lstStyle /><a:p><a:pPr lvl="0" indent="0" marL="0"><a:buNone /></a:pPr><a:r><a:rPr b="1" /><a:t>Breaks down under correlated features</a:t></a:r><a:r><a:rPr /><a:t> — creates impossible data points</a:t></a:r></a:p></a:txBody></a:tc></a:tr><a:tr h="0"><a:tc><a:txBody><a:bodyPr /><a:lstStyle /><a:p><a:pPr lvl="0" indent="0" marL="0"><a:buNone /></a:pPr><a:r><a:rPr /><a:t>Partial dependence</a:t></a:r></a:p></a:txBody></a:tc><a:tc><a:txBody><a:bodyPr /><a:lstStyle /><a:p><a:pPr lvl="0" indent="0" marL="0"><a:buNone /></a:pPr><a:r><a:rPr /><a:t>Assumes </a:t></a:r><a14:m><m:oMath xmlns:m="http://schemas.openxmlformats.org/officeDocument/2006/math"><m:sSub><m:e><m:r><m:t>x</m:t></m:r></m:e><m:sub><m:r><m:t>S</m:t></m:r></m:sub></m:sSub><m:r><m:rPr><m:sty m:val="p" /></m:rPr><m:t>⟂</m:t></m:r><m:sSub><m:e><m:r><m:t>x</m:t></m:r></m:e><m:sub><m:r><m:t>C</m:t></m:r></m:sub></m:sSub></m:oMath></a14:m><a:r><a:rPr /><a:t>; hides heterogeneity</a:t></a:r></a:p></a:txBody></a:tc></a:tr><a:tr h="0"><a:tc><a:txBody><a:bodyPr /><a:lstStyle /><a:p><a:pPr lvl="0" indent="0" marL="0"><a:buNone /></a:pPr><a:r><a:rPr /><a:t>ICE curves</a:t></a:r></a:p></a:txBody></a:tc><a:tc><a:txBody><a:bodyPr /><a:lstStyle /><a:p><a:pPr lvl="0" indent="0" marL="0"><a:buNone /></a:pPr><a:r><a:rPr /><a:t>Reveals the heterogeneity a PDP averages away</a:t></a:r></a:p></a:txBody></a:tc></a:tr><a:tr h="0"><a:tc><a:txBody><a:bodyPr /><a:lstStyle /><a:p><a:pPr lvl="0" indent="0" marL="0"><a:buNone /></a:pPr><a:r><a:rPr b="1" /><a:t>SHAP</a:t></a:r></a:p></a:txBody></a:tc><a:tc><a:txBody><a:bodyPr /><a:lstStyle /><a:p><a:pPr lvl="0" indent="0" marL="0"><a:buNone /></a:pPr><a:r><a:rPr /><a:t>Unique under efficiency/symmetry/dummy/additivity; costly; assumes a value function</a:t></a:r></a:p></a:txBody></a:tc></a:tr></a:tbl></a:graphicData></a:graphic></p:graphicFrame></p:spTree></p:cSld></p:sld>
+</file>
+
+<file path=ppt/slides/slide28.xml><?xml version="1.0" encoding="utf-8"?>
+<p:sld xmlns:a="http://schemas.openxmlformats.org/drawingml/2006/main" xmlns:r="http://schemas.openxmlformats.org/officeDocument/2006/relationships" xmlns:p="http://schemas.openxmlformats.org/presentationml/2006/main">
+  <p:cSld>
+    <p:spTree>
+      <p:nvGrpSpPr>
+        <p:cNvPr id="1" name=""/>
+        <p:cNvGrpSpPr/>
+        <p:nvPr/>
+      </p:nvGrpSpPr>
+      <p:grpSpPr>
+        <a:xfrm>
+          <a:off x="0" y="0"/>
+          <a:ext cx="0" cy="0"/>
+          <a:chOff x="0" y="0"/>
+          <a:chExt cx="0" cy="0"/>
+        </a:xfrm>
+      </p:grpSpPr>
+      <p:sp>
+        <p:nvSpPr>
+          <p:cNvPr id="2" name="Title 1"/>
+          <p:cNvSpPr>
+            <a:spLocks noGrp="1"/>
+          </p:cNvSpPr>
+          <p:nvPr>
+            <p:ph type="title"/>
+          </p:nvPr>
+        </p:nvSpPr>
+        <p:spPr/>
+        <p:txBody>
+          <a:bodyPr/>
+          <a:lstStyle/>
+          <a:p>
+            <a:pPr lvl="0" indent="0" marL="0">
+              <a:buNone/>
+            </a:pPr>
+            <a:r>
+              <a:rPr/>
+              <a:t>The honest summary</a:t>
+            </a:r>
+          </a:p>
+        </p:txBody>
+      </p:sp>
+      <p:sp>
+        <p:nvSpPr>
+          <p:cNvPr id="3" name="Content Placeholder 2"/>
+          <p:cNvSpPr>
+            <a:spLocks noGrp="1"/>
+          </p:cNvSpPr>
+          <p:nvPr>
+            <p:ph idx="1"/>
+          </p:nvPr>
+        </p:nvSpPr>
+        <p:spPr/>
+        <p:txBody>
+          <a:bodyPr/>
+          <a:lstStyle/>
+          <a:p>
+            <a:pPr lvl="0" indent="0" marL="1270000">
+              <a:buNone/>
+            </a:pPr>
+            <a:r>
+              <a:rPr sz="2000"/>
+              <a:t>These tools describe the </a:t>
+            </a:r>
+            <a:r>
+              <a:rPr sz="2000" b="1"/>
+              <a:t>model</a:t>
+            </a:r>
+            <a:r>
+              <a:rPr sz="2000"/>
+              <a:t>, not the world.</a:t>
+            </a:r>
+          </a:p>
+          <a:p>
+            <a:pPr lvl="0" indent="0" marL="0">
+              <a:buNone/>
+            </a:pPr>
+            <a:r>
+              <a:rPr/>
+              <a:t>A large SHAP value means the model </a:t>
+            </a:r>
+            <a:r>
+              <a:rPr b="1"/>
+              <a:t>relies on</a:t>
+            </a:r>
+            <a:r>
+              <a:rPr/>
+              <a:t> that feature — not that the feature </a:t>
+            </a:r>
+            <a:r>
+              <a:rPr b="1"/>
+              <a:t>causes</a:t>
+            </a:r>
+            <a:r>
+              <a:rPr/>
+              <a:t> the outcome.</a:t>
+            </a:r>
+          </a:p>
+          <a:p>
+            <a:pPr lvl="0" indent="0" marL="0">
+              <a:buNone/>
+            </a:pPr>
+            <a:r>
+              <a:rPr/>
+              <a:t>Session 10 is where we finally take causality seriously. Until then, every sentence you write is about prediction.</a:t>
+            </a:r>
+          </a:p>
+        </p:txBody>
+      </p:sp>
+    </p:spTree>
+  </p:cSld>
+</p:sld>
+</file>
+
+<file path=ppt/slides/slide29.xml><?xml version="1.0" encoding="utf-8"?>
+<p:sld xmlns:a="http://schemas.openxmlformats.org/drawingml/2006/main" xmlns:r="http://schemas.openxmlformats.org/officeDocument/2006/relationships" xmlns:p="http://schemas.openxmlformats.org/presentationml/2006/main">
+  <p:cSld>
+    <p:spTree>
+      <p:nvGrpSpPr>
+        <p:cNvPr id="1" name=""/>
+        <p:cNvGrpSpPr/>
+        <p:nvPr/>
+      </p:nvGrpSpPr>
+      <p:grpSpPr>
+        <a:xfrm>
+          <a:off x="0" y="0"/>
+          <a:ext cx="0" cy="0"/>
+          <a:chOff x="0" y="0"/>
+          <a:chExt cx="0" cy="0"/>
+        </a:xfrm>
+      </p:grpSpPr>
+      <p:sp>
+        <p:nvSpPr>
+          <p:cNvPr id="2" name="Title 1"/>
+          <p:cNvSpPr>
+            <a:spLocks noGrp="1"/>
+          </p:cNvSpPr>
+          <p:nvPr>
+            <p:ph type="title"/>
+          </p:nvPr>
+        </p:nvSpPr>
+        <p:spPr>
+          <a:xfrm>
+            <a:off x="722313" y="3305176"/>
+            <a:ext cx="7772400" cy="1021556"/>
+          </a:xfrm>
+        </p:spPr>
+        <p:txBody>
+          <a:bodyPr/>
+          <a:lstStyle/>
+          <a:p>
+            <a:pPr lvl="0" indent="0" marL="0">
+              <a:buNone/>
+            </a:pPr>
+            <a:r>
+              <a:rPr/>
+              <a:t>The lab</a:t>
+            </a:r>
+          </a:p>
+        </p:txBody>
+      </p:sp>
     </p:spTree>
   </p:cSld>
 </p:sld>
@@ -7308,7 +6942,7 @@
             </a:pPr>
             <a:r>
               <a:rPr/>
-              <a:t>The 90 minutes ahead</a:t>
+              <a:t>These slides follow the notes</a:t>
             </a:r>
           </a:p>
         </p:txBody>
@@ -7348,7 +6982,7 @@
                       </a:pPr>
                       <a:r>
                         <a:rPr b="1"/>
-                        <a:t>0–10</a:t>
+                        <a:t>7.1</a:t>
                       </a:r>
                     </a:p>
                   </a:txBody>
@@ -7363,7 +6997,7 @@
                       </a:pPr>
                       <a:r>
                         <a:rPr/>
-                        <a:t>What a tree actually does</a:t>
+                        <a:t>Regression trees</a:t>
                       </a:r>
                     </a:p>
                   </a:txBody>
@@ -7380,7 +7014,7 @@
                       </a:pPr>
                       <a:r>
                         <a:rPr b="1"/>
-                        <a:t>10–25</a:t>
+                        <a:t>7.2</a:t>
                       </a:r>
                     </a:p>
                   </a:txBody>
@@ -7395,7 +7029,7 @@
                       </a:pPr>
                       <a:r>
                         <a:rPr/>
-                        <a:t>Why a single tree is unusable</a:t>
+                        <a:t>Cost-complexity pruning</a:t>
                       </a:r>
                     </a:p>
                   </a:txBody>
@@ -7412,7 +7046,7 @@
                       </a:pPr>
                       <a:r>
                         <a:rPr b="1"/>
-                        <a:t>25–45</a:t>
+                        <a:t>7.3</a:t>
                       </a:r>
                     </a:p>
                   </a:txBody>
@@ -7427,7 +7061,7 @@
                       </a:pPr>
                       <a:r>
                         <a:rPr/>
-                        <a:t>Bagging and random forests</a:t>
+                        <a:t>Bagging and the variance argument</a:t>
                       </a:r>
                     </a:p>
                   </a:txBody>
@@ -7444,7 +7078,7 @@
                       </a:pPr>
                       <a:r>
                         <a:rPr b="1"/>
-                        <a:t>45–65</a:t>
+                        <a:t>7.4</a:t>
                       </a:r>
                     </a:p>
                   </a:txBody>
@@ -7459,7 +7093,7 @@
                       </a:pPr>
                       <a:r>
                         <a:rPr/>
-                        <a:t>Boosting</a:t>
+                        <a:t>Gradient boosting as functional gradient descent</a:t>
                       </a:r>
                     </a:p>
                   </a:txBody>
@@ -7476,7 +7110,7 @@
                       </a:pPr>
                       <a:r>
                         <a:rPr b="1"/>
-                        <a:t>65–85</a:t>
+                        <a:t>7.5</a:t>
                       </a:r>
                     </a:p>
                   </a:txBody>
@@ -7491,39 +7125,7 @@
                       </a:pPr>
                       <a:r>
                         <a:rPr/>
-                        <a:t>Interpretation: importance, PDP, SHAP</a:t>
-                      </a:r>
-                    </a:p>
-                  </a:txBody>
-                </a:tc>
-              </a:tr>
-              <a:tr h="0">
-                <a:tc>
-                  <a:txBody>
-                    <a:bodyPr/>
-                    <a:lstStyle/>
-                    <a:p>
-                      <a:pPr lvl="0" indent="0" marL="0">
-                        <a:buNone/>
-                      </a:pPr>
-                      <a:r>
-                        <a:rPr b="1"/>
-                        <a:t>85–90</a:t>
-                      </a:r>
-                    </a:p>
-                  </a:txBody>
-                </a:tc>
-                <a:tc>
-                  <a:txBody>
-                    <a:bodyPr/>
-                    <a:lstStyle/>
-                    <a:p>
-                      <a:pPr lvl="0" indent="0" marL="0">
-                        <a:buNone/>
-                      </a:pPr>
-                      <a:r>
-                        <a:rPr/>
-                        <a:t>Handoff to the lab</a:t>
+                        <a:t>Recovering interpretation</a:t>
                       </a:r>
                     </a:p>
                   </a:txBody>
@@ -7575,7 +7177,7 @@
             </a:pPr>
             <a:r>
               <a:rPr/>
-              <a:t>In the lab</a:t>
+              <a:t>What you do</a:t>
             </a:r>
           </a:p>
         </p:txBody>
@@ -7600,7 +7202,7 @@
             </a:pPr>
             <a:r>
               <a:rPr/>
-              <a:t>Fit the forest and the boosted model under grouped CV</a:t>
+              <a:t>Fit a pruned tree, a forest and a boosted model on your angle, under grouped CV</a:t>
             </a:r>
           </a:p>
           <a:p>
@@ -7609,7 +7211,7 @@
             </a:pPr>
             <a:r>
               <a:rPr/>
-              <a:t>Compare both to the Session 03 linear specification — does flexibility pay?</a:t>
+              <a:t>Compare against the Session 03 linear specification — does flexibility pay?</a:t>
             </a:r>
           </a:p>
           <a:p>
@@ -7618,17 +7220,15 @@
             </a:pPr>
             <a:r>
               <a:rPr/>
-              <a:t>Produce permutation importance, and check whether </a:t>
-            </a:r>
-            <a:r>
-              <a:rPr>
-                <a:latin typeface="Courier"/>
-              </a:rPr>
-              <a:t>aux_*</a:t>
+              <a:t>Produce </a:t>
+            </a:r>
+            <a:r>
+              <a:rPr b="1"/>
+              <a:t>permutation</a:t>
             </a:r>
             <a:r>
               <a:rPr/>
-              <a:t> columns rank highly</a:t>
+              <a:t> importance, never impurity importance</a:t>
             </a:r>
           </a:p>
           <a:p>
@@ -7637,16 +7237,134 @@
             </a:pPr>
             <a:r>
               <a:rPr/>
-              <a:t>Draw two PDPs and describe the shapes in words</a:t>
-            </a:r>
-          </a:p>
+              <a:t>Draw one PDP and one set of ICE curves; describe the shapes in words</a:t>
+            </a:r>
+          </a:p>
+          <a:p>
+            <a:pPr lvl="0" indent="0" marL="0">
+              <a:buNone/>
+            </a:pPr>
+            <a:r>
+              <a:rPr/>
+              <a:t>Report the tuning you did and on which folds. A boosted model tuned and evaluated on one split is reporting training error.</a:t>
+            </a:r>
+          </a:p>
+        </p:txBody>
+      </p:sp>
+    </p:spTree>
+  </p:cSld>
+</p:sld>
+</file>
+
+<file path=ppt/slides/slide31.xml><?xml version="1.0" encoding="utf-8"?>
+<p:sld xmlns:a="http://schemas.openxmlformats.org/drawingml/2006/main" xmlns:r="http://schemas.openxmlformats.org/officeDocument/2006/relationships" xmlns:p="http://schemas.openxmlformats.org/presentationml/2006/main">
+  <p:cSld>
+    <p:spTree>
+      <p:nvGrpSpPr>
+        <p:cNvPr id="1" name=""/>
+        <p:cNvGrpSpPr/>
+        <p:nvPr/>
+      </p:nvGrpSpPr>
+      <p:grpSpPr>
+        <a:xfrm>
+          <a:off x="0" y="0"/>
+          <a:ext cx="0" cy="0"/>
+          <a:chOff x="0" y="0"/>
+          <a:chExt cx="0" cy="0"/>
+        </a:xfrm>
+      </p:grpSpPr>
+      <p:sp>
+        <p:nvSpPr>
+          <p:cNvPr id="2" name="Title 1"/>
+          <p:cNvSpPr>
+            <a:spLocks noGrp="1"/>
+          </p:cNvSpPr>
+          <p:nvPr>
+            <p:ph type="title"/>
+          </p:nvPr>
+        </p:nvSpPr>
+        <p:spPr/>
+        <p:txBody>
+          <a:bodyPr/>
+          <a:lstStyle/>
+          <a:p>
+            <a:pPr lvl="0" indent="0" marL="0">
+              <a:buNone/>
+            </a:pPr>
+            <a:r>
+              <a:rPr/>
+              <a:t>The two-minute report</a:t>
+            </a:r>
+          </a:p>
+        </p:txBody>
+      </p:sp>
+      <p:sp>
+        <p:nvSpPr>
+          <p:cNvPr id="3" name="Content Placeholder 2"/>
+          <p:cNvSpPr>
+            <a:spLocks noGrp="1"/>
+          </p:cNvSpPr>
+          <p:nvPr>
+            <p:ph idx="1"/>
+          </p:nvPr>
+        </p:nvSpPr>
+        <p:spPr/>
+        <p:txBody>
+          <a:bodyPr/>
+          <a:lstStyle/>
           <a:p>
             <a:pPr lvl="0" indent="-342900" marL="342900">
               <a:buAutoNum type="arabicPeriod"/>
             </a:pPr>
             <a:r>
+              <a:rPr b="1"/>
+              <a:t>What I did</a:t>
+            </a:r>
+            <a:r>
               <a:rPr/>
-              <a:t>Three sentences, using prediction language throughout</a:t>
+              <a:t> — the models, the CV scheme, the baseline they beat</a:t>
+            </a:r>
+          </a:p>
+          <a:p>
+            <a:pPr lvl="0" indent="-342900" marL="342900">
+              <a:buAutoNum type="arabicPeriod"/>
+            </a:pPr>
+            <a:r>
+              <a:rPr b="1"/>
+              <a:t>The number</a:t>
+            </a:r>
+            <a:r>
+              <a:rPr/>
+              <a:t> — error in the units of the outcome</a:t>
+            </a:r>
+          </a:p>
+          <a:p>
+            <a:pPr lvl="0" indent="-342900" marL="342900">
+              <a:buAutoNum type="arabicPeriod"/>
+            </a:pPr>
+            <a:r>
+              <a:rPr b="1"/>
+              <a:t>The catch</a:t>
+            </a:r>
+            <a:r>
+              <a:rPr/>
+              <a:t> — that every statement is about prediction, not effect</a:t>
+            </a:r>
+          </a:p>
+          <a:p>
+            <a:pPr lvl="0" indent="0" marL="0">
+              <a:buNone/>
+            </a:pPr>
+            <a:r>
+              <a:rPr/>
+              <a:t>Full brief: </a:t>
+            </a:r>
+            <a:r>
+              <a:rPr>
+                <a:hlinkClick r:id="rId2"/>
+                <a:latin typeface="Courier"/>
+              </a:rPr>
+              <a:t>02-lab/README.md</a:t>
             </a:r>
           </a:p>
         </p:txBody>
@@ -7675,12 +7393,12 @@
       </p:grpSpPr>
       <p:sp>
         <p:nvSpPr>
-          <p:cNvPr id="2" name="Title 1"/>
-          <p:cNvSpPr>
-            <a:spLocks noGrp="1"/>
-          </p:cNvSpPr>
-          <p:nvPr>
-            <p:ph type="title"/>
+          <p:cNvPr id="3" name="Content Placeholder 2"/>
+          <p:cNvSpPr>
+            <a:spLocks noGrp="1"/>
+          </p:cNvSpPr>
+          <p:nvPr>
+            <p:ph idx="1"/>
           </p:nvPr>
         </p:nvSpPr>
         <p:spPr/>
@@ -7693,87 +7411,18 @@
             </a:pPr>
             <a:r>
               <a:rPr/>
-              <a:t>Before class you read</a:t>
-            </a:r>
-          </a:p>
-        </p:txBody>
-      </p:sp>
-      <p:sp>
-        <p:nvSpPr>
-          <p:cNvPr id="3" name="Content Placeholder 2"/>
-          <p:cNvSpPr>
-            <a:spLocks noGrp="1"/>
-          </p:cNvSpPr>
-          <p:nvPr>
-            <p:ph idx="1"/>
-          </p:nvPr>
-        </p:nvSpPr>
-        <p:spPr/>
-        <p:txBody>
-          <a:bodyPr/>
-          <a:lstStyle/>
-          <a:p>
-            <a:pPr lvl="0" indent="0" marL="0">
-              <a:buNone/>
-            </a:pPr>
-            <a:r>
-              <a:rPr b="1"/>
-              <a:t>Athey &amp; Imbens</a:t>
+              <a:t>Same numbering as </a:t>
+            </a:r>
+            <a:r>
+              <a:rPr>
+                <a:hlinkClick r:id="rId2"/>
+                <a:latin typeface="Courier"/>
+              </a:rPr>
+              <a:t>01-lecture/README.md</a:t>
             </a:r>
             <a:r>
               <a:rPr/>
-              <a:t>, </a:t>
-            </a:r>
-            <a:r>
-              <a:rPr i="1"/>
-              <a:t>Machine Learning Methods That Economists Should Know About</a:t>
-            </a:r>
-            <a:r>
-              <a:rPr/>
-              <a:t>, </a:t>
-            </a:r>
-            <a:r>
-              <a:rPr b="1"/>
-              <a:t>Annual Review of Economics</a:t>
-            </a:r>
-            <a:r>
-              <a:rPr/>
-              <a:t>, 2019.</a:t>
-            </a:r>
-          </a:p>
-          <a:p>
-            <a:pPr lvl="0" indent="0" marL="0">
-              <a:buNone/>
-            </a:pPr>
-            <a:r>
-              <a:rPr/>
-              <a:t>DOI: 10.1146/annurev-economics-080217-053433</a:t>
-            </a:r>
-          </a:p>
-          <a:p>
-            <a:pPr lvl="0" indent="0" marL="0">
-              <a:buNone/>
-            </a:pPr>
-            <a:r>
-              <a:rPr/>
-              <a:t>The sentence to carry into today:</a:t>
-            </a:r>
-          </a:p>
-          <a:p>
-            <a:pPr lvl="0" indent="0" marL="1270000">
-              <a:buNone/>
-            </a:pPr>
-            <a:r>
-              <a:rPr sz="2000"/>
-              <a:t>These methods are built to </a:t>
-            </a:r>
-            <a:r>
-              <a:rPr sz="2000" b="1"/>
-              <a:t>predict</a:t>
-            </a:r>
-            <a:r>
-              <a:rPr sz="2000"/>
-              <a:t>, and they are very good at it. They are not built to give you a coefficient with a standard error, and using them as if they were is the most common misuse in applied work.</a:t>
+              <a:t>.</a:t>
             </a:r>
           </a:p>
         </p:txBody>
@@ -7810,7 +7459,12 @@
             <p:ph type="title"/>
           </p:nvPr>
         </p:nvSpPr>
-        <p:spPr/>
+        <p:spPr>
+          <a:xfrm>
+            <a:off x="722313" y="3305176"/>
+            <a:ext cx="7772400" cy="1021556"/>
+          </a:xfrm>
+        </p:spPr>
         <p:txBody>
           <a:bodyPr/>
           <a:lstStyle/>
@@ -7820,41 +7474,7 @@
             </a:pPr>
             <a:r>
               <a:rPr/>
-              <a:t>Today’s question</a:t>
-            </a:r>
-          </a:p>
-        </p:txBody>
-      </p:sp>
-      <p:sp>
-        <p:nvSpPr>
-          <p:cNvPr id="3" name="Content Placeholder 2"/>
-          <p:cNvSpPr>
-            <a:spLocks noGrp="1"/>
-          </p:cNvSpPr>
-          <p:nvPr>
-            <p:ph idx="1"/>
-          </p:nvPr>
-        </p:nvSpPr>
-        <p:spPr/>
-        <p:txBody>
-          <a:bodyPr/>
-          <a:lstStyle/>
-          <a:p>
-            <a:pPr lvl="0" indent="0" marL="1270000">
-              <a:buNone/>
-            </a:pPr>
-            <a:r>
-              <a:rPr sz="2000" i="1"/>
-              <a:t>What predicts a European country’s productivity growth, and does the answer depend on where the country already is?</a:t>
-            </a:r>
-          </a:p>
-          <a:p>
-            <a:pPr lvl="0" indent="0" marL="0">
-              <a:buNone/>
-            </a:pPr>
-            <a:r>
-              <a:rPr/>
-              <a:t>The second clause is the one linear models handle badly and trees handle naturally.</a:t>
+              <a:t>7.1 Regression trees</a:t>
             </a:r>
           </a:p>
         </p:txBody>
@@ -7891,12 +7511,7 @@
             <p:ph type="title"/>
           </p:nvPr>
         </p:nvSpPr>
-        <p:spPr>
-          <a:xfrm>
-            <a:off x="722313" y="3305176"/>
-            <a:ext cx="7772400" cy="1021556"/>
-          </a:xfrm>
-        </p:spPr>
+        <p:spPr/>
         <p:txBody>
           <a:bodyPr/>
           <a:lstStyle/>
@@ -7906,11 +7521,287 @@
             </a:pPr>
             <a:r>
               <a:rPr/>
-              <a:t>One tree</a:t>
-            </a:r>
-          </a:p>
-        </p:txBody>
-      </p:sp>
+              <a:t>The model</a:t>
+            </a:r>
+          </a:p>
+        </p:txBody>
+      </p:sp>
+      <mc:AlternateContent xmlns:mc="http://schemas.openxmlformats.org/markup-compatibility/2006">
+        <mc:Choice xmlns:a14="http://schemas.microsoft.com/office/drawing/2010/main" Requires="a14">
+          <p:sp>
+            <p:nvSpPr>
+              <p:cNvPr id="3" name="Content Placeholder 2"/>
+              <p:cNvSpPr>
+                <a:spLocks noGrp="1"/>
+              </p:cNvSpPr>
+              <p:nvPr>
+                <p:ph idx="1"/>
+              </p:nvPr>
+            </p:nvSpPr>
+            <p:spPr/>
+            <p:txBody>
+              <a:bodyPr/>
+              <a:lstStyle/>
+              <a:p>
+                <a:pPr lvl="0" indent="0" marL="0">
+                  <a:buNone/>
+                </a:pPr>
+                <a:r>
+                  <a:rPr/>
+                  <a:t>Partition the feature space into </a:t>
+                </a:r>
+                <a14:m>
+                  <m:oMath xmlns:m="http://schemas.openxmlformats.org/officeDocument/2006/math">
+                    <m:r>
+                      <m:t>M</m:t>
+                    </m:r>
+                  </m:oMath>
+                </a14:m>
+                <a:r>
+                  <a:rPr/>
+                  <a:t> regions and predict a constant in each:</a:t>
+                </a:r>
+              </a:p>
+              <a:p>
+                <a:pPr lvl="0" indent="0" marL="0">
+                  <a:buNone/>
+                </a:pPr>
+                <a14:m>
+                  <m:oMathPara xmlns:m="http://schemas.openxmlformats.org/officeDocument/2006/math">
+                    <m:oMathParaPr>
+                      <m:jc m:val="center"/>
+                    </m:oMathParaPr>
+                    <m:oMath>
+                      <m:acc>
+                        <m:accPr>
+                          <m:chr m:val="̂"/>
+                        </m:accPr>
+                        <m:e>
+                          <m:r>
+                            <m:t>f</m:t>
+                          </m:r>
+                        </m:e>
+                      </m:acc>
+                      <m:d>
+                        <m:dPr>
+                          <m:begChr m:val="("/>
+                          <m:sepChr m:val=""/>
+                          <m:endChr m:val=")"/>
+                          <m:grow/>
+                        </m:dPr>
+                        <m:e>
+                          <m:r>
+                            <m:t>x</m:t>
+                          </m:r>
+                        </m:e>
+                      </m:d>
+                      <m:r>
+                        <m:rPr>
+                          <m:sty m:val="p"/>
+                        </m:rPr>
+                        <m:t>=</m:t>
+                      </m:r>
+                      <m:nary>
+                        <m:naryPr>
+                          <m:chr m:val="∑"/>
+                          <m:limLoc m:val="undOvr"/>
+                          <m:subHide m:val="off"/>
+                          <m:supHide m:val="on"/>
+                        </m:naryPr>
+                        <m:sub>
+                          <m:r>
+                            <m:t>m</m:t>
+                          </m:r>
+                        </m:sub>
+                        <m:sup>
+                          <m:r>
+                            <m:t>​</m:t>
+                          </m:r>
+                        </m:sup>
+                        <m:e>
+                          <m:sSub>
+                            <m:e>
+                              <m:r>
+                                <m:t>c</m:t>
+                              </m:r>
+                            </m:e>
+                            <m:sub>
+                              <m:r>
+                                <m:t>m</m:t>
+                              </m:r>
+                            </m:sub>
+                          </m:sSub>
+                        </m:e>
+                      </m:nary>
+                      <m:r>
+                        <m:rPr>
+                          <m:sty m:val="p"/>
+                          <m:scr m:val="double-struck"/>
+                        </m:rPr>
+                        <m:t>1</m:t>
+                      </m:r>
+                      <m:r>
+                        <m:rPr>
+                          <m:sty m:val="p"/>
+                        </m:rPr>
+                        <m:t>{</m:t>
+                      </m:r>
+                      <m:r>
+                        <m:t>x</m:t>
+                      </m:r>
+                      <m:r>
+                        <m:rPr>
+                          <m:sty m:val="p"/>
+                        </m:rPr>
+                        <m:t>∈</m:t>
+                      </m:r>
+                      <m:sSub>
+                        <m:e>
+                          <m:r>
+                            <m:t>R</m:t>
+                          </m:r>
+                        </m:e>
+                        <m:sub>
+                          <m:r>
+                            <m:t>m</m:t>
+                          </m:r>
+                        </m:sub>
+                      </m:sSub>
+                      <m:r>
+                        <m:rPr>
+                          <m:sty m:val="p"/>
+                        </m:rPr>
+                        <m:t>}</m:t>
+                      </m:r>
+                    </m:oMath>
+                  </m:oMathPara>
+                </a14:m>
+              </a:p>
+              <a:p>
+                <a:pPr lvl="0" indent="0" marL="0">
+                  <a:buNone/>
+                </a:pPr>
+                <a:r>
+                  <a:rPr/>
+                  <a:t>Under squared loss the optimal constant is the region mean:</a:t>
+                </a:r>
+              </a:p>
+              <a:p>
+                <a:pPr lvl="0" indent="0" marL="0">
+                  <a:buNone/>
+                </a:pPr>
+                <a14:m>
+                  <m:oMathPara xmlns:m="http://schemas.openxmlformats.org/officeDocument/2006/math">
+                    <m:oMathParaPr>
+                      <m:jc m:val="center"/>
+                    </m:oMathParaPr>
+                    <m:oMath>
+                      <m:sSub>
+                        <m:e>
+                          <m:acc>
+                            <m:accPr>
+                              <m:chr m:val="̂"/>
+                            </m:accPr>
+                            <m:e>
+                              <m:r>
+                                <m:t>c</m:t>
+                              </m:r>
+                            </m:e>
+                          </m:acc>
+                        </m:e>
+                        <m:sub>
+                          <m:r>
+                            <m:t>m</m:t>
+                          </m:r>
+                        </m:sub>
+                      </m:sSub>
+                      <m:r>
+                        <m:rPr>
+                          <m:sty m:val="p"/>
+                        </m:rPr>
+                        <m:t>=</m:t>
+                      </m:r>
+                      <m:r>
+                        <m:rPr>
+                          <m:sty m:val="p"/>
+                        </m:rPr>
+                        <m:t>ave</m:t>
+                      </m:r>
+                      <m:d>
+                        <m:dPr>
+                          <m:begChr m:val="("/>
+                          <m:sepChr m:val=""/>
+                          <m:endChr m:val=")"/>
+                          <m:grow/>
+                        </m:dPr>
+                        <m:e>
+                          <m:sSub>
+                            <m:e>
+                              <m:r>
+                                <m:t>y</m:t>
+                              </m:r>
+                            </m:e>
+                            <m:sub>
+                              <m:r>
+                                <m:t>i</m:t>
+                              </m:r>
+                            </m:sub>
+                          </m:sSub>
+                          <m:r>
+                            <m:rPr>
+                              <m:sty m:val="p"/>
+                            </m:rPr>
+                            <m:t>∣</m:t>
+                          </m:r>
+                          <m:sSub>
+                            <m:e>
+                              <m:r>
+                                <m:t>x</m:t>
+                              </m:r>
+                            </m:e>
+                            <m:sub>
+                              <m:r>
+                                <m:t>i</m:t>
+                              </m:r>
+                            </m:sub>
+                          </m:sSub>
+                          <m:r>
+                            <m:rPr>
+                              <m:sty m:val="p"/>
+                            </m:rPr>
+                            <m:t>∈</m:t>
+                          </m:r>
+                          <m:sSub>
+                            <m:e>
+                              <m:r>
+                                <m:t>R</m:t>
+                              </m:r>
+                            </m:e>
+                            <m:sub>
+                              <m:r>
+                                <m:t>m</m:t>
+                              </m:r>
+                            </m:sub>
+                          </m:sSub>
+                        </m:e>
+                      </m:d>
+                    </m:oMath>
+                  </m:oMathPara>
+                </a14:m>
+              </a:p>
+              <a:p>
+                <a:pPr lvl="0" indent="0" marL="0">
+                  <a:buNone/>
+                </a:pPr>
+                <a:r>
+                  <a:rPr/>
+                  <a:t>A tree is a step function. That is the whole model.</a:t>
+                </a:r>
+              </a:p>
+            </p:txBody>
+          </p:sp>
+        </mc:Choice>
+      </mc:AlternateContent>
     </p:spTree>
   </p:cSld>
 </p:sld>
@@ -7953,7 +7844,7 @@
             </a:pPr>
             <a:r>
               <a:rPr/>
-              <a:t>Recursive binary splitting</a:t>
+              <a:t>Greedy splitting</a:t>
             </a:r>
           </a:p>
         </p:txBody>
@@ -7980,7 +7871,15 @@
                 </a:pPr>
                 <a:r>
                   <a:rPr/>
-                  <a:t>At each node, choose the predictor </a:t>
+                  <a:t>Finding the optimal partition is computationally infeasible, so we proceed </a:t>
+                </a:r>
+                <a:r>
+                  <a:rPr b="1"/>
+                  <a:t>greedily</a:t>
+                </a:r>
+                <a:r>
+                  <a:rPr/>
+                  <a:t>. At each node, search over splitting variable </a:t>
                 </a:r>
                 <a14:m>
                   <m:oMath xmlns:m="http://schemas.openxmlformats.org/officeDocument/2006/math">
@@ -7991,7 +7890,7 @@
                 </a14:m>
                 <a:r>
                   <a:rPr/>
-                  <a:t> and cut point </a:t>
+                  <a:t> and split point </a:t>
                 </a:r>
                 <a14:m>
                   <m:oMath xmlns:m="http://schemas.openxmlformats.org/officeDocument/2006/math">
@@ -8002,7 +7901,7 @@
                 </a14:m>
                 <a:r>
                   <a:rPr/>
-                  <a:t> minimising</a:t>
+                  <a:t>:</a:t>
                 </a:r>
               </a:p>
               <a:p>
@@ -8015,59 +7914,103 @@
                       <m:jc m:val="center"/>
                     </m:oMathParaPr>
                     <m:oMath>
-                      <m:nary>
-                        <m:naryPr>
-                          <m:chr m:val="∑"/>
-                          <m:limLoc m:val="undOvr"/>
-                          <m:subHide m:val="off"/>
-                          <m:supHide m:val="on"/>
-                        </m:naryPr>
-                        <m:sub>
+                      <m:limLow>
+                        <m:e>
                           <m:r>
-                            <m:t>i</m:t>
+                            <m:rPr>
+                              <m:sty m:val="p"/>
+                            </m:rPr>
+                            <m:t>min</m:t>
+                          </m:r>
+                        </m:e>
+                        <m:lim>
+                          <m:r>
+                            <m:t>j</m:t>
                           </m:r>
                           <m:r>
                             <m:rPr>
                               <m:sty m:val="p"/>
                             </m:rPr>
-                            <m:t>:</m:t>
-                          </m:r>
-                          <m:r>
-                            <m:t> </m:t>
-                          </m:r>
-                          <m:sSub>
-                            <m:e>
-                              <m:r>
-                                <m:t>x</m:t>
-                              </m:r>
-                            </m:e>
-                            <m:sub>
-                              <m:r>
-                                <m:t>i</m:t>
-                              </m:r>
-                              <m:r>
-                                <m:t>j</m:t>
-                              </m:r>
-                            </m:sub>
-                          </m:sSub>
-                          <m:r>
-                            <m:rPr>
-                              <m:sty m:val="p"/>
-                            </m:rPr>
-                            <m:t>≤</m:t>
+                            <m:t>,</m:t>
                           </m:r>
                           <m:r>
                             <m:t>s</m:t>
                           </m:r>
-                        </m:sub>
-                        <m:sup>
-                          <m:r>
-                            <m:t>​</m:t>
-                          </m:r>
-                        </m:sup>
+                        </m:lim>
+                      </m:limLow>
+                      <m:r>
+                        <m:t> </m:t>
+                      </m:r>
+                      <m:d>
+                        <m:dPr>
+                          <m:begChr m:val="["/>
+                          <m:sepChr m:val=""/>
+                          <m:endChr m:val="]"/>
+                          <m:grow/>
+                        </m:dPr>
                         <m:e>
-                          <m:sSup>
+                          <m:limLow>
                             <m:e>
+                              <m:r>
+                                <m:rPr>
+                                  <m:sty m:val="p"/>
+                                </m:rPr>
+                                <m:t>min</m:t>
+                              </m:r>
+                            </m:e>
+                            <m:lim>
+                              <m:sSub>
+                                <m:e>
+                                  <m:r>
+                                    <m:t>c</m:t>
+                                  </m:r>
+                                </m:e>
+                                <m:sub>
+                                  <m:r>
+                                    <m:t>1</m:t>
+                                  </m:r>
+                                </m:sub>
+                              </m:sSub>
+                            </m:lim>
+                          </m:limLow>
+                          <m:nary>
+                            <m:naryPr>
+                              <m:chr m:val="∑"/>
+                              <m:limLoc m:val="undOvr"/>
+                              <m:subHide m:val="off"/>
+                              <m:supHide m:val="on"/>
+                            </m:naryPr>
+                            <m:sub>
+                              <m:sSub>
+                                <m:e>
+                                  <m:r>
+                                    <m:t>x</m:t>
+                                  </m:r>
+                                </m:e>
+                                <m:sub>
+                                  <m:r>
+                                    <m:t>i</m:t>
+                                  </m:r>
+                                </m:sub>
+                              </m:sSub>
+                              <m:r>
+                                <m:rPr>
+                                  <m:sty m:val="p"/>
+                                </m:rPr>
+                                <m:t>∈</m:t>
+                              </m:r>
+                              <m:sSub>
+                                <m:e>
+                                  <m:r>
+                                    <m:t>R</m:t>
+                                  </m:r>
+                                </m:e>
+                                <m:sub>
+                                  <m:r>
+                                    <m:t>1</m:t>
+                                  </m:r>
+                                </m:sub>
+                              </m:sSub>
                               <m:d>
                                 <m:dPr>
                                   <m:begChr m:val="("/>
@@ -8076,116 +8019,146 @@
                                   <m:grow/>
                                 </m:dPr>
                                 <m:e>
-                                  <m:sSub>
-                                    <m:e>
-                                      <m:r>
-                                        <m:t>y</m:t>
-                                      </m:r>
-                                    </m:e>
-                                    <m:sub>
-                                      <m:r>
-                                        <m:t>i</m:t>
-                                      </m:r>
-                                    </m:sub>
-                                  </m:sSub>
+                                  <m:r>
+                                    <m:t>j</m:t>
+                                  </m:r>
                                   <m:r>
                                     <m:rPr>
                                       <m:sty m:val="p"/>
                                     </m:rPr>
-                                    <m:t>−</m:t>
+                                    <m:t>,</m:t>
                                   </m:r>
-                                  <m:sSub>
+                                  <m:r>
+                                    <m:t>s</m:t>
+                                  </m:r>
+                                </m:e>
+                              </m:d>
+                            </m:sub>
+                            <m:sup>
+                              <m:r>
+                                <m:t>​</m:t>
+                              </m:r>
+                            </m:sup>
+                            <m:e>
+                              <m:sSup>
+                                <m:e>
+                                  <m:d>
+                                    <m:dPr>
+                                      <m:begChr m:val="("/>
+                                      <m:sepChr m:val=""/>
+                                      <m:endChr m:val=")"/>
+                                      <m:grow/>
+                                    </m:dPr>
                                     <m:e>
-                                      <m:acc>
-                                        <m:accPr>
-                                          <m:chr m:val="‾"/>
-                                        </m:accPr>
+                                      <m:sSub>
                                         <m:e>
                                           <m:r>
                                             <m:t>y</m:t>
                                           </m:r>
                                         </m:e>
-                                      </m:acc>
+                                        <m:sub>
+                                          <m:r>
+                                            <m:t>i</m:t>
+                                          </m:r>
+                                        </m:sub>
+                                      </m:sSub>
+                                      <m:r>
+                                        <m:rPr>
+                                          <m:sty m:val="p"/>
+                                        </m:rPr>
+                                        <m:t>−</m:t>
+                                      </m:r>
+                                      <m:sSub>
+                                        <m:e>
+                                          <m:r>
+                                            <m:t>c</m:t>
+                                          </m:r>
+                                        </m:e>
+                                        <m:sub>
+                                          <m:r>
+                                            <m:t>1</m:t>
+                                          </m:r>
+                                        </m:sub>
+                                      </m:sSub>
                                     </m:e>
-                                    <m:sub>
-                                      <m:r>
-                                        <m:t>L</m:t>
-                                      </m:r>
-                                    </m:sub>
-                                  </m:sSub>
+                                  </m:d>
                                 </m:e>
-                              </m:d>
+                                <m:sup>
+                                  <m:r>
+                                    <m:t>2</m:t>
+                                  </m:r>
+                                </m:sup>
+                              </m:sSup>
                             </m:e>
-                            <m:sup>
-                              <m:r>
-                                <m:t>2</m:t>
-                              </m:r>
-                            </m:sup>
-                          </m:sSup>
-                        </m:e>
-                      </m:nary>
-                      <m:r>
-                        <m:t> </m:t>
-                      </m:r>
-                      <m:r>
-                        <m:rPr>
-                          <m:sty m:val="p"/>
-                        </m:rPr>
-                        <m:t>+</m:t>
-                      </m:r>
-                      <m:nary>
-                        <m:naryPr>
-                          <m:chr m:val="∑"/>
-                          <m:limLoc m:val="undOvr"/>
-                          <m:subHide m:val="off"/>
-                          <m:supHide m:val="on"/>
-                        </m:naryPr>
-                        <m:sub>
-                          <m:r>
-                            <m:t>i</m:t>
-                          </m:r>
+                          </m:nary>
                           <m:r>
                             <m:rPr>
                               <m:sty m:val="p"/>
                             </m:rPr>
-                            <m:t>:</m:t>
+                            <m:t>+</m:t>
                           </m:r>
-                          <m:r>
-                            <m:t> </m:t>
-                          </m:r>
-                          <m:sSub>
+                          <m:limLow>
                             <m:e>
                               <m:r>
-                                <m:t>x</m:t>
+                                <m:rPr>
+                                  <m:sty m:val="p"/>
+                                </m:rPr>
+                                <m:t>min</m:t>
                               </m:r>
                             </m:e>
+                            <m:lim>
+                              <m:sSub>
+                                <m:e>
+                                  <m:r>
+                                    <m:t>c</m:t>
+                                  </m:r>
+                                </m:e>
+                                <m:sub>
+                                  <m:r>
+                                    <m:t>2</m:t>
+                                  </m:r>
+                                </m:sub>
+                              </m:sSub>
+                            </m:lim>
+                          </m:limLow>
+                          <m:nary>
+                            <m:naryPr>
+                              <m:chr m:val="∑"/>
+                              <m:limLoc m:val="undOvr"/>
+                              <m:subHide m:val="off"/>
+                              <m:supHide m:val="on"/>
+                            </m:naryPr>
                             <m:sub>
+                              <m:sSub>
+                                <m:e>
+                                  <m:r>
+                                    <m:t>x</m:t>
+                                  </m:r>
+                                </m:e>
+                                <m:sub>
+                                  <m:r>
+                                    <m:t>i</m:t>
+                                  </m:r>
+                                </m:sub>
+                              </m:sSub>
                               <m:r>
-                                <m:t>i</m:t>
+                                <m:rPr>
+                                  <m:sty m:val="p"/>
+                                </m:rPr>
+                                <m:t>∈</m:t>
                               </m:r>
-                              <m:r>
-                                <m:t>j</m:t>
-                              </m:r>
-                            </m:sub>
-                          </m:sSub>
-                          <m:r>
-                            <m:rPr>
-                              <m:sty m:val="p"/>
-                            </m:rPr>
-                            <m:t>&gt;</m:t>
-                          </m:r>
-                          <m:r>
-                            <m:t>s</m:t>
-                          </m:r>
-                        </m:sub>
-                        <m:sup>
-                          <m:r>
-                            <m:t>​</m:t>
-                          </m:r>
-                        </m:sup>
-                        <m:e>
-                          <m:sSup>
-                            <m:e>
+                              <m:sSub>
+                                <m:e>
+                                  <m:r>
+                                    <m:t>R</m:t>
+                                  </m:r>
+                                </m:e>
+                                <m:sub>
+                                  <m:r>
+                                    <m:t>2</m:t>
+                                  </m:r>
+                                </m:sub>
+                              </m:sSub>
                               <m:d>
                                 <m:dPr>
                                   <m:begChr m:val="("/>
@@ -8194,54 +8167,80 @@
                                   <m:grow/>
                                 </m:dPr>
                                 <m:e>
-                                  <m:sSub>
-                                    <m:e>
-                                      <m:r>
-                                        <m:t>y</m:t>
-                                      </m:r>
-                                    </m:e>
-                                    <m:sub>
-                                      <m:r>
-                                        <m:t>i</m:t>
-                                      </m:r>
-                                    </m:sub>
-                                  </m:sSub>
+                                  <m:r>
+                                    <m:t>j</m:t>
+                                  </m:r>
                                   <m:r>
                                     <m:rPr>
                                       <m:sty m:val="p"/>
                                     </m:rPr>
-                                    <m:t>−</m:t>
+                                    <m:t>,</m:t>
                                   </m:r>
-                                  <m:sSub>
+                                  <m:r>
+                                    <m:t>s</m:t>
+                                  </m:r>
+                                </m:e>
+                              </m:d>
+                            </m:sub>
+                            <m:sup>
+                              <m:r>
+                                <m:t>​</m:t>
+                              </m:r>
+                            </m:sup>
+                            <m:e>
+                              <m:sSup>
+                                <m:e>
+                                  <m:d>
+                                    <m:dPr>
+                                      <m:begChr m:val="("/>
+                                      <m:sepChr m:val=""/>
+                                      <m:endChr m:val=")"/>
+                                      <m:grow/>
+                                    </m:dPr>
                                     <m:e>
-                                      <m:acc>
-                                        <m:accPr>
-                                          <m:chr m:val="‾"/>
-                                        </m:accPr>
+                                      <m:sSub>
                                         <m:e>
                                           <m:r>
                                             <m:t>y</m:t>
                                           </m:r>
                                         </m:e>
-                                      </m:acc>
+                                        <m:sub>
+                                          <m:r>
+                                            <m:t>i</m:t>
+                                          </m:r>
+                                        </m:sub>
+                                      </m:sSub>
+                                      <m:r>
+                                        <m:rPr>
+                                          <m:sty m:val="p"/>
+                                        </m:rPr>
+                                        <m:t>−</m:t>
+                                      </m:r>
+                                      <m:sSub>
+                                        <m:e>
+                                          <m:r>
+                                            <m:t>c</m:t>
+                                          </m:r>
+                                        </m:e>
+                                        <m:sub>
+                                          <m:r>
+                                            <m:t>2</m:t>
+                                          </m:r>
+                                        </m:sub>
+                                      </m:sSub>
                                     </m:e>
-                                    <m:sub>
-                                      <m:r>
-                                        <m:t>R</m:t>
-                                      </m:r>
-                                    </m:sub>
-                                  </m:sSub>
+                                  </m:d>
                                 </m:e>
-                              </m:d>
+                                <m:sup>
+                                  <m:r>
+                                    <m:t>2</m:t>
+                                  </m:r>
+                                </m:sup>
+                              </m:sSup>
                             </m:e>
-                            <m:sup>
-                              <m:r>
-                                <m:t>2</m:t>
-                              </m:r>
-                            </m:sup>
-                          </m:sSup>
+                          </m:nary>
                         </m:e>
-                      </m:nary>
+                      </m:d>
                     </m:oMath>
                   </m:oMathPara>
                 </a14:m>
@@ -8252,7 +8251,187 @@
                 </a:pPr>
                 <a:r>
                   <a:rPr/>
-                  <a:t>then repeat inside each half.</a:t>
+                  <a:t>with </a:t>
+                </a:r>
+                <a14:m>
+                  <m:oMath xmlns:m="http://schemas.openxmlformats.org/officeDocument/2006/math">
+                    <m:sSub>
+                      <m:e>
+                        <m:r>
+                          <m:t>R</m:t>
+                        </m:r>
+                      </m:e>
+                      <m:sub>
+                        <m:r>
+                          <m:t>1</m:t>
+                        </m:r>
+                      </m:sub>
+                    </m:sSub>
+                    <m:d>
+                      <m:dPr>
+                        <m:begChr m:val="("/>
+                        <m:sepChr m:val=""/>
+                        <m:endChr m:val=")"/>
+                        <m:grow/>
+                      </m:dPr>
+                      <m:e>
+                        <m:r>
+                          <m:t>j</m:t>
+                        </m:r>
+                        <m:r>
+                          <m:rPr>
+                            <m:sty m:val="p"/>
+                          </m:rPr>
+                          <m:t>,</m:t>
+                        </m:r>
+                        <m:r>
+                          <m:t>s</m:t>
+                        </m:r>
+                      </m:e>
+                    </m:d>
+                    <m:r>
+                      <m:rPr>
+                        <m:sty m:val="p"/>
+                      </m:rPr>
+                      <m:t>=</m:t>
+                    </m:r>
+                    <m:r>
+                      <m:rPr>
+                        <m:sty m:val="p"/>
+                      </m:rPr>
+                      <m:t>{</m:t>
+                    </m:r>
+                    <m:r>
+                      <m:t>x</m:t>
+                    </m:r>
+                    <m:r>
+                      <m:rPr>
+                        <m:sty m:val="p"/>
+                      </m:rPr>
+                      <m:t>:</m:t>
+                    </m:r>
+                    <m:sSub>
+                      <m:e>
+                        <m:r>
+                          <m:t>x</m:t>
+                        </m:r>
+                      </m:e>
+                      <m:sub>
+                        <m:r>
+                          <m:t>j</m:t>
+                        </m:r>
+                      </m:sub>
+                    </m:sSub>
+                    <m:r>
+                      <m:rPr>
+                        <m:sty m:val="p"/>
+                      </m:rPr>
+                      <m:t>≤</m:t>
+                    </m:r>
+                    <m:r>
+                      <m:t>s</m:t>
+                    </m:r>
+                    <m:r>
+                      <m:rPr>
+                        <m:sty m:val="p"/>
+                      </m:rPr>
+                      <m:t>}</m:t>
+                    </m:r>
+                  </m:oMath>
+                </a14:m>
+                <a:r>
+                  <a:rPr/>
+                  <a:t>, </a:t>
+                </a:r>
+                <a14:m>
+                  <m:oMath xmlns:m="http://schemas.openxmlformats.org/officeDocument/2006/math">
+                    <m:sSub>
+                      <m:e>
+                        <m:r>
+                          <m:t>R</m:t>
+                        </m:r>
+                      </m:e>
+                      <m:sub>
+                        <m:r>
+                          <m:t>2</m:t>
+                        </m:r>
+                      </m:sub>
+                    </m:sSub>
+                    <m:d>
+                      <m:dPr>
+                        <m:begChr m:val="("/>
+                        <m:sepChr m:val=""/>
+                        <m:endChr m:val=")"/>
+                        <m:grow/>
+                      </m:dPr>
+                      <m:e>
+                        <m:r>
+                          <m:t>j</m:t>
+                        </m:r>
+                        <m:r>
+                          <m:rPr>
+                            <m:sty m:val="p"/>
+                          </m:rPr>
+                          <m:t>,</m:t>
+                        </m:r>
+                        <m:r>
+                          <m:t>s</m:t>
+                        </m:r>
+                      </m:e>
+                    </m:d>
+                    <m:r>
+                      <m:rPr>
+                        <m:sty m:val="p"/>
+                      </m:rPr>
+                      <m:t>=</m:t>
+                    </m:r>
+                    <m:r>
+                      <m:rPr>
+                        <m:sty m:val="p"/>
+                      </m:rPr>
+                      <m:t>{</m:t>
+                    </m:r>
+                    <m:r>
+                      <m:t>x</m:t>
+                    </m:r>
+                    <m:r>
+                      <m:rPr>
+                        <m:sty m:val="p"/>
+                      </m:rPr>
+                      <m:t>:</m:t>
+                    </m:r>
+                    <m:sSub>
+                      <m:e>
+                        <m:r>
+                          <m:t>x</m:t>
+                        </m:r>
+                      </m:e>
+                      <m:sub>
+                        <m:r>
+                          <m:t>j</m:t>
+                        </m:r>
+                      </m:sub>
+                    </m:sSub>
+                    <m:r>
+                      <m:rPr>
+                        <m:sty m:val="p"/>
+                      </m:rPr>
+                      <m:t>&gt;</m:t>
+                    </m:r>
+                    <m:r>
+                      <m:t>s</m:t>
+                    </m:r>
+                    <m:r>
+                      <m:rPr>
+                        <m:sty m:val="p"/>
+                      </m:rPr>
+                      <m:t>}</m:t>
+                    </m:r>
+                  </m:oMath>
+                </a14:m>
+                <a:r>
+                  <a:rPr/>
+                  <a:t>.</a:t>
                 </a:r>
               </a:p>
               <a:p>
@@ -8261,15 +8440,46 @@
                 </a:pPr>
                 <a:r>
                   <a:rPr/>
-                  <a:t>The prediction for a region is simply the </a:t>
+                  <a:t>The inner minimisations are just means, so one scan over sorted values of each feature suffices: </a:t>
                 </a:r>
-                <a:r>
-                  <a:rPr b="1"/>
-                  <a:t>mean of the training outcomes in it</a:t>
-                </a:r>
+                <a14:m>
+                  <m:oMath xmlns:m="http://schemas.openxmlformats.org/officeDocument/2006/math">
+                    <m:r>
+                      <m:t>O</m:t>
+                    </m:r>
+                    <m:d>
+                      <m:dPr>
+                        <m:begChr m:val="("/>
+                        <m:sepChr m:val=""/>
+                        <m:endChr m:val=")"/>
+                        <m:grow/>
+                      </m:dPr>
+                      <m:e>
+                        <m:r>
+                          <m:t>p</m:t>
+                        </m:r>
+                        <m:r>
+                          <m:t> </m:t>
+                        </m:r>
+                        <m:r>
+                          <m:t>n</m:t>
+                        </m:r>
+                        <m:r>
+                          <m:rPr>
+                            <m:sty m:val="p"/>
+                          </m:rPr>
+                          <m:t>log</m:t>
+                        </m:r>
+                        <m:r>
+                          <m:t>n</m:t>
+                        </m:r>
+                      </m:e>
+                    </m:d>
+                  </m:oMath>
+                </a14:m>
                 <a:r>
                   <a:rPr/>
-                  <a:t>. A tree is a step function.</a:t>
+                  <a:t> per node.</a:t>
                 </a:r>
               </a:p>
             </p:txBody>
@@ -8318,99 +8528,351 @@
             </a:pPr>
             <a:r>
               <a:rPr/>
-              <a:t>What trees give you free</a:t>
-            </a:r>
-          </a:p>
-        </p:txBody>
-      </p:sp>
-      <p:sp>
-        <p:nvSpPr>
-          <p:cNvPr id="3" name="Content Placeholder 2"/>
-          <p:cNvSpPr>
-            <a:spLocks noGrp="1"/>
-          </p:cNvSpPr>
-          <p:nvPr>
-            <p:ph idx="1"/>
-          </p:nvPr>
-        </p:nvSpPr>
-        <p:spPr/>
-        <p:txBody>
-          <a:bodyPr/>
-          <a:lstStyle/>
-          <a:p>
-            <a:pPr lvl="0"/>
-            <a:r>
-              <a:rPr b="1"/>
-              <a:t>Nonlinearity</a:t>
-            </a:r>
-            <a:r>
-              <a:rPr/>
-              <a:t> — no functional form to specify</a:t>
-            </a:r>
-          </a:p>
-          <a:p>
-            <a:pPr lvl="0"/>
-            <a:r>
-              <a:rPr b="1"/>
-              <a:t>Interactions</a:t>
-            </a:r>
-            <a:r>
-              <a:rPr/>
-              <a:t> — a split below a split </a:t>
-            </a:r>
-            <a:r>
-              <a:rPr i="1"/>
-              <a:t>is</a:t>
-            </a:r>
-            <a:r>
-              <a:rPr/>
-              <a:t> an interaction</a:t>
-            </a:r>
-          </a:p>
-          <a:p>
-            <a:pPr lvl="0"/>
-            <a:r>
-              <a:rPr b="1"/>
-              <a:t>Scale invariance</a:t>
-            </a:r>
-            <a:r>
-              <a:rPr/>
-              <a:t> — no standardising; only the order matters</a:t>
-            </a:r>
-          </a:p>
-          <a:p>
-            <a:pPr lvl="0"/>
-            <a:r>
-              <a:rPr b="1"/>
-              <a:t>Mixed types</a:t>
-            </a:r>
-            <a:r>
-              <a:rPr/>
-              <a:t> — categorical and numeric together</a:t>
-            </a:r>
-          </a:p>
-          <a:p>
-            <a:pPr lvl="0"/>
-            <a:r>
-              <a:rPr b="1"/>
-              <a:t>Missingness</a:t>
-            </a:r>
-            <a:r>
-              <a:rPr/>
-              <a:t> — handled by surrogate splits or a branch of their own</a:t>
-            </a:r>
-          </a:p>
-          <a:p>
-            <a:pPr lvl="0" indent="0" marL="0">
-              <a:buNone/>
-            </a:pPr>
-            <a:r>
-              <a:rPr/>
-              <a:t>This is why trees are the default on tabular data, and why they are worth the interpretive difficulty that follows.</a:t>
-            </a:r>
-          </a:p>
-        </p:txBody>
-      </p:sp>
+              <a:t>Impurity, for classification</a:t>
+            </a:r>
+          </a:p>
+        </p:txBody>
+      </p:sp>
+      <mc:AlternateContent xmlns:mc="http://schemas.openxmlformats.org/markup-compatibility/2006">
+        <mc:Choice xmlns:a14="http://schemas.microsoft.com/office/drawing/2010/main" Requires="a14">
+          <p:sp>
+            <p:nvSpPr>
+              <p:cNvPr id="3" name="Content Placeholder 2"/>
+              <p:cNvSpPr>
+                <a:spLocks noGrp="1"/>
+              </p:cNvSpPr>
+              <p:nvPr>
+                <p:ph idx="1"/>
+              </p:nvPr>
+            </p:nvSpPr>
+            <p:spPr/>
+            <p:txBody>
+              <a:bodyPr/>
+              <a:lstStyle/>
+              <a:p>
+                <a:pPr lvl="0" indent="0" marL="0">
+                  <a:buNone/>
+                </a:pPr>
+                <a:r>
+                  <a:rPr/>
+                  <a:t>Replace variance with a measure on the node class proportions </a:t>
+                </a:r>
+                <a14:m>
+                  <m:oMath xmlns:m="http://schemas.openxmlformats.org/officeDocument/2006/math">
+                    <m:sSub>
+                      <m:e>
+                        <m:acc>
+                          <m:accPr>
+                            <m:chr m:val="̂"/>
+                          </m:accPr>
+                          <m:e>
+                            <m:r>
+                              <m:t>p</m:t>
+                            </m:r>
+                          </m:e>
+                        </m:acc>
+                      </m:e>
+                      <m:sub>
+                        <m:r>
+                          <m:t>m</m:t>
+                        </m:r>
+                        <m:r>
+                          <m:t>k</m:t>
+                        </m:r>
+                      </m:sub>
+                    </m:sSub>
+                  </m:oMath>
+                </a14:m>
+                <a:r>
+                  <a:rPr/>
+                  <a:t>:</a:t>
+                </a:r>
+              </a:p>
+              <a:p>
+                <a:pPr lvl="0" indent="0" marL="0">
+                  <a:buNone/>
+                </a:pPr>
+                <a14:m>
+                  <m:oMathPara xmlns:m="http://schemas.openxmlformats.org/officeDocument/2006/math">
+                    <m:oMathParaPr>
+                      <m:jc m:val="center"/>
+                    </m:oMathParaPr>
+                    <m:oMath>
+                      <m:r>
+                        <m:rPr>
+                          <m:nor/>
+                          <m:sty m:val="p"/>
+                        </m:rPr>
+                        <m:t>Gini</m:t>
+                      </m:r>
+                      <m:r>
+                        <m:rPr>
+                          <m:sty m:val="p"/>
+                        </m:rPr>
+                        <m:t>=</m:t>
+                      </m:r>
+                      <m:nary>
+                        <m:naryPr>
+                          <m:chr m:val="∑"/>
+                          <m:limLoc m:val="undOvr"/>
+                          <m:subHide m:val="off"/>
+                          <m:supHide m:val="on"/>
+                        </m:naryPr>
+                        <m:sub>
+                          <m:r>
+                            <m:t>k</m:t>
+                          </m:r>
+                        </m:sub>
+                        <m:sup>
+                          <m:r>
+                            <m:t>​</m:t>
+                          </m:r>
+                        </m:sup>
+                        <m:e>
+                          <m:sSub>
+                            <m:e>
+                              <m:acc>
+                                <m:accPr>
+                                  <m:chr m:val="̂"/>
+                                </m:accPr>
+                                <m:e>
+                                  <m:r>
+                                    <m:t>p</m:t>
+                                  </m:r>
+                                </m:e>
+                              </m:acc>
+                            </m:e>
+                            <m:sub>
+                              <m:r>
+                                <m:t>m</m:t>
+                              </m:r>
+                              <m:r>
+                                <m:t>k</m:t>
+                              </m:r>
+                            </m:sub>
+                          </m:sSub>
+                        </m:e>
+                      </m:nary>
+                      <m:d>
+                        <m:dPr>
+                          <m:begChr m:val="("/>
+                          <m:sepChr m:val=""/>
+                          <m:endChr m:val=")"/>
+                          <m:grow/>
+                        </m:dPr>
+                        <m:e>
+                          <m:r>
+                            <m:t>1</m:t>
+                          </m:r>
+                          <m:r>
+                            <m:rPr>
+                              <m:sty m:val="p"/>
+                            </m:rPr>
+                            <m:t>−</m:t>
+                          </m:r>
+                          <m:sSub>
+                            <m:e>
+                              <m:acc>
+                                <m:accPr>
+                                  <m:chr m:val="̂"/>
+                                </m:accPr>
+                                <m:e>
+                                  <m:r>
+                                    <m:t>p</m:t>
+                                  </m:r>
+                                </m:e>
+                              </m:acc>
+                            </m:e>
+                            <m:sub>
+                              <m:r>
+                                <m:t>m</m:t>
+                              </m:r>
+                              <m:r>
+                                <m:t>k</m:t>
+                              </m:r>
+                            </m:sub>
+                          </m:sSub>
+                        </m:e>
+                      </m:d>
+                      <m:r>
+                        <m:rPr>
+                          <m:sty m:val="p"/>
+                        </m:rPr>
+                        <m:t>,</m:t>
+                      </m:r>
+                      <m:r>
+                        <m:t>  </m:t>
+                      </m:r>
+                      <m:r>
+                        <m:rPr>
+                          <m:nor/>
+                          <m:sty m:val="p"/>
+                        </m:rPr>
+                        <m:t>Entropy</m:t>
+                      </m:r>
+                      <m:r>
+                        <m:rPr>
+                          <m:sty m:val="p"/>
+                        </m:rPr>
+                        <m:t>=</m:t>
+                      </m:r>
+                      <m:r>
+                        <m:rPr>
+                          <m:sty m:val="p"/>
+                        </m:rPr>
+                        <m:t>−</m:t>
+                      </m:r>
+                      <m:nary>
+                        <m:naryPr>
+                          <m:chr m:val="∑"/>
+                          <m:limLoc m:val="undOvr"/>
+                          <m:subHide m:val="off"/>
+                          <m:supHide m:val="on"/>
+                        </m:naryPr>
+                        <m:sub>
+                          <m:r>
+                            <m:t>k</m:t>
+                          </m:r>
+                        </m:sub>
+                        <m:sup>
+                          <m:r>
+                            <m:t>​</m:t>
+                          </m:r>
+                        </m:sup>
+                        <m:e>
+                          <m:sSub>
+                            <m:e>
+                              <m:acc>
+                                <m:accPr>
+                                  <m:chr m:val="̂"/>
+                                </m:accPr>
+                                <m:e>
+                                  <m:r>
+                                    <m:t>p</m:t>
+                                  </m:r>
+                                </m:e>
+                              </m:acc>
+                            </m:e>
+                            <m:sub>
+                              <m:r>
+                                <m:t>m</m:t>
+                              </m:r>
+                              <m:r>
+                                <m:t>k</m:t>
+                              </m:r>
+                            </m:sub>
+                          </m:sSub>
+                        </m:e>
+                      </m:nary>
+                      <m:r>
+                        <m:rPr>
+                          <m:sty m:val="p"/>
+                        </m:rPr>
+                        <m:t>log</m:t>
+                      </m:r>
+                      <m:sSub>
+                        <m:e>
+                          <m:acc>
+                            <m:accPr>
+                              <m:chr m:val="̂"/>
+                            </m:accPr>
+                            <m:e>
+                              <m:r>
+                                <m:t>p</m:t>
+                              </m:r>
+                            </m:e>
+                          </m:acc>
+                        </m:e>
+                        <m:sub>
+                          <m:r>
+                            <m:t>m</m:t>
+                          </m:r>
+                          <m:r>
+                            <m:t>k</m:t>
+                          </m:r>
+                        </m:sub>
+                      </m:sSub>
+                    </m:oMath>
+                  </m:oMathPara>
+                </a14:m>
+              </a:p>
+              <a:p>
+                <a:pPr lvl="0" indent="0" marL="0">
+                  <a:buNone/>
+                </a:pPr>
+                <a14:m>
+                  <m:oMathPara xmlns:m="http://schemas.openxmlformats.org/officeDocument/2006/math">
+                    <m:oMathParaPr>
+                      <m:jc m:val="center"/>
+                    </m:oMathParaPr>
+                    <m:oMath>
+                      <m:r>
+                        <m:rPr>
+                          <m:nor/>
+                          <m:sty m:val="p"/>
+                        </m:rPr>
+                        <m:t>Misclassification</m:t>
+                      </m:r>
+                      <m:r>
+                        <m:rPr>
+                          <m:sty m:val="p"/>
+                        </m:rPr>
+                        <m:t>=</m:t>
+                      </m:r>
+                      <m:r>
+                        <m:t>1</m:t>
+                      </m:r>
+                      <m:r>
+                        <m:rPr>
+                          <m:sty m:val="p"/>
+                        </m:rPr>
+                        <m:t>−</m:t>
+                      </m:r>
+                      <m:limLow>
+                        <m:e>
+                          <m:r>
+                            <m:rPr>
+                              <m:sty m:val="p"/>
+                            </m:rPr>
+                            <m:t>max</m:t>
+                          </m:r>
+                        </m:e>
+                        <m:lim>
+                          <m:r>
+                            <m:t>k</m:t>
+                          </m:r>
+                        </m:lim>
+                      </m:limLow>
+                      <m:sSub>
+                        <m:e>
+                          <m:acc>
+                            <m:accPr>
+                              <m:chr m:val="̂"/>
+                            </m:accPr>
+                            <m:e>
+                              <m:r>
+                                <m:t>p</m:t>
+                              </m:r>
+                            </m:e>
+                          </m:acc>
+                        </m:e>
+                        <m:sub>
+                          <m:r>
+                            <m:t>m</m:t>
+                          </m:r>
+                          <m:r>
+                            <m:t>k</m:t>
+                          </m:r>
+                        </m:sub>
+                      </m:sSub>
+                    </m:oMath>
+                  </m:oMathPara>
+                </a14:m>
+              </a:p>
+            </p:txBody>
+          </p:sp>
+        </mc:Choice>
+      </mc:AlternateContent>
     </p:spTree>
   </p:cSld>
 </p:sld>
@@ -8453,7 +8915,7 @@
             </a:pPr>
             <a:r>
               <a:rPr/>
-              <a:t>What one tree costs you</a:t>
+              <a:t>Which to grow with</a:t>
             </a:r>
           </a:p>
         </p:txBody>
@@ -8477,41 +8939,49 @@
               <a:buNone/>
             </a:pPr>
             <a:r>
+              <a:rPr/>
+              <a:t>Gini and entropy are differentiable and strictly concave, so they reward splits producing </a:t>
+            </a:r>
+            <a:r>
+              <a:rPr i="1"/>
+              <a:t>purer</a:t>
+            </a:r>
+            <a:r>
+              <a:rPr/>
+              <a:t> nodes </a:t>
+            </a:r>
+            <a:r>
               <a:rPr b="1"/>
-              <a:t>Variance.</a:t>
+              <a:t>even when the majority class does not change</a:t>
             </a:r>
             <a:r>
               <a:rPr/>
-              <a:t> Change a handful of rows and the first split can change, which changes every split beneath it. The tree you show in your appendix is one draw from a wide distribution of trees.</a:t>
-            </a:r>
-          </a:p>
-          <a:p>
-            <a:pPr lvl="0"/>
+              <a:t>.</a:t>
+            </a:r>
+          </a:p>
+          <a:p>
+            <a:pPr lvl="0" indent="0" marL="0">
+              <a:buNone/>
+            </a:pPr>
             <a:r>
               <a:rPr/>
-              <a:t>Step functions cannot extrapolate — ever</a:t>
-            </a:r>
-          </a:p>
-          <a:p>
-            <a:pPr lvl="0"/>
+              <a:t>Misclassification error is insensitive to that and makes a poor </a:t>
+            </a:r>
+            <a:r>
+              <a:rPr b="1"/>
+              <a:t>growing</a:t>
+            </a:r>
             <a:r>
               <a:rPr/>
-              <a:t>Deep trees memorise; shallow trees underfit</a:t>
-            </a:r>
-          </a:p>
-          <a:p>
-            <a:pPr lvl="0"/>
+              <a:t> criterion — though it is the right criterion for </a:t>
+            </a:r>
+            <a:r>
+              <a:rPr b="1"/>
+              <a:t>pruning</a:t>
+            </a:r>
             <a:r>
               <a:rPr/>
-              <a:t>The structure is readable but </a:t>
-            </a:r>
-            <a:r>
-              <a:rPr b="1"/>
-              <a:t>not stable</a:t>
-            </a:r>
-            <a:r>
-              <a:rPr/>
-              <a:t>, so reading it is a trap</a:t>
+              <a:t>.</a:t>
             </a:r>
           </a:p>
         </p:txBody>

--- a/07-trees-forests-boosting/slides.pptx
+++ b/07-trees-forests-boosting/slides.pptx
@@ -7202,7 +7202,7 @@
             </a:pPr>
             <a:r>
               <a:rPr/>
-              <a:t>Fit a pruned tree, a forest and a boosted model on your angle, under grouped CV</a:t>
+              <a:t>Fit a pruned tree, a forest and a boosted model on your project, under grouped CV</a:t>
             </a:r>
           </a:p>
           <a:p>

--- a/07-trees-forests-boosting/slides.pptx
+++ b/07-trees-forests-boosting/slides.pptx
@@ -6895,7 +6895,7 @@
             </a:pPr>
             <a:r>
               <a:rPr/>
-              <a:t>The lab</a:t>
+              <a:t>The practice</a:t>
             </a:r>
           </a:p>
         </p:txBody>
@@ -7364,7 +7364,7 @@
                 <a:hlinkClick r:id="rId2"/>
                 <a:latin typeface="Courier"/>
               </a:rPr>
-              <a:t>02-lab/README.md</a:t>
+              <a:t>02-practice/README.md</a:t>
             </a:r>
           </a:p>
         </p:txBody>

--- a/07-trees-forests-boosting/slides.pptx
+++ b/07-trees-forests-boosting/slides.pptx
@@ -3965,7 +3965,19 @@
                         <m:rPr>
                           <m:sty m:val="p"/>
                         </m:rPr>
-                        <m:t>Var</m:t>
+                        <m:t>V</m:t>
+                      </m:r>
+                      <m:r>
+                        <m:rPr>
+                          <m:sty m:val="p"/>
+                        </m:rPr>
+                        <m:t>a</m:t>
+                      </m:r>
+                      <m:r>
+                        <m:rPr>
+                          <m:sty m:val="p"/>
+                        </m:rPr>
+                        <m:t>r</m:t>
                       </m:r>
                       <m:d>
                         <m:dPr>
@@ -7725,7 +7737,19 @@
                         <m:rPr>
                           <m:sty m:val="p"/>
                         </m:rPr>
-                        <m:t>ave</m:t>
+                        <m:t>a</m:t>
+                      </m:r>
+                      <m:r>
+                        <m:rPr>
+                          <m:sty m:val="p"/>
+                        </m:rPr>
+                        <m:t>v</m:t>
+                      </m:r>
+                      <m:r>
+                        <m:rPr>
+                          <m:sty m:val="p"/>
+                        </m:rPr>
+                        <m:t>e</m:t>
                       </m:r>
                       <m:d>
                         <m:dPr>

--- a/07-trees-forests-boosting/slides.pptx
+++ b/07-trees-forests-boosting/slides.pptx
@@ -936,15 +936,15 @@
         </p:nvSpPr>
         <p:spPr>
           <a:xfrm>
-            <a:off x="722313" y="3305176"/>
-            <a:ext cx="7772400" cy="1021556"/>
+            <a:off x="722313" y="1850000"/>
+            <a:ext cx="7772400" cy="1300000"/>
           </a:xfrm>
         </p:spPr>
         <p:txBody>
           <a:bodyPr anchor="t"/>
           <a:lstStyle>
             <a:lvl1pPr algn="l">
-              <a:defRPr sz="1850" b="1" cap="all"/>
+              <a:defRPr sz="2800" b="1" cap="none"/>
             </a:lvl1pPr>
           </a:lstStyle>
           <a:p>
@@ -967,8 +967,8 @@
         </p:nvSpPr>
         <p:spPr>
           <a:xfrm>
-            <a:off x="722313" y="2180035"/>
-            <a:ext cx="7772400" cy="1125140"/>
+            <a:off x="722313" y="3250000"/>
+            <a:ext cx="7772400" cy="700000"/>
           </a:xfrm>
         </p:spPr>
         <p:txBody>
@@ -3311,8 +3311,8 @@
         </p:nvSpPr>
         <p:spPr>
           <a:xfrm>
-            <a:off x="722313" y="3305176"/>
-            <a:ext cx="7772400" cy="1021556"/>
+            <a:off x="722313" y="1850000"/>
+            <a:ext cx="7772400" cy="1300000"/>
           </a:xfrm>
         </p:spPr>
         <p:txBody>
@@ -3819,8 +3819,8 @@
         </p:nvSpPr>
         <p:spPr>
           <a:xfrm>
-            <a:off x="722313" y="3305176"/>
-            <a:ext cx="7772400" cy="1021556"/>
+            <a:off x="722313" y="1850000"/>
+            <a:ext cx="7772400" cy="1300000"/>
           </a:xfrm>
         </p:spPr>
         <p:txBody>
@@ -4777,8 +4777,8 @@
         </p:nvSpPr>
         <p:spPr>
           <a:xfrm>
-            <a:off x="722313" y="3305176"/>
-            <a:ext cx="7772400" cy="1021556"/>
+            <a:off x="722313" y="1850000"/>
+            <a:ext cx="7772400" cy="1300000"/>
           </a:xfrm>
         </p:spPr>
         <p:txBody>
@@ -6456,8 +6456,8 @@
         </p:nvSpPr>
         <p:spPr>
           <a:xfrm>
-            <a:off x="722313" y="3305176"/>
-            <a:ext cx="7772400" cy="1021556"/>
+            <a:off x="722313" y="1850000"/>
+            <a:ext cx="7772400" cy="1300000"/>
           </a:xfrm>
         </p:spPr>
         <p:txBody>
@@ -6894,8 +6894,8 @@
         </p:nvSpPr>
         <p:spPr>
           <a:xfrm>
-            <a:off x="722313" y="3305176"/>
-            <a:ext cx="7772400" cy="1021556"/>
+            <a:off x="722313" y="1850000"/>
+            <a:ext cx="7772400" cy="1300000"/>
           </a:xfrm>
         </p:spPr>
         <p:txBody>
@@ -7473,8 +7473,8 @@
         </p:nvSpPr>
         <p:spPr>
           <a:xfrm>
-            <a:off x="722313" y="3305176"/>
-            <a:ext cx="7772400" cy="1021556"/>
+            <a:off x="722313" y="1850000"/>
+            <a:ext cx="7772400" cy="1300000"/>
           </a:xfrm>
         </p:spPr>
         <p:txBody>

--- a/07-trees-forests-boosting/slides.pptx
+++ b/07-trees-forests-boosting/slides.pptx
@@ -36,6 +36,27 @@
     <p:sldId id="284" r:id="rId30"/>
     <p:sldId id="285" r:id="rId31"/>
     <p:sldId id="286" r:id="rId32"/>
+    <p:sldId id="287" r:id="rId33"/>
+    <p:sldId id="288" r:id="rId34"/>
+    <p:sldId id="289" r:id="rId35"/>
+    <p:sldId id="290" r:id="rId36"/>
+    <p:sldId id="291" r:id="rId37"/>
+    <p:sldId id="292" r:id="rId38"/>
+    <p:sldId id="293" r:id="rId39"/>
+    <p:sldId id="294" r:id="rId40"/>
+    <p:sldId id="295" r:id="rId41"/>
+    <p:sldId id="296" r:id="rId42"/>
+    <p:sldId id="297" r:id="rId43"/>
+    <p:sldId id="298" r:id="rId44"/>
+    <p:sldId id="299" r:id="rId45"/>
+    <p:sldId id="300" r:id="rId46"/>
+    <p:sldId id="301" r:id="rId47"/>
+    <p:sldId id="302" r:id="rId48"/>
+    <p:sldId id="303" r:id="rId49"/>
+    <p:sldId id="304" r:id="rId50"/>
+    <p:sldId id="305" r:id="rId51"/>
+    <p:sldId id="306" r:id="rId52"/>
+    <p:sldId id="307" r:id="rId53"/>
   </p:sldIdLst>
   <p:sldSz cx="9144000" cy="5143500" type="screen16x9"/>
   <p:notesSz cx="6858000" cy="9144000"/>
@@ -3272,7 +3293,7 @@
             </a:pPr>
             <a:r>
               <a:rPr/>
-              <a:t>20 August 2026</a:t>
+              <a:t>21 August 2026</a:t>
             </a:r>
           </a:p>
         </p:txBody>
@@ -3301,20 +3322,15 @@
       </p:grpSpPr>
       <p:sp>
         <p:nvSpPr>
-          <p:cNvPr id="2" name="Title 1"/>
+          <p:cNvPr id="3" name="Content Placeholder 2"/>
           <p:cNvSpPr>
             <a:spLocks noGrp="1"/>
           </p:cNvSpPr>
           <p:nvPr>
-            <p:ph type="title"/>
+            <p:ph idx="1"/>
           </p:nvPr>
         </p:nvSpPr>
-        <p:spPr>
-          <a:xfrm>
-            <a:off x="722313" y="1850000"/>
-            <a:ext cx="7772400" cy="1300000"/>
-          </a:xfrm>
-        </p:spPr>
+        <p:spPr/>
         <p:txBody>
           <a:bodyPr/>
           <a:lstStyle/>
@@ -3324,7 +3340,7 @@
             </a:pPr>
             <a:r>
               <a:rPr/>
-              <a:t>7.2 Cost-complexity pruning</a:t>
+              <a:t>Same two predictors, same data. Colour is the fitted default probability. The tree can only produce axis-aligned blocks; the logistic model can only produce parallel bands.</a:t>
             </a:r>
           </a:p>
         </p:txBody>
@@ -3371,7 +3387,164 @@
             </a:pPr>
             <a:r>
               <a:rPr/>
-              <a:t>Grow, then cut back</a:t>
+              <a:t>Which of those is right?</a:t>
+            </a:r>
+          </a:p>
+        </p:txBody>
+      </p:sp>
+      <p:sp>
+        <p:nvSpPr>
+          <p:cNvPr id="3" name="Content Placeholder 2"/>
+          <p:cNvSpPr>
+            <a:spLocks noGrp="1"/>
+          </p:cNvSpPr>
+          <p:nvPr>
+            <p:ph idx="1"/>
+          </p:nvPr>
+        </p:nvSpPr>
+        <p:spPr/>
+        <p:txBody>
+          <a:bodyPr/>
+          <a:lstStyle/>
+          <a:p>
+            <a:pPr lvl="0" indent="0" marL="0">
+              <a:buNone/>
+            </a:pPr>
+            <a:r>
+              <a:rPr/>
+              <a:t>Neither, always. The tree captures a </a:t>
+            </a:r>
+            <a:r>
+              <a:rPr b="1"/>
+              <a:t>threshold</a:t>
+            </a:r>
+            <a:r>
+              <a:rPr/>
+              <a:t> — “below 660 FICO everything changes” — that the line cannot. The line captures a </a:t>
+            </a:r>
+            <a:r>
+              <a:rPr b="1"/>
+              <a:t>smooth gradient</a:t>
+            </a:r>
+            <a:r>
+              <a:rPr/>
+              <a:t> that the tree can only approximate in steps.</a:t>
+            </a:r>
+          </a:p>
+          <a:p>
+            <a:pPr lvl="0" indent="0" marL="0">
+              <a:buNone/>
+            </a:pPr>
+            <a:r>
+              <a:rPr/>
+              <a:t>So the question is never “are trees better than regression”. It is: </a:t>
+            </a:r>
+            <a:r>
+              <a:rPr i="1"/>
+              <a:t>is the relationship I am modelling more like a threshold, or more like a gradient?</a:t>
+            </a:r>
+            <a:r>
+              <a:rPr/>
+              <a:t> Draw the picture before you choose.</a:t>
+            </a:r>
+          </a:p>
+        </p:txBody>
+      </p:sp>
+    </p:spTree>
+  </p:cSld>
+</p:sld>
+</file>
+
+<file path=ppt/slides/slide12.xml><?xml version="1.0" encoding="utf-8"?>
+<p:sld xmlns:a="http://schemas.openxmlformats.org/drawingml/2006/main" xmlns:r="http://schemas.openxmlformats.org/officeDocument/2006/relationships" xmlns:p="http://schemas.openxmlformats.org/presentationml/2006/main">
+  <p:cSld>
+    <p:spTree>
+      <p:nvGrpSpPr>
+        <p:cNvPr id="1" name=""/>
+        <p:cNvGrpSpPr/>
+        <p:nvPr/>
+      </p:nvGrpSpPr>
+      <p:grpSpPr>
+        <a:xfrm>
+          <a:off x="0" y="0"/>
+          <a:ext cx="0" cy="0"/>
+          <a:chOff x="0" y="0"/>
+          <a:chExt cx="0" cy="0"/>
+        </a:xfrm>
+      </p:grpSpPr>
+      <p:sp>
+        <p:nvSpPr>
+          <p:cNvPr id="2" name="Title 1"/>
+          <p:cNvSpPr>
+            <a:spLocks noGrp="1"/>
+          </p:cNvSpPr>
+          <p:nvPr>
+            <p:ph type="title"/>
+          </p:nvPr>
+        </p:nvSpPr>
+        <p:spPr>
+          <a:xfrm>
+            <a:off x="722313" y="1850000"/>
+            <a:ext cx="7772400" cy="1300000"/>
+          </a:xfrm>
+        </p:spPr>
+        <p:txBody>
+          <a:bodyPr/>
+          <a:lstStyle/>
+          <a:p>
+            <a:pPr lvl="0" indent="0" marL="0">
+              <a:buNone/>
+            </a:pPr>
+            <a:r>
+              <a:rPr/>
+              <a:t>2 · One tree</a:t>
+            </a:r>
+          </a:p>
+        </p:txBody>
+      </p:sp>
+    </p:spTree>
+  </p:cSld>
+</p:sld>
+</file>
+
+<file path=ppt/slides/slide13.xml><?xml version="1.0" encoding="utf-8"?>
+<p:sld xmlns:a="http://schemas.openxmlformats.org/drawingml/2006/main" xmlns:r="http://schemas.openxmlformats.org/officeDocument/2006/relationships" xmlns:p="http://schemas.openxmlformats.org/presentationml/2006/main">
+  <p:cSld>
+    <p:spTree>
+      <p:nvGrpSpPr>
+        <p:cNvPr id="1" name=""/>
+        <p:cNvGrpSpPr/>
+        <p:nvPr/>
+      </p:nvGrpSpPr>
+      <p:grpSpPr>
+        <a:xfrm>
+          <a:off x="0" y="0"/>
+          <a:ext cx="0" cy="0"/>
+          <a:chOff x="0" y="0"/>
+          <a:chExt cx="0" cy="0"/>
+        </a:xfrm>
+      </p:grpSpPr>
+      <p:sp>
+        <p:nvSpPr>
+          <p:cNvPr id="2" name="Title 1"/>
+          <p:cNvSpPr>
+            <a:spLocks noGrp="1"/>
+          </p:cNvSpPr>
+          <p:nvPr>
+            <p:ph type="title"/>
+          </p:nvPr>
+        </p:nvSpPr>
+        <p:spPr/>
+        <p:txBody>
+          <a:bodyPr/>
+          <a:lstStyle/>
+          <a:p>
+            <a:pPr lvl="0" indent="0" marL="0">
+              <a:buNone/>
+            </a:pPr>
+            <a:r>
+              <a:rPr/>
+              <a:t>The model</a:t>
             </a:r>
           </a:p>
         </p:txBody>
@@ -3398,6 +3571,1593 @@
                 </a:pPr>
                 <a:r>
                   <a:rPr/>
+                  <a:t>Partition the predictor space into </a:t>
+                </a:r>
+                <a14:m>
+                  <m:oMath xmlns:m="http://schemas.openxmlformats.org/officeDocument/2006/math">
+                    <m:r>
+                      <m:t>M</m:t>
+                    </m:r>
+                  </m:oMath>
+                </a14:m>
+                <a:r>
+                  <a:rPr/>
+                  <a:t> regions and predict a </a:t>
+                </a:r>
+                <a:r>
+                  <a:rPr b="1"/>
+                  <a:t>constant</a:t>
+                </a:r>
+                <a:r>
+                  <a:rPr/>
+                  <a:t> in each:</a:t>
+                </a:r>
+              </a:p>
+              <a:p>
+                <a:pPr lvl="0" indent="0" marL="0">
+                  <a:buNone/>
+                </a:pPr>
+                <a14:m>
+                  <m:oMathPara xmlns:m="http://schemas.openxmlformats.org/officeDocument/2006/math">
+                    <m:oMathParaPr>
+                      <m:jc m:val="center"/>
+                    </m:oMathParaPr>
+                    <m:oMath>
+                      <m:acc>
+                        <m:accPr>
+                          <m:chr m:val="̂"/>
+                        </m:accPr>
+                        <m:e>
+                          <m:r>
+                            <m:t>f</m:t>
+                          </m:r>
+                        </m:e>
+                      </m:acc>
+                      <m:d>
+                        <m:dPr>
+                          <m:begChr m:val="("/>
+                          <m:sepChr m:val=""/>
+                          <m:endChr m:val=")"/>
+                          <m:grow/>
+                        </m:dPr>
+                        <m:e>
+                          <m:r>
+                            <m:t>x</m:t>
+                          </m:r>
+                        </m:e>
+                      </m:d>
+                      <m:r>
+                        <m:rPr>
+                          <m:sty m:val="p"/>
+                        </m:rPr>
+                        <m:t>=</m:t>
+                      </m:r>
+                      <m:nary>
+                        <m:naryPr>
+                          <m:chr m:val="∑"/>
+                          <m:limLoc m:val="undOvr"/>
+                          <m:subHide m:val="off"/>
+                          <m:supHide m:val="off"/>
+                        </m:naryPr>
+                        <m:sub>
+                          <m:r>
+                            <m:t>m</m:t>
+                          </m:r>
+                          <m:r>
+                            <m:rPr>
+                              <m:sty m:val="p"/>
+                            </m:rPr>
+                            <m:t>=</m:t>
+                          </m:r>
+                          <m:r>
+                            <m:t>1</m:t>
+                          </m:r>
+                        </m:sub>
+                        <m:sup>
+                          <m:r>
+                            <m:t>M</m:t>
+                          </m:r>
+                        </m:sup>
+                        <m:e>
+                          <m:sSub>
+                            <m:e>
+                              <m:r>
+                                <m:t>c</m:t>
+                              </m:r>
+                            </m:e>
+                            <m:sub>
+                              <m:r>
+                                <m:t>m</m:t>
+                              </m:r>
+                            </m:sub>
+                          </m:sSub>
+                        </m:e>
+                      </m:nary>
+                      <m:r>
+                        <m:t> </m:t>
+                      </m:r>
+                      <m:r>
+                        <m:rPr>
+                          <m:sty m:val="p"/>
+                          <m:scr m:val="double-struck"/>
+                        </m:rPr>
+                        <m:t>1</m:t>
+                      </m:r>
+                      <m:r>
+                        <m:rPr>
+                          <m:sty m:val="p"/>
+                        </m:rPr>
+                        <m:t>{</m:t>
+                      </m:r>
+                      <m:r>
+                        <m:t>x</m:t>
+                      </m:r>
+                      <m:r>
+                        <m:rPr>
+                          <m:sty m:val="p"/>
+                        </m:rPr>
+                        <m:t>∈</m:t>
+                      </m:r>
+                      <m:sSub>
+                        <m:e>
+                          <m:r>
+                            <m:t>R</m:t>
+                          </m:r>
+                        </m:e>
+                        <m:sub>
+                          <m:r>
+                            <m:t>m</m:t>
+                          </m:r>
+                        </m:sub>
+                      </m:sSub>
+                      <m:r>
+                        <m:rPr>
+                          <m:sty m:val="p"/>
+                        </m:rPr>
+                        <m:t>}</m:t>
+                      </m:r>
+                    </m:oMath>
+                  </m:oMathPara>
+                </a14:m>
+              </a:p>
+              <a:p>
+                <a:pPr lvl="0" indent="0" marL="0">
+                  <a:buNone/>
+                </a:pPr>
+                <a:r>
+                  <a:rPr/>
+                  <a:t>Under squared loss the optimal constant is just the region mean, </a:t>
+                </a:r>
+                <a14:m>
+                  <m:oMath xmlns:m="http://schemas.openxmlformats.org/officeDocument/2006/math">
+                    <m:sSub>
+                      <m:e>
+                        <m:acc>
+                          <m:accPr>
+                            <m:chr m:val="̂"/>
+                          </m:accPr>
+                          <m:e>
+                            <m:r>
+                              <m:t>c</m:t>
+                            </m:r>
+                          </m:e>
+                        </m:acc>
+                      </m:e>
+                      <m:sub>
+                        <m:r>
+                          <m:t>m</m:t>
+                        </m:r>
+                      </m:sub>
+                    </m:sSub>
+                    <m:r>
+                      <m:rPr>
+                        <m:sty m:val="p"/>
+                      </m:rPr>
+                      <m:t>=</m:t>
+                    </m:r>
+                    <m:r>
+                      <m:rPr>
+                        <m:sty m:val="p"/>
+                      </m:rPr>
+                      <m:t>a</m:t>
+                    </m:r>
+                    <m:r>
+                      <m:rPr>
+                        <m:sty m:val="p"/>
+                      </m:rPr>
+                      <m:t>v</m:t>
+                    </m:r>
+                    <m:r>
+                      <m:rPr>
+                        <m:sty m:val="p"/>
+                      </m:rPr>
+                      <m:t>e</m:t>
+                    </m:r>
+                    <m:d>
+                      <m:dPr>
+                        <m:begChr m:val="("/>
+                        <m:sepChr m:val=""/>
+                        <m:endChr m:val=")"/>
+                        <m:grow/>
+                      </m:dPr>
+                      <m:e>
+                        <m:sSub>
+                          <m:e>
+                            <m:r>
+                              <m:t>y</m:t>
+                            </m:r>
+                          </m:e>
+                          <m:sub>
+                            <m:r>
+                              <m:t>i</m:t>
+                            </m:r>
+                          </m:sub>
+                        </m:sSub>
+                        <m:r>
+                          <m:rPr>
+                            <m:sty m:val="p"/>
+                          </m:rPr>
+                          <m:t>∣</m:t>
+                        </m:r>
+                        <m:sSub>
+                          <m:e>
+                            <m:r>
+                              <m:t>x</m:t>
+                            </m:r>
+                          </m:e>
+                          <m:sub>
+                            <m:r>
+                              <m:t>i</m:t>
+                            </m:r>
+                          </m:sub>
+                        </m:sSub>
+                        <m:r>
+                          <m:rPr>
+                            <m:sty m:val="p"/>
+                          </m:rPr>
+                          <m:t>∈</m:t>
+                        </m:r>
+                        <m:sSub>
+                          <m:e>
+                            <m:r>
+                              <m:t>R</m:t>
+                            </m:r>
+                          </m:e>
+                          <m:sub>
+                            <m:r>
+                              <m:t>m</m:t>
+                            </m:r>
+                          </m:sub>
+                        </m:sSub>
+                      </m:e>
+                    </m:d>
+                  </m:oMath>
+                </a14:m>
+                <a:r>
+                  <a:rPr/>
+                  <a:t>. So the whole problem is </a:t>
+                </a:r>
+                <a:r>
+                  <a:rPr b="1"/>
+                  <a:t>choosing the regions</a:t>
+                </a:r>
+                <a:r>
+                  <a:rPr/>
+                  <a:t>.</a:t>
+                </a:r>
+              </a:p>
+              <a:p>
+                <a:pPr lvl="0" indent="0" marL="0">
+                  <a:buNone/>
+                </a:pPr>
+                <a:r>
+                  <a:rPr/>
+                  <a:t>And that is where it gets hard: the number of partitions is astronomically large. Finding the best one is infeasible.</a:t>
+                </a:r>
+              </a:p>
+            </p:txBody>
+          </p:sp>
+        </mc:Choice>
+      </mc:AlternateContent>
+    </p:spTree>
+  </p:cSld>
+</p:sld>
+</file>
+
+<file path=ppt/slides/slide14.xml><?xml version="1.0" encoding="utf-8"?>
+<p:sld xmlns:a="http://schemas.openxmlformats.org/drawingml/2006/main" xmlns:r="http://schemas.openxmlformats.org/officeDocument/2006/relationships" xmlns:p="http://schemas.openxmlformats.org/presentationml/2006/main">
+  <p:cSld>
+    <p:spTree>
+      <p:nvGrpSpPr>
+        <p:cNvPr id="1" name=""/>
+        <p:cNvGrpSpPr/>
+        <p:nvPr/>
+      </p:nvGrpSpPr>
+      <p:grpSpPr>
+        <a:xfrm>
+          <a:off x="0" y="0"/>
+          <a:ext cx="0" cy="0"/>
+          <a:chOff x="0" y="0"/>
+          <a:chExt cx="0" cy="0"/>
+        </a:xfrm>
+      </p:grpSpPr>
+      <p:sp>
+        <p:nvSpPr>
+          <p:cNvPr id="2" name="Title 1"/>
+          <p:cNvSpPr>
+            <a:spLocks noGrp="1"/>
+          </p:cNvSpPr>
+          <p:nvPr>
+            <p:ph type="title"/>
+          </p:nvPr>
+        </p:nvSpPr>
+        <p:spPr/>
+        <p:txBody>
+          <a:bodyPr/>
+          <a:lstStyle/>
+          <a:p>
+            <a:pPr lvl="0" indent="0" marL="0">
+              <a:buNone/>
+            </a:pPr>
+            <a:r>
+              <a:rPr/>
+              <a:t>So we are greedy</a:t>
+            </a:r>
+          </a:p>
+        </p:txBody>
+      </p:sp>
+      <mc:AlternateContent xmlns:mc="http://schemas.openxmlformats.org/markup-compatibility/2006">
+        <mc:Choice xmlns:a14="http://schemas.microsoft.com/office/drawing/2010/main" Requires="a14">
+          <p:sp>
+            <p:nvSpPr>
+              <p:cNvPr id="3" name="Content Placeholder 2"/>
+              <p:cNvSpPr>
+                <a:spLocks noGrp="1"/>
+              </p:cNvSpPr>
+              <p:nvPr>
+                <p:ph idx="1"/>
+              </p:nvPr>
+            </p:nvSpPr>
+            <p:spPr/>
+            <p:txBody>
+              <a:bodyPr/>
+              <a:lstStyle/>
+              <a:p>
+                <a:pPr lvl="0" indent="0" marL="0">
+                  <a:buNone/>
+                </a:pPr>
+                <a:r>
+                  <a:rPr/>
+                  <a:t>At each node, search over splitting variable </a:t>
+                </a:r>
+                <a14:m>
+                  <m:oMath xmlns:m="http://schemas.openxmlformats.org/officeDocument/2006/math">
+                    <m:r>
+                      <m:t>j</m:t>
+                    </m:r>
+                  </m:oMath>
+                </a14:m>
+                <a:r>
+                  <a:rPr/>
+                  <a:t> and split point </a:t>
+                </a:r>
+                <a14:m>
+                  <m:oMath xmlns:m="http://schemas.openxmlformats.org/officeDocument/2006/math">
+                    <m:r>
+                      <m:t>s</m:t>
+                    </m:r>
+                  </m:oMath>
+                </a14:m>
+                <a:r>
+                  <a:rPr/>
+                  <a:t>:</a:t>
+                </a:r>
+              </a:p>
+              <a:p>
+                <a:pPr lvl="0" indent="0" marL="0">
+                  <a:buNone/>
+                </a:pPr>
+                <a14:m>
+                  <m:oMathPara xmlns:m="http://schemas.openxmlformats.org/officeDocument/2006/math">
+                    <m:oMathParaPr>
+                      <m:jc m:val="center"/>
+                    </m:oMathParaPr>
+                    <m:oMath>
+                      <m:limLow>
+                        <m:e>
+                          <m:r>
+                            <m:rPr>
+                              <m:sty m:val="p"/>
+                            </m:rPr>
+                            <m:t>min</m:t>
+                          </m:r>
+                        </m:e>
+                        <m:lim>
+                          <m:r>
+                            <m:t>j</m:t>
+                          </m:r>
+                          <m:r>
+                            <m:rPr>
+                              <m:sty m:val="p"/>
+                            </m:rPr>
+                            <m:t>,</m:t>
+                          </m:r>
+                          <m:r>
+                            <m:t>s</m:t>
+                          </m:r>
+                        </m:lim>
+                      </m:limLow>
+                      <m:d>
+                        <m:dPr>
+                          <m:begChr m:val="["/>
+                          <m:sepChr m:val=""/>
+                          <m:endChr m:val="]"/>
+                          <m:grow/>
+                        </m:dPr>
+                        <m:e>
+                          <m:limLow>
+                            <m:e>
+                              <m:r>
+                                <m:rPr>
+                                  <m:sty m:val="p"/>
+                                </m:rPr>
+                                <m:t>min</m:t>
+                              </m:r>
+                            </m:e>
+                            <m:lim>
+                              <m:sSub>
+                                <m:e>
+                                  <m:r>
+                                    <m:t>c</m:t>
+                                  </m:r>
+                                </m:e>
+                                <m:sub>
+                                  <m:r>
+                                    <m:t>1</m:t>
+                                  </m:r>
+                                </m:sub>
+                              </m:sSub>
+                            </m:lim>
+                          </m:limLow>
+                          <m:r>
+                            <m:t>​</m:t>
+                          </m:r>
+                          <m:r>
+                            <m:t>​</m:t>
+                          </m:r>
+                          <m:nary>
+                            <m:naryPr>
+                              <m:chr m:val="∑"/>
+                              <m:limLoc m:val="undOvr"/>
+                              <m:subHide m:val="off"/>
+                              <m:supHide m:val="on"/>
+                            </m:naryPr>
+                            <m:sub>
+                              <m:sSub>
+                                <m:e>
+                                  <m:r>
+                                    <m:t>x</m:t>
+                                  </m:r>
+                                </m:e>
+                                <m:sub>
+                                  <m:r>
+                                    <m:t>i</m:t>
+                                  </m:r>
+                                </m:sub>
+                              </m:sSub>
+                              <m:r>
+                                <m:rPr>
+                                  <m:sty m:val="p"/>
+                                </m:rPr>
+                                <m:t>∈</m:t>
+                              </m:r>
+                              <m:sSub>
+                                <m:e>
+                                  <m:r>
+                                    <m:t>R</m:t>
+                                  </m:r>
+                                </m:e>
+                                <m:sub>
+                                  <m:r>
+                                    <m:t>1</m:t>
+                                  </m:r>
+                                </m:sub>
+                              </m:sSub>
+                              <m:d>
+                                <m:dPr>
+                                  <m:begChr m:val="("/>
+                                  <m:sepChr m:val=""/>
+                                  <m:endChr m:val=")"/>
+                                  <m:grow/>
+                                </m:dPr>
+                                <m:e>
+                                  <m:r>
+                                    <m:t>j</m:t>
+                                  </m:r>
+                                  <m:r>
+                                    <m:rPr>
+                                      <m:sty m:val="p"/>
+                                    </m:rPr>
+                                    <m:t>,</m:t>
+                                  </m:r>
+                                  <m:r>
+                                    <m:t>s</m:t>
+                                  </m:r>
+                                </m:e>
+                              </m:d>
+                            </m:sub>
+                            <m:sup>
+                              <m:r>
+                                <m:t>​</m:t>
+                              </m:r>
+                            </m:sup>
+                            <m:e>
+                              <m:r>
+                                <m:t>​</m:t>
+                              </m:r>
+                            </m:e>
+                          </m:nary>
+                          <m:r>
+                            <m:t>​</m:t>
+                          </m:r>
+                          <m:sSup>
+                            <m:e>
+                              <m:d>
+                                <m:dPr>
+                                  <m:begChr m:val="("/>
+                                  <m:sepChr m:val=""/>
+                                  <m:endChr m:val=")"/>
+                                  <m:grow/>
+                                </m:dPr>
+                                <m:e>
+                                  <m:sSub>
+                                    <m:e>
+                                      <m:r>
+                                        <m:t>y</m:t>
+                                      </m:r>
+                                    </m:e>
+                                    <m:sub>
+                                      <m:r>
+                                        <m:t>i</m:t>
+                                      </m:r>
+                                    </m:sub>
+                                  </m:sSub>
+                                  <m:r>
+                                    <m:rPr>
+                                      <m:sty m:val="p"/>
+                                    </m:rPr>
+                                    <m:t>−</m:t>
+                                  </m:r>
+                                  <m:sSub>
+                                    <m:e>
+                                      <m:r>
+                                        <m:t>c</m:t>
+                                      </m:r>
+                                    </m:e>
+                                    <m:sub>
+                                      <m:r>
+                                        <m:t>1</m:t>
+                                      </m:r>
+                                    </m:sub>
+                                  </m:sSub>
+                                </m:e>
+                              </m:d>
+                            </m:e>
+                            <m:sup>
+                              <m:r>
+                                <m:t>2</m:t>
+                              </m:r>
+                            </m:sup>
+                          </m:sSup>
+                          <m:r>
+                            <m:rPr>
+                              <m:sty m:val="p"/>
+                            </m:rPr>
+                            <m:t>+</m:t>
+                          </m:r>
+                          <m:limLow>
+                            <m:e>
+                              <m:r>
+                                <m:rPr>
+                                  <m:sty m:val="p"/>
+                                </m:rPr>
+                                <m:t>min</m:t>
+                              </m:r>
+                            </m:e>
+                            <m:lim>
+                              <m:sSub>
+                                <m:e>
+                                  <m:r>
+                                    <m:t>c</m:t>
+                                  </m:r>
+                                </m:e>
+                                <m:sub>
+                                  <m:r>
+                                    <m:t>2</m:t>
+                                  </m:r>
+                                </m:sub>
+                              </m:sSub>
+                            </m:lim>
+                          </m:limLow>
+                          <m:r>
+                            <m:t>​</m:t>
+                          </m:r>
+                          <m:r>
+                            <m:t>​</m:t>
+                          </m:r>
+                          <m:nary>
+                            <m:naryPr>
+                              <m:chr m:val="∑"/>
+                              <m:limLoc m:val="undOvr"/>
+                              <m:subHide m:val="off"/>
+                              <m:supHide m:val="on"/>
+                            </m:naryPr>
+                            <m:sub>
+                              <m:sSub>
+                                <m:e>
+                                  <m:r>
+                                    <m:t>x</m:t>
+                                  </m:r>
+                                </m:e>
+                                <m:sub>
+                                  <m:r>
+                                    <m:t>i</m:t>
+                                  </m:r>
+                                </m:sub>
+                              </m:sSub>
+                              <m:r>
+                                <m:rPr>
+                                  <m:sty m:val="p"/>
+                                </m:rPr>
+                                <m:t>∈</m:t>
+                              </m:r>
+                              <m:sSub>
+                                <m:e>
+                                  <m:r>
+                                    <m:t>R</m:t>
+                                  </m:r>
+                                </m:e>
+                                <m:sub>
+                                  <m:r>
+                                    <m:t>2</m:t>
+                                  </m:r>
+                                </m:sub>
+                              </m:sSub>
+                              <m:d>
+                                <m:dPr>
+                                  <m:begChr m:val="("/>
+                                  <m:sepChr m:val=""/>
+                                  <m:endChr m:val=")"/>
+                                  <m:grow/>
+                                </m:dPr>
+                                <m:e>
+                                  <m:r>
+                                    <m:t>j</m:t>
+                                  </m:r>
+                                  <m:r>
+                                    <m:rPr>
+                                      <m:sty m:val="p"/>
+                                    </m:rPr>
+                                    <m:t>,</m:t>
+                                  </m:r>
+                                  <m:r>
+                                    <m:t>s</m:t>
+                                  </m:r>
+                                </m:e>
+                              </m:d>
+                            </m:sub>
+                            <m:sup>
+                              <m:r>
+                                <m:t>​</m:t>
+                              </m:r>
+                            </m:sup>
+                            <m:e>
+                              <m:r>
+                                <m:t>​</m:t>
+                              </m:r>
+                            </m:e>
+                          </m:nary>
+                          <m:r>
+                            <m:t>​</m:t>
+                          </m:r>
+                          <m:sSup>
+                            <m:e>
+                              <m:d>
+                                <m:dPr>
+                                  <m:begChr m:val="("/>
+                                  <m:sepChr m:val=""/>
+                                  <m:endChr m:val=")"/>
+                                  <m:grow/>
+                                </m:dPr>
+                                <m:e>
+                                  <m:sSub>
+                                    <m:e>
+                                      <m:r>
+                                        <m:t>y</m:t>
+                                      </m:r>
+                                    </m:e>
+                                    <m:sub>
+                                      <m:r>
+                                        <m:t>i</m:t>
+                                      </m:r>
+                                    </m:sub>
+                                  </m:sSub>
+                                  <m:r>
+                                    <m:rPr>
+                                      <m:sty m:val="p"/>
+                                    </m:rPr>
+                                    <m:t>−</m:t>
+                                  </m:r>
+                                  <m:sSub>
+                                    <m:e>
+                                      <m:r>
+                                        <m:t>c</m:t>
+                                      </m:r>
+                                    </m:e>
+                                    <m:sub>
+                                      <m:r>
+                                        <m:t>2</m:t>
+                                      </m:r>
+                                    </m:sub>
+                                  </m:sSub>
+                                </m:e>
+                              </m:d>
+                            </m:e>
+                            <m:sup>
+                              <m:r>
+                                <m:t>2</m:t>
+                              </m:r>
+                            </m:sup>
+                          </m:sSup>
+                        </m:e>
+                      </m:d>
+                    </m:oMath>
+                  </m:oMathPara>
+                </a14:m>
+              </a:p>
+              <a:p>
+                <a:pPr lvl="0" indent="0" marL="0">
+                  <a:buNone/>
+                </a:pPr>
+                <a:r>
+                  <a:rPr/>
+                  <a:t>with </a:t>
+                </a:r>
+                <a14:m>
+                  <m:oMath xmlns:m="http://schemas.openxmlformats.org/officeDocument/2006/math">
+                    <m:sSub>
+                      <m:e>
+                        <m:r>
+                          <m:t>R</m:t>
+                        </m:r>
+                      </m:e>
+                      <m:sub>
+                        <m:r>
+                          <m:t>1</m:t>
+                        </m:r>
+                      </m:sub>
+                    </m:sSub>
+                    <m:r>
+                      <m:rPr>
+                        <m:sty m:val="p"/>
+                      </m:rPr>
+                      <m:t>=</m:t>
+                    </m:r>
+                    <m:r>
+                      <m:rPr>
+                        <m:sty m:val="p"/>
+                      </m:rPr>
+                      <m:t>{</m:t>
+                    </m:r>
+                    <m:r>
+                      <m:t>x</m:t>
+                    </m:r>
+                    <m:r>
+                      <m:rPr>
+                        <m:sty m:val="p"/>
+                      </m:rPr>
+                      <m:t>:</m:t>
+                    </m:r>
+                    <m:sSub>
+                      <m:e>
+                        <m:r>
+                          <m:t>x</m:t>
+                        </m:r>
+                      </m:e>
+                      <m:sub>
+                        <m:r>
+                          <m:t>j</m:t>
+                        </m:r>
+                      </m:sub>
+                    </m:sSub>
+                    <m:r>
+                      <m:rPr>
+                        <m:sty m:val="p"/>
+                      </m:rPr>
+                      <m:t>≤</m:t>
+                    </m:r>
+                    <m:r>
+                      <m:t>s</m:t>
+                    </m:r>
+                    <m:r>
+                      <m:rPr>
+                        <m:sty m:val="p"/>
+                      </m:rPr>
+                      <m:t>}</m:t>
+                    </m:r>
+                  </m:oMath>
+                </a14:m>
+                <a:r>
+                  <a:rPr/>
+                  <a:t> and </a:t>
+                </a:r>
+                <a14:m>
+                  <m:oMath xmlns:m="http://schemas.openxmlformats.org/officeDocument/2006/math">
+                    <m:sSub>
+                      <m:e>
+                        <m:r>
+                          <m:t>R</m:t>
+                        </m:r>
+                      </m:e>
+                      <m:sub>
+                        <m:r>
+                          <m:t>2</m:t>
+                        </m:r>
+                      </m:sub>
+                    </m:sSub>
+                    <m:r>
+                      <m:rPr>
+                        <m:sty m:val="p"/>
+                      </m:rPr>
+                      <m:t>=</m:t>
+                    </m:r>
+                    <m:r>
+                      <m:rPr>
+                        <m:sty m:val="p"/>
+                      </m:rPr>
+                      <m:t>{</m:t>
+                    </m:r>
+                    <m:r>
+                      <m:t>x</m:t>
+                    </m:r>
+                    <m:r>
+                      <m:rPr>
+                        <m:sty m:val="p"/>
+                      </m:rPr>
+                      <m:t>:</m:t>
+                    </m:r>
+                    <m:sSub>
+                      <m:e>
+                        <m:r>
+                          <m:t>x</m:t>
+                        </m:r>
+                      </m:e>
+                      <m:sub>
+                        <m:r>
+                          <m:t>j</m:t>
+                        </m:r>
+                      </m:sub>
+                    </m:sSub>
+                    <m:r>
+                      <m:rPr>
+                        <m:sty m:val="p"/>
+                      </m:rPr>
+                      <m:t>&gt;</m:t>
+                    </m:r>
+                    <m:r>
+                      <m:t>s</m:t>
+                    </m:r>
+                    <m:r>
+                      <m:rPr>
+                        <m:sty m:val="p"/>
+                      </m:rPr>
+                      <m:t>}</m:t>
+                    </m:r>
+                  </m:oMath>
+                </a14:m>
+                <a:r>
+                  <a:rPr/>
+                  <a:t>.</a:t>
+                </a:r>
+              </a:p>
+              <a:p>
+                <a:pPr lvl="0" indent="0" marL="0">
+                  <a:buNone/>
+                </a:pPr>
+                <a:r>
+                  <a:rPr/>
+                  <a:t>The inner minimisations are </a:t>
+                </a:r>
+                <a:r>
+                  <a:rPr b="1"/>
+                  <a:t>means</a:t>
+                </a:r>
+                <a:r>
+                  <a:rPr/>
+                  <a:t>, so one sorted scan per feature suffices. Cost per node: </a:t>
+                </a:r>
+                <a14:m>
+                  <m:oMath xmlns:m="http://schemas.openxmlformats.org/officeDocument/2006/math">
+                    <m:r>
+                      <m:t>O</m:t>
+                    </m:r>
+                    <m:d>
+                      <m:dPr>
+                        <m:begChr m:val="("/>
+                        <m:sepChr m:val=""/>
+                        <m:endChr m:val=")"/>
+                        <m:grow/>
+                      </m:dPr>
+                      <m:e>
+                        <m:r>
+                          <m:t>p</m:t>
+                        </m:r>
+                        <m:r>
+                          <m:t> </m:t>
+                        </m:r>
+                        <m:r>
+                          <m:t>n</m:t>
+                        </m:r>
+                        <m:r>
+                          <m:rPr>
+                            <m:sty m:val="p"/>
+                          </m:rPr>
+                          <m:t>log</m:t>
+                        </m:r>
+                        <m:r>
+                          <m:t>n</m:t>
+                        </m:r>
+                      </m:e>
+                    </m:d>
+                  </m:oMath>
+                </a14:m>
+                <a:r>
+                  <a:rPr/>
+                  <a:t> — cheap, which is why trees scale.</a:t>
+                </a:r>
+              </a:p>
+            </p:txBody>
+          </p:sp>
+        </mc:Choice>
+      </mc:AlternateContent>
+    </p:spTree>
+  </p:cSld>
+</p:sld>
+</file>
+
+<file path=ppt/slides/slide15.xml><?xml version="1.0" encoding="utf-8"?>
+<p:sld xmlns:a="http://schemas.openxmlformats.org/drawingml/2006/main" xmlns:r="http://schemas.openxmlformats.org/officeDocument/2006/relationships" xmlns:p="http://schemas.openxmlformats.org/presentationml/2006/main">
+  <p:cSld>
+    <p:spTree>
+      <p:nvGrpSpPr>
+        <p:cNvPr id="1" name=""/>
+        <p:cNvGrpSpPr/>
+        <p:nvPr/>
+      </p:nvGrpSpPr>
+      <p:grpSpPr>
+        <a:xfrm>
+          <a:off x="0" y="0"/>
+          <a:ext cx="0" cy="0"/>
+          <a:chOff x="0" y="0"/>
+          <a:chExt cx="0" cy="0"/>
+        </a:xfrm>
+      </p:grpSpPr>
+      <p:sp>
+        <p:nvSpPr>
+          <p:cNvPr id="2" name="Title 1"/>
+          <p:cNvSpPr>
+            <a:spLocks noGrp="1"/>
+          </p:cNvSpPr>
+          <p:nvPr>
+            <p:ph type="title"/>
+          </p:nvPr>
+        </p:nvSpPr>
+        <p:spPr/>
+        <p:txBody>
+          <a:bodyPr/>
+          <a:lstStyle/>
+          <a:p>
+            <a:pPr lvl="0" indent="0" marL="0">
+              <a:buNone/>
+            </a:pPr>
+            <a:r>
+              <a:rPr/>
+              <a:t>Watch the scan happen</a:t>
+            </a:r>
+          </a:p>
+        </p:txBody>
+      </p:sp>
+      <p:pic>
+        <p:nvPicPr>
+          <p:cNvPr descr="slides_files/figure-pptx/cell-4-output-1.png" id="0" name="Picture 1"/>
+          <p:cNvPicPr>
+            <a:picLocks noGrp="1" noChangeAspect="1"/>
+          </p:cNvPicPr>
+          <p:nvPr/>
+        </p:nvPicPr>
+        <p:blipFill>
+          <a:blip r:embed="rId2"/>
+          <a:stretch>
+            <a:fillRect/>
+          </a:stretch>
+        </p:blipFill>
+        <p:spPr bwMode="auto">
+          <a:xfrm>
+            <a:off x="457200" y="1371600"/>
+            <a:ext cx="8229600" cy="3022600"/>
+          </a:xfrm>
+          <a:prstGeom prst="rect">
+            <a:avLst/>
+          </a:prstGeom>
+          <a:noFill/>
+          <a:ln w="9525">
+            <a:noFill/>
+            <a:headEnd/>
+            <a:tailEnd/>
+          </a:ln>
+        </p:spPr>
+      </p:pic>
+    </p:spTree>
+  </p:cSld>
+</p:sld>
+</file>
+
+<file path=ppt/slides/slide16.xml><?xml version="1.0" encoding="utf-8"?>
+<p:sld xmlns:a="http://schemas.openxmlformats.org/drawingml/2006/main" xmlns:r="http://schemas.openxmlformats.org/officeDocument/2006/relationships" xmlns:p="http://schemas.openxmlformats.org/presentationml/2006/main">
+  <p:cSld>
+    <p:spTree>
+      <p:nvGrpSpPr>
+        <p:cNvPr id="1" name=""/>
+        <p:cNvGrpSpPr/>
+        <p:nvPr/>
+      </p:nvGrpSpPr>
+      <p:grpSpPr>
+        <a:xfrm>
+          <a:off x="0" y="0"/>
+          <a:ext cx="0" cy="0"/>
+          <a:chOff x="0" y="0"/>
+          <a:chExt cx="0" cy="0"/>
+        </a:xfrm>
+      </p:grpSpPr>
+      <p:sp>
+        <p:nvSpPr>
+          <p:cNvPr id="3" name="Content Placeholder 2"/>
+          <p:cNvSpPr>
+            <a:spLocks noGrp="1"/>
+          </p:cNvSpPr>
+          <p:nvPr>
+            <p:ph idx="1"/>
+          </p:nvPr>
+        </p:nvSpPr>
+        <p:spPr/>
+        <p:txBody>
+          <a:bodyPr/>
+          <a:lstStyle/>
+          <a:p>
+            <a:pPr lvl="0" indent="0" marL="0">
+              <a:buNone/>
+            </a:pPr>
+            <a:r>
+              <a:rPr/>
+              <a:t>Left: the actual scan on our data — one number per candidate cut. Right: the three impurity measures.</a:t>
+            </a:r>
+          </a:p>
+        </p:txBody>
+      </p:sp>
+    </p:spTree>
+  </p:cSld>
+</p:sld>
+</file>
+
+<file path=ppt/slides/slide17.xml><?xml version="1.0" encoding="utf-8"?>
+<p:sld xmlns:a="http://schemas.openxmlformats.org/drawingml/2006/main" xmlns:r="http://schemas.openxmlformats.org/officeDocument/2006/relationships" xmlns:p="http://schemas.openxmlformats.org/presentationml/2006/main">
+  <p:cSld>
+    <p:spTree>
+      <p:nvGrpSpPr>
+        <p:cNvPr id="1" name=""/>
+        <p:cNvGrpSpPr/>
+        <p:nvPr/>
+      </p:nvGrpSpPr>
+      <p:grpSpPr>
+        <a:xfrm>
+          <a:off x="0" y="0"/>
+          <a:ext cx="0" cy="0"/>
+          <a:chOff x="0" y="0"/>
+          <a:chExt cx="0" cy="0"/>
+        </a:xfrm>
+      </p:grpSpPr>
+      <p:sp>
+        <p:nvSpPr>
+          <p:cNvPr id="2" name="Title 1"/>
+          <p:cNvSpPr>
+            <a:spLocks noGrp="1"/>
+          </p:cNvSpPr>
+          <p:nvPr>
+            <p:ph type="title"/>
+          </p:nvPr>
+        </p:nvSpPr>
+        <p:spPr/>
+        <p:txBody>
+          <a:bodyPr/>
+          <a:lstStyle/>
+          <a:p>
+            <a:pPr lvl="0" indent="0" marL="0">
+              <a:buNone/>
+            </a:pPr>
+            <a:r>
+              <a:rPr/>
+              <a:t>Why the right-hand panel matters</a:t>
+            </a:r>
+          </a:p>
+        </p:txBody>
+      </p:sp>
+      <mc:AlternateContent xmlns:mc="http://schemas.openxmlformats.org/markup-compatibility/2006">
+        <mc:Choice xmlns:a14="http://schemas.microsoft.com/office/drawing/2010/main" Requires="a14">
+          <p:sp>
+            <p:nvSpPr>
+              <p:cNvPr id="3" name="Content Placeholder 2"/>
+              <p:cNvSpPr>
+                <a:spLocks noGrp="1"/>
+              </p:cNvSpPr>
+              <p:nvPr>
+                <p:ph idx="1"/>
+              </p:nvPr>
+            </p:nvSpPr>
+            <p:spPr/>
+            <p:txBody>
+              <a:bodyPr/>
+              <a:lstStyle/>
+              <a:p>
+                <a:pPr lvl="0" indent="0" marL="0">
+                  <a:buNone/>
+                </a:pPr>
+                <a14:m>
+                  <m:oMathPara xmlns:m="http://schemas.openxmlformats.org/officeDocument/2006/math">
+                    <m:oMathParaPr>
+                      <m:jc m:val="center"/>
+                    </m:oMathParaPr>
+                    <m:oMath>
+                      <m:r>
+                        <m:rPr>
+                          <m:nor/>
+                          <m:sty m:val="p"/>
+                        </m:rPr>
+                        <m:t>Gini</m:t>
+                      </m:r>
+                      <m:r>
+                        <m:rPr>
+                          <m:sty m:val="p"/>
+                        </m:rPr>
+                        <m:t>=</m:t>
+                      </m:r>
+                      <m:nary>
+                        <m:naryPr>
+                          <m:chr m:val="∑"/>
+                          <m:limLoc m:val="undOvr"/>
+                          <m:subHide m:val="off"/>
+                          <m:supHide m:val="on"/>
+                        </m:naryPr>
+                        <m:sub>
+                          <m:r>
+                            <m:t>k</m:t>
+                          </m:r>
+                        </m:sub>
+                        <m:sup>
+                          <m:r>
+                            <m:t>​</m:t>
+                          </m:r>
+                        </m:sup>
+                        <m:e>
+                          <m:sSub>
+                            <m:e>
+                              <m:acc>
+                                <m:accPr>
+                                  <m:chr m:val="̂"/>
+                                </m:accPr>
+                                <m:e>
+                                  <m:r>
+                                    <m:t>p</m:t>
+                                  </m:r>
+                                </m:e>
+                              </m:acc>
+                            </m:e>
+                            <m:sub>
+                              <m:r>
+                                <m:t>m</m:t>
+                              </m:r>
+                              <m:r>
+                                <m:t>k</m:t>
+                              </m:r>
+                            </m:sub>
+                          </m:sSub>
+                        </m:e>
+                      </m:nary>
+                      <m:d>
+                        <m:dPr>
+                          <m:begChr m:val="("/>
+                          <m:sepChr m:val=""/>
+                          <m:endChr m:val=")"/>
+                          <m:grow/>
+                        </m:dPr>
+                        <m:e>
+                          <m:r>
+                            <m:t>1</m:t>
+                          </m:r>
+                          <m:r>
+                            <m:rPr>
+                              <m:sty m:val="p"/>
+                            </m:rPr>
+                            <m:t>−</m:t>
+                          </m:r>
+                          <m:sSub>
+                            <m:e>
+                              <m:acc>
+                                <m:accPr>
+                                  <m:chr m:val="̂"/>
+                                </m:accPr>
+                                <m:e>
+                                  <m:r>
+                                    <m:t>p</m:t>
+                                  </m:r>
+                                </m:e>
+                              </m:acc>
+                            </m:e>
+                            <m:sub>
+                              <m:r>
+                                <m:t>m</m:t>
+                              </m:r>
+                              <m:r>
+                                <m:t>k</m:t>
+                              </m:r>
+                            </m:sub>
+                          </m:sSub>
+                        </m:e>
+                      </m:d>
+                      <m:r>
+                        <m:rPr>
+                          <m:sty m:val="p"/>
+                        </m:rPr>
+                        <m:t>,</m:t>
+                      </m:r>
+                      <m:r>
+                        <m:t> </m:t>
+                      </m:r>
+                      <m:r>
+                        <m:rPr>
+                          <m:nor/>
+                          <m:sty m:val="p"/>
+                        </m:rPr>
+                        <m:t>Entropy</m:t>
+                      </m:r>
+                      <m:r>
+                        <m:rPr>
+                          <m:sty m:val="p"/>
+                        </m:rPr>
+                        <m:t>=</m:t>
+                      </m:r>
+                      <m:r>
+                        <m:rPr>
+                          <m:sty m:val="p"/>
+                        </m:rPr>
+                        <m:t>−</m:t>
+                      </m:r>
+                      <m:nary>
+                        <m:naryPr>
+                          <m:chr m:val="∑"/>
+                          <m:limLoc m:val="undOvr"/>
+                          <m:subHide m:val="off"/>
+                          <m:supHide m:val="on"/>
+                        </m:naryPr>
+                        <m:sub>
+                          <m:r>
+                            <m:t>k</m:t>
+                          </m:r>
+                        </m:sub>
+                        <m:sup>
+                          <m:r>
+                            <m:t>​</m:t>
+                          </m:r>
+                        </m:sup>
+                        <m:e>
+                          <m:sSub>
+                            <m:e>
+                              <m:acc>
+                                <m:accPr>
+                                  <m:chr m:val="̂"/>
+                                </m:accPr>
+                                <m:e>
+                                  <m:r>
+                                    <m:t>p</m:t>
+                                  </m:r>
+                                </m:e>
+                              </m:acc>
+                            </m:e>
+                            <m:sub>
+                              <m:r>
+                                <m:t>m</m:t>
+                              </m:r>
+                              <m:r>
+                                <m:t>k</m:t>
+                              </m:r>
+                            </m:sub>
+                          </m:sSub>
+                        </m:e>
+                      </m:nary>
+                      <m:r>
+                        <m:rPr>
+                          <m:sty m:val="p"/>
+                        </m:rPr>
+                        <m:t>log</m:t>
+                      </m:r>
+                      <m:sSub>
+                        <m:e>
+                          <m:acc>
+                            <m:accPr>
+                              <m:chr m:val="̂"/>
+                            </m:accPr>
+                            <m:e>
+                              <m:r>
+                                <m:t>p</m:t>
+                              </m:r>
+                            </m:e>
+                          </m:acc>
+                        </m:e>
+                        <m:sub>
+                          <m:r>
+                            <m:t>m</m:t>
+                          </m:r>
+                          <m:r>
+                            <m:t>k</m:t>
+                          </m:r>
+                        </m:sub>
+                      </m:sSub>
+                      <m:r>
+                        <m:rPr>
+                          <m:sty m:val="p"/>
+                        </m:rPr>
+                        <m:t>,</m:t>
+                      </m:r>
+                      <m:r>
+                        <m:t> </m:t>
+                      </m:r>
+                      <m:r>
+                        <m:rPr>
+                          <m:nor/>
+                          <m:sty m:val="p"/>
+                        </m:rPr>
+                        <m:t>Miscl.</m:t>
+                      </m:r>
+                      <m:r>
+                        <m:rPr>
+                          <m:sty m:val="p"/>
+                        </m:rPr>
+                        <m:t>=</m:t>
+                      </m:r>
+                      <m:r>
+                        <m:t>1</m:t>
+                      </m:r>
+                      <m:r>
+                        <m:rPr>
+                          <m:sty m:val="p"/>
+                        </m:rPr>
+                        <m:t>−</m:t>
+                      </m:r>
+                      <m:limLow>
+                        <m:e>
+                          <m:r>
+                            <m:rPr>
+                              <m:sty m:val="p"/>
+                            </m:rPr>
+                            <m:t>max</m:t>
+                          </m:r>
+                        </m:e>
+                        <m:lim>
+                          <m:r>
+                            <m:t>k</m:t>
+                          </m:r>
+                        </m:lim>
+                      </m:limLow>
+                      <m:sSub>
+                        <m:e>
+                          <m:acc>
+                            <m:accPr>
+                              <m:chr m:val="̂"/>
+                            </m:accPr>
+                            <m:e>
+                              <m:r>
+                                <m:t>p</m:t>
+                              </m:r>
+                            </m:e>
+                          </m:acc>
+                        </m:e>
+                        <m:sub>
+                          <m:r>
+                            <m:t>m</m:t>
+                          </m:r>
+                          <m:r>
+                            <m:t>k</m:t>
+                          </m:r>
+                        </m:sub>
+                      </m:sSub>
+                    </m:oMath>
+                  </m:oMathPara>
+                </a14:m>
+              </a:p>
+              <a:p>
+                <a:pPr lvl="0" indent="0" marL="0">
+                  <a:buNone/>
+                </a:pPr>
+                <a:r>
+                  <a:rPr/>
+                  <a:t>Gini and entropy are </a:t>
+                </a:r>
+                <a:r>
+                  <a:rPr b="1"/>
+                  <a:t>strictly concave</a:t>
+                </a:r>
+                <a:r>
+                  <a:rPr/>
+                  <a:t>: they reward a split that makes a node purer </a:t>
+                </a:r>
+                <a:r>
+                  <a:rPr i="1"/>
+                  <a:t>even when the majority class does not change</a:t>
+                </a:r>
+                <a:r>
+                  <a:rPr/>
+                  <a:t>. Misclassification is piecewise linear — it registers nothing.</a:t>
+                </a:r>
+              </a:p>
+              <a:p>
+                <a:pPr lvl="0" indent="0" marL="0">
+                  <a:buNone/>
+                </a:pPr>
+                <a:r>
+                  <a:rPr/>
+                  <a:t>So: grow with </a:t>
+                </a:r>
+                <a:r>
+                  <a:rPr b="1"/>
+                  <a:t>Gini or entropy</a:t>
+                </a:r>
+                <a:r>
+                  <a:rPr/>
+                  <a:t>, prune with </a:t>
+                </a:r>
+                <a:r>
+                  <a:rPr b="1"/>
+                  <a:t>misclassification</a:t>
+                </a:r>
+                <a:r>
+                  <a:rPr/>
+                  <a:t> (or whatever loss you will actually be judged on). Different jobs, different criteria.</a:t>
+                </a:r>
+              </a:p>
+            </p:txBody>
+          </p:sp>
+        </mc:Choice>
+      </mc:AlternateContent>
+    </p:spTree>
+  </p:cSld>
+</p:sld>
+</file>
+
+<file path=ppt/slides/slide18.xml><?xml version="1.0" encoding="utf-8"?>
+<p:sld xmlns:a="http://schemas.openxmlformats.org/drawingml/2006/main" xmlns:r="http://schemas.openxmlformats.org/officeDocument/2006/relationships" xmlns:p="http://schemas.openxmlformats.org/presentationml/2006/main">
+  <p:cSld>
+    <p:spTree>
+      <p:nvGrpSpPr>
+        <p:cNvPr id="1" name=""/>
+        <p:cNvGrpSpPr/>
+        <p:nvPr/>
+      </p:nvGrpSpPr>
+      <p:grpSpPr>
+        <a:xfrm>
+          <a:off x="0" y="0"/>
+          <a:ext cx="0" cy="0"/>
+          <a:chOff x="0" y="0"/>
+          <a:chExt cx="0" cy="0"/>
+        </a:xfrm>
+      </p:grpSpPr>
+      <p:sp>
+        <p:nvSpPr>
+          <p:cNvPr id="2" name="Title 1"/>
+          <p:cNvSpPr>
+            <a:spLocks noGrp="1"/>
+          </p:cNvSpPr>
+          <p:nvPr>
+            <p:ph type="title"/>
+          </p:nvPr>
+        </p:nvSpPr>
+        <p:spPr>
+          <a:xfrm>
+            <a:off x="722313" y="1850000"/>
+            <a:ext cx="7772400" cy="1300000"/>
+          </a:xfrm>
+        </p:spPr>
+        <p:txBody>
+          <a:bodyPr/>
+          <a:lstStyle/>
+          <a:p>
+            <a:pPr lvl="0" indent="0" marL="0">
+              <a:buNone/>
+            </a:pPr>
+            <a:r>
+              <a:rPr/>
+              <a:t>3 · Pruning</a:t>
+            </a:r>
+          </a:p>
+        </p:txBody>
+      </p:sp>
+    </p:spTree>
+  </p:cSld>
+</p:sld>
+</file>
+
+<file path=ppt/slides/slide19.xml><?xml version="1.0" encoding="utf-8"?>
+<p:sld xmlns:a="http://schemas.openxmlformats.org/drawingml/2006/main" xmlns:r="http://schemas.openxmlformats.org/officeDocument/2006/relationships" xmlns:p="http://schemas.openxmlformats.org/presentationml/2006/main">
+  <p:cSld>
+    <p:spTree>
+      <p:nvGrpSpPr>
+        <p:cNvPr id="1" name=""/>
+        <p:cNvGrpSpPr/>
+        <p:nvPr/>
+      </p:nvGrpSpPr>
+      <p:grpSpPr>
+        <a:xfrm>
+          <a:off x="0" y="0"/>
+          <a:ext cx="0" cy="0"/>
+          <a:chOff x="0" y="0"/>
+          <a:chExt cx="0" cy="0"/>
+        </a:xfrm>
+      </p:grpSpPr>
+      <p:sp>
+        <p:nvSpPr>
+          <p:cNvPr id="2" name="Title 1"/>
+          <p:cNvSpPr>
+            <a:spLocks noGrp="1"/>
+          </p:cNvSpPr>
+          <p:nvPr>
+            <p:ph type="title"/>
+          </p:nvPr>
+        </p:nvSpPr>
+        <p:spPr/>
+        <p:txBody>
+          <a:bodyPr/>
+          <a:lstStyle/>
+          <a:p>
+            <a:pPr lvl="0" indent="0" marL="0">
+              <a:buNone/>
+            </a:pPr>
+            <a:r>
+              <a:rPr/>
+              <a:t>Cost-complexity</a:t>
+            </a:r>
+          </a:p>
+        </p:txBody>
+      </p:sp>
+      <mc:AlternateContent xmlns:mc="http://schemas.openxmlformats.org/markup-compatibility/2006">
+        <mc:Choice xmlns:a14="http://schemas.microsoft.com/office/drawing/2010/main" Requires="a14">
+          <p:sp>
+            <p:nvSpPr>
+              <p:cNvPr id="3" name="Content Placeholder 2"/>
+              <p:cNvSpPr>
+                <a:spLocks noGrp="1"/>
+              </p:cNvSpPr>
+              <p:nvPr>
+                <p:ph idx="1"/>
+              </p:nvPr>
+            </p:nvSpPr>
+            <p:spPr/>
+            <p:txBody>
+              <a:bodyPr/>
+              <a:lstStyle/>
+              <a:p>
+                <a:pPr lvl="0" indent="0" marL="0">
+                  <a:buNone/>
+                </a:pPr>
+                <a:r>
+                  <a:rPr/>
                   <a:t>Grow a large tree </a:t>
                 </a:r>
                 <a14:m>
@@ -3418,7 +5178,7 @@
                 </a14:m>
                 <a:r>
                   <a:rPr/>
-                  <a:t>, then choose a subtree minimising</a:t>
+                  <a:t>, then choose the subtree minimising</a:t>
                 </a:r>
               </a:p>
               <a:p>
@@ -3613,6 +5373,9 @@
                       <m:r>
                         <m:t>γ</m:t>
                       </m:r>
+                      <m:r>
+                        <m:t> </m:t>
+                      </m:r>
                       <m:d>
                         <m:dPr>
                           <m:begChr m:val="|"/>
@@ -3630,6 +5393,69 @@
                   </m:oMathPara>
                 </a14:m>
               </a:p>
+              <a:p>
+                <a:pPr lvl="0" indent="0" marL="0">
+                  <a:buNone/>
+                </a:pPr>
+                <a:r>
+                  <a:rPr b="1"/>
+                  <a:t>Weakest-link pruning:</a:t>
+                </a:r>
+                <a:r>
+                  <a:rPr/>
+                  <a:t> as </a:t>
+                </a:r>
+                <a14:m>
+                  <m:oMath xmlns:m="http://schemas.openxmlformats.org/officeDocument/2006/math">
+                    <m:r>
+                      <m:t>γ</m:t>
+                    </m:r>
+                  </m:oMath>
+                </a14:m>
+                <a:r>
+                  <a:rPr/>
+                  <a:t> rises from 0, the optimal subtrees are </a:t>
+                </a:r>
+                <a:r>
+                  <a:rPr b="1"/>
+                  <a:t>nested</a:t>
+                </a:r>
+                <a:r>
+                  <a:rPr/>
+                  <a:t> — obtained by repeatedly collapsing the internal node with the smallest per-leaf increase in error.</a:t>
+                </a:r>
+              </a:p>
+              <a:p>
+                <a:pPr lvl="0" indent="0" marL="0">
+                  <a:buNone/>
+                </a:pPr>
+                <a:r>
+                  <a:rPr/>
+                  <a:t>That nesting is what makes it tractable: a one-dimensional family indexed by </a:t>
+                </a:r>
+                <a14:m>
+                  <m:oMath xmlns:m="http://schemas.openxmlformats.org/officeDocument/2006/math">
+                    <m:r>
+                      <m:t>γ</m:t>
+                    </m:r>
+                  </m:oMath>
+                </a14:m>
+                <a:r>
+                  <a:rPr/>
+                  <a:t>, which you then select by cross-validation — exactly as you selected </a:t>
+                </a:r>
+                <a14:m>
+                  <m:oMath xmlns:m="http://schemas.openxmlformats.org/officeDocument/2006/math">
+                    <m:r>
+                      <m:t>λ</m:t>
+                    </m:r>
+                  </m:oMath>
+                </a14:m>
+                <a:r>
+                  <a:rPr/>
+                  <a:t> last week.</a:t>
+                </a:r>
+              </a:p>
             </p:txBody>
           </p:sp>
         </mc:Choice>
@@ -3639,7 +5465,57 @@
 </p:sld>
 </file>
 
-<file path=ppt/slides/slide12.xml><?xml version="1.0" encoding="utf-8"?>
+<file path=ppt/slides/slide2.xml><?xml version="1.0" encoding="utf-8"?>
+<p:sld xmlns:a="http://schemas.openxmlformats.org/drawingml/2006/main" xmlns:r="http://schemas.openxmlformats.org/officeDocument/2006/relationships" xmlns:p="http://schemas.openxmlformats.org/presentationml/2006/main">
+  <p:cSld>
+    <p:spTree>
+      <p:nvGrpSpPr>
+        <p:cNvPr id="1" name=""/>
+        <p:cNvGrpSpPr/>
+        <p:nvPr/>
+      </p:nvGrpSpPr>
+      <p:grpSpPr>
+        <a:xfrm>
+          <a:off x="0" y="0"/>
+          <a:ext cx="0" cy="0"/>
+          <a:chOff x="0" y="0"/>
+          <a:chExt cx="0" cy="0"/>
+        </a:xfrm>
+      </p:grpSpPr>
+      <p:sp>
+        <p:nvSpPr>
+          <p:cNvPr id="3" name="Content Placeholder 2"/>
+          <p:cNvSpPr>
+            <a:spLocks noGrp="1"/>
+          </p:cNvSpPr>
+          <p:nvPr>
+            <p:ph idx="1"/>
+          </p:nvPr>
+        </p:nvSpPr>
+        <p:spPr/>
+        <p:txBody>
+          <a:bodyPr/>
+          <a:lstStyle/>
+          <a:p>
+            <a:pPr lvl="0" indent="0" marL="0">
+              <a:spcBef>
+                <a:spcPts val="3000"/>
+              </a:spcBef>
+              <a:buNone/>
+            </a:pPr>
+            <a:r>
+              <a:rPr b="1"/>
+              <a:t>If we abandon linearity, what do we lose — and can we get the interpretation back?</a:t>
+            </a:r>
+          </a:p>
+        </p:txBody>
+      </p:sp>
+    </p:spTree>
+  </p:cSld>
+</p:sld>
+</file>
+
+<file path=ppt/slides/slide20.xml><?xml version="1.0" encoding="utf-8"?>
 <p:sld xmlns:a="http://schemas.openxmlformats.org/drawingml/2006/main" xmlns:r="http://schemas.openxmlformats.org/officeDocument/2006/relationships" xmlns:p="http://schemas.openxmlformats.org/presentationml/2006/main">
   <p:cSld>
     <p:spTree>
@@ -3676,7 +5552,131 @@
             </a:pPr>
             <a:r>
               <a:rPr/>
-              <a:t>Weakest-link pruning</a:t>
+              <a:t>The same picture as Session 05</a:t>
+            </a:r>
+          </a:p>
+        </p:txBody>
+      </p:sp>
+      <p:pic>
+        <p:nvPicPr>
+          <p:cNvPr descr="slides_files/figure-pptx/cell-5-output-1.png" id="0" name="Picture 1"/>
+          <p:cNvPicPr>
+            <a:picLocks noGrp="1" noChangeAspect="1"/>
+          </p:cNvPicPr>
+          <p:nvPr/>
+        </p:nvPicPr>
+        <p:blipFill>
+          <a:blip r:embed="rId2"/>
+          <a:stretch>
+            <a:fillRect/>
+          </a:stretch>
+        </p:blipFill>
+        <p:spPr bwMode="auto">
+          <a:xfrm>
+            <a:off x="838200" y="1193800"/>
+            <a:ext cx="7454900" cy="3390900"/>
+          </a:xfrm>
+          <a:prstGeom prst="rect">
+            <a:avLst/>
+          </a:prstGeom>
+          <a:noFill/>
+          <a:ln w="9525">
+            <a:noFill/>
+            <a:headEnd/>
+            <a:tailEnd/>
+          </a:ln>
+        </p:spPr>
+      </p:pic>
+    </p:spTree>
+  </p:cSld>
+</p:sld>
+</file>
+
+<file path=ppt/slides/slide21.xml><?xml version="1.0" encoding="utf-8"?>
+<p:sld xmlns:a="http://schemas.openxmlformats.org/drawingml/2006/main" xmlns:r="http://schemas.openxmlformats.org/officeDocument/2006/relationships" xmlns:p="http://schemas.openxmlformats.org/presentationml/2006/main">
+  <p:cSld>
+    <p:spTree>
+      <p:nvGrpSpPr>
+        <p:cNvPr id="1" name=""/>
+        <p:cNvGrpSpPr/>
+        <p:nvPr/>
+      </p:nvGrpSpPr>
+      <p:grpSpPr>
+        <a:xfrm>
+          <a:off x="0" y="0"/>
+          <a:ext cx="0" cy="0"/>
+          <a:chOff x="0" y="0"/>
+          <a:chExt cx="0" cy="0"/>
+        </a:xfrm>
+      </p:grpSpPr>
+      <p:sp>
+        <p:nvSpPr>
+          <p:cNvPr id="3" name="Content Placeholder 2"/>
+          <p:cNvSpPr>
+            <a:spLocks noGrp="1"/>
+          </p:cNvSpPr>
+          <p:nvPr>
+            <p:ph idx="1"/>
+          </p:nvPr>
+        </p:nvSpPr>
+        <p:spPr/>
+        <p:txBody>
+          <a:bodyPr/>
+          <a:lstStyle/>
+          <a:p>
+            <a:pPr lvl="0" indent="0" marL="0">
+              <a:buNone/>
+            </a:pPr>
+            <a:r>
+              <a:rPr/>
+              <a:t>An interior optimum, found by CV, on a one-dimensional complexity family. Session 04’s figure with different axis labels.</a:t>
+            </a:r>
+          </a:p>
+        </p:txBody>
+      </p:sp>
+    </p:spTree>
+  </p:cSld>
+</p:sld>
+</file>
+
+<file path=ppt/slides/slide22.xml><?xml version="1.0" encoding="utf-8"?>
+<p:sld xmlns:a="http://schemas.openxmlformats.org/drawingml/2006/main" xmlns:r="http://schemas.openxmlformats.org/officeDocument/2006/relationships" xmlns:p="http://schemas.openxmlformats.org/presentationml/2006/main">
+  <p:cSld>
+    <p:spTree>
+      <p:nvGrpSpPr>
+        <p:cNvPr id="1" name=""/>
+        <p:cNvGrpSpPr/>
+        <p:nvPr/>
+      </p:nvGrpSpPr>
+      <p:grpSpPr>
+        <a:xfrm>
+          <a:off x="0" y="0"/>
+          <a:ext cx="0" cy="0"/>
+          <a:chOff x="0" y="0"/>
+          <a:chExt cx="0" cy="0"/>
+        </a:xfrm>
+      </p:grpSpPr>
+      <p:sp>
+        <p:nvSpPr>
+          <p:cNvPr id="2" name="Title 1"/>
+          <p:cNvSpPr>
+            <a:spLocks noGrp="1"/>
+          </p:cNvSpPr>
+          <p:nvPr>
+            <p:ph type="title"/>
+          </p:nvPr>
+        </p:nvSpPr>
+        <p:spPr/>
+        <p:txBody>
+          <a:bodyPr/>
+          <a:lstStyle/>
+          <a:p>
+            <a:pPr lvl="0" indent="0" marL="0">
+              <a:buNone/>
+            </a:pPr>
+            <a:r>
+              <a:rPr/>
+              <a:t>The structural point</a:t>
             </a:r>
           </a:p>
         </p:txBody>
@@ -3701,9 +5701,27 @@
                 <a:pPr lvl="0" indent="0" marL="0">
                   <a:buNone/>
                 </a:pPr>
-                <a:r>
-                  <a:rPr/>
-                  <a:t>As </a:t>
+                <a14:m>
+                  <m:oMath xmlns:m="http://schemas.openxmlformats.org/officeDocument/2006/math">
+                    <m:r>
+                      <m:t>λ</m:t>
+                    </m:r>
+                  </m:oMath>
+                </a14:m>
+                <a:r>
+                  <a:rPr/>
+                  <a:t> in ridge. </a:t>
+                </a:r>
+                <a14:m>
+                  <m:oMath xmlns:m="http://schemas.openxmlformats.org/officeDocument/2006/math">
+                    <m:r>
+                      <m:t>λ</m:t>
+                    </m:r>
+                  </m:oMath>
+                </a14:m>
+                <a:r>
+                  <a:rPr/>
+                  <a:t> in lasso. </a:t>
                 </a:r>
                 <a14:m>
                   <m:oMath xmlns:m="http://schemas.openxmlformats.org/officeDocument/2006/math">
@@ -3714,15 +5732,7 @@
                 </a14:m>
                 <a:r>
                   <a:rPr/>
-                  <a:t> increases from 0, the sequence of optimal subtrees is </a:t>
-                </a:r>
-                <a:r>
-                  <a:rPr b="1"/>
-                  <a:t>nested</a:t>
-                </a:r>
-                <a:r>
-                  <a:rPr/>
-                  <a:t>, obtained by successively collapsing the internal node with the smallest per-leaf increase in error.</a:t>
+                  <a:t> here. Tree depth. Number of components in Session 08. Number of clusters in Session 09.</a:t>
                 </a:r>
               </a:p>
               <a:p>
@@ -3730,55 +5740,16 @@
                   <a:buNone/>
                 </a:pPr>
                 <a:r>
-                  <a:rPr/>
-                  <a:t>That gives a </a:t>
-                </a:r>
-                <a:r>
                   <a:rPr b="1"/>
-                  <a:t>one-dimensional family</a:t>
-                </a:r>
-                <a:r>
-                  <a:rPr/>
-                  <a:t> indexed by </a:t>
-                </a:r>
-                <a14:m>
-                  <m:oMath xmlns:m="http://schemas.openxmlformats.org/officeDocument/2006/math">
-                    <m:r>
-                      <m:t>γ</m:t>
-                    </m:r>
-                  </m:oMath>
-                </a14:m>
-                <a:r>
-                  <a:rPr/>
-                  <a:t> — selected by cross-validation, exactly as we selected </a:t>
-                </a:r>
-                <a14:m>
-                  <m:oMath xmlns:m="http://schemas.openxmlformats.org/officeDocument/2006/math">
-                    <m:r>
-                      <m:t>λ</m:t>
-                    </m:r>
-                  </m:oMath>
-                </a14:m>
-                <a:r>
-                  <a:rPr/>
-                  <a:t> in Session 05.</a:t>
-                </a:r>
-              </a:p>
-              <a:p>
-                <a:pPr lvl="0" indent="0" marL="0">
-                  <a:buNone/>
-                </a:pPr>
-                <a:r>
-                  <a:rPr/>
-                  <a:t>The structural parallel is worth noticing: </a:t>
+                  <a:t>Every method in this course has a complexity dial and a cross-validation procedure for setting it.</a:t>
+                </a:r>
+                <a:r>
+                  <a:rPr/>
+                  <a:t> Once you see that, a new method is only ever two questions: </a:t>
                 </a:r>
                 <a:r>
                   <a:rPr i="1"/>
-                  <a:t>every</a:t>
-                </a:r>
-                <a:r>
-                  <a:rPr/>
-                  <a:t> method in this course has a complexity dial and a CV procedure for setting it.</a:t>
+                  <a:t>what is the dial, and what is the loss?</a:t>
                 </a:r>
               </a:p>
             </p:txBody>
@@ -3790,7 +5761,7 @@
 </p:sld>
 </file>
 
-<file path=ppt/slides/slide13.xml><?xml version="1.0" encoding="utf-8"?>
+<file path=ppt/slides/slide23.xml><?xml version="1.0" encoding="utf-8"?>
 <p:sld xmlns:a="http://schemas.openxmlformats.org/drawingml/2006/main" xmlns:r="http://schemas.openxmlformats.org/officeDocument/2006/relationships" xmlns:p="http://schemas.openxmlformats.org/presentationml/2006/main">
   <p:cSld>
     <p:spTree>
@@ -3832,7 +5803,7 @@
             </a:pPr>
             <a:r>
               <a:rPr/>
-              <a:t>7.3 Bagging</a:t>
+              <a:t>4 · Why averaging works</a:t>
             </a:r>
           </a:p>
         </p:txBody>
@@ -3842,7 +5813,7 @@
 </p:sld>
 </file>
 
-<file path=ppt/slides/slide14.xml><?xml version="1.0" encoding="utf-8"?>
+<file path=ppt/slides/slide24.xml><?xml version="1.0" encoding="utf-8"?>
 <p:sld xmlns:a="http://schemas.openxmlformats.org/drawingml/2006/main" xmlns:r="http://schemas.openxmlformats.org/officeDocument/2006/relationships" xmlns:p="http://schemas.openxmlformats.org/presentationml/2006/main">
   <p:cSld>
     <p:spTree>
@@ -3879,7 +5850,139 @@
             </a:pPr>
             <a:r>
               <a:rPr/>
-              <a:t>The variance argument</a:t>
+              <a:t>A single tree is a high-variance estimator</a:t>
+            </a:r>
+          </a:p>
+        </p:txBody>
+      </p:sp>
+      <mc:AlternateContent xmlns:mc="http://schemas.openxmlformats.org/markup-compatibility/2006">
+        <mc:Choice xmlns:a14="http://schemas.microsoft.com/office/drawing/2010/main" Requires="a14">
+          <p:sp>
+            <p:nvSpPr>
+              <p:cNvPr id="3" name="Content Placeholder 2"/>
+              <p:cNvSpPr>
+                <a:spLocks noGrp="1"/>
+              </p:cNvSpPr>
+              <p:nvPr>
+                <p:ph idx="1"/>
+              </p:nvPr>
+            </p:nvSpPr>
+            <p:spPr/>
+            <p:txBody>
+              <a:bodyPr/>
+              <a:lstStyle/>
+              <a:p>
+                <a:pPr lvl="0"/>
+                <a:r>
+                  <a:rPr/>
+                  <a:t>Change 5% of the rows and the </a:t>
+                </a:r>
+                <a:r>
+                  <a:rPr b="1"/>
+                  <a:t>first split</a:t>
+                </a:r>
+                <a:r>
+                  <a:rPr/>
+                  <a:t> can change</a:t>
+                </a:r>
+              </a:p>
+              <a:p>
+                <a:pPr lvl="0"/>
+                <a:r>
+                  <a:rPr/>
+                  <a:t>Change the first split and every region below it changes</a:t>
+                </a:r>
+              </a:p>
+              <a:p>
+                <a:pPr lvl="0"/>
+                <a:r>
+                  <a:rPr/>
+                  <a:t>So the whole partition is unstable — low bias, </a:t>
+                </a:r>
+                <a:r>
+                  <a:rPr b="1"/>
+                  <a:t>very</a:t>
+                </a:r>
+                <a:r>
+                  <a:rPr/>
+                  <a:t> high variance</a:t>
+                </a:r>
+              </a:p>
+              <a:p>
+                <a:pPr lvl="0" indent="0" marL="0">
+                  <a:buNone/>
+                </a:pPr>
+                <a:r>
+                  <a:rPr/>
+                  <a:t>Session 04’s decomposition says: average many high-variance, low-bias estimators and the variance term falls while the bias term does not. That is </a:t>
+                </a:r>
+                <a:r>
+                  <a:rPr b="1"/>
+                  <a:t>bagging</a:t>
+                </a:r>
+                <a:r>
+                  <a:rPr/>
+                  <a:t> — fit </a:t>
+                </a:r>
+                <a14:m>
+                  <m:oMath xmlns:m="http://schemas.openxmlformats.org/officeDocument/2006/math">
+                    <m:r>
+                      <m:t>B</m:t>
+                    </m:r>
+                  </m:oMath>
+                </a14:m>
+                <a:r>
+                  <a:rPr/>
+                  <a:t> trees on bootstrap resamples and average.</a:t>
+                </a:r>
+              </a:p>
+            </p:txBody>
+          </p:sp>
+        </mc:Choice>
+      </mc:AlternateContent>
+    </p:spTree>
+  </p:cSld>
+</p:sld>
+</file>
+
+<file path=ppt/slides/slide25.xml><?xml version="1.0" encoding="utf-8"?>
+<p:sld xmlns:a="http://schemas.openxmlformats.org/drawingml/2006/main" xmlns:r="http://schemas.openxmlformats.org/officeDocument/2006/relationships" xmlns:p="http://schemas.openxmlformats.org/presentationml/2006/main">
+  <p:cSld>
+    <p:spTree>
+      <p:nvGrpSpPr>
+        <p:cNvPr id="1" name=""/>
+        <p:cNvGrpSpPr/>
+        <p:nvPr/>
+      </p:nvGrpSpPr>
+      <p:grpSpPr>
+        <a:xfrm>
+          <a:off x="0" y="0"/>
+          <a:ext cx="0" cy="0"/>
+          <a:chOff x="0" y="0"/>
+          <a:chExt cx="0" cy="0"/>
+        </a:xfrm>
+      </p:grpSpPr>
+      <p:sp>
+        <p:nvSpPr>
+          <p:cNvPr id="2" name="Title 1"/>
+          <p:cNvSpPr>
+            <a:spLocks noGrp="1"/>
+          </p:cNvSpPr>
+          <p:nvPr>
+            <p:ph type="title"/>
+          </p:nvPr>
+        </p:nvSpPr>
+        <p:spPr/>
+        <p:txBody>
+          <a:bodyPr/>
+          <a:lstStyle/>
+          <a:p>
+            <a:pPr lvl="0" indent="0" marL="0">
+              <a:buNone/>
+            </a:pPr>
+            <a:r>
+              <a:rPr/>
+              <a:t>But how far does that go? Do the algebra</a:t>
             </a:r>
           </a:p>
         </p:txBody>
@@ -3906,18 +6009,7 @@
                 </a:pPr>
                 <a:r>
                   <a:rPr/>
-                  <a:t>Average </a:t>
-                </a:r>
-                <a14:m>
-                  <m:oMath xmlns:m="http://schemas.openxmlformats.org/officeDocument/2006/math">
-                    <m:r>
-                      <m:t>B</m:t>
-                    </m:r>
-                  </m:oMath>
-                </a14:m>
-                <a:r>
-                  <a:rPr/>
-                  <a:t> trees fitted on bootstrap samples. If each has variance </a:t>
+                  <a:t>If each tree has variance </a:t>
                 </a:r>
                 <a14:m>
                   <m:oMath xmlns:m="http://schemas.openxmlformats.org/officeDocument/2006/math">
@@ -3989,7 +6081,7 @@
                         <m:e>
                           <m:f>
                             <m:fPr>
-                              <m:type m:val="bar"/>
+                              <m:type m:val="lin"/>
                             </m:fPr>
                             <m:num>
                               <m:r>
@@ -4167,6 +6259,34 @@
                   </m:oMathPara>
                 </a14:m>
               </a:p>
+              <a:p>
+                <a:pPr lvl="0" indent="0" marL="0">
+                  <a:buNone/>
+                </a:pPr>
+                <a:r>
+                  <a:rPr/>
+                  <a:t>Increasing </a:t>
+                </a:r>
+                <a14:m>
+                  <m:oMath xmlns:m="http://schemas.openxmlformats.org/officeDocument/2006/math">
+                    <m:r>
+                      <m:t>B</m:t>
+                    </m:r>
+                  </m:oMath>
+                </a14:m>
+                <a:r>
+                  <a:rPr/>
+                  <a:t> kills the </a:t>
+                </a:r>
+                <a:r>
+                  <a:rPr b="1"/>
+                  <a:t>second</a:t>
+                </a:r>
+                <a:r>
+                  <a:rPr/>
+                  <a:t> term only. The first term does not move. Buying more trees past a point buys nothing at all.</a:t>
+                </a:r>
+              </a:p>
             </p:txBody>
           </p:sp>
         </mc:Choice>
@@ -4176,7 +6296,7 @@
 </p:sld>
 </file>
 
-<file path=ppt/slides/slide15.xml><?xml version="1.0" encoding="utf-8"?>
+<file path=ppt/slides/slide26.xml><?xml version="1.0" encoding="utf-8"?>
 <p:sld xmlns:a="http://schemas.openxmlformats.org/drawingml/2006/main" xmlns:r="http://schemas.openxmlformats.org/officeDocument/2006/relationships" xmlns:p="http://schemas.openxmlformats.org/presentationml/2006/main">
   <p:cSld>
     <p:spTree>
@@ -4213,11 +6333,63 @@
             </a:pPr>
             <a:r>
               <a:rPr/>
-              <a:t>Read that limit</a:t>
+              <a:t>Read it off the graph</a:t>
             </a:r>
           </a:p>
         </p:txBody>
       </p:sp>
+      <p:pic>
+        <p:nvPicPr>
+          <p:cNvPr descr="slides_files/figure-pptx/cell-6-output-1.png" id="0" name="Picture 1"/>
+          <p:cNvPicPr>
+            <a:picLocks noGrp="1" noChangeAspect="1"/>
+          </p:cNvPicPr>
+          <p:nvPr/>
+        </p:nvPicPr>
+        <p:blipFill>
+          <a:blip r:embed="rId2"/>
+          <a:stretch>
+            <a:fillRect/>
+          </a:stretch>
+        </p:blipFill>
+        <p:spPr bwMode="auto">
+          <a:xfrm>
+            <a:off x="838200" y="1193800"/>
+            <a:ext cx="7454900" cy="3390900"/>
+          </a:xfrm>
+          <a:prstGeom prst="rect">
+            <a:avLst/>
+          </a:prstGeom>
+          <a:noFill/>
+          <a:ln w="9525">
+            <a:noFill/>
+            <a:headEnd/>
+            <a:tailEnd/>
+          </a:ln>
+        </p:spPr>
+      </p:pic>
+    </p:spTree>
+  </p:cSld>
+</p:sld>
+</file>
+
+<file path=ppt/slides/slide27.xml><?xml version="1.0" encoding="utf-8"?>
+<p:sld xmlns:a="http://schemas.openxmlformats.org/drawingml/2006/main" xmlns:r="http://schemas.openxmlformats.org/officeDocument/2006/relationships" xmlns:p="http://schemas.openxmlformats.org/presentationml/2006/main">
+  <p:cSld>
+    <p:spTree>
+      <p:nvGrpSpPr>
+        <p:cNvPr id="1" name=""/>
+        <p:cNvGrpSpPr/>
+        <p:nvPr/>
+      </p:nvGrpSpPr>
+      <p:grpSpPr>
+        <a:xfrm>
+          <a:off x="0" y="0"/>
+          <a:ext cx="0" cy="0"/>
+          <a:chOff x="0" y="0"/>
+          <a:chExt cx="0" cy="0"/>
+        </a:xfrm>
+      </p:grpSpPr>
       <mc:AlternateContent xmlns:mc="http://schemas.openxmlformats.org/markup-compatibility/2006">
         <mc:Choice xmlns:a14="http://schemas.microsoft.com/office/drawing/2010/main" Requires="a14">
           <p:sp>
@@ -4238,70 +6410,6 @@
                 <a:pPr lvl="0" indent="0" marL="0">
                   <a:buNone/>
                 </a:pPr>
-                <a:r>
-                  <a:rPr/>
-                  <a:t>Increasing </a:t>
-                </a:r>
-                <a14:m>
-                  <m:oMath xmlns:m="http://schemas.openxmlformats.org/officeDocument/2006/math">
-                    <m:r>
-                      <m:t>B</m:t>
-                    </m:r>
-                  </m:oMath>
-                </a14:m>
-                <a:r>
-                  <a:rPr/>
-                  <a:t> kills the second term but leaves </a:t>
-                </a:r>
-                <a14:m>
-                  <m:oMath xmlns:m="http://schemas.openxmlformats.org/officeDocument/2006/math">
-                    <m:r>
-                      <m:t>ρ</m:t>
-                    </m:r>
-                    <m:sSup>
-                      <m:e>
-                        <m:r>
-                          <m:t>σ</m:t>
-                        </m:r>
-                      </m:e>
-                      <m:sup>
-                        <m:r>
-                          <m:t>2</m:t>
-                        </m:r>
-                      </m:sup>
-                    </m:sSup>
-                  </m:oMath>
-                </a14:m>
-                <a:r>
-                  <a:rPr/>
-                  <a:t> </a:t>
-                </a:r>
-                <a:r>
-                  <a:rPr b="1"/>
-                  <a:t>untouched</a:t>
-                </a:r>
-                <a:r>
-                  <a:rPr/>
-                  <a:t>.</a:t>
-                </a:r>
-              </a:p>
-              <a:p>
-                <a:pPr lvl="0" indent="0" marL="0">
-                  <a:buNone/>
-                </a:pPr>
-                <a:r>
-                  <a:rPr b="1"/>
-                  <a:t>This is the entire motivation for random forests.</a:t>
-                </a:r>
-              </a:p>
-              <a:p>
-                <a:pPr lvl="0" indent="0" marL="0">
-                  <a:buNone/>
-                </a:pPr>
-                <a:r>
-                  <a:rPr/>
-                  <a:t>If one predictor is strongly dominant, every bagged tree splits on it first and the trees are nearly identical: </a:t>
-                </a:r>
                 <a14:m>
                   <m:oMath xmlns:m="http://schemas.openxmlformats.org/officeDocument/2006/math">
                     <m:r>
@@ -4311,16 +6419,107 @@
                       <m:rPr>
                         <m:sty m:val="p"/>
                       </m:rPr>
-                      <m:t>≈</m:t>
+                      <m:t>=</m:t>
                     </m:r>
                     <m:r>
-                      <m:t>1</m:t>
+                      <m:t>0.6</m:t>
                     </m:r>
                   </m:oMath>
                 </a14:m>
                 <a:r>
                   <a:rPr/>
-                  <a:t>, and bagging buys almost nothing.</a:t>
+                  <a:t>, </a:t>
+                </a:r>
+                <a14:m>
+                  <m:oMath xmlns:m="http://schemas.openxmlformats.org/officeDocument/2006/math">
+                    <m:r>
+                      <m:t>B</m:t>
+                    </m:r>
+                    <m:r>
+                      <m:rPr>
+                        <m:sty m:val="p"/>
+                      </m:rPr>
+                      <m:t>=</m:t>
+                    </m:r>
+                    <m:r>
+                      <m:t>100</m:t>
+                    </m:r>
+                  </m:oMath>
+                </a14:m>
+                <a:r>
+                  <a:rPr/>
+                  <a:t> gives </a:t>
+                </a:r>
+                <a14:m>
+                  <m:oMath xmlns:m="http://schemas.openxmlformats.org/officeDocument/2006/math">
+                    <m:r>
+                      <m:t>0.604</m:t>
+                    </m:r>
+                  </m:oMath>
+                </a14:m>
+                <a:r>
+                  <a:rPr/>
+                  <a:t>; </a:t>
+                </a:r>
+                <a14:m>
+                  <m:oMath xmlns:m="http://schemas.openxmlformats.org/officeDocument/2006/math">
+                    <m:r>
+                      <m:t>B</m:t>
+                    </m:r>
+                    <m:r>
+                      <m:rPr>
+                        <m:sty m:val="p"/>
+                      </m:rPr>
+                      <m:t>=</m:t>
+                    </m:r>
+                    <m:r>
+                      <m:rPr>
+                        <m:sty m:val="p"/>
+                      </m:rPr>
+                      <m:t>∞</m:t>
+                    </m:r>
+                  </m:oMath>
+                </a14:m>
+                <a:r>
+                  <a:rPr/>
+                  <a:t> gives </a:t>
+                </a:r>
+                <a14:m>
+                  <m:oMath xmlns:m="http://schemas.openxmlformats.org/officeDocument/2006/math">
+                    <m:r>
+                      <m:t>0.600</m:t>
+                    </m:r>
+                  </m:oMath>
+                </a14:m>
+                <a:r>
+                  <a:rPr/>
+                  <a:t>. </a:t>
+                </a:r>
+                <a:r>
+                  <a:rPr b="1"/>
+                  <a:t>The whole gain is in lowering </a:t>
+                </a:r>
+                <a14:m>
+                  <m:oMath xmlns:m="http://schemas.openxmlformats.org/officeDocument/2006/math">
+                    <m:r>
+                      <m:t>ρ</m:t>
+                    </m:r>
+                  </m:oMath>
+                </a14:m>
+                <a:r>
+                  <a:rPr b="1"/>
+                  <a:t>, not in raising </a:t>
+                </a:r>
+                <a14:m>
+                  <m:oMath xmlns:m="http://schemas.openxmlformats.org/officeDocument/2006/math">
+                    <m:r>
+                      <m:t>B</m:t>
+                    </m:r>
+                  </m:oMath>
+                </a14:m>
+                <a:r>
+                  <a:rPr b="1"/>
+                  <a:t>.</a:t>
                 </a:r>
               </a:p>
             </p:txBody>
@@ -4332,7 +6531,7 @@
 </p:sld>
 </file>
 
-<file path=ppt/slides/slide16.xml><?xml version="1.0" encoding="utf-8"?>
+<file path=ppt/slides/slide28.xml><?xml version="1.0" encoding="utf-8"?>
 <p:sld xmlns:a="http://schemas.openxmlformats.org/drawingml/2006/main" xmlns:r="http://schemas.openxmlformats.org/officeDocument/2006/relationships" xmlns:p="http://schemas.openxmlformats.org/presentationml/2006/main">
   <p:cSld>
     <p:spTree>
@@ -4349,31 +6548,46 @@
           <a:chExt cx="0" cy="0"/>
         </a:xfrm>
       </p:grpSpPr>
-      <p:sp>
-        <p:nvSpPr>
-          <p:cNvPr id="2" name="Title 1"/>
-          <p:cNvSpPr>
-            <a:spLocks noGrp="1"/>
-          </p:cNvSpPr>
-          <p:nvPr>
-            <p:ph type="title"/>
-          </p:nvPr>
-        </p:nvSpPr>
-        <p:spPr/>
-        <p:txBody>
-          <a:bodyPr/>
-          <a:lstStyle/>
-          <a:p>
-            <a:pPr lvl="0" indent="0" marL="0">
-              <a:buNone/>
-            </a:pPr>
-            <a:r>
-              <a:rPr/>
-              <a:t>Random forests decorrelate</a:t>
-            </a:r>
-          </a:p>
-        </p:txBody>
-      </p:sp>
+      <mc:AlternateContent xmlns:mc="http://schemas.openxmlformats.org/markup-compatibility/2006">
+        <mc:Choice xmlns:a14="http://schemas.microsoft.com/office/drawing/2010/main" Requires="a14">
+          <p:sp>
+            <p:nvSpPr>
+              <p:cNvPr id="2" name="Title 1"/>
+              <p:cNvSpPr>
+                <a:spLocks noGrp="1"/>
+              </p:cNvSpPr>
+              <p:nvPr>
+                <p:ph type="title"/>
+              </p:nvPr>
+            </p:nvSpPr>
+            <p:spPr/>
+            <p:txBody>
+              <a:bodyPr/>
+              <a:lstStyle/>
+              <a:p>
+                <a:pPr lvl="0" indent="0" marL="0">
+                  <a:buNone/>
+                </a:pPr>
+                <a:r>
+                  <a:rPr/>
+                  <a:t>So lower </a:t>
+                </a:r>
+                <a14:m>
+                  <m:oMath xmlns:m="http://schemas.openxmlformats.org/officeDocument/2006/math">
+                    <m:r>
+                      <m:t>ρ</m:t>
+                    </m:r>
+                  </m:oMath>
+                </a14:m>
+                <a:r>
+                  <a:rPr/>
+                  <a:t>: that is a random forest</a:t>
+                </a:r>
+              </a:p>
+            </p:txBody>
+          </p:sp>
+        </mc:Choice>
+      </mc:AlternateContent>
       <mc:AlternateContent xmlns:mc="http://schemas.openxmlformats.org/markup-compatibility/2006">
         <mc:Choice xmlns:a14="http://schemas.microsoft.com/office/drawing/2010/main" Requires="a14">
           <p:sp>
@@ -4407,11 +6621,8 @@
                 </a14:m>
                 <a:r>
                   <a:rPr/>
-                  <a:t> features.</a:t>
-                </a:r>
-              </a:p>
-              <a:p>
-                <a:pPr lvl="0"/>
+                  <a:t> features. Defaults: </a:t>
+                </a:r>
                 <a14:m>
                   <m:oMath xmlns:m="http://schemas.openxmlformats.org/officeDocument/2006/math">
                     <m:r>
@@ -4450,22 +6661,10 @@
                 </a14:m>
                 <a:r>
                   <a:rPr/>
-                  <a:t> for classification</a:t>
-                </a:r>
-              </a:p>
-              <a:p>
-                <a:pPr lvl="0"/>
+                  <a:t> for classification, </a:t>
+                </a:r>
                 <a14:m>
                   <m:oMath xmlns:m="http://schemas.openxmlformats.org/officeDocument/2006/math">
-                    <m:r>
-                      <m:t>m</m:t>
-                    </m:r>
-                    <m:r>
-                      <m:rPr>
-                        <m:sty m:val="p"/>
-                      </m:rPr>
-                      <m:t>=</m:t>
-                    </m:r>
                     <m:r>
                       <m:rPr>
                         <m:sty m:val="p"/>
@@ -4494,13 +6693,11 @@
                 </a14:m>
                 <a:r>
                   <a:rPr/>
-                  <a:t> for regression</a:t>
+                  <a:t> for regression.</a:t>
                 </a:r>
               </a:p>
               <a:p>
-                <a:pPr lvl="0" indent="0" marL="0">
-                  <a:buNone/>
-                </a:pPr>
+                <a:pPr lvl="0"/>
                 <a:r>
                   <a:rPr/>
                   <a:t>Lower </a:t>
@@ -4514,7 +6711,7 @@
                 </a14:m>
                 <a:r>
                   <a:rPr/>
-                  <a:t> lowers </a:t>
+                  <a:t> → lower </a:t>
                 </a:r>
                 <a14:m>
                   <m:oMath xmlns:m="http://schemas.openxmlformats.org/officeDocument/2006/math">
@@ -4525,23 +6722,155 @@
                 </a14:m>
                 <a:r>
                   <a:rPr/>
-                  <a:t> but </a:t>
+                  <a:t> → lower ensemble variance</a:t>
+                </a:r>
+              </a:p>
+              <a:p>
+                <a:pPr lvl="0"/>
+                <a:r>
+                  <a:rPr/>
+                  <a:t>Lower </a:t>
+                </a:r>
+                <a14:m>
+                  <m:oMath xmlns:m="http://schemas.openxmlformats.org/officeDocument/2006/math">
+                    <m:r>
+                      <m:t>m</m:t>
+                    </m:r>
+                  </m:oMath>
+                </a14:m>
+                <a:r>
+                  <a:rPr/>
+                  <a:t> → </a:t>
                 </a:r>
                 <a:r>
                   <a:rPr b="1"/>
-                  <a:t>raises individual-tree bias</a:t>
-                </a:r>
-                <a:r>
-                  <a:rPr/>
-                  <a:t> — a bias–variance tradeoff </a:t>
-                </a:r>
-                <a:r>
-                  <a:rPr i="1"/>
-                  <a:t>within</a:t>
-                </a:r>
-                <a:r>
-                  <a:rPr/>
-                  <a:t> the ensemble, tuned by CV.</a:t>
+                  <a:t>higher</a:t>
+                </a:r>
+                <a:r>
+                  <a:rPr/>
+                  <a:t> bias in each individual tree</a:t>
+                </a:r>
+              </a:p>
+              <a:p>
+                <a:pPr lvl="0"/>
+                <a:r>
+                  <a:rPr/>
+                  <a:t>So </a:t>
+                </a:r>
+                <a14:m>
+                  <m:oMath xmlns:m="http://schemas.openxmlformats.org/officeDocument/2006/math">
+                    <m:r>
+                      <m:t>m</m:t>
+                    </m:r>
+                  </m:oMath>
+                </a14:m>
+                <a:r>
+                  <a:rPr/>
+                  <a:t> is itself a bias–variance dial, tuned by CV</a:t>
+                </a:r>
+              </a:p>
+              <a:p>
+                <a:pPr lvl="0" indent="0" marL="0">
+                  <a:buNone/>
+                </a:pPr>
+                <a:r>
+                  <a:rPr/>
+                  <a:t>One free bonus: each row is out-of-bag for about </a:t>
+                </a:r>
+                <a14:m>
+                  <m:oMath xmlns:m="http://schemas.openxmlformats.org/officeDocument/2006/math">
+                    <m:sSup>
+                      <m:e>
+                        <m:d>
+                          <m:dPr>
+                            <m:begChr m:val="("/>
+                            <m:sepChr m:val=""/>
+                            <m:endChr m:val=")"/>
+                            <m:grow/>
+                          </m:dPr>
+                          <m:e>
+                            <m:r>
+                              <m:t>1</m:t>
+                            </m:r>
+                            <m:r>
+                              <m:rPr>
+                                <m:sty m:val="p"/>
+                              </m:rPr>
+                              <m:t>−</m:t>
+                            </m:r>
+                            <m:r>
+                              <m:t>1</m:t>
+                            </m:r>
+                            <m:r>
+                              <m:rPr>
+                                <m:sty m:val="p"/>
+                              </m:rPr>
+                              <m:t>/</m:t>
+                            </m:r>
+                            <m:r>
+                              <m:t>n</m:t>
+                            </m:r>
+                          </m:e>
+                        </m:d>
+                      </m:e>
+                      <m:sup>
+                        <m:r>
+                          <m:t>n</m:t>
+                        </m:r>
+                      </m:sup>
+                    </m:sSup>
+                    <m:r>
+                      <m:rPr>
+                        <m:sty m:val="p"/>
+                      </m:rPr>
+                      <m:t>→</m:t>
+                    </m:r>
+                    <m:sSup>
+                      <m:e>
+                        <m:r>
+                          <m:t>e</m:t>
+                        </m:r>
+                      </m:e>
+                      <m:sup>
+                        <m:r>
+                          <m:rPr>
+                            <m:sty m:val="p"/>
+                          </m:rPr>
+                          <m:t>−</m:t>
+                        </m:r>
+                        <m:r>
+                          <m:t>1</m:t>
+                        </m:r>
+                      </m:sup>
+                    </m:sSup>
+                    <m:r>
+                      <m:rPr>
+                        <m:sty m:val="p"/>
+                      </m:rPr>
+                      <m:t>≈</m:t>
+                    </m:r>
+                    <m:r>
+                      <m:t>36.8</m:t>
+                    </m:r>
+                    <m:r>
+                      <m:rPr>
+                        <m:sty m:val="p"/>
+                      </m:rPr>
+                      <m:t>%</m:t>
+                    </m:r>
+                  </m:oMath>
+                </a14:m>
+                <a:r>
+                  <a:rPr/>
+                  <a:t> of trees, so the </a:t>
+                </a:r>
+                <a:r>
+                  <a:rPr b="1"/>
+                  <a:t>OOB error</a:t>
+                </a:r>
+                <a:r>
+                  <a:rPr/>
+                  <a:t> approximates CV error at no extra cost.</a:t>
                 </a:r>
               </a:p>
             </p:txBody>
@@ -4553,7 +6882,698 @@
 </p:sld>
 </file>
 
-<file path=ppt/slides/slide17.xml><?xml version="1.0" encoding="utf-8"?>
+<file path=ppt/slides/slide29.xml><?xml version="1.0" encoding="utf-8"?>
+<p:sld xmlns:a="http://schemas.openxmlformats.org/drawingml/2006/main" xmlns:r="http://schemas.openxmlformats.org/officeDocument/2006/relationships" xmlns:p="http://schemas.openxmlformats.org/presentationml/2006/main">
+  <p:cSld>
+    <p:spTree>
+      <p:nvGrpSpPr>
+        <p:cNvPr id="1" name=""/>
+        <p:cNvGrpSpPr/>
+        <p:nvPr/>
+      </p:nvGrpSpPr>
+      <p:grpSpPr>
+        <a:xfrm>
+          <a:off x="0" y="0"/>
+          <a:ext cx="0" cy="0"/>
+          <a:chOff x="0" y="0"/>
+          <a:chExt cx="0" cy="0"/>
+        </a:xfrm>
+      </p:grpSpPr>
+      <mc:AlternateContent xmlns:mc="http://schemas.openxmlformats.org/markup-compatibility/2006">
+        <mc:Choice xmlns:a14="http://schemas.microsoft.com/office/drawing/2010/main" Requires="a14">
+          <p:sp>
+            <p:nvSpPr>
+              <p:cNvPr id="2" name="Title 1"/>
+              <p:cNvSpPr>
+                <a:spLocks noGrp="1"/>
+              </p:cNvSpPr>
+              <p:nvPr>
+                <p:ph type="title"/>
+              </p:nvPr>
+            </p:nvSpPr>
+            <p:spPr/>
+            <p:txBody>
+              <a:bodyPr/>
+              <a:lstStyle/>
+              <a:p>
+                <a:pPr lvl="0" indent="0" marL="0">
+                  <a:buNone/>
+                </a:pPr>
+                <a:r>
+                  <a:rPr/>
+                  <a:t>Does it actually happen? Measure </a:t>
+                </a:r>
+                <a14:m>
+                  <m:oMath xmlns:m="http://schemas.openxmlformats.org/officeDocument/2006/math">
+                    <m:r>
+                      <m:t>ρ</m:t>
+                    </m:r>
+                  </m:oMath>
+                </a14:m>
+              </a:p>
+            </p:txBody>
+          </p:sp>
+        </mc:Choice>
+      </mc:AlternateContent>
+      <p:sp>
+        <p:nvSpPr>
+          <p:cNvPr id="3" name="Content Placeholder 2"/>
+          <p:cNvSpPr>
+            <a:spLocks noGrp="1"/>
+          </p:cNvSpPr>
+          <p:nvPr>
+            <p:ph idx="1"/>
+          </p:nvPr>
+        </p:nvSpPr>
+        <p:spPr/>
+        <p:txBody>
+          <a:bodyPr/>
+          <a:lstStyle/>
+          <a:p>
+            <a:pPr lvl="0" indent="0">
+              <a:buNone/>
+            </a:pPr>
+            <a:r>
+              <a:rPr b="1">
+                <a:solidFill>
+                  <a:srgbClr val="007020"/>
+                </a:solidFill>
+                <a:latin typeface="Courier"/>
+              </a:rPr>
+              <a:t>def</a:t>
+            </a:r>
+            <a:r>
+              <a:rPr>
+                <a:latin typeface="Courier"/>
+              </a:rPr>
+              <a:t> fit_and_measure(max_features, depth</a:t>
+            </a:r>
+            <a:r>
+              <a:rPr>
+                <a:solidFill>
+                  <a:srgbClr val="666666"/>
+                </a:solidFill>
+                <a:latin typeface="Courier"/>
+              </a:rPr>
+              <a:t>=</a:t>
+            </a:r>
+            <a:r>
+              <a:rPr>
+                <a:solidFill>
+                  <a:srgbClr val="40A070"/>
+                </a:solidFill>
+                <a:latin typeface="Courier"/>
+              </a:rPr>
+              <a:t>4</a:t>
+            </a:r>
+            <a:r>
+              <a:rPr>
+                <a:latin typeface="Courier"/>
+              </a:rPr>
+              <a:t>, B</a:t>
+            </a:r>
+            <a:r>
+              <a:rPr>
+                <a:solidFill>
+                  <a:srgbClr val="666666"/>
+                </a:solidFill>
+                <a:latin typeface="Courier"/>
+              </a:rPr>
+              <a:t>=</a:t>
+            </a:r>
+            <a:r>
+              <a:rPr>
+                <a:solidFill>
+                  <a:srgbClr val="40A070"/>
+                </a:solidFill>
+                <a:latin typeface="Courier"/>
+              </a:rPr>
+              <a:t>200</a:t>
+            </a:r>
+            <a:r>
+              <a:rPr>
+                <a:latin typeface="Courier"/>
+              </a:rPr>
+              <a:t>):</a:t>
+            </a:r>
+            <a:br/>
+            <a:r>
+              <a:rPr>
+                <a:latin typeface="Courier"/>
+              </a:rPr>
+              <a:t>    </a:t>
+            </a:r>
+            <a:r>
+              <a:rPr i="1">
+                <a:solidFill>
+                  <a:srgbClr val="60A0B0"/>
+                </a:solidFill>
+                <a:latin typeface="Courier"/>
+              </a:rPr>
+              <a:t>"""Fit an ensemble, then measure how correlated its trees' predictions are."""</a:t>
+            </a:r>
+            <a:br/>
+            <a:r>
+              <a:rPr>
+                <a:latin typeface="Courier"/>
+              </a:rPr>
+              <a:t>    m </a:t>
+            </a:r>
+            <a:r>
+              <a:rPr>
+                <a:solidFill>
+                  <a:srgbClr val="666666"/>
+                </a:solidFill>
+                <a:latin typeface="Courier"/>
+              </a:rPr>
+              <a:t>=</a:t>
+            </a:r>
+            <a:r>
+              <a:rPr>
+                <a:latin typeface="Courier"/>
+              </a:rPr>
+              <a:t> RandomForestClassifier(n_estimators</a:t>
+            </a:r>
+            <a:r>
+              <a:rPr>
+                <a:solidFill>
+                  <a:srgbClr val="666666"/>
+                </a:solidFill>
+                <a:latin typeface="Courier"/>
+              </a:rPr>
+              <a:t>=</a:t>
+            </a:r>
+            <a:r>
+              <a:rPr>
+                <a:latin typeface="Courier"/>
+              </a:rPr>
+              <a:t>B, max_depth</a:t>
+            </a:r>
+            <a:r>
+              <a:rPr>
+                <a:solidFill>
+                  <a:srgbClr val="666666"/>
+                </a:solidFill>
+                <a:latin typeface="Courier"/>
+              </a:rPr>
+              <a:t>=</a:t>
+            </a:r>
+            <a:r>
+              <a:rPr>
+                <a:latin typeface="Courier"/>
+              </a:rPr>
+              <a:t>depth,</a:t>
+            </a:r>
+            <a:br/>
+            <a:r>
+              <a:rPr>
+                <a:latin typeface="Courier"/>
+              </a:rPr>
+              <a:t>                               max_features</a:t>
+            </a:r>
+            <a:r>
+              <a:rPr>
+                <a:solidFill>
+                  <a:srgbClr val="666666"/>
+                </a:solidFill>
+                <a:latin typeface="Courier"/>
+              </a:rPr>
+              <a:t>=</a:t>
+            </a:r>
+            <a:r>
+              <a:rPr>
+                <a:latin typeface="Courier"/>
+              </a:rPr>
+              <a:t>max_features, random_state</a:t>
+            </a:r>
+            <a:r>
+              <a:rPr>
+                <a:solidFill>
+                  <a:srgbClr val="666666"/>
+                </a:solidFill>
+                <a:latin typeface="Courier"/>
+              </a:rPr>
+              <a:t>=</a:t>
+            </a:r>
+            <a:r>
+              <a:rPr>
+                <a:solidFill>
+                  <a:srgbClr val="40A070"/>
+                </a:solidFill>
+                <a:latin typeface="Courier"/>
+              </a:rPr>
+              <a:t>0</a:t>
+            </a:r>
+            <a:r>
+              <a:rPr>
+                <a:latin typeface="Courier"/>
+              </a:rPr>
+              <a:t>, n_jobs</a:t>
+            </a:r>
+            <a:r>
+              <a:rPr>
+                <a:solidFill>
+                  <a:srgbClr val="666666"/>
+                </a:solidFill>
+                <a:latin typeface="Courier"/>
+              </a:rPr>
+              <a:t>=-</a:t>
+            </a:r>
+            <a:r>
+              <a:rPr>
+                <a:solidFill>
+                  <a:srgbClr val="40A070"/>
+                </a:solidFill>
+                <a:latin typeface="Courier"/>
+              </a:rPr>
+              <a:t>1</a:t>
+            </a:r>
+            <a:r>
+              <a:rPr>
+                <a:latin typeface="Courier"/>
+              </a:rPr>
+              <a:t>).fit(Xtr, ytr)</a:t>
+            </a:r>
+            <a:br/>
+            <a:r>
+              <a:rPr>
+                <a:latin typeface="Courier"/>
+              </a:rPr>
+              <a:t>    </a:t>
+            </a:r>
+            <a:r>
+              <a:rPr i="1">
+                <a:solidFill>
+                  <a:srgbClr val="60A0B0"/>
+                </a:solidFill>
+                <a:latin typeface="Courier"/>
+              </a:rPr>
+              <a:t># each tree's predicted probability on the test rows, stacked into a matrix</a:t>
+            </a:r>
+            <a:br/>
+            <a:r>
+              <a:rPr>
+                <a:latin typeface="Courier"/>
+              </a:rPr>
+              <a:t>    P </a:t>
+            </a:r>
+            <a:r>
+              <a:rPr>
+                <a:solidFill>
+                  <a:srgbClr val="666666"/>
+                </a:solidFill>
+                <a:latin typeface="Courier"/>
+              </a:rPr>
+              <a:t>=</a:t>
+            </a:r>
+            <a:r>
+              <a:rPr>
+                <a:latin typeface="Courier"/>
+              </a:rPr>
+              <a:t> np.array([t.predict_proba(Xte.to_numpy())[:, </a:t>
+            </a:r>
+            <a:r>
+              <a:rPr>
+                <a:solidFill>
+                  <a:srgbClr val="40A070"/>
+                </a:solidFill>
+                <a:latin typeface="Courier"/>
+              </a:rPr>
+              <a:t>1</a:t>
+            </a:r>
+            <a:r>
+              <a:rPr>
+                <a:latin typeface="Courier"/>
+              </a:rPr>
+              <a:t>] </a:t>
+            </a:r>
+            <a:r>
+              <a:rPr b="1">
+                <a:solidFill>
+                  <a:srgbClr val="007020"/>
+                </a:solidFill>
+                <a:latin typeface="Courier"/>
+              </a:rPr>
+              <a:t>for</a:t>
+            </a:r>
+            <a:r>
+              <a:rPr>
+                <a:latin typeface="Courier"/>
+              </a:rPr>
+              <a:t> t </a:t>
+            </a:r>
+            <a:r>
+              <a:rPr b="1">
+                <a:solidFill>
+                  <a:srgbClr val="007020"/>
+                </a:solidFill>
+                <a:latin typeface="Courier"/>
+              </a:rPr>
+              <a:t>in</a:t>
+            </a:r>
+            <a:r>
+              <a:rPr>
+                <a:latin typeface="Courier"/>
+              </a:rPr>
+              <a:t> m.estimators_[:</a:t>
+            </a:r>
+            <a:r>
+              <a:rPr>
+                <a:solidFill>
+                  <a:srgbClr val="40A070"/>
+                </a:solidFill>
+                <a:latin typeface="Courier"/>
+              </a:rPr>
+              <a:t>80</a:t>
+            </a:r>
+            <a:r>
+              <a:rPr>
+                <a:latin typeface="Courier"/>
+              </a:rPr>
+              <a:t>]])</a:t>
+            </a:r>
+            <a:br/>
+            <a:r>
+              <a:rPr>
+                <a:latin typeface="Courier"/>
+              </a:rPr>
+              <a:t>    C </a:t>
+            </a:r>
+            <a:r>
+              <a:rPr>
+                <a:solidFill>
+                  <a:srgbClr val="666666"/>
+                </a:solidFill>
+                <a:latin typeface="Courier"/>
+              </a:rPr>
+              <a:t>=</a:t>
+            </a:r>
+            <a:r>
+              <a:rPr>
+                <a:latin typeface="Courier"/>
+              </a:rPr>
+              <a:t> np.corrcoef(P)</a:t>
+            </a:r>
+            <a:br/>
+            <a:r>
+              <a:rPr>
+                <a:latin typeface="Courier"/>
+              </a:rPr>
+              <a:t>    rho </a:t>
+            </a:r>
+            <a:r>
+              <a:rPr>
+                <a:solidFill>
+                  <a:srgbClr val="666666"/>
+                </a:solidFill>
+                <a:latin typeface="Courier"/>
+              </a:rPr>
+              <a:t>=</a:t>
+            </a:r>
+            <a:r>
+              <a:rPr>
+                <a:latin typeface="Courier"/>
+              </a:rPr>
+              <a:t> C[np.triu_indices(</a:t>
+            </a:r>
+            <a:r>
+              <a:rPr>
+                <a:solidFill>
+                  <a:srgbClr val="008000"/>
+                </a:solidFill>
+                <a:latin typeface="Courier"/>
+              </a:rPr>
+              <a:t>len</a:t>
+            </a:r>
+            <a:r>
+              <a:rPr>
+                <a:latin typeface="Courier"/>
+              </a:rPr>
+              <a:t>(C), </a:t>
+            </a:r>
+            <a:r>
+              <a:rPr>
+                <a:solidFill>
+                  <a:srgbClr val="40A070"/>
+                </a:solidFill>
+                <a:latin typeface="Courier"/>
+              </a:rPr>
+              <a:t>1</a:t>
+            </a:r>
+            <a:r>
+              <a:rPr>
+                <a:latin typeface="Courier"/>
+              </a:rPr>
+              <a:t>)].mean()</a:t>
+            </a:r>
+            <a:br/>
+            <a:r>
+              <a:rPr>
+                <a:latin typeface="Courier"/>
+              </a:rPr>
+              <a:t>    root </a:t>
+            </a:r>
+            <a:r>
+              <a:rPr>
+                <a:solidFill>
+                  <a:srgbClr val="666666"/>
+                </a:solidFill>
+                <a:latin typeface="Courier"/>
+              </a:rPr>
+              <a:t>=</a:t>
+            </a:r>
+            <a:r>
+              <a:rPr>
+                <a:latin typeface="Courier"/>
+              </a:rPr>
+              <a:t> pd.Series([FEAT[t.tree_.feature[</a:t>
+            </a:r>
+            <a:r>
+              <a:rPr>
+                <a:solidFill>
+                  <a:srgbClr val="40A070"/>
+                </a:solidFill>
+                <a:latin typeface="Courier"/>
+              </a:rPr>
+              <a:t>0</a:t>
+            </a:r>
+            <a:r>
+              <a:rPr>
+                <a:latin typeface="Courier"/>
+              </a:rPr>
+              <a:t>]] </a:t>
+            </a:r>
+            <a:r>
+              <a:rPr b="1">
+                <a:solidFill>
+                  <a:srgbClr val="007020"/>
+                </a:solidFill>
+                <a:latin typeface="Courier"/>
+              </a:rPr>
+              <a:t>for</a:t>
+            </a:r>
+            <a:r>
+              <a:rPr>
+                <a:latin typeface="Courier"/>
+              </a:rPr>
+              <a:t> t </a:t>
+            </a:r>
+            <a:r>
+              <a:rPr b="1">
+                <a:solidFill>
+                  <a:srgbClr val="007020"/>
+                </a:solidFill>
+                <a:latin typeface="Courier"/>
+              </a:rPr>
+              <a:t>in</a:t>
+            </a:r>
+            <a:r>
+              <a:rPr>
+                <a:latin typeface="Courier"/>
+              </a:rPr>
+              <a:t> m.estimators_]).value_counts(normalize</a:t>
+            </a:r>
+            <a:r>
+              <a:rPr>
+                <a:solidFill>
+                  <a:srgbClr val="666666"/>
+                </a:solidFill>
+                <a:latin typeface="Courier"/>
+              </a:rPr>
+              <a:t>=</a:t>
+            </a:r>
+            <a:r>
+              <a:rPr>
+                <a:solidFill>
+                  <a:srgbClr val="19177C"/>
+                </a:solidFill>
+                <a:latin typeface="Courier"/>
+              </a:rPr>
+              <a:t>True</a:t>
+            </a:r>
+            <a:r>
+              <a:rPr>
+                <a:latin typeface="Courier"/>
+              </a:rPr>
+              <a:t>)</a:t>
+            </a:r>
+            <a:br/>
+            <a:r>
+              <a:rPr>
+                <a:latin typeface="Courier"/>
+              </a:rPr>
+              <a:t>    </a:t>
+            </a:r>
+            <a:r>
+              <a:rPr b="1">
+                <a:solidFill>
+                  <a:srgbClr val="007020"/>
+                </a:solidFill>
+                <a:latin typeface="Courier"/>
+              </a:rPr>
+              <a:t>return</a:t>
+            </a:r>
+            <a:r>
+              <a:rPr>
+                <a:latin typeface="Courier"/>
+              </a:rPr>
+              <a:t> m, rho, root</a:t>
+            </a:r>
+            <a:br/>
+            <a:br/>
+            <a:r>
+              <a:rPr>
+                <a:latin typeface="Courier"/>
+              </a:rPr>
+              <a:t>bag_m, rho_bag, root_bag </a:t>
+            </a:r>
+            <a:r>
+              <a:rPr>
+                <a:solidFill>
+                  <a:srgbClr val="666666"/>
+                </a:solidFill>
+                <a:latin typeface="Courier"/>
+              </a:rPr>
+              <a:t>=</a:t>
+            </a:r>
+            <a:r>
+              <a:rPr>
+                <a:latin typeface="Courier"/>
+              </a:rPr>
+              <a:t> fit_and_measure(</a:t>
+            </a:r>
+            <a:r>
+              <a:rPr>
+                <a:solidFill>
+                  <a:srgbClr val="19177C"/>
+                </a:solidFill>
+                <a:latin typeface="Courier"/>
+              </a:rPr>
+              <a:t>None</a:t>
+            </a:r>
+            <a:r>
+              <a:rPr>
+                <a:latin typeface="Courier"/>
+              </a:rPr>
+              <a:t>)     </a:t>
+            </a:r>
+            <a:r>
+              <a:rPr i="1">
+                <a:solidFill>
+                  <a:srgbClr val="60A0B0"/>
+                </a:solidFill>
+                <a:latin typeface="Courier"/>
+              </a:rPr>
+              <a:t># all features at every split = bagging</a:t>
+            </a:r>
+            <a:br/>
+            <a:r>
+              <a:rPr>
+                <a:latin typeface="Courier"/>
+              </a:rPr>
+              <a:t>rf_m,  rho_rf,  root_rf  </a:t>
+            </a:r>
+            <a:r>
+              <a:rPr>
+                <a:solidFill>
+                  <a:srgbClr val="666666"/>
+                </a:solidFill>
+                <a:latin typeface="Courier"/>
+              </a:rPr>
+              <a:t>=</a:t>
+            </a:r>
+            <a:r>
+              <a:rPr>
+                <a:latin typeface="Courier"/>
+              </a:rPr>
+              <a:t> fit_and_measure(</a:t>
+            </a:r>
+            <a:r>
+              <a:rPr>
+                <a:solidFill>
+                  <a:srgbClr val="4070A0"/>
+                </a:solidFill>
+                <a:latin typeface="Courier"/>
+              </a:rPr>
+              <a:t>"sqrt"</a:t>
+            </a:r>
+            <a:r>
+              <a:rPr>
+                <a:latin typeface="Courier"/>
+              </a:rPr>
+              <a:t>)   </a:t>
+            </a:r>
+            <a:r>
+              <a:rPr i="1">
+                <a:solidFill>
+                  <a:srgbClr val="60A0B0"/>
+                </a:solidFill>
+                <a:latin typeface="Courier"/>
+              </a:rPr>
+              <a:t># sqrt(p) features = random forest</a:t>
+            </a:r>
+          </a:p>
+          <a:p>
+            <a:pPr lvl="0" indent="0" marL="0">
+              <a:buNone/>
+            </a:pPr>
+            <a:r>
+              <a:rPr>
+                <a:latin typeface="Courier"/>
+              </a:rPr>
+              <a:t>max_features=None</a:t>
+            </a:r>
+            <a:r>
+              <a:rPr/>
+              <a:t> means </a:t>
+            </a:r>
+            <a:r>
+              <a:rPr i="1"/>
+              <a:t>consider every feature at every split</a:t>
+            </a:r>
+            <a:r>
+              <a:rPr/>
+              <a:t> — that is plain bagging. </a:t>
+            </a:r>
+            <a:r>
+              <a:rPr>
+                <a:latin typeface="Courier"/>
+              </a:rPr>
+              <a:t>"sqrt"</a:t>
+            </a:r>
+            <a:r>
+              <a:rPr/>
+              <a:t> is the forest. Everything else about the two fits is identical.</a:t>
+            </a:r>
+          </a:p>
+        </p:txBody>
+      </p:sp>
+    </p:spTree>
+  </p:cSld>
+</p:sld>
+</file>
+
+<file path=ppt/slides/slide3.xml><?xml version="1.0" encoding="utf-8"?>
 <p:sld xmlns:a="http://schemas.openxmlformats.org/drawingml/2006/main" xmlns:r="http://schemas.openxmlformats.org/officeDocument/2006/relationships" xmlns:p="http://schemas.openxmlformats.org/presentationml/2006/main">
   <p:cSld>
     <p:spTree>
@@ -4590,11 +7610,362 @@
             </a:pPr>
             <a:r>
               <a:rPr/>
-              <a:t>Out-of-bag error, free</a:t>
+              <a:t>Outline</a:t>
             </a:r>
           </a:p>
         </p:txBody>
       </p:sp>
+      <p:graphicFrame>
+        <p:nvGraphicFramePr>
+          <p:cNvPr id="6" name="Content Placeholder 5"/>
+          <p:cNvGraphicFramePr>
+            <a:graphicFrameLocks noGrp="1"/>
+          </p:cNvGraphicFramePr>
+          <p:nvPr>
+            <p:ph idx="1"/>
+          </p:nvPr>
+        </p:nvGraphicFramePr>
+        <p:xfrm>
+          <a:off x="457200" y="1193800"/>
+          <a:ext cx="8229600" cy="3390900"/>
+        </p:xfrm>
+        <a:graphic>
+          <a:graphicData uri="http://schemas.openxmlformats.org/drawingml/2006/table">
+            <a:tbl>
+              <a:tblPr firstRow="0" bandRow="1">
+                <a:tableStyleId>{5C22544A-7EE6-4342-B048-85BDC9FD1C3A}</a:tableStyleId>
+              </a:tblPr>
+              <a:tblGrid>
+                <a:gridCol w="4114800"/>
+                <a:gridCol w="4114800"/>
+              </a:tblGrid>
+              <a:tr h="0">
+                <a:tc>
+                  <a:txBody>
+                    <a:bodyPr/>
+                    <a:lstStyle/>
+                    <a:p>
+                      <a:pPr lvl="0" indent="0" marL="0">
+                        <a:buNone/>
+                      </a:pPr>
+                      <a:r>
+                        <a:rPr b="1"/>
+                        <a:t>1</a:t>
+                      </a:r>
+                    </a:p>
+                  </a:txBody>
+                </a:tc>
+                <a:tc>
+                  <a:txBody>
+                    <a:bodyPr/>
+                    <a:lstStyle/>
+                    <a:p>
+                      <a:pPr lvl="0" indent="0" marL="0">
+                        <a:buNone/>
+                      </a:pPr>
+                      <a:r>
+                        <a:rPr/>
+                        <a:t>Where we are, and what this adds</a:t>
+                      </a:r>
+                    </a:p>
+                  </a:txBody>
+                </a:tc>
+              </a:tr>
+              <a:tr h="0">
+                <a:tc>
+                  <a:txBody>
+                    <a:bodyPr/>
+                    <a:lstStyle/>
+                    <a:p>
+                      <a:pPr lvl="0" indent="0" marL="0">
+                        <a:buNone/>
+                      </a:pPr>
+                      <a:r>
+                        <a:rPr b="1"/>
+                        <a:t>2</a:t>
+                      </a:r>
+                    </a:p>
+                  </a:txBody>
+                </a:tc>
+                <a:tc>
+                  <a:txBody>
+                    <a:bodyPr/>
+                    <a:lstStyle/>
+                    <a:p>
+                      <a:pPr lvl="0" indent="0" marL="0">
+                        <a:buNone/>
+                      </a:pPr>
+                      <a:r>
+                        <a:rPr/>
+                        <a:t>One tree: how a split is chosen</a:t>
+                      </a:r>
+                    </a:p>
+                  </a:txBody>
+                </a:tc>
+              </a:tr>
+              <a:tr h="0">
+                <a:tc>
+                  <a:txBody>
+                    <a:bodyPr/>
+                    <a:lstStyle/>
+                    <a:p>
+                      <a:pPr lvl="0" indent="0" marL="0">
+                        <a:buNone/>
+                      </a:pPr>
+                      <a:r>
+                        <a:rPr b="1"/>
+                        <a:t>3</a:t>
+                      </a:r>
+                    </a:p>
+                  </a:txBody>
+                </a:tc>
+                <a:tc>
+                  <a:txBody>
+                    <a:bodyPr/>
+                    <a:lstStyle/>
+                    <a:p>
+                      <a:pPr lvl="0" indent="0" marL="0">
+                        <a:buNone/>
+                      </a:pPr>
+                      <a:r>
+                        <a:rPr/>
+                        <a:t>Pruning — the same dial again</a:t>
+                      </a:r>
+                    </a:p>
+                  </a:txBody>
+                </a:tc>
+              </a:tr>
+              <a:tr h="0">
+                <a:tc>
+                  <a:txBody>
+                    <a:bodyPr/>
+                    <a:lstStyle/>
+                    <a:p>
+                      <a:pPr lvl="0" indent="0" marL="0">
+                        <a:buNone/>
+                      </a:pPr>
+                      <a:r>
+                        <a:rPr b="1"/>
+                        <a:t>4</a:t>
+                      </a:r>
+                    </a:p>
+                  </a:txBody>
+                </a:tc>
+                <a:tc>
+                  <a:txBody>
+                    <a:bodyPr/>
+                    <a:lstStyle/>
+                    <a:p>
+                      <a:pPr lvl="0" indent="0" marL="0">
+                        <a:buNone/>
+                      </a:pPr>
+                      <a:r>
+                        <a:rPr/>
+                        <a:t>Why averaging works, and when it stops</a:t>
+                      </a:r>
+                    </a:p>
+                  </a:txBody>
+                </a:tc>
+              </a:tr>
+              <a:tr h="0">
+                <a:tc>
+                  <a:txBody>
+                    <a:bodyPr/>
+                    <a:lstStyle/>
+                    <a:p>
+                      <a:pPr lvl="0" indent="0" marL="0">
+                        <a:buNone/>
+                      </a:pPr>
+                      <a:r>
+                        <a:rPr b="1"/>
+                        <a:t>5</a:t>
+                      </a:r>
+                    </a:p>
+                  </a:txBody>
+                </a:tc>
+                <a:tc>
+                  <a:txBody>
+                    <a:bodyPr/>
+                    <a:lstStyle/>
+                    <a:p>
+                      <a:pPr lvl="0" indent="0" marL="0">
+                        <a:buNone/>
+                      </a:pPr>
+                      <a:r>
+                        <a:rPr/>
+                        <a:t>Boosting: gradient descent in function space</a:t>
+                      </a:r>
+                    </a:p>
+                  </a:txBody>
+                </a:tc>
+              </a:tr>
+              <a:tr h="0">
+                <a:tc>
+                  <a:txBody>
+                    <a:bodyPr/>
+                    <a:lstStyle/>
+                    <a:p>
+                      <a:pPr lvl="0" indent="0" marL="0">
+                        <a:buNone/>
+                      </a:pPr>
+                      <a:r>
+                        <a:rPr b="1"/>
+                        <a:t>6</a:t>
+                      </a:r>
+                    </a:p>
+                  </a:txBody>
+                </a:tc>
+                <a:tc>
+                  <a:txBody>
+                    <a:bodyPr/>
+                    <a:lstStyle/>
+                    <a:p>
+                      <a:pPr lvl="0" indent="0" marL="0">
+                        <a:buNone/>
+                      </a:pPr>
+                      <a:r>
+                        <a:rPr/>
+                        <a:t>Getting the interpretation back</a:t>
+                      </a:r>
+                    </a:p>
+                  </a:txBody>
+                </a:tc>
+              </a:tr>
+              <a:tr h="0">
+                <a:tc>
+                  <a:txBody>
+                    <a:bodyPr/>
+                    <a:lstStyle/>
+                    <a:p>
+                      <a:pPr lvl="0" indent="0" marL="0">
+                        <a:buNone/>
+                      </a:pPr>
+                      <a:r>
+                        <a:rPr b="1"/>
+                        <a:t>7</a:t>
+                      </a:r>
+                    </a:p>
+                  </a:txBody>
+                </a:tc>
+                <a:tc>
+                  <a:txBody>
+                    <a:bodyPr/>
+                    <a:lstStyle/>
+                    <a:p>
+                      <a:pPr lvl="0" indent="0" marL="0">
+                        <a:buNone/>
+                      </a:pPr>
+                      <a:r>
+                        <a:rPr/>
+                        <a:t>Key takeaways</a:t>
+                      </a:r>
+                    </a:p>
+                  </a:txBody>
+                </a:tc>
+              </a:tr>
+            </a:tbl>
+          </a:graphicData>
+        </a:graphic>
+      </p:graphicFrame>
+    </p:spTree>
+  </p:cSld>
+</p:sld>
+</file>
+
+<file path=ppt/slides/slide30.xml><?xml version="1.0" encoding="utf-8"?>
+<p:sld xmlns:a="http://schemas.openxmlformats.org/drawingml/2006/main" xmlns:r="http://schemas.openxmlformats.org/officeDocument/2006/relationships" xmlns:p="http://schemas.openxmlformats.org/presentationml/2006/main">
+  <p:cSld>
+    <p:spTree>
+      <p:nvGrpSpPr>
+        <p:cNvPr id="1" name=""/>
+        <p:cNvGrpSpPr/>
+        <p:nvPr/>
+      </p:nvGrpSpPr>
+      <p:grpSpPr>
+        <a:xfrm>
+          <a:off x="0" y="0"/>
+          <a:ext cx="0" cy="0"/>
+          <a:chOff x="0" y="0"/>
+          <a:chExt cx="0" cy="0"/>
+        </a:xfrm>
+      </p:grpSpPr>
+      <p:sp>
+        <p:nvSpPr>
+          <p:cNvPr id="2" name="Title 1"/>
+          <p:cNvSpPr>
+            <a:spLocks noGrp="1"/>
+          </p:cNvSpPr>
+          <p:nvPr>
+            <p:ph type="title"/>
+          </p:nvPr>
+        </p:nvSpPr>
+        <p:spPr/>
+        <p:txBody>
+          <a:bodyPr/>
+          <a:lstStyle/>
+          <a:p>
+            <a:pPr lvl="0" indent="0" marL="0">
+              <a:buNone/>
+            </a:pPr>
+            <a:r>
+              <a:rPr/>
+              <a:t>The mechanism, and the payoff</a:t>
+            </a:r>
+          </a:p>
+        </p:txBody>
+      </p:sp>
+      <p:pic>
+        <p:nvPicPr>
+          <p:cNvPr descr="slides_files/figure-pptx/cell-8-output-1.png" id="0" name="Picture 1"/>
+          <p:cNvPicPr>
+            <a:picLocks noGrp="1" noChangeAspect="1"/>
+          </p:cNvPicPr>
+          <p:nvPr/>
+        </p:nvPicPr>
+        <p:blipFill>
+          <a:blip r:embed="rId2"/>
+          <a:stretch>
+            <a:fillRect/>
+          </a:stretch>
+        </p:blipFill>
+        <p:spPr bwMode="auto">
+          <a:xfrm>
+            <a:off x="457200" y="1346200"/>
+            <a:ext cx="8229600" cy="3098800"/>
+          </a:xfrm>
+          <a:prstGeom prst="rect">
+            <a:avLst/>
+          </a:prstGeom>
+          <a:noFill/>
+          <a:ln w="9525">
+            <a:noFill/>
+            <a:headEnd/>
+            <a:tailEnd/>
+          </a:ln>
+        </p:spPr>
+      </p:pic>
+    </p:spTree>
+  </p:cSld>
+</p:sld>
+</file>
+
+<file path=ppt/slides/slide31.xml><?xml version="1.0" encoding="utf-8"?>
+<p:sld xmlns:a="http://schemas.openxmlformats.org/drawingml/2006/main" xmlns:r="http://schemas.openxmlformats.org/officeDocument/2006/relationships" xmlns:p="http://schemas.openxmlformats.org/presentationml/2006/main">
+  <p:cSld>
+    <p:spTree>
+      <p:nvGrpSpPr>
+        <p:cNvPr id="1" name=""/>
+        <p:cNvGrpSpPr/>
+        <p:nvPr/>
+      </p:nvGrpSpPr>
+      <p:grpSpPr>
+        <a:xfrm>
+          <a:off x="0" y="0"/>
+          <a:ext cx="0" cy="0"/>
+          <a:chOff x="0" y="0"/>
+          <a:chExt cx="0" cy="0"/>
+        </a:xfrm>
+      </p:grpSpPr>
       <mc:AlternateContent xmlns:mc="http://schemas.openxmlformats.org/markup-compatibility/2006">
         <mc:Choice xmlns:a14="http://schemas.microsoft.com/office/drawing/2010/main" Requires="a14">
           <p:sp>
@@ -4617,126 +7988,26 @@
                 </a:pPr>
                 <a:r>
                   <a:rPr/>
-                  <a:t>Each observation is out-of-bag for roughly</a:t>
-                </a:r>
-              </a:p>
-              <a:p>
-                <a:pPr lvl="0" indent="0" marL="0">
-                  <a:buNone/>
-                </a:pPr>
+                  <a:t>Bagging puts the </a:t>
+                </a:r>
+                <a:r>
+                  <a:rPr b="1"/>
+                  <a:t>same</a:t>
+                </a:r>
+                <a:r>
+                  <a:rPr/>
+                  <a:t> feature at the root of 80% of its trees. The forest, forbidden from seeing it most of the time, uses it in a quarter. </a:t>
+                </a:r>
                 <a14:m>
-                  <m:oMathPara xmlns:m="http://schemas.openxmlformats.org/officeDocument/2006/math">
-                    <m:oMathParaPr>
-                      <m:jc m:val="center"/>
-                    </m:oMathParaPr>
-                    <m:oMath>
-                      <m:sSup>
-                        <m:e>
-                          <m:d>
-                            <m:dPr>
-                              <m:begChr m:val="("/>
-                              <m:sepChr m:val=""/>
-                              <m:endChr m:val=")"/>
-                              <m:grow/>
-                            </m:dPr>
-                            <m:e>
-                              <m:r>
-                                <m:t>1</m:t>
-                              </m:r>
-                              <m:r>
-                                <m:rPr>
-                                  <m:sty m:val="p"/>
-                                </m:rPr>
-                                <m:t>−</m:t>
-                              </m:r>
-                              <m:r>
-                                <m:t>1</m:t>
-                              </m:r>
-                              <m:r>
-                                <m:rPr>
-                                  <m:sty m:val="p"/>
-                                </m:rPr>
-                                <m:t>/</m:t>
-                              </m:r>
-                              <m:r>
-                                <m:t>n</m:t>
-                              </m:r>
-                            </m:e>
-                          </m:d>
-                        </m:e>
-                        <m:sup>
-                          <m:r>
-                            <m:t>n</m:t>
-                          </m:r>
-                        </m:sup>
-                      </m:sSup>
-                      <m:r>
-                        <m:rPr>
-                          <m:sty m:val="p"/>
-                        </m:rPr>
-                        <m:t>→</m:t>
-                      </m:r>
-                      <m:sSup>
-                        <m:e>
-                          <m:r>
-                            <m:t>e</m:t>
-                          </m:r>
-                        </m:e>
-                        <m:sup>
-                          <m:r>
-                            <m:rPr>
-                              <m:sty m:val="p"/>
-                            </m:rPr>
-                            <m:t>−</m:t>
-                          </m:r>
-                          <m:r>
-                            <m:t>1</m:t>
-                          </m:r>
-                        </m:sup>
-                      </m:sSup>
-                      <m:r>
-                        <m:rPr>
-                          <m:sty m:val="p"/>
-                        </m:rPr>
-                        <m:t>≈</m:t>
-                      </m:r>
-                      <m:r>
-                        <m:t>36.8</m:t>
-                      </m:r>
-                      <m:r>
-                        <m:rPr>
-                          <m:sty m:val="p"/>
-                        </m:rPr>
-                        <m:t>%</m:t>
-                      </m:r>
-                    </m:oMath>
-                  </m:oMathPara>
+                  <m:oMath xmlns:m="http://schemas.openxmlformats.org/officeDocument/2006/math">
+                    <m:r>
+                      <m:t>ρ</m:t>
+                    </m:r>
+                  </m:oMath>
                 </a14:m>
-              </a:p>
-              <a:p>
-                <a:pPr lvl="0" indent="0" marL="0">
-                  <a:buNone/>
-                </a:pPr>
-                <a:r>
-                  <a:rPr/>
-                  <a:t>of trees, so the </a:t>
-                </a:r>
-                <a:r>
-                  <a:rPr b="1"/>
-                  <a:t>OOB error</a:t>
-                </a:r>
-                <a:r>
-                  <a:rPr/>
-                  <a:t> approximates CV error at no extra cost.</a:t>
-                </a:r>
-              </a:p>
-              <a:p>
-                <a:pPr lvl="0" indent="0" marL="0">
-                  <a:buNone/>
-                </a:pPr>
-                <a:r>
-                  <a:rPr/>
-                  <a:t>On a panel it is still optimistic — the omitted rows include other years of the same country. Group-aware CV remains the honest number.</a:t>
+                <a:r>
+                  <a:rPr/>
+                  <a:t> falls, and the AUC rises.</a:t>
                 </a:r>
               </a:p>
             </p:txBody>
@@ -4748,7 +8019,486 @@
 </p:sld>
 </file>
 
-<file path=ppt/slides/slide18.xml><?xml version="1.0" encoding="utf-8"?>
+<file path=ppt/slides/slide32.xml><?xml version="1.0" encoding="utf-8"?>
+<p:sld xmlns:a="http://schemas.openxmlformats.org/drawingml/2006/main" xmlns:r="http://schemas.openxmlformats.org/officeDocument/2006/relationships" xmlns:p="http://schemas.openxmlformats.org/presentationml/2006/main">
+  <p:cSld>
+    <p:spTree>
+      <p:nvGrpSpPr>
+        <p:cNvPr id="1" name=""/>
+        <p:cNvGrpSpPr/>
+        <p:nvPr/>
+      </p:nvGrpSpPr>
+      <p:grpSpPr>
+        <a:xfrm>
+          <a:off x="0" y="0"/>
+          <a:ext cx="0" cy="0"/>
+          <a:chOff x="0" y="0"/>
+          <a:chExt cx="0" cy="0"/>
+        </a:xfrm>
+      </p:grpSpPr>
+      <p:sp>
+        <p:nvSpPr>
+          <p:cNvPr id="2" name="Title 1"/>
+          <p:cNvSpPr>
+            <a:spLocks noGrp="1"/>
+          </p:cNvSpPr>
+          <p:nvPr>
+            <p:ph type="title"/>
+          </p:nvPr>
+        </p:nvSpPr>
+        <p:spPr/>
+        <p:txBody>
+          <a:bodyPr/>
+          <a:lstStyle/>
+          <a:p>
+            <a:pPr lvl="0" indent="0" marL="0">
+              <a:buNone/>
+            </a:pPr>
+            <a:r>
+              <a:rPr/>
+              <a:t>The honest scoreboard</a:t>
+            </a:r>
+          </a:p>
+        </p:txBody>
+      </p:sp>
+      <p:sp>
+        <p:nvSpPr>
+          <p:cNvPr id="3" name="Content Placeholder 2"/>
+          <p:cNvSpPr>
+            <a:spLocks noGrp="1"/>
+          </p:cNvSpPr>
+          <p:nvPr>
+            <p:ph idx="1"/>
+          </p:nvPr>
+        </p:nvSpPr>
+        <p:spPr/>
+        <p:txBody>
+          <a:bodyPr/>
+          <a:lstStyle/>
+          <a:p>
+            <a:pPr lvl="0" indent="0">
+              <a:buNone/>
+            </a:pPr>
+            <a:r>
+              <a:rPr>
+                <a:latin typeface="Courier"/>
+              </a:rPr>
+              <a:t>tuned </a:t>
+            </a:r>
+            <a:r>
+              <a:rPr>
+                <a:solidFill>
+                  <a:srgbClr val="666666"/>
+                </a:solidFill>
+                <a:latin typeface="Courier"/>
+              </a:rPr>
+              <a:t>=</a:t>
+            </a:r>
+            <a:r>
+              <a:rPr>
+                <a:latin typeface="Courier"/>
+              </a:rPr>
+              <a:t> RandomForestClassifier(n_estimators</a:t>
+            </a:r>
+            <a:r>
+              <a:rPr>
+                <a:solidFill>
+                  <a:srgbClr val="666666"/>
+                </a:solidFill>
+                <a:latin typeface="Courier"/>
+              </a:rPr>
+              <a:t>=</a:t>
+            </a:r>
+            <a:r>
+              <a:rPr>
+                <a:solidFill>
+                  <a:srgbClr val="40A070"/>
+                </a:solidFill>
+                <a:latin typeface="Courier"/>
+              </a:rPr>
+              <a:t>500</a:t>
+            </a:r>
+            <a:r>
+              <a:rPr>
+                <a:latin typeface="Courier"/>
+              </a:rPr>
+              <a:t>, min_samples_leaf</a:t>
+            </a:r>
+            <a:r>
+              <a:rPr>
+                <a:solidFill>
+                  <a:srgbClr val="666666"/>
+                </a:solidFill>
+                <a:latin typeface="Courier"/>
+              </a:rPr>
+              <a:t>=</a:t>
+            </a:r>
+            <a:r>
+              <a:rPr>
+                <a:solidFill>
+                  <a:srgbClr val="40A070"/>
+                </a:solidFill>
+                <a:latin typeface="Courier"/>
+              </a:rPr>
+              <a:t>40</a:t>
+            </a:r>
+            <a:r>
+              <a:rPr>
+                <a:latin typeface="Courier"/>
+              </a:rPr>
+              <a:t>,</a:t>
+            </a:r>
+            <a:br/>
+            <a:r>
+              <a:rPr>
+                <a:latin typeface="Courier"/>
+              </a:rPr>
+              <a:t>                               random_state</a:t>
+            </a:r>
+            <a:r>
+              <a:rPr>
+                <a:solidFill>
+                  <a:srgbClr val="666666"/>
+                </a:solidFill>
+                <a:latin typeface="Courier"/>
+              </a:rPr>
+              <a:t>=</a:t>
+            </a:r>
+            <a:r>
+              <a:rPr>
+                <a:solidFill>
+                  <a:srgbClr val="40A070"/>
+                </a:solidFill>
+                <a:latin typeface="Courier"/>
+              </a:rPr>
+              <a:t>0</a:t>
+            </a:r>
+            <a:r>
+              <a:rPr>
+                <a:latin typeface="Courier"/>
+              </a:rPr>
+              <a:t>, n_jobs</a:t>
+            </a:r>
+            <a:r>
+              <a:rPr>
+                <a:solidFill>
+                  <a:srgbClr val="666666"/>
+                </a:solidFill>
+                <a:latin typeface="Courier"/>
+              </a:rPr>
+              <a:t>=-</a:t>
+            </a:r>
+            <a:r>
+              <a:rPr>
+                <a:solidFill>
+                  <a:srgbClr val="40A070"/>
+                </a:solidFill>
+                <a:latin typeface="Courier"/>
+              </a:rPr>
+              <a:t>1</a:t>
+            </a:r>
+            <a:r>
+              <a:rPr>
+                <a:latin typeface="Courier"/>
+              </a:rPr>
+              <a:t>).fit(Xtr, ytr)</a:t>
+            </a:r>
+            <a:br/>
+            <a:r>
+              <a:rPr>
+                <a:solidFill>
+                  <a:srgbClr val="008000"/>
+                </a:solidFill>
+                <a:latin typeface="Courier"/>
+              </a:rPr>
+              <a:t>print</a:t>
+            </a:r>
+            <a:r>
+              <a:rPr>
+                <a:latin typeface="Courier"/>
+              </a:rPr>
+              <a:t>(</a:t>
+            </a:r>
+            <a:r>
+              <a:rPr>
+                <a:solidFill>
+                  <a:srgbClr val="BB6688"/>
+                </a:solidFill>
+                <a:latin typeface="Courier"/>
+              </a:rPr>
+              <a:t>f"logistic regression (Session 06)  </a:t>
+            </a:r>
+            <a:r>
+              <a:rPr>
+                <a:solidFill>
+                  <a:srgbClr val="4070A0"/>
+                </a:solidFill>
+                <a:latin typeface="Courier"/>
+              </a:rPr>
+              <a:t>{</a:t>
+            </a:r>
+            <a:r>
+              <a:rPr>
+                <a:latin typeface="Courier"/>
+              </a:rPr>
+              <a:t>AUC_LOGIT</a:t>
+            </a:r>
+            <a:r>
+              <a:rPr>
+                <a:solidFill>
+                  <a:srgbClr val="4070A0"/>
+                </a:solidFill>
+                <a:latin typeface="Courier"/>
+              </a:rPr>
+              <a:t>:.4f}</a:t>
+            </a:r>
+            <a:r>
+              <a:rPr>
+                <a:solidFill>
+                  <a:srgbClr val="BB6688"/>
+                </a:solidFill>
+                <a:latin typeface="Courier"/>
+              </a:rPr>
+              <a:t>"</a:t>
+            </a:r>
+            <a:r>
+              <a:rPr>
+                <a:latin typeface="Courier"/>
+              </a:rPr>
+              <a:t>)</a:t>
+            </a:r>
+            <a:br/>
+            <a:r>
+              <a:rPr>
+                <a:solidFill>
+                  <a:srgbClr val="008000"/>
+                </a:solidFill>
+                <a:latin typeface="Courier"/>
+              </a:rPr>
+              <a:t>print</a:t>
+            </a:r>
+            <a:r>
+              <a:rPr>
+                <a:latin typeface="Courier"/>
+              </a:rPr>
+              <a:t>(</a:t>
+            </a:r>
+            <a:r>
+              <a:rPr>
+                <a:solidFill>
+                  <a:srgbClr val="BB6688"/>
+                </a:solidFill>
+                <a:latin typeface="Courier"/>
+              </a:rPr>
+              <a:t>f"bagging, depth 4                  </a:t>
+            </a:r>
+            <a:r>
+              <a:rPr>
+                <a:solidFill>
+                  <a:srgbClr val="4070A0"/>
+                </a:solidFill>
+                <a:latin typeface="Courier"/>
+              </a:rPr>
+              <a:t>{</a:t>
+            </a:r>
+            <a:r>
+              <a:rPr>
+                <a:latin typeface="Courier"/>
+              </a:rPr>
+              <a:t>auc(bag_m)</a:t>
+            </a:r>
+            <a:r>
+              <a:rPr>
+                <a:solidFill>
+                  <a:srgbClr val="4070A0"/>
+                </a:solidFill>
+                <a:latin typeface="Courier"/>
+              </a:rPr>
+              <a:t>:.4f}</a:t>
+            </a:r>
+            <a:r>
+              <a:rPr>
+                <a:solidFill>
+                  <a:srgbClr val="BB6688"/>
+                </a:solidFill>
+                <a:latin typeface="Courier"/>
+              </a:rPr>
+              <a:t>"</a:t>
+            </a:r>
+            <a:r>
+              <a:rPr>
+                <a:latin typeface="Courier"/>
+              </a:rPr>
+              <a:t>)</a:t>
+            </a:r>
+            <a:br/>
+            <a:r>
+              <a:rPr>
+                <a:solidFill>
+                  <a:srgbClr val="008000"/>
+                </a:solidFill>
+                <a:latin typeface="Courier"/>
+              </a:rPr>
+              <a:t>print</a:t>
+            </a:r>
+            <a:r>
+              <a:rPr>
+                <a:latin typeface="Courier"/>
+              </a:rPr>
+              <a:t>(</a:t>
+            </a:r>
+            <a:r>
+              <a:rPr>
+                <a:solidFill>
+                  <a:srgbClr val="BB6688"/>
+                </a:solidFill>
+                <a:latin typeface="Courier"/>
+              </a:rPr>
+              <a:t>f"random forest, depth 4            </a:t>
+            </a:r>
+            <a:r>
+              <a:rPr>
+                <a:solidFill>
+                  <a:srgbClr val="4070A0"/>
+                </a:solidFill>
+                <a:latin typeface="Courier"/>
+              </a:rPr>
+              <a:t>{</a:t>
+            </a:r>
+            <a:r>
+              <a:rPr>
+                <a:latin typeface="Courier"/>
+              </a:rPr>
+              <a:t>auc(rf_m)</a:t>
+            </a:r>
+            <a:r>
+              <a:rPr>
+                <a:solidFill>
+                  <a:srgbClr val="4070A0"/>
+                </a:solidFill>
+                <a:latin typeface="Courier"/>
+              </a:rPr>
+              <a:t>:.4f}</a:t>
+            </a:r>
+            <a:r>
+              <a:rPr>
+                <a:solidFill>
+                  <a:srgbClr val="BB6688"/>
+                </a:solidFill>
+                <a:latin typeface="Courier"/>
+              </a:rPr>
+              <a:t>"</a:t>
+            </a:r>
+            <a:r>
+              <a:rPr>
+                <a:latin typeface="Courier"/>
+              </a:rPr>
+              <a:t>)</a:t>
+            </a:r>
+            <a:br/>
+            <a:r>
+              <a:rPr>
+                <a:solidFill>
+                  <a:srgbClr val="008000"/>
+                </a:solidFill>
+                <a:latin typeface="Courier"/>
+              </a:rPr>
+              <a:t>print</a:t>
+            </a:r>
+            <a:r>
+              <a:rPr>
+                <a:latin typeface="Courier"/>
+              </a:rPr>
+              <a:t>(</a:t>
+            </a:r>
+            <a:r>
+              <a:rPr>
+                <a:solidFill>
+                  <a:srgbClr val="BB6688"/>
+                </a:solidFill>
+                <a:latin typeface="Courier"/>
+              </a:rPr>
+              <a:t>f"random forest, tuned              </a:t>
+            </a:r>
+            <a:r>
+              <a:rPr>
+                <a:solidFill>
+                  <a:srgbClr val="4070A0"/>
+                </a:solidFill>
+                <a:latin typeface="Courier"/>
+              </a:rPr>
+              <a:t>{</a:t>
+            </a:r>
+            <a:r>
+              <a:rPr>
+                <a:latin typeface="Courier"/>
+              </a:rPr>
+              <a:t>auc(tuned)</a:t>
+            </a:r>
+            <a:r>
+              <a:rPr>
+                <a:solidFill>
+                  <a:srgbClr val="4070A0"/>
+                </a:solidFill>
+                <a:latin typeface="Courier"/>
+              </a:rPr>
+              <a:t>:.4f}</a:t>
+            </a:r>
+            <a:r>
+              <a:rPr>
+                <a:solidFill>
+                  <a:srgbClr val="BB6688"/>
+                </a:solidFill>
+                <a:latin typeface="Courier"/>
+              </a:rPr>
+              <a:t>"</a:t>
+            </a:r>
+            <a:r>
+              <a:rPr>
+                <a:latin typeface="Courier"/>
+              </a:rPr>
+              <a:t>)</a:t>
+            </a:r>
+          </a:p>
+          <a:p>
+            <a:pPr lvl="0" indent="0">
+              <a:buNone/>
+            </a:pPr>
+            <a:r>
+              <a:rPr>
+                <a:latin typeface="Courier"/>
+              </a:rPr>
+              <a:t>logistic regression (Session 06)  0.6796
+bagging, depth 4                  0.6671
+random forest, depth 4            0.6757
+random forest, tuned              0.6813</a:t>
+            </a:r>
+          </a:p>
+          <a:p>
+            <a:pPr lvl="0" indent="0" marL="0">
+              <a:buNone/>
+            </a:pPr>
+            <a:r>
+              <a:rPr/>
+              <a:t>A tuned forest, on 9,578 loans and 19 features, beats a linear model in the log-odds by </a:t>
+            </a:r>
+            <a:r>
+              <a:rPr b="1"/>
+              <a:t>0.002 AUC</a:t>
+            </a:r>
+            <a:r>
+              <a:rPr/>
+              <a:t>. Report that honestly. Flexibility is not a free win.</a:t>
+            </a:r>
+          </a:p>
+        </p:txBody>
+      </p:sp>
+    </p:spTree>
+  </p:cSld>
+</p:sld>
+</file>
+
+<file path=ppt/slides/slide33.xml><?xml version="1.0" encoding="utf-8"?>
 <p:sld xmlns:a="http://schemas.openxmlformats.org/drawingml/2006/main" xmlns:r="http://schemas.openxmlformats.org/officeDocument/2006/relationships" xmlns:p="http://schemas.openxmlformats.org/presentationml/2006/main">
   <p:cSld>
     <p:spTree>
@@ -4790,7 +8540,7 @@
             </a:pPr>
             <a:r>
               <a:rPr/>
-              <a:t>7.4 Gradient boosting</a:t>
+              <a:t>5 · Boosting</a:t>
             </a:r>
           </a:p>
         </p:txBody>
@@ -4800,7 +8550,7 @@
 </p:sld>
 </file>
 
-<file path=ppt/slides/slide19.xml><?xml version="1.0" encoding="utf-8"?>
+<file path=ppt/slides/slide34.xml><?xml version="1.0" encoding="utf-8"?>
 <p:sld xmlns:a="http://schemas.openxmlformats.org/drawingml/2006/main" xmlns:r="http://schemas.openxmlformats.org/officeDocument/2006/relationships" xmlns:p="http://schemas.openxmlformats.org/presentationml/2006/main">
   <p:cSld>
     <p:spTree>
@@ -4837,7 +8587,7 @@
             </a:pPr>
             <a:r>
               <a:rPr/>
-              <a:t>Functional gradient descent</a:t>
+              <a:t>A different idea entirely</a:t>
             </a:r>
           </a:p>
         </p:txBody>
@@ -4864,7 +8614,26 @@
                 </a:pPr>
                 <a:r>
                   <a:rPr/>
-                  <a:t>Instead of averaging independent trees, build them </a:t>
+                  <a:t>Bagging fits </a:t>
+                </a:r>
+                <a14:m>
+                  <m:oMath xmlns:m="http://schemas.openxmlformats.org/officeDocument/2006/math">
+                    <m:r>
+                      <m:t>B</m:t>
+                    </m:r>
+                  </m:oMath>
+                </a14:m>
+                <a:r>
+                  <a:rPr/>
+                  <a:t> trees </a:t>
+                </a:r>
+                <a:r>
+                  <a:rPr b="1"/>
+                  <a:t>independently</a:t>
+                </a:r>
+                <a:r>
+                  <a:rPr/>
+                  <a:t> and averages. Boosting fits them </a:t>
                 </a:r>
                 <a:r>
                   <a:rPr b="1"/>
@@ -4872,7 +8641,7 @@
                 </a:r>
                 <a:r>
                   <a:rPr/>
-                  <a:t>, each correcting its predecessor.</a:t>
+                  <a:t>, each one correcting what its predecessors got wrong.</a:t>
                 </a:r>
               </a:p>
               <a:p>
@@ -4965,10 +8734,10 @@
                 </a14:m>
                 <a:r>
                   <a:rPr/>
-                  <a:t> over the </a:t>
-                </a:r>
-                <a:r>
-                  <a:rPr i="1"/>
+                  <a:t> by gradient descent — not over parameters, but over the </a:t>
+                </a:r>
+                <a:r>
+                  <a:rPr b="1"/>
                   <a:t>function</a:t>
                 </a:r>
                 <a:r>
@@ -4984,15 +8753,16 @@
                 </a14:m>
                 <a:r>
                   <a:rPr/>
-                  <a:t>, by gradient descent </a:t>
-                </a:r>
-                <a:r>
-                  <a:rPr b="1"/>
-                  <a:t>in function space</a:t>
-                </a:r>
-                <a:r>
-                  <a:rPr/>
-                  <a:t>.</a:t>
+                  <a:t> itself.</a:t>
+                </a:r>
+              </a:p>
+              <a:p>
+                <a:pPr lvl="0" indent="0" marL="0">
+                  <a:buNone/>
+                </a:pPr>
+                <a:r>
+                  <a:rPr/>
+                  <a:t>That reframing is the whole derivation. Everything below follows from taking it literally.</a:t>
                 </a:r>
               </a:p>
             </p:txBody>
@@ -5004,7 +8774,10 @@
 </p:sld>
 </file>
 
-<file path=ppt/slides/slide2.xml><?xml version="1.0" encoding="utf-8"?>
+<file path=ppt/slides/slide35.xml><?xml version="1.0" encoding="UTF-8"?><p:sld xmlns:a="http://schemas.openxmlformats.org/drawingml/2006/main" xmlns:r="http://schemas.openxmlformats.org/officeDocument/2006/relationships" xmlns:p="http://schemas.openxmlformats.org/presentationml/2006/main"><p:cSld><p:spTree><p:nvGrpSpPr><p:cNvPr id="1" name="" /><p:cNvGrpSpPr /><p:nvPr /></p:nvGrpSpPr><p:grpSpPr><a:xfrm><a:off x="0" y="0" /><a:ext cx="0" cy="0" /><a:chOff x="0" y="0" /><a:chExt cx="0" cy="0" /></a:xfrm></p:grpSpPr><p:sp><p:nvSpPr><p:cNvPr id="2" name="Title 1" /><p:cNvSpPr><a:spLocks noGrp="1" /></p:cNvSpPr><p:nvPr><p:ph type="title" /></p:nvPr></p:nvSpPr><p:spPr><a:xfrm><a:off x="457201" y="204787" /><a:ext cx="3008313" cy="871538" /></a:xfrm></p:spPr><p:txBody><a:bodyPr /><a:lstStyle /><a:p><a:pPr lvl="0" indent="0" marL="0"><a:buNone /></a:pPr><a:r><a:rPr /><a:t>Gradient descent in function space</a:t></a:r></a:p></p:txBody></p:sp><mc:AlternateContent xmlns:mc="http://schemas.openxmlformats.org/markup-compatibility/2006"><mc:Choice xmlns:a14="http://schemas.microsoft.com/office/drawing/2010/main" Requires="a14"><p:sp><p:nvSpPr><p:cNvPr id="4" name="Text Placeholder 3" /><p:cNvSpPr><a:spLocks noGrp="1" /></p:cNvSpPr><p:nvPr><p:ph idx="2" sz="half" type="body" /></p:nvPr></p:nvSpPr><p:spPr /><p:txBody><a:bodyPr /><a:lstStyle /><a:p><a:pPr lvl="0" indent="0" marL="0"><a:buNone /></a:pPr><a:r><a:rPr /><a:t>At stage </a:t></a:r><a14:m><m:oMath xmlns:m="http://schemas.openxmlformats.org/officeDocument/2006/math"><m:r><m:t>m</m:t></m:r></m:oMath></a14:m><a:r><a:rPr /><a:t>, the negative gradient at the current fit is the </a:t></a:r><a:r><a:rPr b="1" /><a:t>pseudo-residual</a:t></a:r><a:r><a:rPr /><a:t>:</a:t></a:r></a:p><a:p><a:pPr lvl="0" indent="0" marL="0"><a:buNone /></a:pPr><a14:m><m:oMathPara xmlns:m="http://schemas.openxmlformats.org/officeDocument/2006/math"><m:oMathParaPr><m:jc m:val="center" /></m:oMathParaPr><m:oMath><m:sSub><m:e><m:r><m:t>r</m:t></m:r></m:e><m:sub><m:r><m:t>i</m:t></m:r><m:r><m:t>m</m:t></m:r></m:sub></m:sSub><m:r><m:rPr><m:sty m:val="p" /></m:rPr><m:t>=</m:t></m:r><m:r><m:rPr><m:sty m:val="p" /></m:rPr><m:t>−</m:t></m:r><m:sSub><m:e><m:d><m:dPr><m:begChr m:val="[" /><m:sepChr m:val="" /><m:endChr m:val="]" /><m:grow /></m:dPr><m:e><m:f><m:fPr><m:type m:val="bar" /></m:fPr><m:num><m:r><m:rPr><m:sty m:val="p" /></m:rPr><m:t>∂</m:t></m:r><m:r><m:t>L</m:t></m:r><m:d><m:dPr><m:begChr m:val="(" /><m:sepChr m:val="" /><m:endChr m:val=")" /><m:grow /></m:dPr><m:e><m:sSub><m:e><m:r><m:t>y</m:t></m:r></m:e><m:sub><m:r><m:t>i</m:t></m:r></m:sub></m:sSub><m:r><m:rPr><m:sty m:val="p" /></m:rPr><m:t>,</m:t></m:r><m:r><m:t>F</m:t></m:r><m:d><m:dPr><m:begChr m:val="(" /><m:sepChr m:val="" /><m:endChr m:val=")" /><m:grow /></m:dPr><m:e><m:sSub><m:e><m:r><m:t>x</m:t></m:r></m:e><m:sub><m:r><m:t>i</m:t></m:r></m:sub></m:sSub></m:e></m:d></m:e></m:d></m:num><m:den><m:r><m:rPr><m:sty m:val="p" /></m:rPr><m:t>∂</m:t></m:r><m:r><m:t>F</m:t></m:r><m:d><m:dPr><m:begChr m:val="(" /><m:sepChr m:val="" /><m:endChr m:val=")" /><m:grow /></m:dPr><m:e><m:sSub><m:e><m:r><m:t>x</m:t></m:r></m:e><m:sub><m:r><m:t>i</m:t></m:r></m:sub></m:sSub></m:e></m:d></m:den></m:f></m:e></m:d></m:e><m:sub><m:r><m:t>F</m:t></m:r><m:r><m:rPr><m:sty m:val="p" /></m:rPr><m:t>=</m:t></m:r><m:sSub><m:e><m:r><m:t>F</m:t></m:r></m:e><m:sub><m:r><m:t>m</m:t></m:r><m:r><m:rPr><m:sty m:val="p" /></m:rPr><m:t>−</m:t></m:r><m:r><m:t>1</m:t></m:r></m:sub></m:sSub></m:sub></m:sSub></m:oMath></m:oMathPara></a14:m></a:p></p:txBody></p:sp></mc:Choice></mc:AlternateContent><p:graphicFrame><p:nvGraphicFramePr><p:cNvPr id="6" name="Content Placeholder 5" /><p:cNvGraphicFramePr><a:graphicFrameLocks noGrp="1" /></p:cNvGraphicFramePr><p:nvPr><p:ph idx="1" /></p:nvPr></p:nvGraphicFramePr><p:xfrm><a:off x="3568700" y="203200" /><a:ext cx="5105400" cy="4381500" /></p:xfrm><a:graphic><a:graphicData uri="http://schemas.openxmlformats.org/drawingml/2006/table"><a:tbl><a:tblPr firstRow="1" bandRow="1"><a:tableStyleId>{5C22544A-7EE6-4342-B048-85BDC9FD1C3A}</a:tableStyleId></a:tblPr><a:tblGrid><a:gridCol w="2552700" /><a:gridCol w="2552700" /></a:tblGrid><a:tr h="0"><a:tc><a:txBody><a:bodyPr /><a:lstStyle /><a:p><a:pPr lvl="0" indent="0" marL="0"><a:buNone /></a:pPr><a:r><a:rPr /><a:t>Loss</a:t></a:r></a:p></a:txBody><a:tcPr /></a:tc><a:tc><a:txBody><a:bodyPr /><a:lstStyle /><a:p><a:pPr lvl="0" indent="0" marL="0"><a:buNone /></a:pPr><a14:m><m:oMath xmlns:m="http://schemas.openxmlformats.org/officeDocument/2006/math"><m:sSub><m:e><m:r><m:t>r</m:t></m:r></m:e><m:sub><m:r><m:t>i</m:t></m:r><m:r><m:t>m</m:t></m:r></m:sub></m:sSub></m:oMath></a14:m><a:r><a:rPr /><a:t> becomes</a:t></a:r></a:p></a:txBody><a:tcPr /></a:tc></a:tr><a:tr h="0"><a:tc><a:txBody><a:bodyPr /><a:lstStyle /><a:p><a:pPr lvl="0" indent="0" marL="0"><a:buNone /></a:pPr><a:r><a:rPr /><a:t>squared error</a:t></a:r></a:p></a:txBody></a:tc><a:tc><a:txBody><a:bodyPr /><a:lstStyle /><a:p><a:pPr lvl="0" indent="0" marL="0"><a:buNone /></a:pPr><a14:m><m:oMath xmlns:m="http://schemas.openxmlformats.org/officeDocument/2006/math"><m:sSub><m:e><m:r><m:t>y</m:t></m:r></m:e><m:sub><m:r><m:t>i</m:t></m:r></m:sub></m:sSub><m:r><m:rPr><m:sty m:val="p" /></m:rPr><m:t>−</m:t></m:r><m:sSub><m:e><m:r><m:t>F</m:t></m:r></m:e><m:sub><m:r><m:t>m</m:t></m:r><m:r><m:rPr><m:sty m:val="p" /></m:rPr><m:t>−</m:t></m:r><m:r><m:t>1</m:t></m:r></m:sub></m:sSub><m:d><m:dPr><m:begChr m:val="(" /><m:sepChr m:val="" /><m:endChr m:val=")" /><m:grow /></m:dPr><m:e><m:sSub><m:e><m:r><m:t>x</m:t></m:r></m:e><m:sub><m:r><m:t>i</m:t></m:r></m:sub></m:sSub></m:e></m:d></m:oMath></a14:m><a:r><a:rPr /><a:t> — literally the residual</a:t></a:r></a:p></a:txBody></a:tc></a:tr><a:tr h="0"><a:tc><a:txBody><a:bodyPr /><a:lstStyle /><a:p><a:pPr lvl="0" indent="0" marL="0"><a:buNone /></a:pPr><a:r><a:rPr /><a:t>logistic</a:t></a:r></a:p></a:txBody></a:tc><a:tc><a:txBody><a:bodyPr /><a:lstStyle /><a:p><a:pPr lvl="0" indent="0" marL="0"><a:buNone /></a:pPr><a14:m><m:oMath xmlns:m="http://schemas.openxmlformats.org/officeDocument/2006/math"><m:sSub><m:e><m:r><m:t>y</m:t></m:r></m:e><m:sub><m:r><m:t>i</m:t></m:r></m:sub></m:sSub><m:r><m:rPr><m:sty m:val="p" /></m:rPr><m:t>−</m:t></m:r><m:sSub><m:e><m:r><m:t>p</m:t></m:r></m:e><m:sub><m:r><m:t>m</m:t></m:r><m:r><m:rPr><m:sty m:val="p" /></m:rPr><m:t>−</m:t></m:r><m:r><m:t>1</m:t></m:r></m:sub></m:sSub><m:d><m:dPr><m:begChr m:val="(" /><m:sepChr m:val="" /><m:endChr m:val=")" /><m:grow /></m:dPr><m:e><m:sSub><m:e><m:r><m:t>x</m:t></m:r></m:e><m:sub><m:r><m:t>i</m:t></m:r></m:sub></m:sSub></m:e></m:d></m:oMath></a14:m><a:r><a:rPr /><a:t> — the probability residual from Session 06</a:t></a:r></a:p></a:txBody></a:tc></a:tr></a:tbl></a:graphicData></a:graphic></p:graphicFrame></p:spTree></p:cSld></p:sld>
+</file>
+
+<file path=ppt/slides/slide36.xml><?xml version="1.0" encoding="utf-8"?>
 <p:sld xmlns:a="http://schemas.openxmlformats.org/drawingml/2006/main" xmlns:r="http://schemas.openxmlformats.org/officeDocument/2006/relationships" xmlns:p="http://schemas.openxmlformats.org/presentationml/2006/main">
   <p:cSld>
     <p:spTree>
@@ -5021,40 +8794,144 @@
           <a:chExt cx="0" cy="0"/>
         </a:xfrm>
       </p:grpSpPr>
-      <p:sp>
-        <p:nvSpPr>
-          <p:cNvPr id="3" name="Content Placeholder 2"/>
-          <p:cNvSpPr>
-            <a:spLocks noGrp="1"/>
-          </p:cNvSpPr>
-          <p:nvPr>
-            <p:ph idx="1"/>
-          </p:nvPr>
-        </p:nvSpPr>
-        <p:spPr/>
-        <p:txBody>
-          <a:bodyPr/>
-          <a:lstStyle/>
-          <a:p>
-            <a:pPr lvl="0" indent="0" marL="0">
-              <a:spcBef>
-                <a:spcPts val="3000"/>
-              </a:spcBef>
-              <a:buNone/>
-            </a:pPr>
-            <a:r>
-              <a:rPr b="1"/>
-              <a:t>If we abandon linearity, is interpretability recoverable?</a:t>
-            </a:r>
-          </a:p>
-        </p:txBody>
-      </p:sp>
+      <mc:AlternateContent xmlns:mc="http://schemas.openxmlformats.org/markup-compatibility/2006">
+        <mc:Choice xmlns:a14="http://schemas.microsoft.com/office/drawing/2010/main" Requires="a14">
+          <p:sp>
+            <p:nvSpPr>
+              <p:cNvPr id="3" name="Content Placeholder 2"/>
+              <p:cNvSpPr>
+                <a:spLocks noGrp="1"/>
+              </p:cNvSpPr>
+              <p:nvPr>
+                <p:ph idx="1"/>
+              </p:nvPr>
+            </p:nvSpPr>
+            <p:spPr/>
+            <p:txBody>
+              <a:bodyPr/>
+              <a:lstStyle/>
+              <a:p>
+                <a:pPr lvl="0" indent="0" marL="0">
+                  <a:buNone/>
+                </a:pPr>
+                <a:r>
+                  <a:rPr/>
+                  <a:t>Fit a small tree </a:t>
+                </a:r>
+                <a14:m>
+                  <m:oMath xmlns:m="http://schemas.openxmlformats.org/officeDocument/2006/math">
+                    <m:sSub>
+                      <m:e>
+                        <m:r>
+                          <m:t>h</m:t>
+                        </m:r>
+                      </m:e>
+                      <m:sub>
+                        <m:r>
+                          <m:t>m</m:t>
+                        </m:r>
+                      </m:sub>
+                    </m:sSub>
+                  </m:oMath>
+                </a14:m>
+                <a:r>
+                  <a:rPr/>
+                  <a:t> to those pseudo-residuals, then step: </a:t>
+                </a:r>
+                <a14:m>
+                  <m:oMath xmlns:m="http://schemas.openxmlformats.org/officeDocument/2006/math">
+                    <m:sSub>
+                      <m:e>
+                        <m:r>
+                          <m:t>F</m:t>
+                        </m:r>
+                      </m:e>
+                      <m:sub>
+                        <m:r>
+                          <m:t>m</m:t>
+                        </m:r>
+                      </m:sub>
+                    </m:sSub>
+                    <m:r>
+                      <m:rPr>
+                        <m:sty m:val="p"/>
+                      </m:rPr>
+                      <m:t>=</m:t>
+                    </m:r>
+                    <m:sSub>
+                      <m:e>
+                        <m:r>
+                          <m:t>F</m:t>
+                        </m:r>
+                      </m:e>
+                      <m:sub>
+                        <m:r>
+                          <m:t>m</m:t>
+                        </m:r>
+                        <m:r>
+                          <m:rPr>
+                            <m:sty m:val="p"/>
+                          </m:rPr>
+                          <m:t>−</m:t>
+                        </m:r>
+                        <m:r>
+                          <m:t>1</m:t>
+                        </m:r>
+                      </m:sub>
+                    </m:sSub>
+                    <m:r>
+                      <m:rPr>
+                        <m:sty m:val="p"/>
+                      </m:rPr>
+                      <m:t>+</m:t>
+                    </m:r>
+                    <m:r>
+                      <m:t>ν</m:t>
+                    </m:r>
+                    <m:r>
+                      <m:t> </m:t>
+                    </m:r>
+                    <m:sSub>
+                      <m:e>
+                        <m:r>
+                          <m:t>γ</m:t>
+                        </m:r>
+                      </m:e>
+                      <m:sub>
+                        <m:r>
+                          <m:t>m</m:t>
+                        </m:r>
+                      </m:sub>
+                    </m:sSub>
+                    <m:sSub>
+                      <m:e>
+                        <m:r>
+                          <m:t>h</m:t>
+                        </m:r>
+                      </m:e>
+                      <m:sub>
+                        <m:r>
+                          <m:t>m</m:t>
+                        </m:r>
+                      </m:sub>
+                    </m:sSub>
+                  </m:oMath>
+                </a14:m>
+                <a:r>
+                  <a:rPr/>
+                  <a:t>.</a:t>
+                </a:r>
+              </a:p>
+            </p:txBody>
+          </p:sp>
+        </mc:Choice>
+      </mc:AlternateContent>
     </p:spTree>
   </p:cSld>
 </p:sld>
 </file>
 
-<file path=ppt/slides/slide20.xml><?xml version="1.0" encoding="utf-8"?>
+<file path=ppt/slides/slide37.xml><?xml version="1.0" encoding="utf-8"?>
 <p:sld xmlns:a="http://schemas.openxmlformats.org/drawingml/2006/main" xmlns:r="http://schemas.openxmlformats.org/officeDocument/2006/relationships" xmlns:p="http://schemas.openxmlformats.org/presentationml/2006/main">
   <p:cSld>
     <p:spTree>
@@ -5091,7 +8968,7 @@
             </a:pPr>
             <a:r>
               <a:rPr/>
-              <a:t>The pseudo-residual</a:t>
+              <a:t>Shrinkage is not optional</a:t>
             </a:r>
           </a:p>
         </p:txBody>
@@ -5112,513 +8989,6 @@
             <p:txBody>
               <a:bodyPr/>
               <a:lstStyle/>
-              <a:p>
-                <a:pPr lvl="0" indent="0" marL="0">
-                  <a:buNone/>
-                </a:pPr>
-                <a:r>
-                  <a:rPr/>
-                  <a:t>At stage </a:t>
-                </a:r>
-                <a14:m>
-                  <m:oMath xmlns:m="http://schemas.openxmlformats.org/officeDocument/2006/math">
-                    <m:r>
-                      <m:t>m</m:t>
-                    </m:r>
-                  </m:oMath>
-                </a14:m>
-                <a:r>
-                  <a:rPr/>
-                  <a:t>, the negative gradient at the current fit:</a:t>
-                </a:r>
-              </a:p>
-              <a:p>
-                <a:pPr lvl="0" indent="0" marL="0">
-                  <a:buNone/>
-                </a:pPr>
-                <a14:m>
-                  <m:oMathPara xmlns:m="http://schemas.openxmlformats.org/officeDocument/2006/math">
-                    <m:oMathParaPr>
-                      <m:jc m:val="center"/>
-                    </m:oMathParaPr>
-                    <m:oMath>
-                      <m:sSub>
-                        <m:e>
-                          <m:r>
-                            <m:t>r</m:t>
-                          </m:r>
-                        </m:e>
-                        <m:sub>
-                          <m:r>
-                            <m:t>i</m:t>
-                          </m:r>
-                          <m:r>
-                            <m:t>m</m:t>
-                          </m:r>
-                        </m:sub>
-                      </m:sSub>
-                      <m:r>
-                        <m:rPr>
-                          <m:sty m:val="p"/>
-                        </m:rPr>
-                        <m:t>=</m:t>
-                      </m:r>
-                      <m:r>
-                        <m:rPr>
-                          <m:sty m:val="p"/>
-                        </m:rPr>
-                        <m:t>−</m:t>
-                      </m:r>
-                      <m:sSub>
-                        <m:e>
-                          <m:d>
-                            <m:dPr>
-                              <m:begChr m:val="["/>
-                              <m:sepChr m:val=""/>
-                              <m:endChr m:val="]"/>
-                              <m:grow/>
-                            </m:dPr>
-                            <m:e>
-                              <m:f>
-                                <m:fPr>
-                                  <m:type m:val="bar"/>
-                                </m:fPr>
-                                <m:num>
-                                  <m:r>
-                                    <m:rPr>
-                                      <m:sty m:val="p"/>
-                                    </m:rPr>
-                                    <m:t>∂</m:t>
-                                  </m:r>
-                                  <m:r>
-                                    <m:t>L</m:t>
-                                  </m:r>
-                                  <m:d>
-                                    <m:dPr>
-                                      <m:begChr m:val="("/>
-                                      <m:sepChr m:val=""/>
-                                      <m:endChr m:val=")"/>
-                                      <m:grow/>
-                                    </m:dPr>
-                                    <m:e>
-                                      <m:sSub>
-                                        <m:e>
-                                          <m:r>
-                                            <m:t>y</m:t>
-                                          </m:r>
-                                        </m:e>
-                                        <m:sub>
-                                          <m:r>
-                                            <m:t>i</m:t>
-                                          </m:r>
-                                        </m:sub>
-                                      </m:sSub>
-                                      <m:r>
-                                        <m:rPr>
-                                          <m:sty m:val="p"/>
-                                        </m:rPr>
-                                        <m:t>,</m:t>
-                                      </m:r>
-                                      <m:r>
-                                        <m:t>F</m:t>
-                                      </m:r>
-                                      <m:d>
-                                        <m:dPr>
-                                          <m:begChr m:val="("/>
-                                          <m:sepChr m:val=""/>
-                                          <m:endChr m:val=")"/>
-                                          <m:grow/>
-                                        </m:dPr>
-                                        <m:e>
-                                          <m:sSub>
-                                            <m:e>
-                                              <m:r>
-                                                <m:t>x</m:t>
-                                              </m:r>
-                                            </m:e>
-                                            <m:sub>
-                                              <m:r>
-                                                <m:t>i</m:t>
-                                              </m:r>
-                                            </m:sub>
-                                          </m:sSub>
-                                        </m:e>
-                                      </m:d>
-                                    </m:e>
-                                  </m:d>
-                                </m:num>
-                                <m:den>
-                                  <m:r>
-                                    <m:rPr>
-                                      <m:sty m:val="p"/>
-                                    </m:rPr>
-                                    <m:t>∂</m:t>
-                                  </m:r>
-                                  <m:r>
-                                    <m:t>F</m:t>
-                                  </m:r>
-                                  <m:d>
-                                    <m:dPr>
-                                      <m:begChr m:val="("/>
-                                      <m:sepChr m:val=""/>
-                                      <m:endChr m:val=")"/>
-                                      <m:grow/>
-                                    </m:dPr>
-                                    <m:e>
-                                      <m:sSub>
-                                        <m:e>
-                                          <m:r>
-                                            <m:t>x</m:t>
-                                          </m:r>
-                                        </m:e>
-                                        <m:sub>
-                                          <m:r>
-                                            <m:t>i</m:t>
-                                          </m:r>
-                                        </m:sub>
-                                      </m:sSub>
-                                    </m:e>
-                                  </m:d>
-                                </m:den>
-                              </m:f>
-                            </m:e>
-                          </m:d>
-                        </m:e>
-                        <m:sub>
-                          <m:r>
-                            <m:t>F</m:t>
-                          </m:r>
-                          <m:r>
-                            <m:rPr>
-                              <m:sty m:val="p"/>
-                            </m:rPr>
-                            <m:t>=</m:t>
-                          </m:r>
-                          <m:sSub>
-                            <m:e>
-                              <m:r>
-                                <m:t>F</m:t>
-                              </m:r>
-                            </m:e>
-                            <m:sub>
-                              <m:r>
-                                <m:t>m</m:t>
-                              </m:r>
-                              <m:r>
-                                <m:rPr>
-                                  <m:sty m:val="p"/>
-                                </m:rPr>
-                                <m:t>−</m:t>
-                              </m:r>
-                              <m:r>
-                                <m:t>1</m:t>
-                              </m:r>
-                            </m:sub>
-                          </m:sSub>
-                        </m:sub>
-                      </m:sSub>
-                    </m:oMath>
-                  </m:oMathPara>
-                </a14:m>
-              </a:p>
-              <a:p>
-                <a:pPr lvl="0"/>
-                <a:r>
-                  <a:rPr b="1"/>
-                  <a:t>Squared loss:</a:t>
-                </a:r>
-                <a:r>
-                  <a:rPr/>
-                  <a:t> </a:t>
-                </a:r>
-                <a14:m>
-                  <m:oMath xmlns:m="http://schemas.openxmlformats.org/officeDocument/2006/math">
-                    <m:sSub>
-                      <m:e>
-                        <m:r>
-                          <m:t>r</m:t>
-                        </m:r>
-                      </m:e>
-                      <m:sub>
-                        <m:r>
-                          <m:t>i</m:t>
-                        </m:r>
-                        <m:r>
-                          <m:t>m</m:t>
-                        </m:r>
-                      </m:sub>
-                    </m:sSub>
-                    <m:r>
-                      <m:rPr>
-                        <m:sty m:val="p"/>
-                      </m:rPr>
-                      <m:t>=</m:t>
-                    </m:r>
-                    <m:sSub>
-                      <m:e>
-                        <m:r>
-                          <m:t>y</m:t>
-                        </m:r>
-                      </m:e>
-                      <m:sub>
-                        <m:r>
-                          <m:t>i</m:t>
-                        </m:r>
-                      </m:sub>
-                    </m:sSub>
-                    <m:r>
-                      <m:rPr>
-                        <m:sty m:val="p"/>
-                      </m:rPr>
-                      <m:t>−</m:t>
-                    </m:r>
-                    <m:sSub>
-                      <m:e>
-                        <m:r>
-                          <m:t>F</m:t>
-                        </m:r>
-                      </m:e>
-                      <m:sub>
-                        <m:r>
-                          <m:t>m</m:t>
-                        </m:r>
-                        <m:r>
-                          <m:rPr>
-                            <m:sty m:val="p"/>
-                          </m:rPr>
-                          <m:t>−</m:t>
-                        </m:r>
-                        <m:r>
-                          <m:t>1</m:t>
-                        </m:r>
-                      </m:sub>
-                    </m:sSub>
-                    <m:d>
-                      <m:dPr>
-                        <m:begChr m:val="("/>
-                        <m:sepChr m:val=""/>
-                        <m:endChr m:val=")"/>
-                        <m:grow/>
-                      </m:dPr>
-                      <m:e>
-                        <m:sSub>
-                          <m:e>
-                            <m:r>
-                              <m:t>x</m:t>
-                            </m:r>
-                          </m:e>
-                          <m:sub>
-                            <m:r>
-                              <m:t>i</m:t>
-                            </m:r>
-                          </m:sub>
-                        </m:sSub>
-                      </m:e>
-                    </m:d>
-                  </m:oMath>
-                </a14:m>
-                <a:r>
-                  <a:rPr/>
-                  <a:t> — literally the residual</a:t>
-                </a:r>
-              </a:p>
-              <a:p>
-                <a:pPr lvl="0"/>
-                <a:r>
-                  <a:rPr b="1"/>
-                  <a:t>Logistic loss:</a:t>
-                </a:r>
-                <a:r>
-                  <a:rPr/>
-                  <a:t> </a:t>
-                </a:r>
-                <a14:m>
-                  <m:oMath xmlns:m="http://schemas.openxmlformats.org/officeDocument/2006/math">
-                    <m:sSub>
-                      <m:e>
-                        <m:r>
-                          <m:t>r</m:t>
-                        </m:r>
-                      </m:e>
-                      <m:sub>
-                        <m:r>
-                          <m:t>i</m:t>
-                        </m:r>
-                        <m:r>
-                          <m:t>m</m:t>
-                        </m:r>
-                      </m:sub>
-                    </m:sSub>
-                    <m:r>
-                      <m:rPr>
-                        <m:sty m:val="p"/>
-                      </m:rPr>
-                      <m:t>=</m:t>
-                    </m:r>
-                    <m:sSub>
-                      <m:e>
-                        <m:r>
-                          <m:t>y</m:t>
-                        </m:r>
-                      </m:e>
-                      <m:sub>
-                        <m:r>
-                          <m:t>i</m:t>
-                        </m:r>
-                      </m:sub>
-                    </m:sSub>
-                    <m:r>
-                      <m:rPr>
-                        <m:sty m:val="p"/>
-                      </m:rPr>
-                      <m:t>−</m:t>
-                    </m:r>
-                    <m:sSub>
-                      <m:e>
-                        <m:r>
-                          <m:t>p</m:t>
-                        </m:r>
-                      </m:e>
-                      <m:sub>
-                        <m:r>
-                          <m:t>m</m:t>
-                        </m:r>
-                        <m:r>
-                          <m:rPr>
-                            <m:sty m:val="p"/>
-                          </m:rPr>
-                          <m:t>−</m:t>
-                        </m:r>
-                        <m:r>
-                          <m:t>1</m:t>
-                        </m:r>
-                      </m:sub>
-                    </m:sSub>
-                    <m:d>
-                      <m:dPr>
-                        <m:begChr m:val="("/>
-                        <m:sepChr m:val=""/>
-                        <m:endChr m:val=")"/>
-                        <m:grow/>
-                      </m:dPr>
-                      <m:e>
-                        <m:sSub>
-                          <m:e>
-                            <m:r>
-                              <m:t>x</m:t>
-                            </m:r>
-                          </m:e>
-                          <m:sub>
-                            <m:r>
-                              <m:t>i</m:t>
-                            </m:r>
-                          </m:sub>
-                        </m:sSub>
-                      </m:e>
-                    </m:d>
-                  </m:oMath>
-                </a14:m>
-                <a:r>
-                  <a:rPr/>
-                  <a:t> — the same probability residual as Session 06</a:t>
-                </a:r>
-              </a:p>
-            </p:txBody>
-          </p:sp>
-        </mc:Choice>
-      </mc:AlternateContent>
-    </p:spTree>
-  </p:cSld>
-</p:sld>
-</file>
-
-<file path=ppt/slides/slide21.xml><?xml version="1.0" encoding="utf-8"?>
-<p:sld xmlns:a="http://schemas.openxmlformats.org/drawingml/2006/main" xmlns:r="http://schemas.openxmlformats.org/officeDocument/2006/relationships" xmlns:p="http://schemas.openxmlformats.org/presentationml/2006/main">
-  <p:cSld>
-    <p:spTree>
-      <p:nvGrpSpPr>
-        <p:cNvPr id="1" name=""/>
-        <p:cNvGrpSpPr/>
-        <p:nvPr/>
-      </p:nvGrpSpPr>
-      <p:grpSpPr>
-        <a:xfrm>
-          <a:off x="0" y="0"/>
-          <a:ext cx="0" cy="0"/>
-          <a:chOff x="0" y="0"/>
-          <a:chExt cx="0" cy="0"/>
-        </a:xfrm>
-      </p:grpSpPr>
-      <p:sp>
-        <p:nvSpPr>
-          <p:cNvPr id="2" name="Title 1"/>
-          <p:cNvSpPr>
-            <a:spLocks noGrp="1"/>
-          </p:cNvSpPr>
-          <p:nvPr>
-            <p:ph type="title"/>
-          </p:nvPr>
-        </p:nvSpPr>
-        <p:spPr/>
-        <p:txBody>
-          <a:bodyPr/>
-          <a:lstStyle/>
-          <a:p>
-            <a:pPr lvl="0" indent="0" marL="0">
-              <a:buNone/>
-            </a:pPr>
-            <a:r>
-              <a:rPr/>
-              <a:t>The update</a:t>
-            </a:r>
-          </a:p>
-        </p:txBody>
-      </p:sp>
-      <mc:AlternateContent xmlns:mc="http://schemas.openxmlformats.org/markup-compatibility/2006">
-        <mc:Choice xmlns:a14="http://schemas.microsoft.com/office/drawing/2010/main" Requires="a14">
-          <p:sp>
-            <p:nvSpPr>
-              <p:cNvPr id="3" name="Content Placeholder 2"/>
-              <p:cNvSpPr>
-                <a:spLocks noGrp="1"/>
-              </p:cNvSpPr>
-              <p:nvPr>
-                <p:ph idx="1"/>
-              </p:nvPr>
-            </p:nvSpPr>
-            <p:spPr/>
-            <p:txBody>
-              <a:bodyPr/>
-              <a:lstStyle/>
-              <a:p>
-                <a:pPr lvl="0" indent="0" marL="0">
-                  <a:buNone/>
-                </a:pPr>
-                <a:r>
-                  <a:rPr/>
-                  <a:t>Fit a small tree </a:t>
-                </a:r>
-                <a14:m>
-                  <m:oMath xmlns:m="http://schemas.openxmlformats.org/officeDocument/2006/math">
-                    <m:sSub>
-                      <m:e>
-                        <m:r>
-                          <m:t>h</m:t>
-                        </m:r>
-                      </m:e>
-                      <m:sub>
-                        <m:r>
-                          <m:t>m</m:t>
-                        </m:r>
-                      </m:sub>
-                    </m:sSub>
-                  </m:oMath>
-                </a14:m>
-                <a:r>
-                  <a:rPr/>
-                  <a:t> to the pseudo-residuals:</a:t>
-                </a:r>
-              </a:p>
               <a:p>
                 <a:pPr lvl="0" indent="0" marL="0">
                   <a:buNone/>
@@ -5778,20 +9148,10 @@
                 </a14:m>
               </a:p>
               <a:p>
-                <a:pPr lvl="0" indent="0" marL="0">
-                  <a:buNone/>
-                </a:pPr>
-                <a:r>
-                  <a:rPr/>
-                  <a:t>The </a:t>
-                </a:r>
-                <a:r>
-                  <a:rPr b="1"/>
-                  <a:t>shrinkage</a:t>
-                </a:r>
-                <a:r>
-                  <a:rPr/>
-                  <a:t> </a:t>
+                <a:pPr lvl="0"/>
+                <a:r>
+                  <a:rPr/>
+                  <a:t>Small </a:t>
                 </a:r>
                 <a14:m>
                   <m:oMath xmlns:m="http://schemas.openxmlformats.org/officeDocument/2006/math">
@@ -5802,7 +9162,15 @@
                 </a14:m>
                 <a:r>
                   <a:rPr/>
-                  <a:t> is essential: small </a:t>
+                  <a:t> (0.01–0.1) with </a:t>
+                </a:r>
+                <a:r>
+                  <a:rPr b="1"/>
+                  <a:t>many</a:t>
+                </a:r>
+                <a:r>
+                  <a:rPr/>
+                  <a:t> trees generalises far better than large </a:t>
                 </a:r>
                 <a14:m>
                   <m:oMath xmlns:m="http://schemas.openxmlformats.org/officeDocument/2006/math">
@@ -5813,7 +9181,14 @@
                 </a14:m>
                 <a:r>
                   <a:rPr/>
-                  <a:t> (0.01–0.1) with many trees generalises far better than large </a:t>
+                  <a:t> with few</a:t>
+                </a:r>
+              </a:p>
+              <a:p>
+                <a:pPr lvl="0"/>
+                <a:r>
+                  <a:rPr/>
+                  <a:t>Halving </a:t>
                 </a:r>
                 <a14:m>
                   <m:oMath xmlns:m="http://schemas.openxmlformats.org/officeDocument/2006/math">
@@ -5824,7 +9199,33 @@
                 </a14:m>
                 <a:r>
                   <a:rPr/>
-                  <a:t> with few. Halving </a:t>
+                  <a:t> roughly </a:t>
+                </a:r>
+                <a:r>
+                  <a:rPr b="1"/>
+                  <a:t>doubles</a:t>
+                </a:r>
+                <a:r>
+                  <a:rPr/>
+                  <a:t> the </a:t>
+                </a:r>
+                <a14:m>
+                  <m:oMath xmlns:m="http://schemas.openxmlformats.org/officeDocument/2006/math">
+                    <m:r>
+                      <m:t>M</m:t>
+                    </m:r>
+                  </m:oMath>
+                </a14:m>
+                <a:r>
+                  <a:rPr/>
+                  <a:t> you need</a:t>
+                </a:r>
+              </a:p>
+              <a:p>
+                <a:pPr lvl="0"/>
+                <a:r>
+                  <a:rPr/>
+                  <a:t>Three dials interact: </a:t>
                 </a:r>
                 <a14:m>
                   <m:oMath xmlns:m="http://schemas.openxmlformats.org/officeDocument/2006/math">
@@ -5835,7 +9236,7 @@
                 </a14:m>
                 <a:r>
                   <a:rPr/>
-                  <a:t> roughly doubles the required </a:t>
+                  <a:t>, </a:t>
                 </a:r>
                 <a14:m>
                   <m:oMath xmlns:m="http://schemas.openxmlformats.org/officeDocument/2006/math">
@@ -5846,7 +9247,77 @@
                 </a14:m>
                 <a:r>
                   <a:rPr/>
-                  <a:t>.</a:t>
+                  <a:t>, and depth </a:t>
+                </a:r>
+                <a14:m>
+                  <m:oMath xmlns:m="http://schemas.openxmlformats.org/officeDocument/2006/math">
+                    <m:r>
+                      <m:t>d</m:t>
+                    </m:r>
+                  </m:oMath>
+                </a14:m>
+                <a:r>
+                  <a:rPr/>
+                  <a:t> — where </a:t>
+                </a:r>
+                <a14:m>
+                  <m:oMath xmlns:m="http://schemas.openxmlformats.org/officeDocument/2006/math">
+                    <m:r>
+                      <m:t>d</m:t>
+                    </m:r>
+                  </m:oMath>
+                </a14:m>
+                <a:r>
+                  <a:rPr/>
+                  <a:t> caps the </a:t>
+                </a:r>
+                <a:r>
+                  <a:rPr b="1"/>
+                  <a:t>interaction order</a:t>
+                </a:r>
+                <a:r>
+                  <a:rPr/>
+                  <a:t> (</a:t>
+                </a:r>
+                <a14:m>
+                  <m:oMath xmlns:m="http://schemas.openxmlformats.org/officeDocument/2006/math">
+                    <m:r>
+                      <m:t>d</m:t>
+                    </m:r>
+                    <m:r>
+                      <m:rPr>
+                        <m:sty m:val="p"/>
+                      </m:rPr>
+                      <m:t>=</m:t>
+                    </m:r>
+                    <m:r>
+                      <m:t>1</m:t>
+                    </m:r>
+                  </m:oMath>
+                </a14:m>
+                <a:r>
+                  <a:rPr/>
+                  <a:t> is additive, </a:t>
+                </a:r>
+                <a14:m>
+                  <m:oMath xmlns:m="http://schemas.openxmlformats.org/officeDocument/2006/math">
+                    <m:r>
+                      <m:t>d</m:t>
+                    </m:r>
+                    <m:r>
+                      <m:rPr>
+                        <m:sty m:val="p"/>
+                      </m:rPr>
+                      <m:t>=</m:t>
+                    </m:r>
+                    <m:r>
+                      <m:t>2</m:t>
+                    </m:r>
+                  </m:oMath>
+                </a14:m>
+                <a:r>
+                  <a:rPr/>
+                  <a:t> allows two-way interactions)</a:t>
                 </a:r>
               </a:p>
             </p:txBody>
@@ -5858,65 +9329,7 @@
 </p:sld>
 </file>
 
-<file path=ppt/slides/slide22.xml><?xml version="1.0" encoding="UTF-8"?><p:sld xmlns:a="http://schemas.openxmlformats.org/drawingml/2006/main" xmlns:r="http://schemas.openxmlformats.org/officeDocument/2006/relationships" xmlns:p="http://schemas.openxmlformats.org/presentationml/2006/main"><p:cSld><p:spTree><p:nvGrpSpPr><p:cNvPr id="1" name="" /><p:cNvGrpSpPr /><p:nvPr /></p:nvGrpSpPr><p:grpSpPr><a:xfrm><a:off x="0" y="0" /><a:ext cx="0" cy="0" /><a:chOff x="0" y="0" /><a:chExt cx="0" cy="0" /></a:xfrm></p:grpSpPr><p:sp><p:nvSpPr><p:cNvPr id="2" name="Title 1" /><p:cNvSpPr><a:spLocks noGrp="1" /></p:cNvSpPr><p:nvPr><p:ph type="title" /></p:nvPr></p:nvSpPr><p:spPr /><p:txBody><a:bodyPr /><a:lstStyle /><a:p><a:pPr lvl="0" indent="0" marL="0"><a:buNone /></a:pPr><a:r><a:rPr /><a:t>Three interacting knobs</a:t></a:r></a:p></p:txBody></p:sp><p:graphicFrame><p:nvGraphicFramePr><p:cNvPr id="6" name="Content Placeholder 5" /><p:cNvGraphicFramePr><a:graphicFrameLocks noGrp="1" /></p:cNvGraphicFramePr><p:nvPr><p:ph idx="1" /></p:nvPr></p:nvGraphicFramePr><p:xfrm><a:off x="457200" y="1193800" /><a:ext cx="8229600" cy="3390900" /></p:xfrm><a:graphic><a:graphicData uri="http://schemas.openxmlformats.org/drawingml/2006/table"><a:tbl><a:tblPr firstRow="1" bandRow="1"><a:tableStyleId>{5C22544A-7EE6-4342-B048-85BDC9FD1C3A}</a:tableStyleId></a:tblPr><a:tblGrid><a:gridCol w="4114800" /><a:gridCol w="4114800" /></a:tblGrid><a:tr h="0"><a:tc><a:txBody><a:bodyPr /><a:lstStyle /><a:p><a:pPr lvl="0" indent="0" marL="0"><a:buNone /></a:pPr><a:r><a:rPr /><a:t>Knob</a:t></a:r></a:p></a:txBody><a:tcPr /></a:tc><a:tc><a:txBody><a:bodyPr /><a:lstStyle /><a:p><a:pPr lvl="0" indent="0" marL="0"><a:buNone /></a:pPr><a:r><a:rPr /><a:t>Controls</a:t></a:r></a:p></a:txBody><a:tcPr /></a:tc></a:tr><a:tr h="0"><a:tc><a:txBody><a:bodyPr /><a:lstStyle /><a:p><a:pPr lvl="0" indent="0" marL="0"><a:buNone /></a:pPr><a14:m><m:oMath xmlns:m="http://schemas.openxmlformats.org/officeDocument/2006/math"><m:r><m:t>ν</m:t></m:r></m:oMath></a14:m></a:p></a:txBody></a:tc><a:tc><a:txBody><a:bodyPr /><a:lstStyle /><a:p><a:pPr lvl="0" indent="0" marL="0"><a:buNone /></a:pPr><a:r><a:rPr /><a:t>learning rate — smaller generalises better</a:t></a:r></a:p></a:txBody></a:tc></a:tr><a:tr h="0"><a:tc><a:txBody><a:bodyPr /><a:lstStyle /><a:p><a:pPr lvl="0" indent="0" marL="0"><a:buNone /></a:pPr><a14:m><m:oMath xmlns:m="http://schemas.openxmlformats.org/officeDocument/2006/math"><m:r><m:t>M</m:t></m:r></m:oMath></a14:m></a:p></a:txBody></a:tc><a:tc><a:txBody><a:bodyPr /><a:lstStyle /><a:p><a:pPr lvl="0" indent="0" marL="0"><a:buNone /></a:pPr><a:r><a:rPr /><a:t>number of trees — </a:t></a:r><a:r><a:rPr b="1" /><a:t>too many overfits</a:t></a:r><a:r><a:rPr /><a:t>, unlike a forest</a:t></a:r></a:p></a:txBody></a:tc></a:tr><a:tr h="0"><a:tc><a:txBody><a:bodyPr /><a:lstStyle /><a:p><a:pPr lvl="0" indent="0" marL="0"><a:buNone /></a:pPr><a14:m><m:oMath xmlns:m="http://schemas.openxmlformats.org/officeDocument/2006/math"><m:r><m:t>d</m:t></m:r></m:oMath></a14:m></a:p></a:txBody></a:tc><a:tc><a:txBody><a:bodyPr /><a:lstStyle /><a:p><a:pPr lvl="0" indent="0" marL="0"><a:buNone /></a:pPr><a:r><a:rPr /><a:t>tree depth — maximum interaction order: </a:t></a:r><a14:m><m:oMath xmlns:m="http://schemas.openxmlformats.org/officeDocument/2006/math"><m:r><m:t>d</m:t></m:r><m:r><m:rPr><m:sty m:val="p" /></m:rPr><m:t>=</m:t></m:r><m:r><m:t>1</m:t></m:r></m:oMath></a14:m><a:r><a:rPr /><a:t> additive, </a:t></a:r><a14:m><m:oMath xmlns:m="http://schemas.openxmlformats.org/officeDocument/2006/math"><m:r><m:t>d</m:t></m:r><m:r><m:rPr><m:sty m:val="p" /></m:rPr><m:t>=</m:t></m:r><m:r><m:t>2</m:t></m:r></m:oMath></a14:m><a:r><a:rPr /><a:t> two-way</a:t></a:r></a:p></a:txBody></a:tc></a:tr></a:tbl></a:graphicData></a:graphic></p:graphicFrame></p:spTree></p:cSld></p:sld>
-</file>
-
-<file path=ppt/slides/slide23.xml><?xml version="1.0" encoding="utf-8"?>
-<p:sld xmlns:a="http://schemas.openxmlformats.org/drawingml/2006/main" xmlns:r="http://schemas.openxmlformats.org/officeDocument/2006/relationships" xmlns:p="http://schemas.openxmlformats.org/presentationml/2006/main">
-  <p:cSld>
-    <p:spTree>
-      <p:nvGrpSpPr>
-        <p:cNvPr id="1" name=""/>
-        <p:cNvGrpSpPr/>
-        <p:nvPr/>
-      </p:nvGrpSpPr>
-      <p:grpSpPr>
-        <a:xfrm>
-          <a:off x="0" y="0"/>
-          <a:ext cx="0" cy="0"/>
-          <a:chOff x="0" y="0"/>
-          <a:chExt cx="0" cy="0"/>
-        </a:xfrm>
-      </p:grpSpPr>
-      <p:sp>
-        <p:nvSpPr>
-          <p:cNvPr id="3" name="Content Placeholder 2"/>
-          <p:cNvSpPr>
-            <a:spLocks noGrp="1"/>
-          </p:cNvSpPr>
-          <p:nvPr>
-            <p:ph idx="1"/>
-          </p:nvPr>
-        </p:nvSpPr>
-        <p:spPr/>
-        <p:txBody>
-          <a:bodyPr/>
-          <a:lstStyle/>
-          <a:p>
-            <a:pPr lvl="0" indent="0" marL="0">
-              <a:buNone/>
-            </a:pPr>
-            <a:r>
-              <a:rPr/>
-              <a:t>A random forest does not overfit as you add trees. </a:t>
-            </a:r>
-            <a:r>
-              <a:rPr b="1"/>
-              <a:t>A boosted model does.</a:t>
-            </a:r>
-            <a:r>
-              <a:rPr/>
-              <a:t> The stopping point must be chosen on validation data.</a:t>
-            </a:r>
-          </a:p>
-        </p:txBody>
-      </p:sp>
-    </p:spTree>
-  </p:cSld>
-</p:sld>
-</file>
-
-<file path=ppt/slides/slide24.xml><?xml version="1.0" encoding="utf-8"?>
+<file path=ppt/slides/slide38.xml><?xml version="1.0" encoding="utf-8"?>
 <p:sld xmlns:a="http://schemas.openxmlformats.org/drawingml/2006/main" xmlns:r="http://schemas.openxmlformats.org/officeDocument/2006/relationships" xmlns:p="http://schemas.openxmlformats.org/presentationml/2006/main">
   <p:cSld>
     <p:spTree>
@@ -5953,7 +9366,293 @@
             </a:pPr>
             <a:r>
               <a:rPr/>
-              <a:t>What XGBoost and LightGBM add</a:t>
+              <a:t>The learning-rate picture</a:t>
+            </a:r>
+          </a:p>
+        </p:txBody>
+      </p:sp>
+      <p:pic>
+        <p:nvPicPr>
+          <p:cNvPr descr="slides_files/figure-pptx/cell-10-output-1.png" id="0" name="Picture 1"/>
+          <p:cNvPicPr>
+            <a:picLocks noGrp="1" noChangeAspect="1"/>
+          </p:cNvPicPr>
+          <p:nvPr/>
+        </p:nvPicPr>
+        <p:blipFill>
+          <a:blip r:embed="rId2"/>
+          <a:stretch>
+            <a:fillRect/>
+          </a:stretch>
+        </p:blipFill>
+        <p:spPr bwMode="auto">
+          <a:xfrm>
+            <a:off x="723900" y="1193800"/>
+            <a:ext cx="7696200" cy="3390900"/>
+          </a:xfrm>
+          <a:prstGeom prst="rect">
+            <a:avLst/>
+          </a:prstGeom>
+          <a:noFill/>
+          <a:ln w="9525">
+            <a:noFill/>
+            <a:headEnd/>
+            <a:tailEnd/>
+          </a:ln>
+        </p:spPr>
+      </p:pic>
+    </p:spTree>
+  </p:cSld>
+</p:sld>
+</file>
+
+<file path=ppt/slides/slide39.xml><?xml version="1.0" encoding="utf-8"?>
+<p:sld xmlns:a="http://schemas.openxmlformats.org/drawingml/2006/main" xmlns:r="http://schemas.openxmlformats.org/officeDocument/2006/relationships" xmlns:p="http://schemas.openxmlformats.org/presentationml/2006/main">
+  <p:cSld>
+    <p:spTree>
+      <p:nvGrpSpPr>
+        <p:cNvPr id="1" name=""/>
+        <p:cNvGrpSpPr/>
+        <p:nvPr/>
+      </p:nvGrpSpPr>
+      <p:grpSpPr>
+        <a:xfrm>
+          <a:off x="0" y="0"/>
+          <a:ext cx="0" cy="0"/>
+          <a:chOff x="0" y="0"/>
+          <a:chExt cx="0" cy="0"/>
+        </a:xfrm>
+      </p:grpSpPr>
+      <mc:AlternateContent xmlns:mc="http://schemas.openxmlformats.org/markup-compatibility/2006">
+        <mc:Choice xmlns:a14="http://schemas.microsoft.com/office/drawing/2010/main" Requires="a14">
+          <p:sp>
+            <p:nvSpPr>
+              <p:cNvPr id="3" name="Content Placeholder 2"/>
+              <p:cNvSpPr>
+                <a:spLocks noGrp="1"/>
+              </p:cNvSpPr>
+              <p:nvPr>
+                <p:ph idx="1"/>
+              </p:nvPr>
+            </p:nvSpPr>
+            <p:spPr/>
+            <p:txBody>
+              <a:bodyPr/>
+              <a:lstStyle/>
+              <a:p>
+                <a:pPr lvl="0" indent="0" marL="0">
+                  <a:buNone/>
+                </a:pPr>
+                <a:r>
+                  <a:rPr/>
+                  <a:t>Dots mark each curve’s peak. The fast learner (</a:t>
+                </a:r>
+                <a14:m>
+                  <m:oMath xmlns:m="http://schemas.openxmlformats.org/officeDocument/2006/math">
+                    <m:r>
+                      <m:t>ν</m:t>
+                    </m:r>
+                    <m:r>
+                      <m:rPr>
+                        <m:sty m:val="p"/>
+                      </m:rPr>
+                      <m:t>=</m:t>
+                    </m:r>
+                    <m:r>
+                      <m:t>0.5</m:t>
+                    </m:r>
+                  </m:oMath>
+                </a14:m>
+                <a:r>
+                  <a:rPr/>
+                  <a:t>) peaks early and then </a:t>
+                </a:r>
+                <a:r>
+                  <a:rPr b="1"/>
+                  <a:t>decays</a:t>
+                </a:r>
+                <a:r>
+                  <a:rPr/>
+                  <a:t> — it is overfitting one stage at a time.</a:t>
+                </a:r>
+              </a:p>
+            </p:txBody>
+          </p:sp>
+        </mc:Choice>
+      </mc:AlternateContent>
+    </p:spTree>
+  </p:cSld>
+</p:sld>
+</file>
+
+<file path=ppt/slides/slide4.xml><?xml version="1.0" encoding="utf-8"?>
+<p:sld xmlns:a="http://schemas.openxmlformats.org/drawingml/2006/main" xmlns:r="http://schemas.openxmlformats.org/officeDocument/2006/relationships" xmlns:p="http://schemas.openxmlformats.org/presentationml/2006/main">
+  <p:cSld>
+    <p:spTree>
+      <p:nvGrpSpPr>
+        <p:cNvPr id="1" name=""/>
+        <p:cNvGrpSpPr/>
+        <p:nvPr/>
+      </p:nvGrpSpPr>
+      <p:grpSpPr>
+        <a:xfrm>
+          <a:off x="0" y="0"/>
+          <a:ext cx="0" cy="0"/>
+          <a:chOff x="0" y="0"/>
+          <a:chExt cx="0" cy="0"/>
+        </a:xfrm>
+      </p:grpSpPr>
+      <p:sp>
+        <p:nvSpPr>
+          <p:cNvPr id="2" name="Title 1"/>
+          <p:cNvSpPr>
+            <a:spLocks noGrp="1"/>
+          </p:cNvSpPr>
+          <p:nvPr>
+            <p:ph type="title"/>
+          </p:nvPr>
+        </p:nvSpPr>
+        <p:spPr/>
+        <p:txBody>
+          <a:bodyPr/>
+          <a:lstStyle/>
+          <a:p>
+            <a:pPr lvl="0" indent="0" marL="0">
+              <a:buNone/>
+            </a:pPr>
+            <a:r>
+              <a:rPr/>
+              <a:t>Learning objectives</a:t>
+            </a:r>
+          </a:p>
+        </p:txBody>
+      </p:sp>
+      <p:sp>
+        <p:nvSpPr>
+          <p:cNvPr id="3" name="Content Placeholder 2"/>
+          <p:cNvSpPr>
+            <a:spLocks noGrp="1"/>
+          </p:cNvSpPr>
+          <p:nvPr>
+            <p:ph idx="1"/>
+          </p:nvPr>
+        </p:nvSpPr>
+        <p:spPr/>
+        <p:txBody>
+          <a:bodyPr/>
+          <a:lstStyle/>
+          <a:p>
+            <a:pPr lvl="0"/>
+            <a:r>
+              <a:rPr/>
+              <a:t>Write the greedy splitting objective and say why the </a:t>
+            </a:r>
+            <a:r>
+              <a:rPr b="1"/>
+              <a:t>global</a:t>
+            </a:r>
+            <a:r>
+              <a:rPr/>
+              <a:t> problem is infeasible</a:t>
+            </a:r>
+          </a:p>
+          <a:p>
+            <a:pPr lvl="0"/>
+            <a:r>
+              <a:rPr/>
+              <a:t>Explain why misclassification error is a poor </a:t>
+            </a:r>
+            <a:r>
+              <a:rPr i="1"/>
+              <a:t>growing</a:t>
+            </a:r>
+            <a:r>
+              <a:rPr/>
+              <a:t> criterion but the right </a:t>
+            </a:r>
+            <a:r>
+              <a:rPr i="1"/>
+              <a:t>pruning</a:t>
+            </a:r>
+            <a:r>
+              <a:rPr/>
+              <a:t> one</a:t>
+            </a:r>
+          </a:p>
+          <a:p>
+            <a:pPr lvl="0"/>
+            <a:r>
+              <a:rPr b="1"/>
+              <a:t>Derive</a:t>
+            </a:r>
+            <a:r>
+              <a:rPr/>
+              <a:t> the bagging variance formula and read off why random forests subsample features</a:t>
+            </a:r>
+          </a:p>
+          <a:p>
+            <a:pPr lvl="0"/>
+            <a:r>
+              <a:rPr/>
+              <a:t>Describe boosting as gradient descent on a loss, in function space</a:t>
+            </a:r>
+          </a:p>
+          <a:p>
+            <a:pPr lvl="0"/>
+            <a:r>
+              <a:rPr/>
+              <a:t>Choose an interpretation tool, and state precisely </a:t>
+            </a:r>
+            <a:r>
+              <a:rPr b="1"/>
+              <a:t>what it does not tell you</a:t>
+            </a:r>
+          </a:p>
+        </p:txBody>
+      </p:sp>
+    </p:spTree>
+  </p:cSld>
+</p:sld>
+</file>
+
+<file path=ppt/slides/slide40.xml><?xml version="1.0" encoding="utf-8"?>
+<p:sld xmlns:a="http://schemas.openxmlformats.org/drawingml/2006/main" xmlns:r="http://schemas.openxmlformats.org/officeDocument/2006/relationships" xmlns:p="http://schemas.openxmlformats.org/presentationml/2006/main">
+  <p:cSld>
+    <p:spTree>
+      <p:nvGrpSpPr>
+        <p:cNvPr id="1" name=""/>
+        <p:cNvGrpSpPr/>
+        <p:nvPr/>
+      </p:nvGrpSpPr>
+      <p:grpSpPr>
+        <a:xfrm>
+          <a:off x="0" y="0"/>
+          <a:ext cx="0" cy="0"/>
+          <a:chOff x="0" y="0"/>
+          <a:chExt cx="0" cy="0"/>
+        </a:xfrm>
+      </p:grpSpPr>
+      <p:sp>
+        <p:nvSpPr>
+          <p:cNvPr id="2" name="Title 1"/>
+          <p:cNvSpPr>
+            <a:spLocks noGrp="1"/>
+          </p:cNvSpPr>
+          <p:nvPr>
+            <p:ph type="title"/>
+          </p:nvPr>
+        </p:nvSpPr>
+        <p:spPr/>
+        <p:txBody>
+          <a:bodyPr/>
+          <a:lstStyle/>
+          <a:p>
+            <a:pPr lvl="0" indent="0" marL="0">
+              <a:buNone/>
+            </a:pPr>
+            <a:r>
+              <a:rPr/>
+              <a:t>What the modern libraries add</a:t>
             </a:r>
           </a:p>
         </p:txBody>
@@ -5980,7 +9679,7 @@
                 </a:pPr>
                 <a:r>
                   <a:rPr/>
-                  <a:t>A second-order expansion and an explicit penalty:</a:t>
+                  <a:t>XGBoost and LightGBM expand the loss to second order and penalise the tree explicitly:</a:t>
                 </a:r>
               </a:p>
               <a:p>
@@ -6208,20 +9907,15 @@
                           </m:sSub>
                         </m:e>
                       </m:d>
-                    </m:oMath>
-                  </m:oMathPara>
-                </a14:m>
-              </a:p>
-              <a:p>
-                <a:pPr lvl="0" indent="0" marL="0">
-                  <a:buNone/>
-                </a:pPr>
-                <a14:m>
-                  <m:oMathPara xmlns:m="http://schemas.openxmlformats.org/officeDocument/2006/math">
-                    <m:oMathParaPr>
-                      <m:jc m:val="center"/>
-                    </m:oMathParaPr>
-                    <m:oMath>
+                      <m:r>
+                        <m:rPr>
+                          <m:sty m:val="p"/>
+                        </m:rPr>
+                        <m:t>,</m:t>
+                      </m:r>
+                      <m:r>
+                        <m:t>  </m:t>
+                      </m:r>
                       <m:r>
                         <m:t>Ω</m:t>
                       </m:r>
@@ -6318,7 +10012,7 @@
                 </a:pPr>
                 <a:r>
                   <a:rPr/>
-                  <a:t>Solving for the optimal leaf weights gives</a:t>
+                  <a:t>Solving for the optimal leaf weight:</a:t>
                 </a:r>
               </a:p>
               <a:p>
@@ -6415,7 +10109,58 @@
                 </a:pPr>
                 <a:r>
                   <a:rPr/>
-                  <a:t>Regularisation reappearing, in a third guise.</a:t>
+                  <a:t>Look at that denominator. </a:t>
+                </a:r>
+                <a:r>
+                  <a:rPr b="1"/>
+                  <a:t>That is ridge</a:t>
+                </a:r>
+                <a:r>
+                  <a:rPr/>
+                  <a:t>, in a third guise — the same </a:t>
+                </a:r>
+                <a14:m>
+                  <m:oMath xmlns:m="http://schemas.openxmlformats.org/officeDocument/2006/math">
+                    <m:r>
+                      <m:rPr>
+                        <m:sty m:val="p"/>
+                      </m:rPr>
+                      <m:t>+</m:t>
+                    </m:r>
+                    <m:r>
+                      <m:t>λ</m:t>
+                    </m:r>
+                  </m:oMath>
+                </a14:m>
+                <a:r>
+                  <a:rPr/>
+                  <a:t> that made </a:t>
+                </a:r>
+                <a14:m>
+                  <m:oMath xmlns:m="http://schemas.openxmlformats.org/officeDocument/2006/math">
+                    <m:sSup>
+                      <m:e>
+                        <m:r>
+                          <m:t>X</m:t>
+                        </m:r>
+                      </m:e>
+                      <m:sup>
+                        <m:r>
+                          <m:rPr>
+                            <m:sty m:val="p"/>
+                          </m:rPr>
+                          <m:t>⊤</m:t>
+                        </m:r>
+                      </m:sup>
+                    </m:sSup>
+                    <m:r>
+                      <m:t>X</m:t>
+                    </m:r>
+                  </m:oMath>
+                </a14:m>
+                <a:r>
+                  <a:rPr/>
+                  <a:t> invertible in Session 05, now stabilising a leaf.</a:t>
                 </a:r>
               </a:p>
             </p:txBody>
@@ -6427,7 +10172,7 @@
 </p:sld>
 </file>
 
-<file path=ppt/slides/slide25.xml><?xml version="1.0" encoding="utf-8"?>
+<file path=ppt/slides/slide41.xml><?xml version="1.0" encoding="utf-8"?>
 <p:sld xmlns:a="http://schemas.openxmlformats.org/drawingml/2006/main" xmlns:r="http://schemas.openxmlformats.org/officeDocument/2006/relationships" xmlns:p="http://schemas.openxmlformats.org/presentationml/2006/main">
   <p:cSld>
     <p:spTree>
@@ -6469,7 +10214,7 @@
             </a:pPr>
             <a:r>
               <a:rPr/>
-              <a:t>7.5 Recovering interpretation</a:t>
+              <a:t>6 · Recovering interpretation</a:t>
             </a:r>
           </a:p>
         </p:txBody>
@@ -6479,7 +10224,10 @@
 </p:sld>
 </file>
 
-<file path=ppt/slides/slide26.xml><?xml version="1.0" encoding="utf-8"?>
+<file path=ppt/slides/slide42.xml><?xml version="1.0" encoding="UTF-8"?><p:sld xmlns:a="http://schemas.openxmlformats.org/drawingml/2006/main" xmlns:r="http://schemas.openxmlformats.org/officeDocument/2006/relationships" xmlns:p="http://schemas.openxmlformats.org/presentationml/2006/main"><p:cSld><p:spTree><p:nvGrpSpPr><p:cNvPr id="1" name="" /><p:cNvGrpSpPr /><p:nvPr /></p:nvGrpSpPr><p:grpSpPr><a:xfrm><a:off x="0" y="0" /><a:ext cx="0" cy="0" /><a:chOff x="0" y="0" /><a:chExt cx="0" cy="0" /></a:xfrm></p:grpSpPr><p:sp><p:nvSpPr><p:cNvPr id="2" name="Title 1" /><p:cNvSpPr><a:spLocks noGrp="1" /></p:cNvSpPr><p:nvPr><p:ph type="title" /></p:nvPr></p:nvSpPr><p:spPr /><p:txBody><a:bodyPr /><a:lstStyle /><a:p><a:pPr lvl="0" indent="0" marL="0"><a:buNone /></a:pPr><a:r><a:rPr /><a:t>Five tools, and what each is for</a:t></a:r></a:p></p:txBody></p:sp><p:graphicFrame><p:nvGraphicFramePr><p:cNvPr id="6" name="Content Placeholder 5" /><p:cNvGraphicFramePr><a:graphicFrameLocks noGrp="1" /></p:cNvGraphicFramePr><p:nvPr><p:ph idx="1" /></p:nvPr></p:nvGraphicFramePr><p:xfrm><a:off x="457200" y="1193800" /><a:ext cx="8229600" cy="3390900" /></p:xfrm><a:graphic><a:graphicData uri="http://schemas.openxmlformats.org/drawingml/2006/table"><a:tbl><a:tblPr firstRow="1" bandRow="1"><a:tableStyleId>{5C22544A-7EE6-4342-B048-85BDC9FD1C3A}</a:tableStyleId></a:tblPr><a:tblGrid><a:gridCol w="2743200" /><a:gridCol w="2743200" /><a:gridCol w="2743200" /></a:tblGrid><a:tr h="0"><a:tc><a:txBody><a:bodyPr /><a:lstStyle /><a:p><a:pPr lvl="0" indent="0" marL="0"><a:buNone /></a:pPr><a:r><a:rPr /><a:t>Tool</a:t></a:r></a:p></a:txBody><a:tcPr /></a:tc><a:tc><a:txBody><a:bodyPr /><a:lstStyle /><a:p><a:pPr lvl="0" indent="0" marL="0"><a:buNone /></a:pPr><a:r><a:rPr /><a:t>What it answers</a:t></a:r></a:p></a:txBody><a:tcPr /></a:tc><a:tc><a:txBody><a:bodyPr /><a:lstStyle /><a:p><a:pPr lvl="0" indent="0" marL="0"><a:buNone /></a:pPr><a:r><a:rPr /><a:t>The caveat</a:t></a:r></a:p></a:txBody><a:tcPr /></a:tc></a:tr><a:tr h="0"><a:tc><a:txBody><a:bodyPr /><a:lstStyle /><a:p><a:pPr lvl="0" indent="0" marL="0"><a:buNone /></a:pPr><a:r><a:rPr /><a:t>Impurity importance</a:t></a:r></a:p></a:txBody></a:tc><a:tc><a:txBody><a:bodyPr /><a:lstStyle /><a:p><a:pPr lvl="0" indent="0" marL="0"><a:buNone /></a:pPr><a:r><a:rPr /><a:t>how often, and how usefully, a feature was split on</a:t></a:r></a:p></a:txBody></a:tc><a:tc><a:txBody><a:bodyPr /><a:lstStyle /><a:p><a:pPr lvl="0" indent="0" marL="0"><a:buNone /></a:pPr><a:r><a:rPr b="1" /><a:t>biased</a:t></a:r><a:r><a:rPr /><a:t> toward high-cardinality features; in-sample</a:t></a:r></a:p></a:txBody></a:tc></a:tr><a:tr h="0"><a:tc><a:txBody><a:bodyPr /><a:lstStyle /><a:p><a:pPr lvl="0" indent="0" marL="0"><a:buNone /></a:pPr><a:r><a:rPr /><a:t>Permutation importance</a:t></a:r></a:p></a:txBody></a:tc><a:tc><a:txBody><a:bodyPr /><a:lstStyle /><a:p><a:pPr lvl="0" indent="0" marL="0"><a:buNone /></a:pPr><a:r><a:rPr /><a:t>how much test error rises when it is scrambled</a:t></a:r></a:p></a:txBody></a:tc><a:tc><a:txBody><a:bodyPr /><a:lstStyle /><a:p><a:pPr lvl="0" indent="0" marL="0"><a:buNone /></a:pPr><a:r><a:rPr /><a:t>breaks under </a:t></a:r><a:r><a:rPr b="1" /><a:t>correlated</a:t></a:r><a:r><a:rPr /><a:t> features</a:t></a:r></a:p></a:txBody></a:tc></a:tr><a:tr h="0"><a:tc><a:txBody><a:bodyPr /><a:lstStyle /><a:p><a:pPr lvl="0" indent="0" marL="0"><a:buNone /></a:pPr><a:r><a:rPr /><a:t>Partial dependence</a:t></a:r></a:p></a:txBody></a:tc><a:tc><a:txBody><a:bodyPr /><a:lstStyle /><a:p><a:pPr lvl="0" indent="0" marL="0"><a:buNone /></a:pPr><a:r><a:rPr /><a:t>the average marginal relationship</a:t></a:r></a:p></a:txBody></a:tc><a:tc><a:txBody><a:bodyPr /><a:lstStyle /><a:p><a:pPr lvl="0" indent="0" marL="0"><a:buNone /></a:pPr><a:r><a:rPr /><a:t>assumes </a:t></a:r><a14:m><m:oMath xmlns:m="http://schemas.openxmlformats.org/officeDocument/2006/math"><m:sSub><m:e><m:r><m:t>x</m:t></m:r></m:e><m:sub><m:r><m:t>S</m:t></m:r></m:sub></m:sSub><m:r><m:rPr><m:sty m:val="p" /></m:rPr><m:t>⟂</m:t></m:r><m:sSub><m:e><m:r><m:t>x</m:t></m:r></m:e><m:sub><m:r><m:t>C</m:t></m:r></m:sub></m:sSub></m:oMath></a14:m><a:r><a:rPr /><a:t>; hides heterogeneity</a:t></a:r></a:p></a:txBody></a:tc></a:tr><a:tr h="0"><a:tc><a:txBody><a:bodyPr /><a:lstStyle /><a:p><a:pPr lvl="0" indent="0" marL="0"><a:buNone /></a:pPr><a:r><a:rPr /><a:t>ICE curves</a:t></a:r></a:p></a:txBody></a:tc><a:tc><a:txBody><a:bodyPr /><a:lstStyle /><a:p><a:pPr lvl="0" indent="0" marL="0"><a:buNone /></a:pPr><a:r><a:rPr /><a:t>the per-observation version</a:t></a:r></a:p></a:txBody></a:tc><a:tc><a:txBody><a:bodyPr /><a:lstStyle /><a:p><a:pPr lvl="0" indent="0" marL="0"><a:buNone /></a:pPr><a:r><a:rPr /><a:t>reveals what PDP averages away</a:t></a:r></a:p></a:txBody></a:tc></a:tr><a:tr h="0"><a:tc><a:txBody><a:bodyPr /><a:lstStyle /><a:p><a:pPr lvl="0" indent="0" marL="0"><a:buNone /></a:pPr><a:r><a:rPr /><a:t>SHAP</a:t></a:r></a:p></a:txBody></a:tc><a:tc><a:txBody><a:bodyPr /><a:lstStyle /><a:p><a:pPr lvl="0" indent="0" marL="0"><a:buNone /></a:pPr><a:r><a:rPr /><a:t>additive attribution, per prediction</a:t></a:r></a:p></a:txBody></a:tc><a:tc><a:txBody><a:bodyPr /><a:lstStyle /><a:p><a:pPr lvl="0" indent="0" marL="0"><a:buNone /></a:pPr><a:r><a:rPr /><a:t>axiomatically unique, costly, still a model summary</a:t></a:r></a:p></a:txBody></a:tc></a:tr></a:tbl></a:graphicData></a:graphic></p:graphicFrame></p:spTree></p:cSld></p:sld>
+</file>
+
+<file path=ppt/slides/slide43.xml><?xml version="1.0" encoding="utf-8"?>
 <p:sld xmlns:a="http://schemas.openxmlformats.org/drawingml/2006/main" xmlns:r="http://schemas.openxmlformats.org/officeDocument/2006/relationships" xmlns:p="http://schemas.openxmlformats.org/presentationml/2006/main">
   <p:cSld>
     <p:spTree>
@@ -6516,242 +10264,102 @@
             </a:pPr>
             <a:r>
               <a:rPr/>
-              <a:t>The five tools</a:t>
+              <a:t>The impurity bias is not theoretical</a:t>
             </a:r>
           </a:p>
         </p:txBody>
       </p:sp>
-      <p:graphicFrame>
-        <p:nvGraphicFramePr>
-          <p:cNvPr id="6" name="Content Placeholder 5"/>
-          <p:cNvGraphicFramePr>
-            <a:graphicFrameLocks noGrp="1"/>
-          </p:cNvGraphicFramePr>
-          <p:nvPr>
-            <p:ph idx="1"/>
-          </p:nvPr>
-        </p:nvGraphicFramePr>
-        <p:xfrm>
-          <a:off x="457200" y="1193800"/>
-          <a:ext cx="8229600" cy="3390900"/>
-        </p:xfrm>
-        <a:graphic>
-          <a:graphicData uri="http://schemas.openxmlformats.org/drawingml/2006/table">
-            <a:tbl>
-              <a:tblPr firstRow="1" bandRow="1">
-                <a:tableStyleId>{5C22544A-7EE6-4342-B048-85BDC9FD1C3A}</a:tableStyleId>
-              </a:tblPr>
-              <a:tblGrid>
-                <a:gridCol w="4114800"/>
-                <a:gridCol w="4114800"/>
-              </a:tblGrid>
-              <a:tr h="0">
-                <a:tc>
-                  <a:txBody>
-                    <a:bodyPr/>
-                    <a:lstStyle/>
-                    <a:p>
-                      <a:pPr lvl="0" indent="0" marL="0">
-                        <a:buNone/>
-                      </a:pPr>
-                      <a:r>
-                        <a:rPr/>
-                        <a:t>Method</a:t>
-                      </a:r>
-                    </a:p>
-                  </a:txBody>
-                  <a:tcPr/>
-                </a:tc>
-                <a:tc>
-                  <a:txBody>
-                    <a:bodyPr/>
-                    <a:lstStyle/>
-                    <a:p>
-                      <a:pPr lvl="0" indent="0" marL="0">
-                        <a:buNone/>
-                      </a:pPr>
-                      <a:r>
-                        <a:rPr/>
-                        <a:t>What it answers</a:t>
-                      </a:r>
-                    </a:p>
-                  </a:txBody>
-                  <a:tcPr/>
-                </a:tc>
-              </a:tr>
-              <a:tr h="0">
-                <a:tc>
-                  <a:txBody>
-                    <a:bodyPr/>
-                    <a:lstStyle/>
-                    <a:p>
-                      <a:pPr lvl="0" indent="0" marL="0">
-                        <a:buNone/>
-                      </a:pPr>
-                      <a:r>
-                        <a:rPr/>
-                        <a:t>Impurity importance</a:t>
-                      </a:r>
-                    </a:p>
-                  </a:txBody>
-                </a:tc>
-                <a:tc>
-                  <a:txBody>
-                    <a:bodyPr/>
-                    <a:lstStyle/>
-                    <a:p>
-                      <a:pPr lvl="0" indent="0" marL="0">
-                        <a:buNone/>
-                      </a:pPr>
-                      <a:r>
-                        <a:rPr/>
-                        <a:t>how often and how usefully a feature was split on</a:t>
-                      </a:r>
-                    </a:p>
-                  </a:txBody>
-                </a:tc>
-              </a:tr>
-              <a:tr h="0">
-                <a:tc>
-                  <a:txBody>
-                    <a:bodyPr/>
-                    <a:lstStyle/>
-                    <a:p>
-                      <a:pPr lvl="0" indent="0" marL="0">
-                        <a:buNone/>
-                      </a:pPr>
-                      <a:r>
-                        <a:rPr b="1"/>
-                        <a:t>Permutation importance</a:t>
-                      </a:r>
-                    </a:p>
-                  </a:txBody>
-                </a:tc>
-                <a:tc>
-                  <a:txBody>
-                    <a:bodyPr/>
-                    <a:lstStyle/>
-                    <a:p>
-                      <a:pPr lvl="0" indent="0" marL="0">
-                        <a:buNone/>
-                      </a:pPr>
-                      <a:r>
-                        <a:rPr/>
-                        <a:t>how much test error rises when the feature is scrambled</a:t>
-                      </a:r>
-                    </a:p>
-                  </a:txBody>
-                </a:tc>
-              </a:tr>
-              <a:tr h="0">
-                <a:tc>
-                  <a:txBody>
-                    <a:bodyPr/>
-                    <a:lstStyle/>
-                    <a:p>
-                      <a:pPr lvl="0" indent="0" marL="0">
-                        <a:buNone/>
-                      </a:pPr>
-                      <a:r>
-                        <a:rPr/>
-                        <a:t>Partial dependence</a:t>
-                      </a:r>
-                    </a:p>
-                  </a:txBody>
-                </a:tc>
-                <a:tc>
-                  <a:txBody>
-                    <a:bodyPr/>
-                    <a:lstStyle/>
-                    <a:p>
-                      <a:pPr lvl="0" indent="0" marL="0">
-                        <a:buNone/>
-                      </a:pPr>
-                      <a:r>
-                        <a:rPr/>
-                        <a:t>average marginal relationship</a:t>
-                      </a:r>
-                    </a:p>
-                  </a:txBody>
-                </a:tc>
-              </a:tr>
-              <a:tr h="0">
-                <a:tc>
-                  <a:txBody>
-                    <a:bodyPr/>
-                    <a:lstStyle/>
-                    <a:p>
-                      <a:pPr lvl="0" indent="0" marL="0">
-                        <a:buNone/>
-                      </a:pPr>
-                      <a:r>
-                        <a:rPr/>
-                        <a:t>ICE curves</a:t>
-                      </a:r>
-                    </a:p>
-                  </a:txBody>
-                </a:tc>
-                <a:tc>
-                  <a:txBody>
-                    <a:bodyPr/>
-                    <a:lstStyle/>
-                    <a:p>
-                      <a:pPr lvl="0" indent="0" marL="0">
-                        <a:buNone/>
-                      </a:pPr>
-                      <a:r>
-                        <a:rPr/>
-                        <a:t>the per-observation version of a PDP</a:t>
-                      </a:r>
-                    </a:p>
-                  </a:txBody>
-                </a:tc>
-              </a:tr>
-              <a:tr h="0">
-                <a:tc>
-                  <a:txBody>
-                    <a:bodyPr/>
-                    <a:lstStyle/>
-                    <a:p>
-                      <a:pPr lvl="0" indent="0" marL="0">
-                        <a:buNone/>
-                      </a:pPr>
-                      <a:r>
-                        <a:rPr b="1"/>
-                        <a:t>SHAP</a:t>
-                      </a:r>
-                    </a:p>
-                  </a:txBody>
-                </a:tc>
-                <a:tc>
-                  <a:txBody>
-                    <a:bodyPr/>
-                    <a:lstStyle/>
-                    <a:p>
-                      <a:pPr lvl="0" indent="0" marL="0">
-                        <a:buNone/>
-                      </a:pPr>
-                      <a:r>
-                        <a:rPr/>
-                        <a:t>additive attribution per prediction, from cooperative game theory</a:t>
-                      </a:r>
-                    </a:p>
-                  </a:txBody>
-                </a:tc>
-              </a:tr>
-            </a:tbl>
-          </a:graphicData>
-        </a:graphic>
-      </p:graphicFrame>
+      <p:pic>
+        <p:nvPicPr>
+          <p:cNvPr descr="slides_files/figure-pptx/cell-11-output-1.png" id="0" name="Picture 1"/>
+          <p:cNvPicPr>
+            <a:picLocks noGrp="1" noChangeAspect="1"/>
+          </p:cNvPicPr>
+          <p:nvPr/>
+        </p:nvPicPr>
+        <p:blipFill>
+          <a:blip r:embed="rId2"/>
+          <a:stretch>
+            <a:fillRect/>
+          </a:stretch>
+        </p:blipFill>
+        <p:spPr bwMode="auto">
+          <a:xfrm>
+            <a:off x="457200" y="1308100"/>
+            <a:ext cx="8229600" cy="3162300"/>
+          </a:xfrm>
+          <a:prstGeom prst="rect">
+            <a:avLst/>
+          </a:prstGeom>
+          <a:noFill/>
+          <a:ln w="9525">
+            <a:noFill/>
+            <a:headEnd/>
+            <a:tailEnd/>
+          </a:ln>
+        </p:spPr>
+      </p:pic>
     </p:spTree>
   </p:cSld>
 </p:sld>
 </file>
 
-<file path=ppt/slides/slide27.xml><?xml version="1.0" encoding="UTF-8"?><p:sld xmlns:a="http://schemas.openxmlformats.org/drawingml/2006/main" xmlns:r="http://schemas.openxmlformats.org/officeDocument/2006/relationships" xmlns:p="http://schemas.openxmlformats.org/presentationml/2006/main"><p:cSld><p:spTree><p:nvGrpSpPr><p:cNvPr id="1" name="" /><p:cNvGrpSpPr /><p:nvPr /></p:nvGrpSpPr><p:grpSpPr><a:xfrm><a:off x="0" y="0" /><a:ext cx="0" cy="0" /><a:chOff x="0" y="0" /><a:chExt cx="0" cy="0" /></a:xfrm></p:grpSpPr><p:sp><p:nvSpPr><p:cNvPr id="2" name="Title 1" /><p:cNvSpPr><a:spLocks noGrp="1" /></p:cNvSpPr><p:nvPr><p:ph type="title" /></p:nvPr></p:nvSpPr><p:spPr /><p:txBody><a:bodyPr /><a:lstStyle /><a:p><a:pPr lvl="0" indent="0" marL="0"><a:buNone /></a:pPr><a:r><a:rPr /><a:t>And their caveats</a:t></a:r></a:p></p:txBody></p:sp><p:graphicFrame><p:nvGraphicFramePr><p:cNvPr id="6" name="Content Placeholder 5" /><p:cNvGraphicFramePr><a:graphicFrameLocks noGrp="1" /></p:cNvGraphicFramePr><p:nvPr><p:ph idx="1" /></p:nvPr></p:nvGraphicFramePr><p:xfrm><a:off x="457200" y="1193800" /><a:ext cx="8229600" cy="3390900" /></p:xfrm><a:graphic><a:graphicData uri="http://schemas.openxmlformats.org/drawingml/2006/table"><a:tbl><a:tblPr firstRow="1" bandRow="1"><a:tableStyleId>{5C22544A-7EE6-4342-B048-85BDC9FD1C3A}</a:tableStyleId></a:tblPr><a:tblGrid><a:gridCol w="4114800" /><a:gridCol w="4114800" /></a:tblGrid><a:tr h="0"><a:tc><a:txBody><a:bodyPr /><a:lstStyle /><a:p><a:pPr lvl="0" indent="0" marL="0"><a:buNone /></a:pPr><a:r><a:rPr /><a:t>Method</a:t></a:r></a:p></a:txBody><a:tcPr /></a:tc><a:tc><a:txBody><a:bodyPr /><a:lstStyle /><a:p><a:pPr lvl="0" indent="0" marL="0"><a:buNone /></a:pPr><a:r><a:rPr /><a:t>Caveat</a:t></a:r></a:p></a:txBody><a:tcPr /></a:tc></a:tr><a:tr h="0"><a:tc><a:txBody><a:bodyPr /><a:lstStyle /><a:p><a:pPr lvl="0" indent="0" marL="0"><a:buNone /></a:pPr><a:r><a:rPr /><a:t>Impurity importance</a:t></a:r></a:p></a:txBody></a:tc><a:tc><a:txBody><a:bodyPr /><a:lstStyle /><a:p><a:pPr lvl="0" indent="0" marL="0"><a:buNone /></a:pPr><a:r><a:rPr /><a:t>Biased toward high-cardinality features; computed </a:t></a:r><a:r><a:rPr b="1" /><a:t>in-sample</a:t></a:r></a:p></a:txBody></a:tc></a:tr><a:tr h="0"><a:tc><a:txBody><a:bodyPr /><a:lstStyle /><a:p><a:pPr lvl="0" indent="0" marL="0"><a:buNone /></a:pPr><a:r><a:rPr b="1" /><a:t>Permutation importance</a:t></a:r></a:p></a:txBody></a:tc><a:tc><a:txBody><a:bodyPr /><a:lstStyle /><a:p><a:pPr lvl="0" indent="0" marL="0"><a:buNone /></a:pPr><a:r><a:rPr b="1" /><a:t>Breaks down under correlated features</a:t></a:r><a:r><a:rPr /><a:t> — creates impossible data points</a:t></a:r></a:p></a:txBody></a:tc></a:tr><a:tr h="0"><a:tc><a:txBody><a:bodyPr /><a:lstStyle /><a:p><a:pPr lvl="0" indent="0" marL="0"><a:buNone /></a:pPr><a:r><a:rPr /><a:t>Partial dependence</a:t></a:r></a:p></a:txBody></a:tc><a:tc><a:txBody><a:bodyPr /><a:lstStyle /><a:p><a:pPr lvl="0" indent="0" marL="0"><a:buNone /></a:pPr><a:r><a:rPr /><a:t>Assumes </a:t></a:r><a14:m><m:oMath xmlns:m="http://schemas.openxmlformats.org/officeDocument/2006/math"><m:sSub><m:e><m:r><m:t>x</m:t></m:r></m:e><m:sub><m:r><m:t>S</m:t></m:r></m:sub></m:sSub><m:r><m:rPr><m:sty m:val="p" /></m:rPr><m:t>⟂</m:t></m:r><m:sSub><m:e><m:r><m:t>x</m:t></m:r></m:e><m:sub><m:r><m:t>C</m:t></m:r></m:sub></m:sSub></m:oMath></a14:m><a:r><a:rPr /><a:t>; hides heterogeneity</a:t></a:r></a:p></a:txBody></a:tc></a:tr><a:tr h="0"><a:tc><a:txBody><a:bodyPr /><a:lstStyle /><a:p><a:pPr lvl="0" indent="0" marL="0"><a:buNone /></a:pPr><a:r><a:rPr /><a:t>ICE curves</a:t></a:r></a:p></a:txBody></a:tc><a:tc><a:txBody><a:bodyPr /><a:lstStyle /><a:p><a:pPr lvl="0" indent="0" marL="0"><a:buNone /></a:pPr><a:r><a:rPr /><a:t>Reveals the heterogeneity a PDP averages away</a:t></a:r></a:p></a:txBody></a:tc></a:tr><a:tr h="0"><a:tc><a:txBody><a:bodyPr /><a:lstStyle /><a:p><a:pPr lvl="0" indent="0" marL="0"><a:buNone /></a:pPr><a:r><a:rPr b="1" /><a:t>SHAP</a:t></a:r></a:p></a:txBody></a:tc><a:tc><a:txBody><a:bodyPr /><a:lstStyle /><a:p><a:pPr lvl="0" indent="0" marL="0"><a:buNone /></a:pPr><a:r><a:rPr /><a:t>Unique under efficiency/symmetry/dummy/additivity; costly; assumes a value function</a:t></a:r></a:p></a:txBody></a:tc></a:tr></a:tbl></a:graphicData></a:graphic></p:graphicFrame></p:spTree></p:cSld></p:sld>
+<file path=ppt/slides/slide44.xml><?xml version="1.0" encoding="utf-8"?>
+<p:sld xmlns:a="http://schemas.openxmlformats.org/drawingml/2006/main" xmlns:r="http://schemas.openxmlformats.org/officeDocument/2006/relationships" xmlns:p="http://schemas.openxmlformats.org/presentationml/2006/main">
+  <p:cSld>
+    <p:spTree>
+      <p:nvGrpSpPr>
+        <p:cNvPr id="1" name=""/>
+        <p:cNvGrpSpPr/>
+        <p:nvPr/>
+      </p:nvGrpSpPr>
+      <p:grpSpPr>
+        <a:xfrm>
+          <a:off x="0" y="0"/>
+          <a:ext cx="0" cy="0"/>
+          <a:chOff x="0" y="0"/>
+          <a:chExt cx="0" cy="0"/>
+        </a:xfrm>
+      </p:grpSpPr>
+      <p:sp>
+        <p:nvSpPr>
+          <p:cNvPr id="3" name="Content Placeholder 2"/>
+          <p:cNvSpPr>
+            <a:spLocks noGrp="1"/>
+          </p:cNvSpPr>
+          <p:nvPr>
+            <p:ph idx="1"/>
+          </p:nvPr>
+        </p:nvSpPr>
+        <p:spPr/>
+        <p:txBody>
+          <a:bodyPr/>
+          <a:lstStyle/>
+          <a:p>
+            <a:pPr lvl="0" indent="0" marL="0">
+              <a:buNone/>
+            </a:pPr>
+            <a:r>
+              <a:rPr/>
+              <a:t>Impurity importance rewards features with </a:t>
+            </a:r>
+            <a:r>
+              <a:rPr b="1"/>
+              <a:t>thousands of candidate split points</a:t>
+            </a:r>
+            <a:r>
+              <a:rPr/>
+              <a:t>. Permutation importance, scored out of sample, puts FICO first — which is what a credit analyst would have told you before you started.</a:t>
+            </a:r>
+          </a:p>
+        </p:txBody>
+      </p:sp>
+    </p:spTree>
+  </p:cSld>
+</p:sld>
 </file>
 
-<file path=ppt/slides/slide28.xml><?xml version="1.0" encoding="utf-8"?>
+<file path=ppt/slides/slide45.xml><?xml version="1.0" encoding="utf-8"?>
 <p:sld xmlns:a="http://schemas.openxmlformats.org/drawingml/2006/main" xmlns:r="http://schemas.openxmlformats.org/officeDocument/2006/relationships" xmlns:p="http://schemas.openxmlformats.org/presentationml/2006/main">
   <p:cSld>
     <p:spTree>
@@ -6788,7 +10396,7 @@
             </a:pPr>
             <a:r>
               <a:rPr/>
-              <a:t>The honest summary</a:t>
+              <a:t>Why that happens</a:t>
             </a:r>
           </a:p>
         </p:txBody>
@@ -6808,54 +10416,57 @@
           <a:bodyPr/>
           <a:lstStyle/>
           <a:p>
-            <a:pPr lvl="0" indent="0" marL="1270000">
-              <a:buNone/>
-            </a:pPr>
-            <a:r>
-              <a:rPr sz="2000"/>
-              <a:t>These tools describe the </a:t>
-            </a:r>
-            <a:r>
-              <a:rPr sz="2000" b="1"/>
-              <a:t>model</a:t>
-            </a:r>
-            <a:r>
-              <a:rPr sz="2000"/>
-              <a:t>, not the world.</a:t>
-            </a:r>
-          </a:p>
-          <a:p>
             <a:pPr lvl="0" indent="0" marL="0">
               <a:buNone/>
             </a:pPr>
             <a:r>
               <a:rPr/>
-              <a:t>A large SHAP value means the model </a:t>
+              <a:t>A continuous feature with 7,000 distinct values offers 7,000 chances to reduce impurity </a:t>
             </a:r>
             <a:r>
               <a:rPr b="1"/>
-              <a:t>relies on</a:t>
+              <a:t>by noise</a:t>
             </a:r>
             <a:r>
               <a:rPr/>
-              <a:t> that feature — not that the feature </a:t>
+              <a:t>. A binary flag offers one. Impurity importance never corrects for that.</a:t>
+            </a:r>
+          </a:p>
+          <a:p>
+            <a:pPr lvl="0"/>
+            <a:r>
+              <a:rPr/>
+              <a:t>Never report impurity importance as “which variables matter”</a:t>
+            </a:r>
+          </a:p>
+          <a:p>
+            <a:pPr lvl="0"/>
+            <a:r>
+              <a:rPr/>
+              <a:t>Report </a:t>
             </a:r>
             <a:r>
               <a:rPr b="1"/>
-              <a:t>causes</a:t>
+              <a:t>permutation</a:t>
             </a:r>
             <a:r>
               <a:rPr/>
-              <a:t> the outcome.</a:t>
-            </a:r>
-          </a:p>
-          <a:p>
-            <a:pPr lvl="0" indent="0" marL="0">
-              <a:buNone/>
-            </a:pPr>
+              <a:t> importance, computed on </a:t>
+            </a:r>
+            <a:r>
+              <a:rPr b="1"/>
+              <a:t>held-out</a:t>
+            </a:r>
             <a:r>
               <a:rPr/>
-              <a:t>Session 10 is where we finally take causality seriously. Until then, every sentence you write is about prediction.</a:t>
+              <a:t> rows</a:t>
+            </a:r>
+          </a:p>
+          <a:p>
+            <a:pPr lvl="0"/>
+            <a:r>
+              <a:rPr/>
+              <a:t>And state which features are correlated, because permutation breaks there too</a:t>
             </a:r>
           </a:p>
         </p:txBody>
@@ -6865,7 +10476,253 @@
 </p:sld>
 </file>
 
-<file path=ppt/slides/slide29.xml><?xml version="1.0" encoding="utf-8"?>
+<file path=ppt/slides/slide46.xml><?xml version="1.0" encoding="utf-8"?>
+<p:sld xmlns:a="http://schemas.openxmlformats.org/drawingml/2006/main" xmlns:r="http://schemas.openxmlformats.org/officeDocument/2006/relationships" xmlns:p="http://schemas.openxmlformats.org/presentationml/2006/main">
+  <p:cSld>
+    <p:spTree>
+      <p:nvGrpSpPr>
+        <p:cNvPr id="1" name=""/>
+        <p:cNvGrpSpPr/>
+        <p:nvPr/>
+      </p:nvGrpSpPr>
+      <p:grpSpPr>
+        <a:xfrm>
+          <a:off x="0" y="0"/>
+          <a:ext cx="0" cy="0"/>
+          <a:chOff x="0" y="0"/>
+          <a:chExt cx="0" cy="0"/>
+        </a:xfrm>
+      </p:grpSpPr>
+      <p:sp>
+        <p:nvSpPr>
+          <p:cNvPr id="2" name="Title 1"/>
+          <p:cNvSpPr>
+            <a:spLocks noGrp="1"/>
+          </p:cNvSpPr>
+          <p:nvPr>
+            <p:ph type="title"/>
+          </p:nvPr>
+        </p:nvSpPr>
+        <p:spPr/>
+        <p:txBody>
+          <a:bodyPr/>
+          <a:lstStyle/>
+          <a:p>
+            <a:pPr lvl="0" indent="0" marL="0">
+              <a:buNone/>
+            </a:pPr>
+            <a:r>
+              <a:rPr/>
+              <a:t>The relationship itself: PDP and ICE</a:t>
+            </a:r>
+          </a:p>
+        </p:txBody>
+      </p:sp>
+      <p:pic>
+        <p:nvPicPr>
+          <p:cNvPr descr="slides_files/figure-pptx/cell-12-output-1.png" id="0" name="Picture 1"/>
+          <p:cNvPicPr>
+            <a:picLocks noGrp="1" noChangeAspect="1"/>
+          </p:cNvPicPr>
+          <p:nvPr/>
+        </p:nvPicPr>
+        <p:blipFill>
+          <a:blip r:embed="rId2"/>
+          <a:stretch>
+            <a:fillRect/>
+          </a:stretch>
+        </p:blipFill>
+        <p:spPr bwMode="auto">
+          <a:xfrm>
+            <a:off x="838200" y="1193800"/>
+            <a:ext cx="7454900" cy="3390900"/>
+          </a:xfrm>
+          <a:prstGeom prst="rect">
+            <a:avLst/>
+          </a:prstGeom>
+          <a:noFill/>
+          <a:ln w="9525">
+            <a:noFill/>
+            <a:headEnd/>
+            <a:tailEnd/>
+          </a:ln>
+        </p:spPr>
+      </p:pic>
+    </p:spTree>
+  </p:cSld>
+</p:sld>
+</file>
+
+<file path=ppt/slides/slide47.xml><?xml version="1.0" encoding="utf-8"?>
+<p:sld xmlns:a="http://schemas.openxmlformats.org/drawingml/2006/main" xmlns:r="http://schemas.openxmlformats.org/officeDocument/2006/relationships" xmlns:p="http://schemas.openxmlformats.org/presentationml/2006/main">
+  <p:cSld>
+    <p:spTree>
+      <p:nvGrpSpPr>
+        <p:cNvPr id="1" name=""/>
+        <p:cNvGrpSpPr/>
+        <p:nvPr/>
+      </p:nvGrpSpPr>
+      <p:grpSpPr>
+        <a:xfrm>
+          <a:off x="0" y="0"/>
+          <a:ext cx="0" cy="0"/>
+          <a:chOff x="0" y="0"/>
+          <a:chExt cx="0" cy="0"/>
+        </a:xfrm>
+      </p:grpSpPr>
+      <p:sp>
+        <p:nvSpPr>
+          <p:cNvPr id="3" name="Content Placeholder 2"/>
+          <p:cNvSpPr>
+            <a:spLocks noGrp="1"/>
+          </p:cNvSpPr>
+          <p:nvPr>
+            <p:ph idx="1"/>
+          </p:nvPr>
+        </p:nvSpPr>
+        <p:spPr/>
+        <p:txBody>
+          <a:bodyPr/>
+          <a:lstStyle/>
+          <a:p>
+            <a:pPr lvl="0" indent="0" marL="0">
+              <a:buNone/>
+            </a:pPr>
+            <a:r>
+              <a:rPr/>
+              <a:t>The thick line is the average. The thin lines are </a:t>
+            </a:r>
+            <a:r>
+              <a:rPr b="1"/>
+              <a:t>individual borrowers</a:t>
+            </a:r>
+            <a:r>
+              <a:rPr/>
+              <a:t> — and they are not parallel. A single PDP curve would have hidden that.</a:t>
+            </a:r>
+          </a:p>
+        </p:txBody>
+      </p:sp>
+    </p:spTree>
+  </p:cSld>
+</p:sld>
+</file>
+
+<file path=ppt/slides/slide48.xml><?xml version="1.0" encoding="utf-8"?>
+<p:sld xmlns:a="http://schemas.openxmlformats.org/drawingml/2006/main" xmlns:r="http://schemas.openxmlformats.org/officeDocument/2006/relationships" xmlns:p="http://schemas.openxmlformats.org/presentationml/2006/main">
+  <p:cSld>
+    <p:spTree>
+      <p:nvGrpSpPr>
+        <p:cNvPr id="1" name=""/>
+        <p:cNvGrpSpPr/>
+        <p:nvPr/>
+      </p:nvGrpSpPr>
+      <p:grpSpPr>
+        <a:xfrm>
+          <a:off x="0" y="0"/>
+          <a:ext cx="0" cy="0"/>
+          <a:chOff x="0" y="0"/>
+          <a:chExt cx="0" cy="0"/>
+        </a:xfrm>
+      </p:grpSpPr>
+      <p:sp>
+        <p:nvSpPr>
+          <p:cNvPr id="2" name="Title 1"/>
+          <p:cNvSpPr>
+            <a:spLocks noGrp="1"/>
+          </p:cNvSpPr>
+          <p:nvPr>
+            <p:ph type="title"/>
+          </p:nvPr>
+        </p:nvSpPr>
+        <p:spPr/>
+        <p:txBody>
+          <a:bodyPr/>
+          <a:lstStyle/>
+          <a:p>
+            <a:pPr lvl="0" indent="0" marL="0">
+              <a:buNone/>
+            </a:pPr>
+            <a:r>
+              <a:rPr/>
+              <a:t>The sentence to remember</a:t>
+            </a:r>
+          </a:p>
+        </p:txBody>
+      </p:sp>
+      <p:sp>
+        <p:nvSpPr>
+          <p:cNvPr id="3" name="Content Placeholder 2"/>
+          <p:cNvSpPr>
+            <a:spLocks noGrp="1"/>
+          </p:cNvSpPr>
+          <p:nvPr>
+            <p:ph idx="1"/>
+          </p:nvPr>
+        </p:nvSpPr>
+        <p:spPr/>
+        <p:txBody>
+          <a:bodyPr/>
+          <a:lstStyle/>
+          <a:p>
+            <a:pPr lvl="0" indent="0" marL="0">
+              <a:buNone/>
+            </a:pPr>
+            <a:r>
+              <a:rPr/>
+              <a:t>These tools describe </a:t>
+            </a:r>
+            <a:r>
+              <a:rPr b="1"/>
+              <a:t>the model</a:t>
+            </a:r>
+            <a:r>
+              <a:rPr/>
+              <a:t>, not the world. A large SHAP value means the model relies on that feature. It does not mean the feature causes the outcome.</a:t>
+            </a:r>
+          </a:p>
+          <a:p>
+            <a:pPr lvl="0" indent="0" marL="0">
+              <a:buNone/>
+            </a:pPr>
+            <a:r>
+              <a:rPr/>
+              <a:t>Your model learned that low FICO predicts default. It did not learn that </a:t>
+            </a:r>
+            <a:r>
+              <a:rPr i="1"/>
+              <a:t>raising</a:t>
+            </a:r>
+            <a:r>
+              <a:rPr/>
+              <a:t> someone’s FICO score would lower their default probability. Those are different claims requiring different evidence.</a:t>
+            </a:r>
+          </a:p>
+          <a:p>
+            <a:pPr lvl="0" indent="0" marL="0">
+              <a:buNone/>
+            </a:pPr>
+            <a:r>
+              <a:rPr/>
+              <a:t>That distinction is the entire subject of </a:t>
+            </a:r>
+            <a:r>
+              <a:rPr b="1"/>
+              <a:t>Session 10</a:t>
+            </a:r>
+            <a:r>
+              <a:rPr/>
+              <a:t>. Notice how uncomfortable it is now.</a:t>
+            </a:r>
+          </a:p>
+        </p:txBody>
+      </p:sp>
+    </p:spTree>
+  </p:cSld>
+</p:sld>
+</file>
+
+<file path=ppt/slides/slide49.xml><?xml version="1.0" encoding="utf-8"?>
 <p:sld xmlns:a="http://schemas.openxmlformats.org/drawingml/2006/main" xmlns:r="http://schemas.openxmlformats.org/officeDocument/2006/relationships" xmlns:p="http://schemas.openxmlformats.org/presentationml/2006/main">
   <p:cSld>
     <p:spTree>
@@ -6907,534 +10764,7 @@
             </a:pPr>
             <a:r>
               <a:rPr/>
-              <a:t>The practice</a:t>
-            </a:r>
-          </a:p>
-        </p:txBody>
-      </p:sp>
-    </p:spTree>
-  </p:cSld>
-</p:sld>
-</file>
-
-<file path=ppt/slides/slide3.xml><?xml version="1.0" encoding="utf-8"?>
-<p:sld xmlns:a="http://schemas.openxmlformats.org/drawingml/2006/main" xmlns:r="http://schemas.openxmlformats.org/officeDocument/2006/relationships" xmlns:p="http://schemas.openxmlformats.org/presentationml/2006/main">
-  <p:cSld>
-    <p:spTree>
-      <p:nvGrpSpPr>
-        <p:cNvPr id="1" name=""/>
-        <p:cNvGrpSpPr/>
-        <p:nvPr/>
-      </p:nvGrpSpPr>
-      <p:grpSpPr>
-        <a:xfrm>
-          <a:off x="0" y="0"/>
-          <a:ext cx="0" cy="0"/>
-          <a:chOff x="0" y="0"/>
-          <a:chExt cx="0" cy="0"/>
-        </a:xfrm>
-      </p:grpSpPr>
-      <p:sp>
-        <p:nvSpPr>
-          <p:cNvPr id="2" name="Title 1"/>
-          <p:cNvSpPr>
-            <a:spLocks noGrp="1"/>
-          </p:cNvSpPr>
-          <p:nvPr>
-            <p:ph type="title"/>
-          </p:nvPr>
-        </p:nvSpPr>
-        <p:spPr/>
-        <p:txBody>
-          <a:bodyPr/>
-          <a:lstStyle/>
-          <a:p>
-            <a:pPr lvl="0" indent="0" marL="0">
-              <a:buNone/>
-            </a:pPr>
-            <a:r>
-              <a:rPr/>
-              <a:t>These slides follow the notes</a:t>
-            </a:r>
-          </a:p>
-        </p:txBody>
-      </p:sp>
-      <p:graphicFrame>
-        <p:nvGraphicFramePr>
-          <p:cNvPr id="6" name="Content Placeholder 5"/>
-          <p:cNvGraphicFramePr>
-            <a:graphicFrameLocks noGrp="1"/>
-          </p:cNvGraphicFramePr>
-          <p:nvPr>
-            <p:ph idx="1"/>
-          </p:nvPr>
-        </p:nvGraphicFramePr>
-        <p:xfrm>
-          <a:off x="457200" y="1193800"/>
-          <a:ext cx="8229600" cy="3390900"/>
-        </p:xfrm>
-        <a:graphic>
-          <a:graphicData uri="http://schemas.openxmlformats.org/drawingml/2006/table">
-            <a:tbl>
-              <a:tblPr firstRow="0" bandRow="1">
-                <a:tableStyleId>{5C22544A-7EE6-4342-B048-85BDC9FD1C3A}</a:tableStyleId>
-              </a:tblPr>
-              <a:tblGrid>
-                <a:gridCol w="4114800"/>
-                <a:gridCol w="4114800"/>
-              </a:tblGrid>
-              <a:tr h="0">
-                <a:tc>
-                  <a:txBody>
-                    <a:bodyPr/>
-                    <a:lstStyle/>
-                    <a:p>
-                      <a:pPr lvl="0" indent="0" marL="0">
-                        <a:buNone/>
-                      </a:pPr>
-                      <a:r>
-                        <a:rPr b="1"/>
-                        <a:t>7.1</a:t>
-                      </a:r>
-                    </a:p>
-                  </a:txBody>
-                </a:tc>
-                <a:tc>
-                  <a:txBody>
-                    <a:bodyPr/>
-                    <a:lstStyle/>
-                    <a:p>
-                      <a:pPr lvl="0" indent="0" marL="0">
-                        <a:buNone/>
-                      </a:pPr>
-                      <a:r>
-                        <a:rPr/>
-                        <a:t>Regression trees</a:t>
-                      </a:r>
-                    </a:p>
-                  </a:txBody>
-                </a:tc>
-              </a:tr>
-              <a:tr h="0">
-                <a:tc>
-                  <a:txBody>
-                    <a:bodyPr/>
-                    <a:lstStyle/>
-                    <a:p>
-                      <a:pPr lvl="0" indent="0" marL="0">
-                        <a:buNone/>
-                      </a:pPr>
-                      <a:r>
-                        <a:rPr b="1"/>
-                        <a:t>7.2</a:t>
-                      </a:r>
-                    </a:p>
-                  </a:txBody>
-                </a:tc>
-                <a:tc>
-                  <a:txBody>
-                    <a:bodyPr/>
-                    <a:lstStyle/>
-                    <a:p>
-                      <a:pPr lvl="0" indent="0" marL="0">
-                        <a:buNone/>
-                      </a:pPr>
-                      <a:r>
-                        <a:rPr/>
-                        <a:t>Cost-complexity pruning</a:t>
-                      </a:r>
-                    </a:p>
-                  </a:txBody>
-                </a:tc>
-              </a:tr>
-              <a:tr h="0">
-                <a:tc>
-                  <a:txBody>
-                    <a:bodyPr/>
-                    <a:lstStyle/>
-                    <a:p>
-                      <a:pPr lvl="0" indent="0" marL="0">
-                        <a:buNone/>
-                      </a:pPr>
-                      <a:r>
-                        <a:rPr b="1"/>
-                        <a:t>7.3</a:t>
-                      </a:r>
-                    </a:p>
-                  </a:txBody>
-                </a:tc>
-                <a:tc>
-                  <a:txBody>
-                    <a:bodyPr/>
-                    <a:lstStyle/>
-                    <a:p>
-                      <a:pPr lvl="0" indent="0" marL="0">
-                        <a:buNone/>
-                      </a:pPr>
-                      <a:r>
-                        <a:rPr/>
-                        <a:t>Bagging and the variance argument</a:t>
-                      </a:r>
-                    </a:p>
-                  </a:txBody>
-                </a:tc>
-              </a:tr>
-              <a:tr h="0">
-                <a:tc>
-                  <a:txBody>
-                    <a:bodyPr/>
-                    <a:lstStyle/>
-                    <a:p>
-                      <a:pPr lvl="0" indent="0" marL="0">
-                        <a:buNone/>
-                      </a:pPr>
-                      <a:r>
-                        <a:rPr b="1"/>
-                        <a:t>7.4</a:t>
-                      </a:r>
-                    </a:p>
-                  </a:txBody>
-                </a:tc>
-                <a:tc>
-                  <a:txBody>
-                    <a:bodyPr/>
-                    <a:lstStyle/>
-                    <a:p>
-                      <a:pPr lvl="0" indent="0" marL="0">
-                        <a:buNone/>
-                      </a:pPr>
-                      <a:r>
-                        <a:rPr/>
-                        <a:t>Gradient boosting as functional gradient descent</a:t>
-                      </a:r>
-                    </a:p>
-                  </a:txBody>
-                </a:tc>
-              </a:tr>
-              <a:tr h="0">
-                <a:tc>
-                  <a:txBody>
-                    <a:bodyPr/>
-                    <a:lstStyle/>
-                    <a:p>
-                      <a:pPr lvl="0" indent="0" marL="0">
-                        <a:buNone/>
-                      </a:pPr>
-                      <a:r>
-                        <a:rPr b="1"/>
-                        <a:t>7.5</a:t>
-                      </a:r>
-                    </a:p>
-                  </a:txBody>
-                </a:tc>
-                <a:tc>
-                  <a:txBody>
-                    <a:bodyPr/>
-                    <a:lstStyle/>
-                    <a:p>
-                      <a:pPr lvl="0" indent="0" marL="0">
-                        <a:buNone/>
-                      </a:pPr>
-                      <a:r>
-                        <a:rPr/>
-                        <a:t>Recovering interpretation</a:t>
-                      </a:r>
-                    </a:p>
-                  </a:txBody>
-                </a:tc>
-              </a:tr>
-            </a:tbl>
-          </a:graphicData>
-        </a:graphic>
-      </p:graphicFrame>
-    </p:spTree>
-  </p:cSld>
-</p:sld>
-</file>
-
-<file path=ppt/slides/slide30.xml><?xml version="1.0" encoding="utf-8"?>
-<p:sld xmlns:a="http://schemas.openxmlformats.org/drawingml/2006/main" xmlns:r="http://schemas.openxmlformats.org/officeDocument/2006/relationships" xmlns:p="http://schemas.openxmlformats.org/presentationml/2006/main">
-  <p:cSld>
-    <p:spTree>
-      <p:nvGrpSpPr>
-        <p:cNvPr id="1" name=""/>
-        <p:cNvGrpSpPr/>
-        <p:nvPr/>
-      </p:nvGrpSpPr>
-      <p:grpSpPr>
-        <a:xfrm>
-          <a:off x="0" y="0"/>
-          <a:ext cx="0" cy="0"/>
-          <a:chOff x="0" y="0"/>
-          <a:chExt cx="0" cy="0"/>
-        </a:xfrm>
-      </p:grpSpPr>
-      <p:sp>
-        <p:nvSpPr>
-          <p:cNvPr id="2" name="Title 1"/>
-          <p:cNvSpPr>
-            <a:spLocks noGrp="1"/>
-          </p:cNvSpPr>
-          <p:nvPr>
-            <p:ph type="title"/>
-          </p:nvPr>
-        </p:nvSpPr>
-        <p:spPr/>
-        <p:txBody>
-          <a:bodyPr/>
-          <a:lstStyle/>
-          <a:p>
-            <a:pPr lvl="0" indent="0" marL="0">
-              <a:buNone/>
-            </a:pPr>
-            <a:r>
-              <a:rPr/>
-              <a:t>What you do</a:t>
-            </a:r>
-          </a:p>
-        </p:txBody>
-      </p:sp>
-      <p:sp>
-        <p:nvSpPr>
-          <p:cNvPr id="3" name="Content Placeholder 2"/>
-          <p:cNvSpPr>
-            <a:spLocks noGrp="1"/>
-          </p:cNvSpPr>
-          <p:nvPr>
-            <p:ph idx="1"/>
-          </p:nvPr>
-        </p:nvSpPr>
-        <p:spPr/>
-        <p:txBody>
-          <a:bodyPr/>
-          <a:lstStyle/>
-          <a:p>
-            <a:pPr lvl="0" indent="-342900" marL="342900">
-              <a:buAutoNum type="arabicPeriod"/>
-            </a:pPr>
-            <a:r>
-              <a:rPr/>
-              <a:t>Fit a pruned tree, a forest and a boosted model on your project, under grouped CV</a:t>
-            </a:r>
-          </a:p>
-          <a:p>
-            <a:pPr lvl="0" indent="-342900" marL="342900">
-              <a:buAutoNum type="arabicPeriod"/>
-            </a:pPr>
-            <a:r>
-              <a:rPr/>
-              <a:t>Compare against the Session 03 linear specification — does flexibility pay?</a:t>
-            </a:r>
-          </a:p>
-          <a:p>
-            <a:pPr lvl="0" indent="-342900" marL="342900">
-              <a:buAutoNum type="arabicPeriod"/>
-            </a:pPr>
-            <a:r>
-              <a:rPr/>
-              <a:t>Produce </a:t>
-            </a:r>
-            <a:r>
-              <a:rPr b="1"/>
-              <a:t>permutation</a:t>
-            </a:r>
-            <a:r>
-              <a:rPr/>
-              <a:t> importance, never impurity importance</a:t>
-            </a:r>
-          </a:p>
-          <a:p>
-            <a:pPr lvl="0" indent="-342900" marL="342900">
-              <a:buAutoNum type="arabicPeriod"/>
-            </a:pPr>
-            <a:r>
-              <a:rPr/>
-              <a:t>Draw one PDP and one set of ICE curves; describe the shapes in words</a:t>
-            </a:r>
-          </a:p>
-          <a:p>
-            <a:pPr lvl="0" indent="0" marL="0">
-              <a:buNone/>
-            </a:pPr>
-            <a:r>
-              <a:rPr/>
-              <a:t>Report the tuning you did and on which folds. A boosted model tuned and evaluated on one split is reporting training error.</a:t>
-            </a:r>
-          </a:p>
-        </p:txBody>
-      </p:sp>
-    </p:spTree>
-  </p:cSld>
-</p:sld>
-</file>
-
-<file path=ppt/slides/slide31.xml><?xml version="1.0" encoding="utf-8"?>
-<p:sld xmlns:a="http://schemas.openxmlformats.org/drawingml/2006/main" xmlns:r="http://schemas.openxmlformats.org/officeDocument/2006/relationships" xmlns:p="http://schemas.openxmlformats.org/presentationml/2006/main">
-  <p:cSld>
-    <p:spTree>
-      <p:nvGrpSpPr>
-        <p:cNvPr id="1" name=""/>
-        <p:cNvGrpSpPr/>
-        <p:nvPr/>
-      </p:nvGrpSpPr>
-      <p:grpSpPr>
-        <a:xfrm>
-          <a:off x="0" y="0"/>
-          <a:ext cx="0" cy="0"/>
-          <a:chOff x="0" y="0"/>
-          <a:chExt cx="0" cy="0"/>
-        </a:xfrm>
-      </p:grpSpPr>
-      <p:sp>
-        <p:nvSpPr>
-          <p:cNvPr id="2" name="Title 1"/>
-          <p:cNvSpPr>
-            <a:spLocks noGrp="1"/>
-          </p:cNvSpPr>
-          <p:nvPr>
-            <p:ph type="title"/>
-          </p:nvPr>
-        </p:nvSpPr>
-        <p:spPr/>
-        <p:txBody>
-          <a:bodyPr/>
-          <a:lstStyle/>
-          <a:p>
-            <a:pPr lvl="0" indent="0" marL="0">
-              <a:buNone/>
-            </a:pPr>
-            <a:r>
-              <a:rPr/>
-              <a:t>The two-minute report</a:t>
-            </a:r>
-          </a:p>
-        </p:txBody>
-      </p:sp>
-      <p:sp>
-        <p:nvSpPr>
-          <p:cNvPr id="3" name="Content Placeholder 2"/>
-          <p:cNvSpPr>
-            <a:spLocks noGrp="1"/>
-          </p:cNvSpPr>
-          <p:nvPr>
-            <p:ph idx="1"/>
-          </p:nvPr>
-        </p:nvSpPr>
-        <p:spPr/>
-        <p:txBody>
-          <a:bodyPr/>
-          <a:lstStyle/>
-          <a:p>
-            <a:pPr lvl="0" indent="-342900" marL="342900">
-              <a:buAutoNum type="arabicPeriod"/>
-            </a:pPr>
-            <a:r>
-              <a:rPr b="1"/>
-              <a:t>What I did</a:t>
-            </a:r>
-            <a:r>
-              <a:rPr/>
-              <a:t> — the models, the CV scheme, the baseline they beat</a:t>
-            </a:r>
-          </a:p>
-          <a:p>
-            <a:pPr lvl="0" indent="-342900" marL="342900">
-              <a:buAutoNum type="arabicPeriod"/>
-            </a:pPr>
-            <a:r>
-              <a:rPr b="1"/>
-              <a:t>The number</a:t>
-            </a:r>
-            <a:r>
-              <a:rPr/>
-              <a:t> — error in the units of the outcome</a:t>
-            </a:r>
-          </a:p>
-          <a:p>
-            <a:pPr lvl="0" indent="-342900" marL="342900">
-              <a:buAutoNum type="arabicPeriod"/>
-            </a:pPr>
-            <a:r>
-              <a:rPr b="1"/>
-              <a:t>The catch</a:t>
-            </a:r>
-            <a:r>
-              <a:rPr/>
-              <a:t> — that every statement is about prediction, not effect</a:t>
-            </a:r>
-          </a:p>
-          <a:p>
-            <a:pPr lvl="0" indent="0" marL="0">
-              <a:buNone/>
-            </a:pPr>
-            <a:r>
-              <a:rPr/>
-              <a:t>Full brief: </a:t>
-            </a:r>
-            <a:r>
-              <a:rPr>
-                <a:hlinkClick r:id="rId2"/>
-                <a:latin typeface="Courier"/>
-              </a:rPr>
-              <a:t>02-practice/README.md</a:t>
-            </a:r>
-          </a:p>
-        </p:txBody>
-      </p:sp>
-    </p:spTree>
-  </p:cSld>
-</p:sld>
-</file>
-
-<file path=ppt/slides/slide4.xml><?xml version="1.0" encoding="utf-8"?>
-<p:sld xmlns:a="http://schemas.openxmlformats.org/drawingml/2006/main" xmlns:r="http://schemas.openxmlformats.org/officeDocument/2006/relationships" xmlns:p="http://schemas.openxmlformats.org/presentationml/2006/main">
-  <p:cSld>
-    <p:spTree>
-      <p:nvGrpSpPr>
-        <p:cNvPr id="1" name=""/>
-        <p:cNvGrpSpPr/>
-        <p:nvPr/>
-      </p:nvGrpSpPr>
-      <p:grpSpPr>
-        <a:xfrm>
-          <a:off x="0" y="0"/>
-          <a:ext cx="0" cy="0"/>
-          <a:chOff x="0" y="0"/>
-          <a:chExt cx="0" cy="0"/>
-        </a:xfrm>
-      </p:grpSpPr>
-      <p:sp>
-        <p:nvSpPr>
-          <p:cNvPr id="3" name="Content Placeholder 2"/>
-          <p:cNvSpPr>
-            <a:spLocks noGrp="1"/>
-          </p:cNvSpPr>
-          <p:nvPr>
-            <p:ph idx="1"/>
-          </p:nvPr>
-        </p:nvSpPr>
-        <p:spPr/>
-        <p:txBody>
-          <a:bodyPr/>
-          <a:lstStyle/>
-          <a:p>
-            <a:pPr lvl="0" indent="0" marL="0">
-              <a:buNone/>
-            </a:pPr>
-            <a:r>
-              <a:rPr/>
-              <a:t>Same numbering as </a:t>
-            </a:r>
-            <a:r>
-              <a:rPr>
-                <a:hlinkClick r:id="rId2"/>
-                <a:latin typeface="Courier"/>
-              </a:rPr>
-              <a:t>01-lecture/README.md</a:t>
-            </a:r>
-            <a:r>
-              <a:rPr/>
-              <a:t>.</a:t>
+              <a:t>7 · Takeaways</a:t>
             </a:r>
           </a:p>
         </p:txBody>
@@ -7486,7 +10816,7 @@
             </a:pPr>
             <a:r>
               <a:rPr/>
-              <a:t>7.1 Regression trees</a:t>
+              <a:t>1 · What this adds</a:t>
             </a:r>
           </a:p>
         </p:txBody>
@@ -7496,7 +10826,7 @@
 </p:sld>
 </file>
 
-<file path=ppt/slides/slide6.xml><?xml version="1.0" encoding="utf-8"?>
+<file path=ppt/slides/slide50.xml><?xml version="1.0" encoding="utf-8"?>
 <p:sld xmlns:a="http://schemas.openxmlformats.org/drawingml/2006/main" xmlns:r="http://schemas.openxmlformats.org/officeDocument/2006/relationships" xmlns:p="http://schemas.openxmlformats.org/presentationml/2006/main">
   <p:cSld>
     <p:spTree>
@@ -7533,7 +10863,7 @@
             </a:pPr>
             <a:r>
               <a:rPr/>
-              <a:t>The model</a:t>
+              <a:t>Key takeaways</a:t>
             </a:r>
           </a:p>
         </p:txBody>
@@ -7555,271 +10885,215 @@
               <a:bodyPr/>
               <a:lstStyle/>
               <a:p>
-                <a:pPr lvl="0" indent="0" marL="0">
-                  <a:buNone/>
+                <a:pPr lvl="0" indent="-342900" marL="342900">
+                  <a:buAutoNum type="arabicPeriod"/>
                 </a:pPr>
                 <a:r>
                   <a:rPr/>
-                  <a:t>Partition the feature space into </a:t>
-                </a:r>
+                  <a:t>A tree is a </a:t>
+                </a:r>
+                <a:r>
+                  <a:rPr b="1"/>
+                  <a:t>partition</a:t>
+                </a:r>
+                <a:r>
+                  <a:rPr/>
+                  <a:t>, not a curve — good for thresholds, clumsy for gradients</a:t>
+                </a:r>
+              </a:p>
+              <a:p>
+                <a:pPr lvl="0" indent="-342900" marL="342900">
+                  <a:buAutoNum type="arabicPeriod"/>
+                </a:pPr>
+                <a:r>
+                  <a:rPr/>
+                  <a:t>Grow with Gini or entropy; </a:t>
+                </a:r>
+                <a:r>
+                  <a:rPr b="1"/>
+                  <a:t>prune</a:t>
+                </a:r>
+                <a:r>
+                  <a:rPr/>
+                  <a:t> with the loss you will be judged on</a:t>
+                </a:r>
+              </a:p>
+              <a:p>
+                <a:pPr lvl="0" indent="-342900" marL="342900">
+                  <a:buAutoNum type="arabicPeriod"/>
+                </a:pPr>
                 <a14:m>
                   <m:oMath xmlns:m="http://schemas.openxmlformats.org/officeDocument/2006/math">
                     <m:r>
-                      <m:t>M</m:t>
+                      <m:t>ρ</m:t>
+                    </m:r>
+                    <m:sSup>
+                      <m:e>
+                        <m:r>
+                          <m:t>σ</m:t>
+                        </m:r>
+                      </m:e>
+                      <m:sup>
+                        <m:r>
+                          <m:t>2</m:t>
+                        </m:r>
+                      </m:sup>
+                    </m:sSup>
+                    <m:r>
+                      <m:rPr>
+                        <m:sty m:val="p"/>
+                      </m:rPr>
+                      <m:t>+</m:t>
+                    </m:r>
+                    <m:f>
+                      <m:fPr>
+                        <m:type m:val="bar"/>
+                      </m:fPr>
+                      <m:num>
+                        <m:r>
+                          <m:t>1</m:t>
+                        </m:r>
+                        <m:r>
+                          <m:rPr>
+                            <m:sty m:val="p"/>
+                          </m:rPr>
+                          <m:t>−</m:t>
+                        </m:r>
+                        <m:r>
+                          <m:t>ρ</m:t>
+                        </m:r>
+                      </m:num>
+                      <m:den>
+                        <m:r>
+                          <m:t>B</m:t>
+                        </m:r>
+                      </m:den>
+                    </m:f>
+                    <m:sSup>
+                      <m:e>
+                        <m:r>
+                          <m:t>σ</m:t>
+                        </m:r>
+                      </m:e>
+                      <m:sup>
+                        <m:r>
+                          <m:t>2</m:t>
+                        </m:r>
+                      </m:sup>
+                    </m:sSup>
+                  </m:oMath>
+                </a14:m>
+                <a:r>
+                  <a:rPr/>
+                  <a:t>: more trees hit a floor, so </a:t>
+                </a:r>
+                <a:r>
+                  <a:rPr b="1"/>
+                  <a:t>decorrelate</a:t>
+                </a:r>
+                <a:r>
+                  <a:rPr/>
+                  <a:t> instead</a:t>
+                </a:r>
+              </a:p>
+              <a:p>
+                <a:pPr lvl="0" indent="-342900" marL="342900">
+                  <a:buAutoNum type="arabicPeriod"/>
+                </a:pPr>
+                <a:r>
+                  <a:rPr/>
+                  <a:t>Boosting is gradient descent in function space; small </a:t>
+                </a:r>
+                <a14:m>
+                  <m:oMath xmlns:m="http://schemas.openxmlformats.org/officeDocument/2006/math">
+                    <m:r>
+                      <m:t>ν</m:t>
                     </m:r>
                   </m:oMath>
                 </a14:m>
                 <a:r>
                   <a:rPr/>
-                  <a:t> regions and predict a constant in each:</a:t>
+                  <a:t> and many trees</a:t>
                 </a:r>
               </a:p>
               <a:p>
-                <a:pPr lvl="0" indent="0" marL="0">
-                  <a:buNone/>
+                <a:pPr lvl="0" indent="-342900" marL="342900">
+                  <a:buAutoNum type="arabicPeriod"/>
                 </a:pPr>
+                <a:r>
+                  <a:rPr/>
+                  <a:t>Regularisation reappears inside every leaf: </a:t>
+                </a:r>
                 <a14:m>
-                  <m:oMathPara xmlns:m="http://schemas.openxmlformats.org/officeDocument/2006/math">
-                    <m:oMathParaPr>
-                      <m:jc m:val="center"/>
-                    </m:oMathParaPr>
-                    <m:oMath>
-                      <m:acc>
-                        <m:accPr>
-                          <m:chr m:val="̂"/>
-                        </m:accPr>
-                        <m:e>
-                          <m:r>
-                            <m:t>f</m:t>
-                          </m:r>
-                        </m:e>
-                      </m:acc>
-                      <m:d>
-                        <m:dPr>
-                          <m:begChr m:val="("/>
-                          <m:sepChr m:val=""/>
-                          <m:endChr m:val=")"/>
-                          <m:grow/>
-                        </m:dPr>
-                        <m:e>
-                          <m:r>
-                            <m:t>x</m:t>
-                          </m:r>
-                        </m:e>
-                      </m:d>
-                      <m:r>
-                        <m:rPr>
-                          <m:sty m:val="p"/>
-                        </m:rPr>
-                        <m:t>=</m:t>
-                      </m:r>
-                      <m:nary>
-                        <m:naryPr>
-                          <m:chr m:val="∑"/>
-                          <m:limLoc m:val="undOvr"/>
-                          <m:subHide m:val="off"/>
-                          <m:supHide m:val="on"/>
-                        </m:naryPr>
-                        <m:sub>
-                          <m:r>
-                            <m:t>m</m:t>
-                          </m:r>
-                        </m:sub>
-                        <m:sup>
-                          <m:r>
-                            <m:t>​</m:t>
-                          </m:r>
-                        </m:sup>
-                        <m:e>
-                          <m:sSub>
-                            <m:e>
-                              <m:r>
-                                <m:t>c</m:t>
-                              </m:r>
-                            </m:e>
-                            <m:sub>
-                              <m:r>
-                                <m:t>m</m:t>
-                              </m:r>
-                            </m:sub>
-                          </m:sSub>
-                        </m:e>
-                      </m:nary>
-                      <m:r>
-                        <m:rPr>
-                          <m:sty m:val="p"/>
-                          <m:scr m:val="double-struck"/>
-                        </m:rPr>
-                        <m:t>1</m:t>
-                      </m:r>
-                      <m:r>
-                        <m:rPr>
-                          <m:sty m:val="p"/>
-                        </m:rPr>
-                        <m:t>{</m:t>
-                      </m:r>
-                      <m:r>
-                        <m:t>x</m:t>
-                      </m:r>
-                      <m:r>
-                        <m:rPr>
-                          <m:sty m:val="p"/>
-                        </m:rPr>
-                        <m:t>∈</m:t>
-                      </m:r>
-                      <m:sSub>
-                        <m:e>
-                          <m:r>
-                            <m:t>R</m:t>
-                          </m:r>
-                        </m:e>
-                        <m:sub>
-                          <m:r>
-                            <m:t>m</m:t>
-                          </m:r>
-                        </m:sub>
-                      </m:sSub>
-                      <m:r>
-                        <m:rPr>
-                          <m:sty m:val="p"/>
-                        </m:rPr>
-                        <m:t>}</m:t>
-                      </m:r>
-                    </m:oMath>
-                  </m:oMathPara>
+                  <m:oMath xmlns:m="http://schemas.openxmlformats.org/officeDocument/2006/math">
+                    <m:sSup>
+                      <m:e>
+                        <m:r>
+                          <m:t>w</m:t>
+                        </m:r>
+                      </m:e>
+                      <m:sup>
+                        <m:r>
+                          <m:rPr>
+                            <m:sty m:val="p"/>
+                          </m:rPr>
+                          <m:t>⋆</m:t>
+                        </m:r>
+                      </m:sup>
+                    </m:sSup>
+                    <m:r>
+                      <m:rPr>
+                        <m:sty m:val="p"/>
+                      </m:rPr>
+                      <m:t>=</m:t>
+                    </m:r>
+                    <m:r>
+                      <m:rPr>
+                        <m:sty m:val="p"/>
+                      </m:rPr>
+                      <m:t>−</m:t>
+                    </m:r>
+                    <m:r>
+                      <m:t>G</m:t>
+                    </m:r>
+                    <m:r>
+                      <m:rPr>
+                        <m:sty m:val="p"/>
+                      </m:rPr>
+                      <m:t>/</m:t>
+                    </m:r>
+                    <m:d>
+                      <m:dPr>
+                        <m:begChr m:val="("/>
+                        <m:sepChr m:val=""/>
+                        <m:endChr m:val=")"/>
+                        <m:grow/>
+                      </m:dPr>
+                      <m:e>
+                        <m:r>
+                          <m:t>H</m:t>
+                        </m:r>
+                        <m:r>
+                          <m:rPr>
+                            <m:sty m:val="p"/>
+                          </m:rPr>
+                          <m:t>+</m:t>
+                        </m:r>
+                        <m:r>
+                          <m:t>λ</m:t>
+                        </m:r>
+                      </m:e>
+                    </m:d>
+                  </m:oMath>
                 </a14:m>
               </a:p>
               <a:p>
-                <a:pPr lvl="0" indent="0" marL="0">
-                  <a:buNone/>
+                <a:pPr lvl="0" indent="-342900" marL="342900">
+                  <a:buAutoNum type="arabicPeriod"/>
                 </a:pPr>
                 <a:r>
                   <a:rPr/>
-                  <a:t>Under squared loss the optimal constant is the region mean:</a:t>
-                </a:r>
-              </a:p>
-              <a:p>
-                <a:pPr lvl="0" indent="0" marL="0">
-                  <a:buNone/>
-                </a:pPr>
-                <a14:m>
-                  <m:oMathPara xmlns:m="http://schemas.openxmlformats.org/officeDocument/2006/math">
-                    <m:oMathParaPr>
-                      <m:jc m:val="center"/>
-                    </m:oMathParaPr>
-                    <m:oMath>
-                      <m:sSub>
-                        <m:e>
-                          <m:acc>
-                            <m:accPr>
-                              <m:chr m:val="̂"/>
-                            </m:accPr>
-                            <m:e>
-                              <m:r>
-                                <m:t>c</m:t>
-                              </m:r>
-                            </m:e>
-                          </m:acc>
-                        </m:e>
-                        <m:sub>
-                          <m:r>
-                            <m:t>m</m:t>
-                          </m:r>
-                        </m:sub>
-                      </m:sSub>
-                      <m:r>
-                        <m:rPr>
-                          <m:sty m:val="p"/>
-                        </m:rPr>
-                        <m:t>=</m:t>
-                      </m:r>
-                      <m:r>
-                        <m:rPr>
-                          <m:sty m:val="p"/>
-                        </m:rPr>
-                        <m:t>a</m:t>
-                      </m:r>
-                      <m:r>
-                        <m:rPr>
-                          <m:sty m:val="p"/>
-                        </m:rPr>
-                        <m:t>v</m:t>
-                      </m:r>
-                      <m:r>
-                        <m:rPr>
-                          <m:sty m:val="p"/>
-                        </m:rPr>
-                        <m:t>e</m:t>
-                      </m:r>
-                      <m:d>
-                        <m:dPr>
-                          <m:begChr m:val="("/>
-                          <m:sepChr m:val=""/>
-                          <m:endChr m:val=")"/>
-                          <m:grow/>
-                        </m:dPr>
-                        <m:e>
-                          <m:sSub>
-                            <m:e>
-                              <m:r>
-                                <m:t>y</m:t>
-                              </m:r>
-                            </m:e>
-                            <m:sub>
-                              <m:r>
-                                <m:t>i</m:t>
-                              </m:r>
-                            </m:sub>
-                          </m:sSub>
-                          <m:r>
-                            <m:rPr>
-                              <m:sty m:val="p"/>
-                            </m:rPr>
-                            <m:t>∣</m:t>
-                          </m:r>
-                          <m:sSub>
-                            <m:e>
-                              <m:r>
-                                <m:t>x</m:t>
-                              </m:r>
-                            </m:e>
-                            <m:sub>
-                              <m:r>
-                                <m:t>i</m:t>
-                              </m:r>
-                            </m:sub>
-                          </m:sSub>
-                          <m:r>
-                            <m:rPr>
-                              <m:sty m:val="p"/>
-                            </m:rPr>
-                            <m:t>∈</m:t>
-                          </m:r>
-                          <m:sSub>
-                            <m:e>
-                              <m:r>
-                                <m:t>R</m:t>
-                              </m:r>
-                            </m:e>
-                            <m:sub>
-                              <m:r>
-                                <m:t>m</m:t>
-                              </m:r>
-                            </m:sub>
-                          </m:sSub>
-                        </m:e>
-                      </m:d>
-                    </m:oMath>
-                  </m:oMathPara>
-                </a14:m>
-              </a:p>
-              <a:p>
-                <a:pPr lvl="0" indent="0" marL="0">
-                  <a:buNone/>
-                </a:pPr>
-                <a:r>
-                  <a:rPr/>
-                  <a:t>A tree is a step function. That is the whole model.</a:t>
+                  <a:t>Interpretation tools describe the model. Causality is Session 10</a:t>
                 </a:r>
               </a:p>
             </p:txBody>
@@ -7831,7 +11105,7 @@
 </p:sld>
 </file>
 
-<file path=ppt/slides/slide7.xml><?xml version="1.0" encoding="utf-8"?>
+<file path=ppt/slides/slide51.xml><?xml version="1.0" encoding="utf-8"?>
 <p:sld xmlns:a="http://schemas.openxmlformats.org/drawingml/2006/main" xmlns:r="http://schemas.openxmlformats.org/officeDocument/2006/relationships" xmlns:p="http://schemas.openxmlformats.org/presentationml/2006/main">
   <p:cSld>
     <p:spTree>
@@ -7868,7 +11142,7 @@
             </a:pPr>
             <a:r>
               <a:rPr/>
-              <a:t>Greedy splitting</a:t>
+              <a:t>What loses marks</a:t>
             </a:r>
           </a:p>
         </p:txBody>
@@ -7890,626 +11164,252 @@
               <a:bodyPr/>
               <a:lstStyle/>
               <a:p>
-                <a:pPr lvl="0" indent="0" marL="0">
-                  <a:buNone/>
-                </a:pPr>
-                <a:r>
-                  <a:rPr/>
-                  <a:t>Finding the optimal partition is computationally infeasible, so we proceed </a:t>
+                <a:pPr lvl="0"/>
+                <a:r>
+                  <a:rPr/>
+                  <a:t>Reporting </a:t>
                 </a:r>
                 <a:r>
                   <a:rPr b="1"/>
-                  <a:t>greedily</a:t>
-                </a:r>
-                <a:r>
-                  <a:rPr/>
-                  <a:t>. At each node, search over splitting variable </a:t>
+                  <a:t>impurity</a:t>
+                </a:r>
+                <a:r>
+                  <a:rPr/>
+                  <a:t> importance as evidence about the world</a:t>
+                </a:r>
+              </a:p>
+              <a:p>
+                <a:pPr lvl="0"/>
+                <a:r>
+                  <a:rPr/>
+                  <a:t>Reporting importances computed </a:t>
+                </a:r>
+                <a:r>
+                  <a:rPr b="1"/>
+                  <a:t>in sample</a:t>
+                </a:r>
+              </a:p>
+              <a:p>
+                <a:pPr lvl="0"/>
+                <a:r>
+                  <a:rPr/>
+                  <a:t>A partial-dependence plot with no note on whether the features are independent</a:t>
+                </a:r>
+              </a:p>
+              <a:p>
+                <a:pPr lvl="0"/>
+                <a:r>
+                  <a:rPr/>
+                  <a:t>Tuning </a:t>
                 </a:r>
                 <a14:m>
                   <m:oMath xmlns:m="http://schemas.openxmlformats.org/officeDocument/2006/math">
                     <m:r>
-                      <m:t>j</m:t>
+                      <m:t>ν</m:t>
                     </m:r>
                   </m:oMath>
                 </a14:m>
                 <a:r>
                   <a:rPr/>
-                  <a:t> and split point </a:t>
+                  <a:t>, </a:t>
                 </a:r>
                 <a14:m>
                   <m:oMath xmlns:m="http://schemas.openxmlformats.org/officeDocument/2006/math">
                     <m:r>
-                      <m:t>s</m:t>
+                      <m:t>M</m:t>
                     </m:r>
                   </m:oMath>
                 </a14:m>
                 <a:r>
                   <a:rPr/>
-                  <a:t>:</a:t>
+                  <a:t> and depth one at a time, as if they did not interact</a:t>
+                </a:r>
+              </a:p>
+              <a:p>
+                <a:pPr lvl="0"/>
+                <a:r>
+                  <a:rPr/>
+                  <a:t>Claiming the ensemble “beat the linear model” without showing both numbers</a:t>
                 </a:r>
               </a:p>
               <a:p>
                 <a:pPr lvl="0" indent="0" marL="0">
                   <a:buNone/>
                 </a:pPr>
-                <a14:m>
-                  <m:oMathPara xmlns:m="http://schemas.openxmlformats.org/officeDocument/2006/math">
-                    <m:oMathParaPr>
-                      <m:jc m:val="center"/>
-                    </m:oMathParaPr>
-                    <m:oMath>
-                      <m:limLow>
-                        <m:e>
-                          <m:r>
-                            <m:rPr>
-                              <m:sty m:val="p"/>
-                            </m:rPr>
-                            <m:t>min</m:t>
-                          </m:r>
-                        </m:e>
-                        <m:lim>
-                          <m:r>
-                            <m:t>j</m:t>
-                          </m:r>
-                          <m:r>
-                            <m:rPr>
-                              <m:sty m:val="p"/>
-                            </m:rPr>
-                            <m:t>,</m:t>
-                          </m:r>
-                          <m:r>
-                            <m:t>s</m:t>
-                          </m:r>
-                        </m:lim>
-                      </m:limLow>
-                      <m:r>
-                        <m:t> </m:t>
-                      </m:r>
-                      <m:d>
-                        <m:dPr>
-                          <m:begChr m:val="["/>
-                          <m:sepChr m:val=""/>
-                          <m:endChr m:val="]"/>
-                          <m:grow/>
-                        </m:dPr>
-                        <m:e>
-                          <m:limLow>
-                            <m:e>
-                              <m:r>
-                                <m:rPr>
-                                  <m:sty m:val="p"/>
-                                </m:rPr>
-                                <m:t>min</m:t>
-                              </m:r>
-                            </m:e>
-                            <m:lim>
-                              <m:sSub>
-                                <m:e>
-                                  <m:r>
-                                    <m:t>c</m:t>
-                                  </m:r>
-                                </m:e>
-                                <m:sub>
-                                  <m:r>
-                                    <m:t>1</m:t>
-                                  </m:r>
-                                </m:sub>
-                              </m:sSub>
-                            </m:lim>
-                          </m:limLow>
-                          <m:nary>
-                            <m:naryPr>
-                              <m:chr m:val="∑"/>
-                              <m:limLoc m:val="undOvr"/>
-                              <m:subHide m:val="off"/>
-                              <m:supHide m:val="on"/>
-                            </m:naryPr>
-                            <m:sub>
-                              <m:sSub>
-                                <m:e>
-                                  <m:r>
-                                    <m:t>x</m:t>
-                                  </m:r>
-                                </m:e>
-                                <m:sub>
-                                  <m:r>
-                                    <m:t>i</m:t>
-                                  </m:r>
-                                </m:sub>
-                              </m:sSub>
-                              <m:r>
-                                <m:rPr>
-                                  <m:sty m:val="p"/>
-                                </m:rPr>
-                                <m:t>∈</m:t>
-                              </m:r>
-                              <m:sSub>
-                                <m:e>
-                                  <m:r>
-                                    <m:t>R</m:t>
-                                  </m:r>
-                                </m:e>
-                                <m:sub>
-                                  <m:r>
-                                    <m:t>1</m:t>
-                                  </m:r>
-                                </m:sub>
-                              </m:sSub>
-                              <m:d>
-                                <m:dPr>
-                                  <m:begChr m:val="("/>
-                                  <m:sepChr m:val=""/>
-                                  <m:endChr m:val=")"/>
-                                  <m:grow/>
-                                </m:dPr>
-                                <m:e>
-                                  <m:r>
-                                    <m:t>j</m:t>
-                                  </m:r>
-                                  <m:r>
-                                    <m:rPr>
-                                      <m:sty m:val="p"/>
-                                    </m:rPr>
-                                    <m:t>,</m:t>
-                                  </m:r>
-                                  <m:r>
-                                    <m:t>s</m:t>
-                                  </m:r>
-                                </m:e>
-                              </m:d>
-                            </m:sub>
-                            <m:sup>
-                              <m:r>
-                                <m:t>​</m:t>
-                              </m:r>
-                            </m:sup>
-                            <m:e>
-                              <m:sSup>
-                                <m:e>
-                                  <m:d>
-                                    <m:dPr>
-                                      <m:begChr m:val="("/>
-                                      <m:sepChr m:val=""/>
-                                      <m:endChr m:val=")"/>
-                                      <m:grow/>
-                                    </m:dPr>
-                                    <m:e>
-                                      <m:sSub>
-                                        <m:e>
-                                          <m:r>
-                                            <m:t>y</m:t>
-                                          </m:r>
-                                        </m:e>
-                                        <m:sub>
-                                          <m:r>
-                                            <m:t>i</m:t>
-                                          </m:r>
-                                        </m:sub>
-                                      </m:sSub>
-                                      <m:r>
-                                        <m:rPr>
-                                          <m:sty m:val="p"/>
-                                        </m:rPr>
-                                        <m:t>−</m:t>
-                                      </m:r>
-                                      <m:sSub>
-                                        <m:e>
-                                          <m:r>
-                                            <m:t>c</m:t>
-                                          </m:r>
-                                        </m:e>
-                                        <m:sub>
-                                          <m:r>
-                                            <m:t>1</m:t>
-                                          </m:r>
-                                        </m:sub>
-                                      </m:sSub>
-                                    </m:e>
-                                  </m:d>
-                                </m:e>
-                                <m:sup>
-                                  <m:r>
-                                    <m:t>2</m:t>
-                                  </m:r>
-                                </m:sup>
-                              </m:sSup>
-                            </m:e>
-                          </m:nary>
-                          <m:r>
-                            <m:rPr>
-                              <m:sty m:val="p"/>
-                            </m:rPr>
-                            <m:t>+</m:t>
-                          </m:r>
-                          <m:limLow>
-                            <m:e>
-                              <m:r>
-                                <m:rPr>
-                                  <m:sty m:val="p"/>
-                                </m:rPr>
-                                <m:t>min</m:t>
-                              </m:r>
-                            </m:e>
-                            <m:lim>
-                              <m:sSub>
-                                <m:e>
-                                  <m:r>
-                                    <m:t>c</m:t>
-                                  </m:r>
-                                </m:e>
-                                <m:sub>
-                                  <m:r>
-                                    <m:t>2</m:t>
-                                  </m:r>
-                                </m:sub>
-                              </m:sSub>
-                            </m:lim>
-                          </m:limLow>
-                          <m:nary>
-                            <m:naryPr>
-                              <m:chr m:val="∑"/>
-                              <m:limLoc m:val="undOvr"/>
-                              <m:subHide m:val="off"/>
-                              <m:supHide m:val="on"/>
-                            </m:naryPr>
-                            <m:sub>
-                              <m:sSub>
-                                <m:e>
-                                  <m:r>
-                                    <m:t>x</m:t>
-                                  </m:r>
-                                </m:e>
-                                <m:sub>
-                                  <m:r>
-                                    <m:t>i</m:t>
-                                  </m:r>
-                                </m:sub>
-                              </m:sSub>
-                              <m:r>
-                                <m:rPr>
-                                  <m:sty m:val="p"/>
-                                </m:rPr>
-                                <m:t>∈</m:t>
-                              </m:r>
-                              <m:sSub>
-                                <m:e>
-                                  <m:r>
-                                    <m:t>R</m:t>
-                                  </m:r>
-                                </m:e>
-                                <m:sub>
-                                  <m:r>
-                                    <m:t>2</m:t>
-                                  </m:r>
-                                </m:sub>
-                              </m:sSub>
-                              <m:d>
-                                <m:dPr>
-                                  <m:begChr m:val="("/>
-                                  <m:sepChr m:val=""/>
-                                  <m:endChr m:val=")"/>
-                                  <m:grow/>
-                                </m:dPr>
-                                <m:e>
-                                  <m:r>
-                                    <m:t>j</m:t>
-                                  </m:r>
-                                  <m:r>
-                                    <m:rPr>
-                                      <m:sty m:val="p"/>
-                                    </m:rPr>
-                                    <m:t>,</m:t>
-                                  </m:r>
-                                  <m:r>
-                                    <m:t>s</m:t>
-                                  </m:r>
-                                </m:e>
-                              </m:d>
-                            </m:sub>
-                            <m:sup>
-                              <m:r>
-                                <m:t>​</m:t>
-                              </m:r>
-                            </m:sup>
-                            <m:e>
-                              <m:sSup>
-                                <m:e>
-                                  <m:d>
-                                    <m:dPr>
-                                      <m:begChr m:val="("/>
-                                      <m:sepChr m:val=""/>
-                                      <m:endChr m:val=")"/>
-                                      <m:grow/>
-                                    </m:dPr>
-                                    <m:e>
-                                      <m:sSub>
-                                        <m:e>
-                                          <m:r>
-                                            <m:t>y</m:t>
-                                          </m:r>
-                                        </m:e>
-                                        <m:sub>
-                                          <m:r>
-                                            <m:t>i</m:t>
-                                          </m:r>
-                                        </m:sub>
-                                      </m:sSub>
-                                      <m:r>
-                                        <m:rPr>
-                                          <m:sty m:val="p"/>
-                                        </m:rPr>
-                                        <m:t>−</m:t>
-                                      </m:r>
-                                      <m:sSub>
-                                        <m:e>
-                                          <m:r>
-                                            <m:t>c</m:t>
-                                          </m:r>
-                                        </m:e>
-                                        <m:sub>
-                                          <m:r>
-                                            <m:t>2</m:t>
-                                          </m:r>
-                                        </m:sub>
-                                      </m:sSub>
-                                    </m:e>
-                                  </m:d>
-                                </m:e>
-                                <m:sup>
-                                  <m:r>
-                                    <m:t>2</m:t>
-                                  </m:r>
-                                </m:sup>
-                              </m:sSup>
-                            </m:e>
-                          </m:nary>
-                        </m:e>
-                      </m:d>
-                    </m:oMath>
-                  </m:oMathPara>
-                </a14:m>
-              </a:p>
-              <a:p>
-                <a:pPr lvl="0" indent="0" marL="0">
-                  <a:buNone/>
-                </a:pPr>
-                <a:r>
-                  <a:rPr/>
-                  <a:t>with </a:t>
-                </a:r>
-                <a14:m>
-                  <m:oMath xmlns:m="http://schemas.openxmlformats.org/officeDocument/2006/math">
-                    <m:sSub>
-                      <m:e>
-                        <m:r>
-                          <m:t>R</m:t>
-                        </m:r>
-                      </m:e>
-                      <m:sub>
-                        <m:r>
-                          <m:t>1</m:t>
-                        </m:r>
-                      </m:sub>
-                    </m:sSub>
-                    <m:d>
-                      <m:dPr>
-                        <m:begChr m:val="("/>
-                        <m:sepChr m:val=""/>
-                        <m:endChr m:val=")"/>
-                        <m:grow/>
-                      </m:dPr>
-                      <m:e>
-                        <m:r>
-                          <m:t>j</m:t>
-                        </m:r>
-                        <m:r>
-                          <m:rPr>
-                            <m:sty m:val="p"/>
-                          </m:rPr>
-                          <m:t>,</m:t>
-                        </m:r>
-                        <m:r>
-                          <m:t>s</m:t>
-                        </m:r>
-                      </m:e>
-                    </m:d>
-                    <m:r>
-                      <m:rPr>
-                        <m:sty m:val="p"/>
-                      </m:rPr>
-                      <m:t>=</m:t>
-                    </m:r>
-                    <m:r>
-                      <m:rPr>
-                        <m:sty m:val="p"/>
-                      </m:rPr>
-                      <m:t>{</m:t>
-                    </m:r>
-                    <m:r>
-                      <m:t>x</m:t>
-                    </m:r>
-                    <m:r>
-                      <m:rPr>
-                        <m:sty m:val="p"/>
-                      </m:rPr>
-                      <m:t>:</m:t>
-                    </m:r>
-                    <m:sSub>
-                      <m:e>
-                        <m:r>
-                          <m:t>x</m:t>
-                        </m:r>
-                      </m:e>
-                      <m:sub>
-                        <m:r>
-                          <m:t>j</m:t>
-                        </m:r>
-                      </m:sub>
-                    </m:sSub>
-                    <m:r>
-                      <m:rPr>
-                        <m:sty m:val="p"/>
-                      </m:rPr>
-                      <m:t>≤</m:t>
-                    </m:r>
-                    <m:r>
-                      <m:t>s</m:t>
-                    </m:r>
-                    <m:r>
-                      <m:rPr>
-                        <m:sty m:val="p"/>
-                      </m:rPr>
-                      <m:t>}</m:t>
-                    </m:r>
-                  </m:oMath>
-                </a14:m>
-                <a:r>
-                  <a:rPr/>
-                  <a:t>, </a:t>
-                </a:r>
-                <a14:m>
-                  <m:oMath xmlns:m="http://schemas.openxmlformats.org/officeDocument/2006/math">
-                    <m:sSub>
-                      <m:e>
-                        <m:r>
-                          <m:t>R</m:t>
-                        </m:r>
-                      </m:e>
-                      <m:sub>
-                        <m:r>
-                          <m:t>2</m:t>
-                        </m:r>
-                      </m:sub>
-                    </m:sSub>
-                    <m:d>
-                      <m:dPr>
-                        <m:begChr m:val="("/>
-                        <m:sepChr m:val=""/>
-                        <m:endChr m:val=")"/>
-                        <m:grow/>
-                      </m:dPr>
-                      <m:e>
-                        <m:r>
-                          <m:t>j</m:t>
-                        </m:r>
-                        <m:r>
-                          <m:rPr>
-                            <m:sty m:val="p"/>
-                          </m:rPr>
-                          <m:t>,</m:t>
-                        </m:r>
-                        <m:r>
-                          <m:t>s</m:t>
-                        </m:r>
-                      </m:e>
-                    </m:d>
-                    <m:r>
-                      <m:rPr>
-                        <m:sty m:val="p"/>
-                      </m:rPr>
-                      <m:t>=</m:t>
-                    </m:r>
-                    <m:r>
-                      <m:rPr>
-                        <m:sty m:val="p"/>
-                      </m:rPr>
-                      <m:t>{</m:t>
-                    </m:r>
-                    <m:r>
-                      <m:t>x</m:t>
-                    </m:r>
-                    <m:r>
-                      <m:rPr>
-                        <m:sty m:val="p"/>
-                      </m:rPr>
-                      <m:t>:</m:t>
-                    </m:r>
-                    <m:sSub>
-                      <m:e>
-                        <m:r>
-                          <m:t>x</m:t>
-                        </m:r>
-                      </m:e>
-                      <m:sub>
-                        <m:r>
-                          <m:t>j</m:t>
-                        </m:r>
-                      </m:sub>
-                    </m:sSub>
-                    <m:r>
-                      <m:rPr>
-                        <m:sty m:val="p"/>
-                      </m:rPr>
-                      <m:t>&gt;</m:t>
-                    </m:r>
-                    <m:r>
-                      <m:t>s</m:t>
-                    </m:r>
-                    <m:r>
-                      <m:rPr>
-                        <m:sty m:val="p"/>
-                      </m:rPr>
-                      <m:t>}</m:t>
-                    </m:r>
-                  </m:oMath>
-                </a14:m>
-                <a:r>
-                  <a:rPr/>
-                  <a:t>.</a:t>
-                </a:r>
-              </a:p>
-              <a:p>
-                <a:pPr lvl="0" indent="0" marL="0">
-                  <a:buNone/>
-                </a:pPr>
-                <a:r>
-                  <a:rPr/>
-                  <a:t>The inner minimisations are just means, so one scan over sorted values of each feature suffices: </a:t>
-                </a:r>
-                <a14:m>
-                  <m:oMath xmlns:m="http://schemas.openxmlformats.org/officeDocument/2006/math">
-                    <m:r>
-                      <m:t>O</m:t>
-                    </m:r>
-                    <m:d>
-                      <m:dPr>
-                        <m:begChr m:val="("/>
-                        <m:sepChr m:val=""/>
-                        <m:endChr m:val=")"/>
-                        <m:grow/>
-                      </m:dPr>
-                      <m:e>
-                        <m:r>
-                          <m:t>p</m:t>
-                        </m:r>
-                        <m:r>
-                          <m:t> </m:t>
-                        </m:r>
-                        <m:r>
-                          <m:t>n</m:t>
-                        </m:r>
-                        <m:r>
-                          <m:rPr>
-                            <m:sty m:val="p"/>
-                          </m:rPr>
-                          <m:t>log</m:t>
-                        </m:r>
-                        <m:r>
-                          <m:t>n</m:t>
-                        </m:r>
-                      </m:e>
-                    </m:d>
-                  </m:oMath>
-                </a14:m>
-                <a:r>
-                  <a:rPr/>
-                  <a:t> per node.</a:t>
+                <a:r>
+                  <a:rPr/>
+                  <a:t>On this dataset the tuned forest beats logistic regression by roughly </a:t>
+                </a:r>
+                <a:r>
+                  <a:rPr b="1"/>
+                  <a:t>0.002 AUC</a:t>
+                </a:r>
+                <a:r>
+                  <a:rPr/>
+                  <a:t>. Flexibility is not a free win, and saying so is a sign of judgment, not weakness.</a:t>
                 </a:r>
               </a:p>
             </p:txBody>
           </p:sp>
         </mc:Choice>
       </mc:AlternateContent>
+    </p:spTree>
+  </p:cSld>
+</p:sld>
+</file>
+
+<file path=ppt/slides/slide52.xml><?xml version="1.0" encoding="utf-8"?>
+<p:sld xmlns:a="http://schemas.openxmlformats.org/drawingml/2006/main" xmlns:r="http://schemas.openxmlformats.org/officeDocument/2006/relationships" xmlns:p="http://schemas.openxmlformats.org/presentationml/2006/main">
+  <p:cSld>
+    <p:spTree>
+      <p:nvGrpSpPr>
+        <p:cNvPr id="1" name=""/>
+        <p:cNvGrpSpPr/>
+        <p:nvPr/>
+      </p:nvGrpSpPr>
+      <p:grpSpPr>
+        <a:xfrm>
+          <a:off x="0" y="0"/>
+          <a:ext cx="0" cy="0"/>
+          <a:chOff x="0" y="0"/>
+          <a:chExt cx="0" cy="0"/>
+        </a:xfrm>
+      </p:grpSpPr>
+      <p:sp>
+        <p:nvSpPr>
+          <p:cNvPr id="2" name="Title 1"/>
+          <p:cNvSpPr>
+            <a:spLocks noGrp="1"/>
+          </p:cNvSpPr>
+          <p:nvPr>
+            <p:ph type="title"/>
+          </p:nvPr>
+        </p:nvSpPr>
+        <p:spPr/>
+        <p:txBody>
+          <a:bodyPr/>
+          <a:lstStyle/>
+          <a:p>
+            <a:pPr lvl="0" indent="0" marL="0">
+              <a:buNone/>
+            </a:pPr>
+            <a:r>
+              <a:rPr/>
+              <a:t>Now, the practice</a:t>
+            </a:r>
+          </a:p>
+        </p:txBody>
+      </p:sp>
+      <p:sp>
+        <p:nvSpPr>
+          <p:cNvPr id="3" name="Content Placeholder 2"/>
+          <p:cNvSpPr>
+            <a:spLocks noGrp="1"/>
+          </p:cNvSpPr>
+          <p:nvPr>
+            <p:ph idx="1"/>
+          </p:nvPr>
+        </p:nvSpPr>
+        <p:spPr/>
+        <p:txBody>
+          <a:bodyPr/>
+          <a:lstStyle/>
+          <a:p>
+            <a:pPr lvl="0" indent="0" marL="0">
+              <a:buNone/>
+            </a:pPr>
+            <a:r>
+              <a:rPr/>
+              <a:t>Ninety minutes, in your groups. You will fit a tree, a forest and a boosted ensemble on the same target, tune each honestly, and — the part that carries the marks — say what the importances do and do not license you to claim.</a:t>
+            </a:r>
+          </a:p>
+          <a:p>
+            <a:pPr lvl="0" indent="0" marL="0">
+              <a:buNone/>
+            </a:pPr>
+            <a:r>
+              <a:rPr/>
+              <a:t>Notes: </a:t>
+            </a:r>
+            <a:r>
+              <a:rPr>
+                <a:hlinkClick r:id="rId2"/>
+                <a:latin typeface="Courier"/>
+              </a:rPr>
+              <a:t>01-lecture/README.md</a:t>
+            </a:r>
+            <a:r>
+              <a:rPr/>
+              <a:t> · practice brief: </a:t>
+            </a:r>
+            <a:r>
+              <a:rPr>
+                <a:hlinkClick r:id="rId3"/>
+                <a:latin typeface="Courier"/>
+              </a:rPr>
+              <a:t>02-practice/README.md</a:t>
+            </a:r>
+          </a:p>
+        </p:txBody>
+      </p:sp>
+    </p:spTree>
+  </p:cSld>
+</p:sld>
+</file>
+
+<file path=ppt/slides/slide6.xml><?xml version="1.0" encoding="UTF-8"?><p:sld xmlns:a="http://schemas.openxmlformats.org/drawingml/2006/main" xmlns:r="http://schemas.openxmlformats.org/officeDocument/2006/relationships" xmlns:p="http://schemas.openxmlformats.org/presentationml/2006/main"><p:cSld><p:spTree><p:nvGrpSpPr><p:cNvPr id="1" name="" /><p:cNvGrpSpPr /><p:nvPr /></p:nvGrpSpPr><p:grpSpPr><a:xfrm><a:off x="0" y="0" /><a:ext cx="0" cy="0" /><a:chOff x="0" y="0" /><a:chExt cx="0" cy="0" /></a:xfrm></p:grpSpPr><p:sp><p:nvSpPr><p:cNvPr id="2" name="Title 1" /><p:cNvSpPr><a:spLocks noGrp="1" /></p:cNvSpPr><p:nvPr><p:ph type="title" /></p:nvPr></p:nvSpPr><p:spPr /><p:txBody><a:bodyPr /><a:lstStyle /><a:p><a:pPr lvl="0" indent="0" marL="0"><a:buNone /></a:pPr><a:r><a:rPr /><a:t>Everything so far has been one straight line</a:t></a:r></a:p></p:txBody></p:sp><p:graphicFrame><p:nvGraphicFramePr><p:cNvPr id="6" name="Content Placeholder 5" /><p:cNvGraphicFramePr><a:graphicFrameLocks noGrp="1" /></p:cNvGraphicFramePr><p:nvPr><p:ph idx="1" /></p:nvPr></p:nvGraphicFramePr><p:xfrm><a:off x="457200" y="1193800" /><a:ext cx="8229600" cy="3390900" /></p:xfrm><a:graphic><a:graphicData uri="http://schemas.openxmlformats.org/drawingml/2006/table"><a:tbl><a:tblPr firstRow="1" bandRow="1"><a:tableStyleId>{5C22544A-7EE6-4342-B048-85BDC9FD1C3A}</a:tableStyleId></a:tblPr><a:tblGrid><a:gridCol w="4114800" /><a:gridCol w="4114800" /></a:tblGrid><a:tr h="0"><a:tc><a:txBody><a:bodyPr /><a:lstStyle /><a:p><a:pPr lvl="0" indent="0" marL="0"><a:buNone /></a:pPr><a:r><a:rPr /><a:t>Session</a:t></a:r></a:p></a:txBody><a:tcPr /></a:tc><a:tc><a:txBody><a:bodyPr /><a:lstStyle /><a:p><a:pPr lvl="0" indent="0" marL="0"><a:buNone /></a:pPr><a:r><a:rPr /><a:t>What it assumed</a:t></a:r></a:p></a:txBody><a:tcPr /></a:tc></a:tr><a:tr h="0"><a:tc><a:txBody><a:bodyPr /><a:lstStyle /><a:p><a:pPr lvl="0" indent="0" marL="0"><a:buNone /></a:pPr><a:r><a:rPr b="1" /><a:t>02–03</a:t></a:r></a:p></a:txBody></a:tc><a:tc><a:txBody><a:bodyPr /><a:lstStyle /><a:p><a:pPr lvl="0" indent="0" marL="0"><a:buNone /></a:pPr><a14:m><m:oMath xmlns:m="http://schemas.openxmlformats.org/officeDocument/2006/math"><m:r><m:rPr><m:sty m:val="p" /><m:scr m:val="double-struck" /></m:rPr><m:t>E</m:t></m:r><m:d><m:dPr><m:begChr m:val="[" /><m:sepChr m:val="" /><m:endChr m:val="]" /><m:grow /></m:dPr><m:e><m:r><m:t>y</m:t></m:r><m:r><m:rPr><m:sty m:val="p" /></m:rPr><m:t>∣</m:t></m:r><m:r><m:t>x</m:t></m:r></m:e></m:d><m:r><m:rPr><m:sty m:val="p" /></m:rPr><m:t>=</m:t></m:r><m:sSup><m:e><m:r><m:t>x</m:t></m:r></m:e><m:sup><m:r><m:rPr><m:sty m:val="p" /></m:rPr><m:t>⊤</m:t></m:r></m:sup></m:sSup><m:r><m:t>β</m:t></m:r></m:oMath></a14:m><a:r><a:rPr /><a:t> — additive, linear, no interactions</a:t></a:r></a:p></a:txBody></a:tc></a:tr><a:tr h="0"><a:tc><a:txBody><a:bodyPr /><a:lstStyle /><a:p><a:pPr lvl="0" indent="0" marL="0"><a:buNone /></a:pPr><a:r><a:rPr b="1" /><a:t>05</a:t></a:r></a:p></a:txBody></a:tc><a:tc><a:txBody><a:bodyPr /><a:lstStyle /><a:p><a:pPr lvl="0" indent="0" marL="0"><a:buNone /></a:pPr><a:r><a:rPr /><a:t>Still linear. The penalty changed </a:t></a:r><a:r><a:rPr i="1" /><a:t>which</a:t></a:r><a:r><a:rPr /><a:t> </a:t></a:r><a14:m><m:oMath xmlns:m="http://schemas.openxmlformats.org/officeDocument/2006/math"><m:r><m:t>β</m:t></m:r></m:oMath></a14:m><a:r><a:rPr /><a:t>, not the functional form</a:t></a:r></a:p></a:txBody></a:tc></a:tr><a:tr h="0"><a:tc><a:txBody><a:bodyPr /><a:lstStyle /><a:p><a:pPr lvl="0" indent="0" marL="0"><a:buNone /></a:pPr><a:r><a:rPr b="1" /><a:t>06</a:t></a:r></a:p></a:txBody></a:tc><a:tc><a:txBody><a:bodyPr /><a:lstStyle /><a:p><a:pPr lvl="0" indent="0" marL="0"><a:buNone /></a:pPr><a:r><a:rPr /><a:t>Still linear — </a:t></a:r><a:r><a:rPr b="1" /><a:t>in the log-odds</a:t></a:r></a:p></a:txBody></a:tc></a:tr></a:tbl></a:graphicData></a:graphic></p:graphicFrame></p:spTree></p:cSld></p:sld>
+</file>
+
+<file path=ppt/slides/slide7.xml><?xml version="1.0" encoding="utf-8"?>
+<p:sld xmlns:a="http://schemas.openxmlformats.org/drawingml/2006/main" xmlns:r="http://schemas.openxmlformats.org/officeDocument/2006/relationships" xmlns:p="http://schemas.openxmlformats.org/presentationml/2006/main">
+  <p:cSld>
+    <p:spTree>
+      <p:nvGrpSpPr>
+        <p:cNvPr id="1" name=""/>
+        <p:cNvGrpSpPr/>
+        <p:nvPr/>
+      </p:nvGrpSpPr>
+      <p:grpSpPr>
+        <a:xfrm>
+          <a:off x="0" y="0"/>
+          <a:ext cx="0" cy="0"/>
+          <a:chOff x="0" y="0"/>
+          <a:chExt cx="0" cy="0"/>
+        </a:xfrm>
+      </p:grpSpPr>
+      <p:sp>
+        <p:nvSpPr>
+          <p:cNvPr id="3" name="Content Placeholder 2"/>
+          <p:cNvSpPr>
+            <a:spLocks noGrp="1"/>
+          </p:cNvSpPr>
+          <p:nvPr>
+            <p:ph idx="1"/>
+          </p:nvPr>
+        </p:nvSpPr>
+        <p:spPr/>
+        <p:txBody>
+          <a:bodyPr/>
+          <a:lstStyle/>
+          <a:p>
+            <a:pPr lvl="0" indent="0" marL="0">
+              <a:buNone/>
+            </a:pPr>
+            <a:r>
+              <a:rPr/>
+              <a:t>Every interaction and every non-linearity so far had to be </a:t>
+            </a:r>
+            <a:r>
+              <a:rPr b="1"/>
+              <a:t>typed by hand</a:t>
+            </a:r>
+            <a:r>
+              <a:rPr/>
+              <a:t>: a squared term, a product, a spline. You had to know it was there.</a:t>
+            </a:r>
+          </a:p>
+        </p:txBody>
+      </p:sp>
     </p:spTree>
   </p:cSld>
 </p:sld>
@@ -8552,7 +11452,7 @@
             </a:pPr>
             <a:r>
               <a:rPr/>
-              <a:t>Impurity, for classification</a:t>
+              <a:t>What today adds</a:t>
             </a:r>
           </a:p>
         </p:txBody>
@@ -8574,324 +11474,78 @@
               <a:bodyPr/>
               <a:lstStyle/>
               <a:p>
-                <a:pPr lvl="0" indent="0" marL="0">
+                <a:pPr lvl="0" indent="0" marL="1270000">
                   <a:buNone/>
                 </a:pPr>
                 <a:r>
-                  <a:rPr/>
-                  <a:t>Replace variance with a measure on the node class proportions </a:t>
-                </a:r>
-                <a14:m>
-                  <m:oMath xmlns:m="http://schemas.openxmlformats.org/officeDocument/2006/math">
-                    <m:sSub>
-                      <m:e>
-                        <m:acc>
-                          <m:accPr>
-                            <m:chr m:val="̂"/>
-                          </m:accPr>
-                          <m:e>
-                            <m:r>
-                              <m:t>p</m:t>
-                            </m:r>
-                          </m:e>
-                        </m:acc>
-                      </m:e>
-                      <m:sub>
-                        <m:r>
-                          <m:t>m</m:t>
-                        </m:r>
-                        <m:r>
-                          <m:t>k</m:t>
-                        </m:r>
-                      </m:sub>
-                    </m:sSub>
-                  </m:oMath>
-                </a14:m>
-                <a:r>
-                  <a:rPr/>
-                  <a:t>:</a:t>
+                  <a:rPr sz="2000"/>
+                  <a:t>A model class that finds the non-linearity and the interactions </a:t>
+                </a:r>
+                <a:r>
+                  <a:rPr sz="2000" b="1"/>
+                  <a:t>for you</a:t>
+                </a:r>
+                <a:r>
+                  <a:rPr sz="2000"/>
+                  <a:t>, from the data.</a:t>
+                </a:r>
+              </a:p>
+              <a:p>
+                <a:pPr lvl="0"/>
+                <a:r>
+                  <a:rPr/>
+                  <a:t>Trees: no functional form at all, just a </a:t>
+                </a:r>
+                <a:r>
+                  <a:rPr b="1"/>
+                  <a:t>partition</a:t>
+                </a:r>
+                <a:r>
+                  <a:rPr/>
+                  <a:t> of the predictor space</a:t>
+                </a:r>
+              </a:p>
+              <a:p>
+                <a:pPr lvl="0"/>
+                <a:r>
+                  <a:rPr/>
+                  <a:t>Forests: a variance-reduction device with a formula that tells you exactly when it stops working</a:t>
+                </a:r>
+              </a:p>
+              <a:p>
+                <a:pPr lvl="0"/>
+                <a:r>
+                  <a:rPr/>
+                  <a:t>Boosting: the same idea run </a:t>
+                </a:r>
+                <a:r>
+                  <a:rPr b="1"/>
+                  <a:t>sequentially</a:t>
+                </a:r>
+                <a:r>
+                  <a:rPr/>
+                  <a:t>, which turns out to be gradient descent</a:t>
                 </a:r>
               </a:p>
               <a:p>
                 <a:pPr lvl="0" indent="0" marL="0">
                   <a:buNone/>
                 </a:pPr>
+                <a:r>
+                  <a:rPr/>
+                  <a:t>And what it costs: no coefficients, no standard errors, no </a:t>
+                </a:r>
                 <a14:m>
-                  <m:oMathPara xmlns:m="http://schemas.openxmlformats.org/officeDocument/2006/math">
-                    <m:oMathParaPr>
-                      <m:jc m:val="center"/>
-                    </m:oMathParaPr>
-                    <m:oMath>
-                      <m:r>
-                        <m:rPr>
-                          <m:nor/>
-                          <m:sty m:val="p"/>
-                        </m:rPr>
-                        <m:t>Gini</m:t>
-                      </m:r>
-                      <m:r>
-                        <m:rPr>
-                          <m:sty m:val="p"/>
-                        </m:rPr>
-                        <m:t>=</m:t>
-                      </m:r>
-                      <m:nary>
-                        <m:naryPr>
-                          <m:chr m:val="∑"/>
-                          <m:limLoc m:val="undOvr"/>
-                          <m:subHide m:val="off"/>
-                          <m:supHide m:val="on"/>
-                        </m:naryPr>
-                        <m:sub>
-                          <m:r>
-                            <m:t>k</m:t>
-                          </m:r>
-                        </m:sub>
-                        <m:sup>
-                          <m:r>
-                            <m:t>​</m:t>
-                          </m:r>
-                        </m:sup>
-                        <m:e>
-                          <m:sSub>
-                            <m:e>
-                              <m:acc>
-                                <m:accPr>
-                                  <m:chr m:val="̂"/>
-                                </m:accPr>
-                                <m:e>
-                                  <m:r>
-                                    <m:t>p</m:t>
-                                  </m:r>
-                                </m:e>
-                              </m:acc>
-                            </m:e>
-                            <m:sub>
-                              <m:r>
-                                <m:t>m</m:t>
-                              </m:r>
-                              <m:r>
-                                <m:t>k</m:t>
-                              </m:r>
-                            </m:sub>
-                          </m:sSub>
-                        </m:e>
-                      </m:nary>
-                      <m:d>
-                        <m:dPr>
-                          <m:begChr m:val="("/>
-                          <m:sepChr m:val=""/>
-                          <m:endChr m:val=")"/>
-                          <m:grow/>
-                        </m:dPr>
-                        <m:e>
-                          <m:r>
-                            <m:t>1</m:t>
-                          </m:r>
-                          <m:r>
-                            <m:rPr>
-                              <m:sty m:val="p"/>
-                            </m:rPr>
-                            <m:t>−</m:t>
-                          </m:r>
-                          <m:sSub>
-                            <m:e>
-                              <m:acc>
-                                <m:accPr>
-                                  <m:chr m:val="̂"/>
-                                </m:accPr>
-                                <m:e>
-                                  <m:r>
-                                    <m:t>p</m:t>
-                                  </m:r>
-                                </m:e>
-                              </m:acc>
-                            </m:e>
-                            <m:sub>
-                              <m:r>
-                                <m:t>m</m:t>
-                              </m:r>
-                              <m:r>
-                                <m:t>k</m:t>
-                              </m:r>
-                            </m:sub>
-                          </m:sSub>
-                        </m:e>
-                      </m:d>
-                      <m:r>
-                        <m:rPr>
-                          <m:sty m:val="p"/>
-                        </m:rPr>
-                        <m:t>,</m:t>
-                      </m:r>
-                      <m:r>
-                        <m:t>  </m:t>
-                      </m:r>
-                      <m:r>
-                        <m:rPr>
-                          <m:nor/>
-                          <m:sty m:val="p"/>
-                        </m:rPr>
-                        <m:t>Entropy</m:t>
-                      </m:r>
-                      <m:r>
-                        <m:rPr>
-                          <m:sty m:val="p"/>
-                        </m:rPr>
-                        <m:t>=</m:t>
-                      </m:r>
-                      <m:r>
-                        <m:rPr>
-                          <m:sty m:val="p"/>
-                        </m:rPr>
-                        <m:t>−</m:t>
-                      </m:r>
-                      <m:nary>
-                        <m:naryPr>
-                          <m:chr m:val="∑"/>
-                          <m:limLoc m:val="undOvr"/>
-                          <m:subHide m:val="off"/>
-                          <m:supHide m:val="on"/>
-                        </m:naryPr>
-                        <m:sub>
-                          <m:r>
-                            <m:t>k</m:t>
-                          </m:r>
-                        </m:sub>
-                        <m:sup>
-                          <m:r>
-                            <m:t>​</m:t>
-                          </m:r>
-                        </m:sup>
-                        <m:e>
-                          <m:sSub>
-                            <m:e>
-                              <m:acc>
-                                <m:accPr>
-                                  <m:chr m:val="̂"/>
-                                </m:accPr>
-                                <m:e>
-                                  <m:r>
-                                    <m:t>p</m:t>
-                                  </m:r>
-                                </m:e>
-                              </m:acc>
-                            </m:e>
-                            <m:sub>
-                              <m:r>
-                                <m:t>m</m:t>
-                              </m:r>
-                              <m:r>
-                                <m:t>k</m:t>
-                              </m:r>
-                            </m:sub>
-                          </m:sSub>
-                        </m:e>
-                      </m:nary>
-                      <m:r>
-                        <m:rPr>
-                          <m:sty m:val="p"/>
-                        </m:rPr>
-                        <m:t>log</m:t>
-                      </m:r>
-                      <m:sSub>
-                        <m:e>
-                          <m:acc>
-                            <m:accPr>
-                              <m:chr m:val="̂"/>
-                            </m:accPr>
-                            <m:e>
-                              <m:r>
-                                <m:t>p</m:t>
-                              </m:r>
-                            </m:e>
-                          </m:acc>
-                        </m:e>
-                        <m:sub>
-                          <m:r>
-                            <m:t>m</m:t>
-                          </m:r>
-                          <m:r>
-                            <m:t>k</m:t>
-                          </m:r>
-                        </m:sub>
-                      </m:sSub>
-                    </m:oMath>
-                  </m:oMathPara>
+                  <m:oMath xmlns:m="http://schemas.openxmlformats.org/officeDocument/2006/math">
+                    <m:r>
+                      <m:t>t</m:t>
+                    </m:r>
+                  </m:oMath>
                 </a14:m>
-              </a:p>
-              <a:p>
-                <a:pPr lvl="0" indent="0" marL="0">
-                  <a:buNone/>
-                </a:pPr>
-                <a14:m>
-                  <m:oMathPara xmlns:m="http://schemas.openxmlformats.org/officeDocument/2006/math">
-                    <m:oMathParaPr>
-                      <m:jc m:val="center"/>
-                    </m:oMathParaPr>
-                    <m:oMath>
-                      <m:r>
-                        <m:rPr>
-                          <m:nor/>
-                          <m:sty m:val="p"/>
-                        </m:rPr>
-                        <m:t>Misclassification</m:t>
-                      </m:r>
-                      <m:r>
-                        <m:rPr>
-                          <m:sty m:val="p"/>
-                        </m:rPr>
-                        <m:t>=</m:t>
-                      </m:r>
-                      <m:r>
-                        <m:t>1</m:t>
-                      </m:r>
-                      <m:r>
-                        <m:rPr>
-                          <m:sty m:val="p"/>
-                        </m:rPr>
-                        <m:t>−</m:t>
-                      </m:r>
-                      <m:limLow>
-                        <m:e>
-                          <m:r>
-                            <m:rPr>
-                              <m:sty m:val="p"/>
-                            </m:rPr>
-                            <m:t>max</m:t>
-                          </m:r>
-                        </m:e>
-                        <m:lim>
-                          <m:r>
-                            <m:t>k</m:t>
-                          </m:r>
-                        </m:lim>
-                      </m:limLow>
-                      <m:sSub>
-                        <m:e>
-                          <m:acc>
-                            <m:accPr>
-                              <m:chr m:val="̂"/>
-                            </m:accPr>
-                            <m:e>
-                              <m:r>
-                                <m:t>p</m:t>
-                              </m:r>
-                            </m:e>
-                          </m:acc>
-                        </m:e>
-                        <m:sub>
-                          <m:r>
-                            <m:t>m</m:t>
-                          </m:r>
-                          <m:r>
-                            <m:t>k</m:t>
-                          </m:r>
-                        </m:sub>
-                      </m:sSub>
-                    </m:oMath>
-                  </m:oMathPara>
-                </a14:m>
+                <a:r>
+                  <a:rPr/>
+                  <a:t>-statistics. Section 6 is about how much of that we can recover — and it is less than the software suggests.</a:t>
+                </a:r>
               </a:p>
             </p:txBody>
           </p:sp>
@@ -8939,77 +11593,41 @@
             </a:pPr>
             <a:r>
               <a:rPr/>
-              <a:t>Which to grow with</a:t>
+              <a:t>A tree is a partition, not a curve</a:t>
             </a:r>
           </a:p>
         </p:txBody>
       </p:sp>
-      <p:sp>
-        <p:nvSpPr>
-          <p:cNvPr id="3" name="Content Placeholder 2"/>
-          <p:cNvSpPr>
-            <a:spLocks noGrp="1"/>
-          </p:cNvSpPr>
-          <p:nvPr>
-            <p:ph idx="1"/>
-          </p:nvPr>
-        </p:nvSpPr>
-        <p:spPr/>
-        <p:txBody>
-          <a:bodyPr/>
-          <a:lstStyle/>
-          <a:p>
-            <a:pPr lvl="0" indent="0" marL="0">
-              <a:buNone/>
-            </a:pPr>
-            <a:r>
-              <a:rPr/>
-              <a:t>Gini and entropy are differentiable and strictly concave, so they reward splits producing </a:t>
-            </a:r>
-            <a:r>
-              <a:rPr i="1"/>
-              <a:t>purer</a:t>
-            </a:r>
-            <a:r>
-              <a:rPr/>
-              <a:t> nodes </a:t>
-            </a:r>
-            <a:r>
-              <a:rPr b="1"/>
-              <a:t>even when the majority class does not change</a:t>
-            </a:r>
-            <a:r>
-              <a:rPr/>
-              <a:t>.</a:t>
-            </a:r>
-          </a:p>
-          <a:p>
-            <a:pPr lvl="0" indent="0" marL="0">
-              <a:buNone/>
-            </a:pPr>
-            <a:r>
-              <a:rPr/>
-              <a:t>Misclassification error is insensitive to that and makes a poor </a:t>
-            </a:r>
-            <a:r>
-              <a:rPr b="1"/>
-              <a:t>growing</a:t>
-            </a:r>
-            <a:r>
-              <a:rPr/>
-              <a:t> criterion — though it is the right criterion for </a:t>
-            </a:r>
-            <a:r>
-              <a:rPr b="1"/>
-              <a:t>pruning</a:t>
-            </a:r>
-            <a:r>
-              <a:rPr/>
-              <a:t>.</a:t>
-            </a:r>
-          </a:p>
-        </p:txBody>
-      </p:sp>
+      <p:pic>
+        <p:nvPicPr>
+          <p:cNvPr descr="slides_files/figure-pptx/cell-3-output-1.png" id="0" name="Picture 1"/>
+          <p:cNvPicPr>
+            <a:picLocks noGrp="1" noChangeAspect="1"/>
+          </p:cNvPicPr>
+          <p:nvPr/>
+        </p:nvPicPr>
+        <p:blipFill>
+          <a:blip r:embed="rId2"/>
+          <a:stretch>
+            <a:fillRect/>
+          </a:stretch>
+        </p:blipFill>
+        <p:spPr bwMode="auto">
+          <a:xfrm>
+            <a:off x="457200" y="1320800"/>
+            <a:ext cx="8229600" cy="3124200"/>
+          </a:xfrm>
+          <a:prstGeom prst="rect">
+            <a:avLst/>
+          </a:prstGeom>
+          <a:noFill/>
+          <a:ln w="9525">
+            <a:noFill/>
+            <a:headEnd/>
+            <a:tailEnd/>
+          </a:ln>
+        </p:spPr>
+      </p:pic>
     </p:spTree>
   </p:cSld>
 </p:sld>
